--- a/docs/Презентация Гамов.pptx
+++ b/docs/Презентация Гамов.pptx
@@ -5,7 +5,7 @@
     <p:sldMasterId id="2147483648" r:id="rId1"/>
   </p:sldMasterIdLst>
   <p:notesMasterIdLst>
-    <p:notesMasterId r:id="rId19"/>
+    <p:notesMasterId r:id="rId15"/>
   </p:notesMasterIdLst>
   <p:sldIdLst>
     <p:sldId id="257" r:id="rId2"/>
@@ -21,10 +21,6 @@
     <p:sldId id="316" r:id="rId12"/>
     <p:sldId id="308" r:id="rId13"/>
     <p:sldId id="310" r:id="rId14"/>
-    <p:sldId id="307" r:id="rId15"/>
-    <p:sldId id="313" r:id="rId16"/>
-    <p:sldId id="303" r:id="rId17"/>
-    <p:sldId id="264" r:id="rId18"/>
   </p:sldIdLst>
   <p:sldSz cx="12192000" cy="6858000"/>
   <p:notesSz cx="6858000" cy="9144000"/>
@@ -1195,7 +1191,7 @@
               <a:latin typeface="Times New Roman" panose="02020603050405020304" pitchFamily="18" charset="0"/>
               <a:cs typeface="Times New Roman" panose="02020603050405020304" pitchFamily="18" charset="0"/>
             </a:rPr>
-            <a:t>Реализовать сервис</a:t>
+            <a:t>Реализовать сервис с авторской методикой</a:t>
           </a:r>
           <a:endParaRPr lang="ru-RU" sz="2400" dirty="0">
             <a:latin typeface="Inter Variable Text" panose="02000503000000020004" pitchFamily="2" charset="0"/>
@@ -1850,7 +1846,7 @@
               <a:latin typeface="Times New Roman" panose="02020603050405020304" pitchFamily="18" charset="0"/>
               <a:cs typeface="Times New Roman" panose="02020603050405020304" pitchFamily="18" charset="0"/>
             </a:rPr>
-            <a:t>Реализовать сервис</a:t>
+            <a:t>Реализовать сервис с авторской методикой</a:t>
           </a:r>
           <a:endParaRPr lang="ru-RU" sz="2400" kern="1200" dirty="0">
             <a:latin typeface="Inter Variable Text" panose="02000503000000020004" pitchFamily="2" charset="0"/>
@@ -3300,7 +3296,7 @@
           <a:p>
             <a:fld id="{9D65A6D9-C591-48FC-BCC5-4F44DCD5D36B}" type="datetimeFigureOut">
               <a:rPr lang="en-US" smtClean="0"/>
-              <a:t>5/15/2026</a:t>
+              <a:t>5/28/2026</a:t>
             </a:fld>
             <a:endParaRPr lang="en-US"/>
           </a:p>
@@ -3976,414 +3972,6 @@
 </p:notes>
 </file>
 
-<file path=ppt/notesSlides/notesSlide13.xml><?xml version="1.0" encoding="utf-8"?>
-<p:notes xmlns:a="http://schemas.openxmlformats.org/drawingml/2006/main" xmlns:r="http://schemas.openxmlformats.org/officeDocument/2006/relationships" xmlns:p="http://schemas.openxmlformats.org/presentationml/2006/main">
-  <p:cSld>
-    <p:spTree>
-      <p:nvGrpSpPr>
-        <p:cNvPr id="1" name="">
-          <a:extLst>
-            <a:ext uri="{FF2B5EF4-FFF2-40B4-BE49-F238E27FC236}">
-              <a16:creationId xmlns:a16="http://schemas.microsoft.com/office/drawing/2014/main" id="{F111970C-2C94-82F1-0F3D-4A4BDCB08F9D}"/>
-            </a:ext>
-          </a:extLst>
-        </p:cNvPr>
-        <p:cNvGrpSpPr/>
-        <p:nvPr/>
-      </p:nvGrpSpPr>
-      <p:grpSpPr>
-        <a:xfrm>
-          <a:off x="0" y="0"/>
-          <a:ext cx="0" cy="0"/>
-          <a:chOff x="0" y="0"/>
-          <a:chExt cx="0" cy="0"/>
-        </a:xfrm>
-      </p:grpSpPr>
-      <p:sp>
-        <p:nvSpPr>
-          <p:cNvPr id="2" name="Образ слайда 1">
-            <a:extLst>
-              <a:ext uri="{FF2B5EF4-FFF2-40B4-BE49-F238E27FC236}">
-                <a16:creationId xmlns:a16="http://schemas.microsoft.com/office/drawing/2014/main" id="{85E84D7E-2CA2-58CB-DBD4-D249FEEDA4E6}"/>
-              </a:ext>
-            </a:extLst>
-          </p:cNvPr>
-          <p:cNvSpPr>
-            <a:spLocks noGrp="1" noRot="1" noChangeAspect="1"/>
-          </p:cNvSpPr>
-          <p:nvPr>
-            <p:ph type="sldImg"/>
-          </p:nvPr>
-        </p:nvSpPr>
-        <p:spPr/>
-      </p:sp>
-      <p:sp>
-        <p:nvSpPr>
-          <p:cNvPr id="3" name="Заметки 2">
-            <a:extLst>
-              <a:ext uri="{FF2B5EF4-FFF2-40B4-BE49-F238E27FC236}">
-                <a16:creationId xmlns:a16="http://schemas.microsoft.com/office/drawing/2014/main" id="{86471C7B-3239-DA47-2706-62E98AF2DD54}"/>
-              </a:ext>
-            </a:extLst>
-          </p:cNvPr>
-          <p:cNvSpPr>
-            <a:spLocks noGrp="1"/>
-          </p:cNvSpPr>
-          <p:nvPr>
-            <p:ph type="body" idx="1"/>
-          </p:nvPr>
-        </p:nvSpPr>
-        <p:spPr/>
-        <p:txBody>
-          <a:bodyPr/>
-          <a:lstStyle/>
-          <a:p>
-            <a:endParaRPr lang="ru-RU" dirty="0"/>
-          </a:p>
-        </p:txBody>
-      </p:sp>
-      <p:sp>
-        <p:nvSpPr>
-          <p:cNvPr id="4" name="Номер слайда 3">
-            <a:extLst>
-              <a:ext uri="{FF2B5EF4-FFF2-40B4-BE49-F238E27FC236}">
-                <a16:creationId xmlns:a16="http://schemas.microsoft.com/office/drawing/2014/main" id="{83C68162-CAAB-0F65-CE1D-08E577228105}"/>
-              </a:ext>
-            </a:extLst>
-          </p:cNvPr>
-          <p:cNvSpPr>
-            <a:spLocks noGrp="1"/>
-          </p:cNvSpPr>
-          <p:nvPr>
-            <p:ph type="sldNum" sz="quarter" idx="10"/>
-          </p:nvPr>
-        </p:nvSpPr>
-        <p:spPr/>
-        <p:txBody>
-          <a:bodyPr/>
-          <a:lstStyle/>
-          <a:p>
-            <a:fld id="{BF6F1928-7763-4D19-8FE7-5ACFF015AC24}" type="slidenum">
-              <a:rPr lang="en-US" smtClean="0"/>
-              <a:t>14</a:t>
-            </a:fld>
-            <a:endParaRPr lang="en-US"/>
-          </a:p>
-        </p:txBody>
-      </p:sp>
-    </p:spTree>
-    <p:extLst>
-      <p:ext uri="{BB962C8B-B14F-4D97-AF65-F5344CB8AC3E}">
-        <p14:creationId xmlns:p14="http://schemas.microsoft.com/office/powerpoint/2010/main" val="1865861307"/>
-      </p:ext>
-    </p:extLst>
-  </p:cSld>
-  <p:clrMapOvr>
-    <a:masterClrMapping/>
-  </p:clrMapOvr>
-</p:notes>
-</file>
-
-<file path=ppt/notesSlides/notesSlide14.xml><?xml version="1.0" encoding="utf-8"?>
-<p:notes xmlns:a="http://schemas.openxmlformats.org/drawingml/2006/main" xmlns:r="http://schemas.openxmlformats.org/officeDocument/2006/relationships" xmlns:p="http://schemas.openxmlformats.org/presentationml/2006/main">
-  <p:cSld>
-    <p:spTree>
-      <p:nvGrpSpPr>
-        <p:cNvPr id="1" name="">
-          <a:extLst>
-            <a:ext uri="{FF2B5EF4-FFF2-40B4-BE49-F238E27FC236}">
-              <a16:creationId xmlns:a16="http://schemas.microsoft.com/office/drawing/2014/main" id="{AB377C98-670C-65F9-4547-ECED8247D9C7}"/>
-            </a:ext>
-          </a:extLst>
-        </p:cNvPr>
-        <p:cNvGrpSpPr/>
-        <p:nvPr/>
-      </p:nvGrpSpPr>
-      <p:grpSpPr>
-        <a:xfrm>
-          <a:off x="0" y="0"/>
-          <a:ext cx="0" cy="0"/>
-          <a:chOff x="0" y="0"/>
-          <a:chExt cx="0" cy="0"/>
-        </a:xfrm>
-      </p:grpSpPr>
-      <p:sp>
-        <p:nvSpPr>
-          <p:cNvPr id="2" name="Образ слайда 1">
-            <a:extLst>
-              <a:ext uri="{FF2B5EF4-FFF2-40B4-BE49-F238E27FC236}">
-                <a16:creationId xmlns:a16="http://schemas.microsoft.com/office/drawing/2014/main" id="{8CBBE2E7-E87F-BCC7-AE73-BB78CCA18DCB}"/>
-              </a:ext>
-            </a:extLst>
-          </p:cNvPr>
-          <p:cNvSpPr>
-            <a:spLocks noGrp="1" noRot="1" noChangeAspect="1"/>
-          </p:cNvSpPr>
-          <p:nvPr>
-            <p:ph type="sldImg"/>
-          </p:nvPr>
-        </p:nvSpPr>
-        <p:spPr/>
-      </p:sp>
-      <p:sp>
-        <p:nvSpPr>
-          <p:cNvPr id="3" name="Заметки 2">
-            <a:extLst>
-              <a:ext uri="{FF2B5EF4-FFF2-40B4-BE49-F238E27FC236}">
-                <a16:creationId xmlns:a16="http://schemas.microsoft.com/office/drawing/2014/main" id="{37DFBE97-E8C6-95E0-3740-F7B476946DF0}"/>
-              </a:ext>
-            </a:extLst>
-          </p:cNvPr>
-          <p:cNvSpPr>
-            <a:spLocks noGrp="1"/>
-          </p:cNvSpPr>
-          <p:nvPr>
-            <p:ph type="body" idx="1"/>
-          </p:nvPr>
-        </p:nvSpPr>
-        <p:spPr/>
-        <p:txBody>
-          <a:bodyPr/>
-          <a:lstStyle/>
-          <a:p>
-            <a:endParaRPr lang="ru-RU" dirty="0"/>
-          </a:p>
-        </p:txBody>
-      </p:sp>
-      <p:sp>
-        <p:nvSpPr>
-          <p:cNvPr id="4" name="Номер слайда 3">
-            <a:extLst>
-              <a:ext uri="{FF2B5EF4-FFF2-40B4-BE49-F238E27FC236}">
-                <a16:creationId xmlns:a16="http://schemas.microsoft.com/office/drawing/2014/main" id="{B54BFC31-0F2B-EDBC-ED20-258D7CF782F5}"/>
-              </a:ext>
-            </a:extLst>
-          </p:cNvPr>
-          <p:cNvSpPr>
-            <a:spLocks noGrp="1"/>
-          </p:cNvSpPr>
-          <p:nvPr>
-            <p:ph type="sldNum" sz="quarter" idx="10"/>
-          </p:nvPr>
-        </p:nvSpPr>
-        <p:spPr/>
-        <p:txBody>
-          <a:bodyPr/>
-          <a:lstStyle/>
-          <a:p>
-            <a:fld id="{BF6F1928-7763-4D19-8FE7-5ACFF015AC24}" type="slidenum">
-              <a:rPr lang="en-US" smtClean="0"/>
-              <a:t>15</a:t>
-            </a:fld>
-            <a:endParaRPr lang="en-US"/>
-          </a:p>
-        </p:txBody>
-      </p:sp>
-    </p:spTree>
-    <p:extLst>
-      <p:ext uri="{BB962C8B-B14F-4D97-AF65-F5344CB8AC3E}">
-        <p14:creationId xmlns:p14="http://schemas.microsoft.com/office/powerpoint/2010/main" val="55737930"/>
-      </p:ext>
-    </p:extLst>
-  </p:cSld>
-  <p:clrMapOvr>
-    <a:masterClrMapping/>
-  </p:clrMapOvr>
-</p:notes>
-</file>
-
-<file path=ppt/notesSlides/notesSlide15.xml><?xml version="1.0" encoding="utf-8"?>
-<p:notes xmlns:a="http://schemas.openxmlformats.org/drawingml/2006/main" xmlns:r="http://schemas.openxmlformats.org/officeDocument/2006/relationships" xmlns:p="http://schemas.openxmlformats.org/presentationml/2006/main">
-  <p:cSld>
-    <p:spTree>
-      <p:nvGrpSpPr>
-        <p:cNvPr id="1" name="">
-          <a:extLst>
-            <a:ext uri="{FF2B5EF4-FFF2-40B4-BE49-F238E27FC236}">
-              <a16:creationId xmlns:a16="http://schemas.microsoft.com/office/drawing/2014/main" id="{0849AAAC-6D43-0F24-01E5-4465ECC0DFD2}"/>
-            </a:ext>
-          </a:extLst>
-        </p:cNvPr>
-        <p:cNvGrpSpPr/>
-        <p:nvPr/>
-      </p:nvGrpSpPr>
-      <p:grpSpPr>
-        <a:xfrm>
-          <a:off x="0" y="0"/>
-          <a:ext cx="0" cy="0"/>
-          <a:chOff x="0" y="0"/>
-          <a:chExt cx="0" cy="0"/>
-        </a:xfrm>
-      </p:grpSpPr>
-      <p:sp>
-        <p:nvSpPr>
-          <p:cNvPr id="2" name="Образ слайда 1">
-            <a:extLst>
-              <a:ext uri="{FF2B5EF4-FFF2-40B4-BE49-F238E27FC236}">
-                <a16:creationId xmlns:a16="http://schemas.microsoft.com/office/drawing/2014/main" id="{C7FB43C0-9177-3195-DF78-27C1E75C9018}"/>
-              </a:ext>
-            </a:extLst>
-          </p:cNvPr>
-          <p:cNvSpPr>
-            <a:spLocks noGrp="1" noRot="1" noChangeAspect="1"/>
-          </p:cNvSpPr>
-          <p:nvPr>
-            <p:ph type="sldImg"/>
-          </p:nvPr>
-        </p:nvSpPr>
-        <p:spPr/>
-      </p:sp>
-      <p:sp>
-        <p:nvSpPr>
-          <p:cNvPr id="3" name="Заметки 2">
-            <a:extLst>
-              <a:ext uri="{FF2B5EF4-FFF2-40B4-BE49-F238E27FC236}">
-                <a16:creationId xmlns:a16="http://schemas.microsoft.com/office/drawing/2014/main" id="{F1B28203-1AD5-1CCC-1B9F-398E306A88AD}"/>
-              </a:ext>
-            </a:extLst>
-          </p:cNvPr>
-          <p:cNvSpPr>
-            <a:spLocks noGrp="1"/>
-          </p:cNvSpPr>
-          <p:nvPr>
-            <p:ph type="body" idx="1"/>
-          </p:nvPr>
-        </p:nvSpPr>
-        <p:spPr/>
-        <p:txBody>
-          <a:bodyPr/>
-          <a:lstStyle/>
-          <a:p>
-            <a:endParaRPr lang="ru-RU" dirty="0"/>
-          </a:p>
-        </p:txBody>
-      </p:sp>
-      <p:sp>
-        <p:nvSpPr>
-          <p:cNvPr id="4" name="Номер слайда 3">
-            <a:extLst>
-              <a:ext uri="{FF2B5EF4-FFF2-40B4-BE49-F238E27FC236}">
-                <a16:creationId xmlns:a16="http://schemas.microsoft.com/office/drawing/2014/main" id="{B98A4141-50F4-D8E3-5786-085D698B2E2F}"/>
-              </a:ext>
-            </a:extLst>
-          </p:cNvPr>
-          <p:cNvSpPr>
-            <a:spLocks noGrp="1"/>
-          </p:cNvSpPr>
-          <p:nvPr>
-            <p:ph type="sldNum" sz="quarter" idx="10"/>
-          </p:nvPr>
-        </p:nvSpPr>
-        <p:spPr/>
-        <p:txBody>
-          <a:bodyPr/>
-          <a:lstStyle/>
-          <a:p>
-            <a:fld id="{BF6F1928-7763-4D19-8FE7-5ACFF015AC24}" type="slidenum">
-              <a:rPr lang="en-US" smtClean="0"/>
-              <a:t>16</a:t>
-            </a:fld>
-            <a:endParaRPr lang="en-US"/>
-          </a:p>
-        </p:txBody>
-      </p:sp>
-    </p:spTree>
-    <p:extLst>
-      <p:ext uri="{BB962C8B-B14F-4D97-AF65-F5344CB8AC3E}">
-        <p14:creationId xmlns:p14="http://schemas.microsoft.com/office/powerpoint/2010/main" val="1008655992"/>
-      </p:ext>
-    </p:extLst>
-  </p:cSld>
-  <p:clrMapOvr>
-    <a:masterClrMapping/>
-  </p:clrMapOvr>
-</p:notes>
-</file>
-
-<file path=ppt/notesSlides/notesSlide16.xml><?xml version="1.0" encoding="utf-8"?>
-<p:notes xmlns:a="http://schemas.openxmlformats.org/drawingml/2006/main" xmlns:r="http://schemas.openxmlformats.org/officeDocument/2006/relationships" xmlns:p="http://schemas.openxmlformats.org/presentationml/2006/main">
-  <p:cSld>
-    <p:spTree>
-      <p:nvGrpSpPr>
-        <p:cNvPr id="1" name=""/>
-        <p:cNvGrpSpPr/>
-        <p:nvPr/>
-      </p:nvGrpSpPr>
-      <p:grpSpPr>
-        <a:xfrm>
-          <a:off x="0" y="0"/>
-          <a:ext cx="0" cy="0"/>
-          <a:chOff x="0" y="0"/>
-          <a:chExt cx="0" cy="0"/>
-        </a:xfrm>
-      </p:grpSpPr>
-      <p:sp>
-        <p:nvSpPr>
-          <p:cNvPr id="2" name="Образ слайда 1"/>
-          <p:cNvSpPr>
-            <a:spLocks noGrp="1" noRot="1" noChangeAspect="1"/>
-          </p:cNvSpPr>
-          <p:nvPr>
-            <p:ph type="sldImg"/>
-          </p:nvPr>
-        </p:nvSpPr>
-        <p:spPr/>
-      </p:sp>
-      <p:sp>
-        <p:nvSpPr>
-          <p:cNvPr id="3" name="Заметки 2"/>
-          <p:cNvSpPr>
-            <a:spLocks noGrp="1"/>
-          </p:cNvSpPr>
-          <p:nvPr>
-            <p:ph type="body" idx="1"/>
-          </p:nvPr>
-        </p:nvSpPr>
-        <p:spPr/>
-        <p:txBody>
-          <a:bodyPr/>
-          <a:lstStyle/>
-          <a:p>
-            <a:endParaRPr lang="ru-RU" dirty="0"/>
-          </a:p>
-        </p:txBody>
-      </p:sp>
-      <p:sp>
-        <p:nvSpPr>
-          <p:cNvPr id="4" name="Номер слайда 3"/>
-          <p:cNvSpPr>
-            <a:spLocks noGrp="1"/>
-          </p:cNvSpPr>
-          <p:nvPr>
-            <p:ph type="sldNum" sz="quarter" idx="10"/>
-          </p:nvPr>
-        </p:nvSpPr>
-        <p:spPr/>
-        <p:txBody>
-          <a:bodyPr/>
-          <a:lstStyle/>
-          <a:p>
-            <a:fld id="{BF6F1928-7763-4D19-8FE7-5ACFF015AC24}" type="slidenum">
-              <a:rPr lang="en-US" smtClean="0"/>
-              <a:t>17</a:t>
-            </a:fld>
-            <a:endParaRPr lang="en-US"/>
-          </a:p>
-        </p:txBody>
-      </p:sp>
-    </p:spTree>
-    <p:extLst>
-      <p:ext uri="{BB962C8B-B14F-4D97-AF65-F5344CB8AC3E}">
-        <p14:creationId xmlns:p14="http://schemas.microsoft.com/office/powerpoint/2010/main" val="3515031076"/>
-      </p:ext>
-    </p:extLst>
-  </p:cSld>
-  <p:clrMapOvr>
-    <a:masterClrMapping/>
-  </p:clrMapOvr>
-</p:notes>
-</file>
-
 <file path=ppt/notesSlides/notesSlide2.xml><?xml version="1.0" encoding="utf-8"?>
 <p:notes xmlns:a="http://schemas.openxmlformats.org/drawingml/2006/main" xmlns:r="http://schemas.openxmlformats.org/officeDocument/2006/relationships" xmlns:p="http://schemas.openxmlformats.org/presentationml/2006/main">
   <p:cSld>
@@ -5395,7 +4983,7 @@
           <a:p>
             <a:fld id="{7D041A35-9E0E-854D-AA68-667636D6212A}" type="datetimeFigureOut">
               <a:rPr lang="ru-RU" smtClean="0"/>
-              <a:t>15.05.2026</a:t>
+              <a:t>28.05.2026</a:t>
             </a:fld>
             <a:endParaRPr lang="ru-RU"/>
           </a:p>
@@ -5593,7 +5181,7 @@
           <a:p>
             <a:fld id="{7D041A35-9E0E-854D-AA68-667636D6212A}" type="datetimeFigureOut">
               <a:rPr lang="ru-RU" smtClean="0"/>
-              <a:t>15.05.2026</a:t>
+              <a:t>28.05.2026</a:t>
             </a:fld>
             <a:endParaRPr lang="ru-RU"/>
           </a:p>
@@ -5801,7 +5389,7 @@
           <a:p>
             <a:fld id="{7D041A35-9E0E-854D-AA68-667636D6212A}" type="datetimeFigureOut">
               <a:rPr lang="ru-RU" smtClean="0"/>
-              <a:t>15.05.2026</a:t>
+              <a:t>28.05.2026</a:t>
             </a:fld>
             <a:endParaRPr lang="ru-RU"/>
           </a:p>
@@ -5999,7 +5587,7 @@
           <a:p>
             <a:fld id="{7D041A35-9E0E-854D-AA68-667636D6212A}" type="datetimeFigureOut">
               <a:rPr lang="ru-RU" smtClean="0"/>
-              <a:t>15.05.2026</a:t>
+              <a:t>28.05.2026</a:t>
             </a:fld>
             <a:endParaRPr lang="ru-RU"/>
           </a:p>
@@ -6274,7 +5862,7 @@
           <a:p>
             <a:fld id="{7D041A35-9E0E-854D-AA68-667636D6212A}" type="datetimeFigureOut">
               <a:rPr lang="ru-RU" smtClean="0"/>
-              <a:t>15.05.2026</a:t>
+              <a:t>28.05.2026</a:t>
             </a:fld>
             <a:endParaRPr lang="ru-RU"/>
           </a:p>
@@ -6539,7 +6127,7 @@
           <a:p>
             <a:fld id="{7D041A35-9E0E-854D-AA68-667636D6212A}" type="datetimeFigureOut">
               <a:rPr lang="ru-RU" smtClean="0"/>
-              <a:t>15.05.2026</a:t>
+              <a:t>28.05.2026</a:t>
             </a:fld>
             <a:endParaRPr lang="ru-RU"/>
           </a:p>
@@ -6951,7 +6539,7 @@
           <a:p>
             <a:fld id="{7D041A35-9E0E-854D-AA68-667636D6212A}" type="datetimeFigureOut">
               <a:rPr lang="ru-RU" smtClean="0"/>
-              <a:t>15.05.2026</a:t>
+              <a:t>28.05.2026</a:t>
             </a:fld>
             <a:endParaRPr lang="ru-RU"/>
           </a:p>
@@ -7092,7 +6680,7 @@
           <a:p>
             <a:fld id="{7D041A35-9E0E-854D-AA68-667636D6212A}" type="datetimeFigureOut">
               <a:rPr lang="ru-RU" smtClean="0"/>
-              <a:t>15.05.2026</a:t>
+              <a:t>28.05.2026</a:t>
             </a:fld>
             <a:endParaRPr lang="ru-RU"/>
           </a:p>
@@ -7205,7 +6793,7 @@
           <a:p>
             <a:fld id="{7D041A35-9E0E-854D-AA68-667636D6212A}" type="datetimeFigureOut">
               <a:rPr lang="ru-RU" smtClean="0"/>
-              <a:t>15.05.2026</a:t>
+              <a:t>28.05.2026</a:t>
             </a:fld>
             <a:endParaRPr lang="ru-RU"/>
           </a:p>
@@ -7516,7 +7104,7 @@
           <a:p>
             <a:fld id="{7D041A35-9E0E-854D-AA68-667636D6212A}" type="datetimeFigureOut">
               <a:rPr lang="ru-RU" smtClean="0"/>
-              <a:t>15.05.2026</a:t>
+              <a:t>28.05.2026</a:t>
             </a:fld>
             <a:endParaRPr lang="ru-RU"/>
           </a:p>
@@ -7804,7 +7392,7 @@
           <a:p>
             <a:fld id="{7D041A35-9E0E-854D-AA68-667636D6212A}" type="datetimeFigureOut">
               <a:rPr lang="ru-RU" smtClean="0"/>
-              <a:t>15.05.2026</a:t>
+              <a:t>28.05.2026</a:t>
             </a:fld>
             <a:endParaRPr lang="ru-RU"/>
           </a:p>
@@ -8054,7 +7642,7 @@
           <a:p>
             <a:fld id="{7D041A35-9E0E-854D-AA68-667636D6212A}" type="datetimeFigureOut">
               <a:rPr lang="ru-RU" smtClean="0"/>
-              <a:t>15.05.2026</a:t>
+              <a:t>28.05.2026</a:t>
             </a:fld>
             <a:endParaRPr lang="ru-RU"/>
           </a:p>
@@ -8534,8 +8122,8 @@
         </p:nvSpPr>
         <p:spPr>
           <a:xfrm>
-            <a:off x="372773" y="5626485"/>
-            <a:ext cx="3391569" cy="461665"/>
+            <a:off x="300037" y="5500187"/>
+            <a:ext cx="7192097" cy="1200329"/>
           </a:xfrm>
           <a:prstGeom prst="rect">
             <a:avLst/>
@@ -8560,7 +8148,36 @@
                 <a:ea typeface="Inter Variable Text" panose="02000503000000020004" pitchFamily="2" charset="0"/>
                 <a:cs typeface="Times New Roman" panose="02020603050405020304" pitchFamily="18" charset="0"/>
               </a:rPr>
-              <a:t>Гамов Павел Антонович</a:t>
+              <a:t>Студент группы ЭМС-271 Гамов Павел Антонович</a:t>
+            </a:r>
+          </a:p>
+          <a:p>
+            <a:endParaRPr lang="ru-RU" sz="2400" dirty="0">
+              <a:solidFill>
+                <a:schemeClr val="tx1">
+                  <a:lumMod val="65000"/>
+                  <a:lumOff val="35000"/>
+                </a:schemeClr>
+              </a:solidFill>
+              <a:latin typeface="Times New Roman" panose="02020603050405020304" pitchFamily="18" charset="0"/>
+              <a:ea typeface="Inter Variable Text" panose="02000503000000020004" pitchFamily="2" charset="0"/>
+              <a:cs typeface="Times New Roman" panose="02020603050405020304" pitchFamily="18" charset="0"/>
+            </a:endParaRPr>
+          </a:p>
+          <a:p>
+            <a:r>
+              <a:rPr lang="ru-RU" sz="2400" dirty="0">
+                <a:solidFill>
+                  <a:schemeClr val="tx1">
+                    <a:lumMod val="65000"/>
+                    <a:lumOff val="35000"/>
+                  </a:schemeClr>
+                </a:solidFill>
+                <a:latin typeface="Times New Roman" panose="02020603050405020304" pitchFamily="18" charset="0"/>
+                <a:ea typeface="Inter Variable Text" panose="02000503000000020004" pitchFamily="2" charset="0"/>
+                <a:cs typeface="Times New Roman" panose="02020603050405020304" pitchFamily="18" charset="0"/>
+              </a:rPr>
+              <a:t>Научный руководитель Демидов Андрей Викторович</a:t>
             </a:r>
           </a:p>
         </p:txBody>
@@ -9243,7 +8860,7 @@
                   <a:ea typeface="Inter Variable Text" panose="02000503000000020004" pitchFamily="2" charset="0"/>
                   <a:cs typeface="Inter Variable Text" panose="02000503000000020004" pitchFamily="2" charset="0"/>
                 </a:rPr>
-                <a:t>10</a:t>
+                <a:t>8</a:t>
               </a:r>
               <a:endParaRPr lang="en-US" sz="1400" dirty="0">
                 <a:solidFill>
@@ -10059,7 +9676,7 @@
                   <a:ea typeface="Inter Variable Text" panose="02000503000000020004" pitchFamily="2" charset="0"/>
                   <a:cs typeface="Inter Variable Text" panose="02000503000000020004" pitchFamily="2" charset="0"/>
                 </a:rPr>
-                <a:t>11</a:t>
+                <a:t>9</a:t>
               </a:r>
               <a:endParaRPr lang="en-US" sz="1400" dirty="0">
                 <a:solidFill>
@@ -10588,7 +10205,7 @@
                   <a:ea typeface="Inter Variable Text" panose="02000503000000020004" pitchFamily="2" charset="0"/>
                   <a:cs typeface="Inter Variable Text" panose="02000503000000020004" pitchFamily="2" charset="0"/>
                 </a:rPr>
-                <a:t>12</a:t>
+                <a:t>10</a:t>
               </a:r>
               <a:endParaRPr lang="en-US" sz="1400" dirty="0">
                 <a:solidFill>
@@ -10725,7 +10342,7 @@
           <p:nvPr>
             <p:extLst>
               <p:ext uri="{D42A27DB-BD31-4B8C-83A1-F6EECF244321}">
-                <p14:modId xmlns:p14="http://schemas.microsoft.com/office/powerpoint/2010/main" val="1878188713"/>
+                <p14:modId xmlns:p14="http://schemas.microsoft.com/office/powerpoint/2010/main" val="3912519797"/>
               </p:ext>
             </p:extLst>
           </p:nvPr>
@@ -10738,31 +10355,31 @@
           <a:graphicData uri="http://schemas.openxmlformats.org/drawingml/2006/table">
             <a:tbl>
               <a:tblPr firstRow="1" firstCol="1" bandRow="1">
-                <a:tableStyleId>{FABFCF23-3B69-468F-B69F-88F6DE6A72F2}</a:tableStyleId>
+                <a:tableStyleId>{69012ECD-51FC-41F1-AA8D-1B2483CD663E}</a:tableStyleId>
               </a:tblPr>
               <a:tblGrid>
-                <a:gridCol w="5731016">
+                <a:gridCol w="5802699">
                   <a:extLst>
                     <a:ext uri="{9D8B030D-6E8A-4147-A177-3AD203B41FA5}">
                       <a16:colId xmlns:a16="http://schemas.microsoft.com/office/drawing/2014/main" val="1738581461"/>
                     </a:ext>
                   </a:extLst>
                 </a:gridCol>
-                <a:gridCol w="2529343">
+                <a:gridCol w="1849008">
                   <a:extLst>
                     <a:ext uri="{9D8B030D-6E8A-4147-A177-3AD203B41FA5}">
                       <a16:colId xmlns:a16="http://schemas.microsoft.com/office/drawing/2014/main" val="3626096163"/>
                     </a:ext>
                   </a:extLst>
                 </a:gridCol>
-                <a:gridCol w="1347059">
+                <a:gridCol w="1136685">
                   <a:extLst>
                     <a:ext uri="{9D8B030D-6E8A-4147-A177-3AD203B41FA5}">
                       <a16:colId xmlns:a16="http://schemas.microsoft.com/office/drawing/2014/main" val="2091020232"/>
                     </a:ext>
                   </a:extLst>
                 </a:gridCol>
-                <a:gridCol w="1984508">
+                <a:gridCol w="2803534">
                   <a:extLst>
                     <a:ext uri="{9D8B030D-6E8A-4147-A177-3AD203B41FA5}">
                       <a16:colId xmlns:a16="http://schemas.microsoft.com/office/drawing/2014/main" val="532211291"/>
@@ -10782,8 +10399,6 @@
                       <a:r>
                         <a:rPr lang="ru-RU" sz="2400" kern="100" dirty="0">
                           <a:effectLst/>
-                          <a:latin typeface="Times New Roman" panose="02020603050405020304" pitchFamily="18" charset="0"/>
-                          <a:cs typeface="Times New Roman" panose="02020603050405020304" pitchFamily="18" charset="0"/>
                         </a:rPr>
                         <a:t>Наименование показателя</a:t>
                       </a:r>
@@ -10795,31 +10410,7 @@
                       </a:endParaRPr>
                     </a:p>
                   </a:txBody>
-                  <a:tcPr marL="34925" marR="34925" marT="34925" marB="34925" anchor="ctr">
-                    <a:lnL w="12700" cmpd="sng">
-                      <a:noFill/>
-                    </a:lnL>
-                    <a:lnR>
-                      <a:noFill/>
-                    </a:lnR>
-                    <a:lnT w="12700" cmpd="sng">
-                      <a:noFill/>
-                    </a:lnT>
-                    <a:lnB w="12700" cmpd="sng">
-                      <a:noFill/>
-                    </a:lnB>
-                    <a:lnTlToBr w="12700" cmpd="sng">
-                      <a:noFill/>
-                      <a:prstDash val="solid"/>
-                    </a:lnTlToBr>
-                    <a:lnBlToTr w="12700" cmpd="sng">
-                      <a:noFill/>
-                      <a:prstDash val="solid"/>
-                    </a:lnBlToTr>
-                    <a:solidFill>
-                      <a:schemeClr val="accent1"/>
-                    </a:solidFill>
-                  </a:tcPr>
+                  <a:tcPr marL="34925" marR="34925" marT="34925" marB="34925" anchor="ctr"/>
                 </a:tc>
                 <a:tc>
                   <a:txBody>
@@ -10835,8 +10426,6 @@
                             <a:schemeClr val="bg1"/>
                           </a:solidFill>
                           <a:effectLst/>
-                          <a:latin typeface="Times New Roman" panose="02020603050405020304" pitchFamily="18" charset="0"/>
-                          <a:cs typeface="Times New Roman" panose="02020603050405020304" pitchFamily="18" charset="0"/>
                         </a:rPr>
                         <a:t>Обозначение</a:t>
                       </a:r>
@@ -10851,31 +10440,7 @@
                       </a:endParaRPr>
                     </a:p>
                   </a:txBody>
-                  <a:tcPr marL="34925" marR="34925" marT="34925" marB="34925" anchor="ctr">
-                    <a:lnL>
-                      <a:noFill/>
-                    </a:lnL>
-                    <a:lnR>
-                      <a:noFill/>
-                    </a:lnR>
-                    <a:lnT w="12700" cmpd="sng">
-                      <a:noFill/>
-                    </a:lnT>
-                    <a:lnB w="12700" cmpd="sng">
-                      <a:noFill/>
-                    </a:lnB>
-                    <a:lnTlToBr w="12700" cmpd="sng">
-                      <a:noFill/>
-                      <a:prstDash val="solid"/>
-                    </a:lnTlToBr>
-                    <a:lnBlToTr w="12700" cmpd="sng">
-                      <a:noFill/>
-                      <a:prstDash val="solid"/>
-                    </a:lnBlToTr>
-                    <a:solidFill>
-                      <a:schemeClr val="accent1"/>
-                    </a:solidFill>
-                  </a:tcPr>
+                  <a:tcPr marL="34925" marR="34925" marT="34925" marB="34925" anchor="ctr"/>
                 </a:tc>
                 <a:tc>
                   <a:txBody>
@@ -10891,8 +10456,6 @@
                             <a:schemeClr val="bg1"/>
                           </a:solidFill>
                           <a:effectLst/>
-                          <a:latin typeface="Times New Roman" panose="02020603050405020304" pitchFamily="18" charset="0"/>
-                          <a:cs typeface="Times New Roman" panose="02020603050405020304" pitchFamily="18" charset="0"/>
                         </a:rPr>
                         <a:t>Ед. изм.</a:t>
                       </a:r>
@@ -10907,31 +10470,7 @@
                       </a:endParaRPr>
                     </a:p>
                   </a:txBody>
-                  <a:tcPr marL="34925" marR="34925" marT="34925" marB="34925" anchor="ctr">
-                    <a:lnL>
-                      <a:noFill/>
-                    </a:lnL>
-                    <a:lnR>
-                      <a:noFill/>
-                    </a:lnR>
-                    <a:lnT w="12700" cmpd="sng">
-                      <a:noFill/>
-                    </a:lnT>
-                    <a:lnB w="12700" cmpd="sng">
-                      <a:noFill/>
-                    </a:lnB>
-                    <a:lnTlToBr w="12700" cmpd="sng">
-                      <a:noFill/>
-                      <a:prstDash val="solid"/>
-                    </a:lnTlToBr>
-                    <a:lnBlToTr w="12700" cmpd="sng">
-                      <a:noFill/>
-                      <a:prstDash val="solid"/>
-                    </a:lnBlToTr>
-                    <a:solidFill>
-                      <a:schemeClr val="accent1"/>
-                    </a:solidFill>
-                  </a:tcPr>
+                  <a:tcPr marL="34925" marR="34925" marT="34925" marB="34925" anchor="ctr"/>
                 </a:tc>
                 <a:tc>
                   <a:txBody>
@@ -10947,8 +10486,6 @@
                             <a:schemeClr val="bg1"/>
                           </a:solidFill>
                           <a:effectLst/>
-                          <a:latin typeface="Times New Roman" panose="02020603050405020304" pitchFamily="18" charset="0"/>
-                          <a:cs typeface="Times New Roman" panose="02020603050405020304" pitchFamily="18" charset="0"/>
                         </a:rPr>
                         <a:t>Величина показателя</a:t>
                       </a:r>
@@ -10963,31 +10500,7 @@
                       </a:endParaRPr>
                     </a:p>
                   </a:txBody>
-                  <a:tcPr marL="34925" marR="34925" marT="34925" marB="34925" anchor="ctr">
-                    <a:lnL>
-                      <a:noFill/>
-                    </a:lnL>
-                    <a:lnR w="12700" cmpd="sng">
-                      <a:noFill/>
-                    </a:lnR>
-                    <a:lnT w="12700" cmpd="sng">
-                      <a:noFill/>
-                    </a:lnT>
-                    <a:lnB w="12700" cmpd="sng">
-                      <a:noFill/>
-                    </a:lnB>
-                    <a:lnTlToBr w="12700" cmpd="sng">
-                      <a:noFill/>
-                      <a:prstDash val="solid"/>
-                    </a:lnTlToBr>
-                    <a:lnBlToTr w="12700" cmpd="sng">
-                      <a:noFill/>
-                      <a:prstDash val="solid"/>
-                    </a:lnBlToTr>
-                    <a:solidFill>
-                      <a:schemeClr val="accent1"/>
-                    </a:solidFill>
-                  </a:tcPr>
+                  <a:tcPr marL="34925" marR="34925" marT="34925" marB="34925" anchor="ctr"/>
                 </a:tc>
                 <a:extLst>
                   <a:ext uri="{0D108BD9-81ED-4DB2-BD59-A6C34878D82A}">
@@ -11001,16 +10514,126 @@
                     <a:bodyPr/>
                     <a:lstStyle/>
                     <a:p>
-                      <a:pPr algn="ctr">
+                      <a:pPr lvl="0" algn="l">
                         <a:buNone/>
                       </a:pPr>
                       <a:r>
                         <a:rPr lang="ru-RU" sz="2400" b="0" kern="100" dirty="0">
                           <a:effectLst/>
-                          <a:latin typeface="Times New Roman" panose="02020603050405020304" pitchFamily="18" charset="0"/>
-                          <a:cs typeface="Times New Roman" panose="02020603050405020304" pitchFamily="18" charset="0"/>
                         </a:rPr>
-                        <a:t>Объем инвестиций</a:t>
+                        <a:t>1. Объем инвестиций</a:t>
+                      </a:r>
+                      <a:endParaRPr lang="ru-RU" sz="2000" b="0" kern="100" dirty="0">
+                        <a:effectLst/>
+                        <a:latin typeface="Times New Roman" panose="02020603050405020304" pitchFamily="18" charset="0"/>
+                        <a:ea typeface="NSimSun" panose="02010609030101010101" pitchFamily="49" charset="-122"/>
+                        <a:cs typeface="Times New Roman" panose="02020603050405020304" pitchFamily="18" charset="0"/>
+                      </a:endParaRPr>
+                    </a:p>
+                  </a:txBody>
+                  <a:tcPr marL="34925" marR="34925" marT="34925" marB="34925"/>
+                </a:tc>
+                <a:tc>
+                  <a:txBody>
+                    <a:bodyPr/>
+                    <a:lstStyle/>
+                    <a:p>
+                      <a:pPr algn="ctr">
+                        <a:buNone/>
+                      </a:pPr>
+                      <a:r>
+                        <a:rPr lang="ru-RU" sz="2400" kern="100" dirty="0">
+                          <a:solidFill>
+                            <a:srgbClr val="000000"/>
+                          </a:solidFill>
+                          <a:effectLst/>
+                        </a:rPr>
+                        <a:t>I проект</a:t>
+                      </a:r>
+                      <a:endParaRPr lang="ru-RU" sz="2000" kern="100" dirty="0">
+                        <a:effectLst/>
+                        <a:latin typeface="Times New Roman" panose="02020603050405020304" pitchFamily="18" charset="0"/>
+                        <a:ea typeface="NSimSun" panose="02010609030101010101" pitchFamily="49" charset="-122"/>
+                        <a:cs typeface="Times New Roman" panose="02020603050405020304" pitchFamily="18" charset="0"/>
+                      </a:endParaRPr>
+                    </a:p>
+                  </a:txBody>
+                  <a:tcPr marL="34925" marR="34925" marT="34925" marB="34925"/>
+                </a:tc>
+                <a:tc>
+                  <a:txBody>
+                    <a:bodyPr/>
+                    <a:lstStyle/>
+                    <a:p>
+                      <a:pPr algn="ctr">
+                        <a:buNone/>
+                      </a:pPr>
+                      <a:r>
+                        <a:rPr lang="ru-RU" sz="2400" kern="100" dirty="0">
+                          <a:solidFill>
+                            <a:srgbClr val="000000"/>
+                          </a:solidFill>
+                          <a:effectLst/>
+                        </a:rPr>
+                        <a:t>руб.</a:t>
+                      </a:r>
+                      <a:endParaRPr lang="ru-RU" sz="2000" kern="100" dirty="0">
+                        <a:effectLst/>
+                        <a:latin typeface="Times New Roman" panose="02020603050405020304" pitchFamily="18" charset="0"/>
+                        <a:ea typeface="NSimSun" panose="02010609030101010101" pitchFamily="49" charset="-122"/>
+                        <a:cs typeface="Times New Roman" panose="02020603050405020304" pitchFamily="18" charset="0"/>
+                      </a:endParaRPr>
+                    </a:p>
+                  </a:txBody>
+                  <a:tcPr marL="34925" marR="34925" marT="34925" marB="34925"/>
+                </a:tc>
+                <a:tc>
+                  <a:txBody>
+                    <a:bodyPr/>
+                    <a:lstStyle/>
+                    <a:p>
+                      <a:pPr algn="ctr">
+                        <a:buNone/>
+                      </a:pPr>
+                      <a:r>
+                        <a:rPr lang="ru-RU" sz="2400" kern="100" dirty="0">
+                          <a:solidFill>
+                            <a:srgbClr val="000000"/>
+                          </a:solidFill>
+                          <a:effectLst/>
+                        </a:rPr>
+                        <a:t>966 528</a:t>
+                      </a:r>
+                      <a:endParaRPr lang="ru-RU" sz="2000" kern="100" dirty="0">
+                        <a:effectLst/>
+                        <a:latin typeface="Times New Roman" panose="02020603050405020304" pitchFamily="18" charset="0"/>
+                        <a:ea typeface="NSimSun" panose="02010609030101010101" pitchFamily="49" charset="-122"/>
+                        <a:cs typeface="Times New Roman" panose="02020603050405020304" pitchFamily="18" charset="0"/>
+                      </a:endParaRPr>
+                    </a:p>
+                  </a:txBody>
+                  <a:tcPr marL="34925" marR="34925" marT="34925" marB="34925"/>
+                </a:tc>
+                <a:extLst>
+                  <a:ext uri="{0D108BD9-81ED-4DB2-BD59-A6C34878D82A}">
+                    <a16:rowId xmlns:a16="http://schemas.microsoft.com/office/drawing/2014/main" val="2091818599"/>
+                  </a:ext>
+                </a:extLst>
+              </a:tr>
+              <a:tr h="508476">
+                <a:tc>
+                  <a:txBody>
+                    <a:bodyPr/>
+                    <a:lstStyle/>
+                    <a:p>
+                      <a:pPr lvl="0" algn="l">
+                        <a:buNone/>
+                      </a:pPr>
+                      <a:r>
+                        <a:rPr lang="ru-RU" sz="2400" b="0" kern="100" dirty="0">
+                          <a:effectLst/>
+                        </a:rPr>
+                        <a:t>2. Ставка дисконтирования</a:t>
                       </a:r>
                       <a:endParaRPr lang="ru-RU" sz="2000" b="0" kern="100" dirty="0">
                         <a:effectLst/>
@@ -11021,26 +10644,11 @@
                     </a:p>
                   </a:txBody>
                   <a:tcPr marL="34925" marR="34925" marT="34925" marB="34925">
-                    <a:lnL w="12700" cmpd="sng">
-                      <a:noFill/>
-                    </a:lnL>
-                    <a:lnR>
-                      <a:noFill/>
-                    </a:lnR>
-                    <a:lnT w="12700" cmpd="sng">
-                      <a:noFill/>
-                    </a:lnT>
-                    <a:lnB w="12700" cmpd="sng">
-                      <a:noFill/>
-                    </a:lnB>
-                    <a:lnTlToBr w="12700" cmpd="sng">
-                      <a:noFill/>
-                      <a:prstDash val="solid"/>
-                    </a:lnTlToBr>
-                    <a:lnBlToTr w="12700" cmpd="sng">
-                      <a:noFill/>
-                      <a:prstDash val="solid"/>
-                    </a:lnBlToTr>
+                    <a:solidFill>
+                      <a:schemeClr val="bg1">
+                        <a:lumMod val="95000"/>
+                      </a:schemeClr>
+                    </a:solidFill>
                   </a:tcPr>
                 </a:tc>
                 <a:tc>
@@ -11057,10 +10665,8 @@
                             <a:srgbClr val="000000"/>
                           </a:solidFill>
                           <a:effectLst/>
-                          <a:latin typeface="Times New Roman" panose="02020603050405020304" pitchFamily="18" charset="0"/>
-                          <a:cs typeface="Times New Roman" panose="02020603050405020304" pitchFamily="18" charset="0"/>
                         </a:rPr>
-                        <a:t>I проект</a:t>
+                        <a:t>r</a:t>
                       </a:r>
                       <a:endParaRPr lang="ru-RU" sz="2000" kern="100">
                         <a:effectLst/>
@@ -11071,26 +10677,259 @@
                     </a:p>
                   </a:txBody>
                   <a:tcPr marL="34925" marR="34925" marT="34925" marB="34925">
-                    <a:lnL>
-                      <a:noFill/>
-                    </a:lnL>
-                    <a:lnR>
-                      <a:noFill/>
-                    </a:lnR>
-                    <a:lnT w="12700" cmpd="sng">
-                      <a:noFill/>
-                    </a:lnT>
-                    <a:lnB w="12700" cmpd="sng">
-                      <a:noFill/>
-                    </a:lnB>
-                    <a:lnTlToBr w="12700" cmpd="sng">
-                      <a:noFill/>
-                      <a:prstDash val="solid"/>
-                    </a:lnTlToBr>
-                    <a:lnBlToTr w="12700" cmpd="sng">
-                      <a:noFill/>
-                      <a:prstDash val="solid"/>
-                    </a:lnBlToTr>
+                    <a:solidFill>
+                      <a:schemeClr val="bg1">
+                        <a:lumMod val="95000"/>
+                      </a:schemeClr>
+                    </a:solidFill>
+                  </a:tcPr>
+                </a:tc>
+                <a:tc>
+                  <a:txBody>
+                    <a:bodyPr/>
+                    <a:lstStyle/>
+                    <a:p>
+                      <a:pPr algn="ctr">
+                        <a:buNone/>
+                      </a:pPr>
+                      <a:r>
+                        <a:rPr lang="ru-RU" sz="2400" kern="100" dirty="0">
+                          <a:solidFill>
+                            <a:srgbClr val="000000"/>
+                          </a:solidFill>
+                          <a:effectLst/>
+                        </a:rPr>
+                        <a:t>%</a:t>
+                      </a:r>
+                      <a:endParaRPr lang="ru-RU" sz="2000" kern="100" dirty="0">
+                        <a:effectLst/>
+                        <a:latin typeface="Times New Roman" panose="02020603050405020304" pitchFamily="18" charset="0"/>
+                        <a:ea typeface="NSimSun" panose="02010609030101010101" pitchFamily="49" charset="-122"/>
+                        <a:cs typeface="Times New Roman" panose="02020603050405020304" pitchFamily="18" charset="0"/>
+                      </a:endParaRPr>
+                    </a:p>
+                  </a:txBody>
+                  <a:tcPr marL="34925" marR="34925" marT="34925" marB="34925">
+                    <a:solidFill>
+                      <a:schemeClr val="bg1">
+                        <a:lumMod val="95000"/>
+                      </a:schemeClr>
+                    </a:solidFill>
+                  </a:tcPr>
+                </a:tc>
+                <a:tc>
+                  <a:txBody>
+                    <a:bodyPr/>
+                    <a:lstStyle/>
+                    <a:p>
+                      <a:pPr algn="ctr">
+                        <a:buNone/>
+                      </a:pPr>
+                      <a:r>
+                        <a:rPr lang="ru-RU" sz="2400" kern="100" dirty="0">
+                          <a:solidFill>
+                            <a:srgbClr val="000000"/>
+                          </a:solidFill>
+                          <a:effectLst/>
+                        </a:rPr>
+                        <a:t>15</a:t>
+                      </a:r>
+                      <a:endParaRPr lang="ru-RU" sz="2000" kern="100" dirty="0">
+                        <a:effectLst/>
+                        <a:latin typeface="Times New Roman" panose="02020603050405020304" pitchFamily="18" charset="0"/>
+                        <a:ea typeface="NSimSun" panose="02010609030101010101" pitchFamily="49" charset="-122"/>
+                        <a:cs typeface="Times New Roman" panose="02020603050405020304" pitchFamily="18" charset="0"/>
+                      </a:endParaRPr>
+                    </a:p>
+                  </a:txBody>
+                  <a:tcPr marL="34925" marR="34925" marT="34925" marB="34925">
+                    <a:solidFill>
+                      <a:schemeClr val="bg1">
+                        <a:lumMod val="95000"/>
+                      </a:schemeClr>
+                    </a:solidFill>
+                  </a:tcPr>
+                </a:tc>
+                <a:extLst>
+                  <a:ext uri="{0D108BD9-81ED-4DB2-BD59-A6C34878D82A}">
+                    <a16:rowId xmlns:a16="http://schemas.microsoft.com/office/drawing/2014/main" val="2632555450"/>
+                  </a:ext>
+                </a:extLst>
+              </a:tr>
+              <a:tr h="508476">
+                <a:tc>
+                  <a:txBody>
+                    <a:bodyPr/>
+                    <a:lstStyle/>
+                    <a:p>
+                      <a:pPr lvl="0" algn="l">
+                        <a:buNone/>
+                      </a:pPr>
+                      <a:r>
+                        <a:rPr lang="ru-RU" sz="2400" b="0" kern="100" dirty="0">
+                          <a:effectLst/>
+                        </a:rPr>
+                        <a:t>3. Чистая приведенная стоимость проекта</a:t>
+                      </a:r>
+                      <a:endParaRPr lang="ru-RU" sz="2000" b="0" kern="100" dirty="0">
+                        <a:effectLst/>
+                        <a:latin typeface="Times New Roman" panose="02020603050405020304" pitchFamily="18" charset="0"/>
+                        <a:ea typeface="NSimSun" panose="02010609030101010101" pitchFamily="49" charset="-122"/>
+                        <a:cs typeface="Times New Roman" panose="02020603050405020304" pitchFamily="18" charset="0"/>
+                      </a:endParaRPr>
+                    </a:p>
+                  </a:txBody>
+                  <a:tcPr marL="34925" marR="34925" marT="34925" marB="34925"/>
+                </a:tc>
+                <a:tc>
+                  <a:txBody>
+                    <a:bodyPr/>
+                    <a:lstStyle/>
+                    <a:p>
+                      <a:pPr algn="ctr">
+                        <a:buNone/>
+                      </a:pPr>
+                      <a:r>
+                        <a:rPr lang="ru-RU" sz="2400" kern="100" dirty="0">
+                          <a:solidFill>
+                            <a:srgbClr val="000000"/>
+                          </a:solidFill>
+                          <a:effectLst/>
+                        </a:rPr>
+                        <a:t>NPV</a:t>
+                      </a:r>
+                      <a:endParaRPr lang="ru-RU" sz="2000" kern="100" dirty="0">
+                        <a:effectLst/>
+                        <a:latin typeface="Times New Roman" panose="02020603050405020304" pitchFamily="18" charset="0"/>
+                        <a:ea typeface="NSimSun" panose="02010609030101010101" pitchFamily="49" charset="-122"/>
+                        <a:cs typeface="Times New Roman" panose="02020603050405020304" pitchFamily="18" charset="0"/>
+                      </a:endParaRPr>
+                    </a:p>
+                  </a:txBody>
+                  <a:tcPr marL="34925" marR="34925" marT="34925" marB="34925"/>
+                </a:tc>
+                <a:tc>
+                  <a:txBody>
+                    <a:bodyPr/>
+                    <a:lstStyle/>
+                    <a:p>
+                      <a:pPr algn="ctr">
+                        <a:buNone/>
+                      </a:pPr>
+                      <a:r>
+                        <a:rPr lang="ru-RU" sz="2400" kern="100">
+                          <a:solidFill>
+                            <a:srgbClr val="000000"/>
+                          </a:solidFill>
+                          <a:effectLst/>
+                        </a:rPr>
+                        <a:t>руб.</a:t>
+                      </a:r>
+                      <a:endParaRPr lang="ru-RU" sz="2000" kern="100">
+                        <a:effectLst/>
+                        <a:latin typeface="Times New Roman" panose="02020603050405020304" pitchFamily="18" charset="0"/>
+                        <a:ea typeface="NSimSun" panose="02010609030101010101" pitchFamily="49" charset="-122"/>
+                        <a:cs typeface="Times New Roman" panose="02020603050405020304" pitchFamily="18" charset="0"/>
+                      </a:endParaRPr>
+                    </a:p>
+                  </a:txBody>
+                  <a:tcPr marL="34925" marR="34925" marT="34925" marB="34925"/>
+                </a:tc>
+                <a:tc>
+                  <a:txBody>
+                    <a:bodyPr/>
+                    <a:lstStyle/>
+                    <a:p>
+                      <a:pPr algn="ctr">
+                        <a:buNone/>
+                      </a:pPr>
+                      <a:r>
+                        <a:rPr lang="ru-RU" sz="2400" kern="100" dirty="0">
+                          <a:solidFill>
+                            <a:srgbClr val="000000"/>
+                          </a:solidFill>
+                          <a:effectLst/>
+                        </a:rPr>
+                        <a:t>1 742 467</a:t>
+                      </a:r>
+                      <a:endParaRPr lang="ru-RU" sz="2000" kern="100" dirty="0">
+                        <a:effectLst/>
+                        <a:latin typeface="Times New Roman" panose="02020603050405020304" pitchFamily="18" charset="0"/>
+                        <a:ea typeface="NSimSun" panose="02010609030101010101" pitchFamily="49" charset="-122"/>
+                        <a:cs typeface="Times New Roman" panose="02020603050405020304" pitchFamily="18" charset="0"/>
+                      </a:endParaRPr>
+                    </a:p>
+                  </a:txBody>
+                  <a:tcPr marL="34925" marR="34925" marT="34925" marB="34925"/>
+                </a:tc>
+                <a:extLst>
+                  <a:ext uri="{0D108BD9-81ED-4DB2-BD59-A6C34878D82A}">
+                    <a16:rowId xmlns:a16="http://schemas.microsoft.com/office/drawing/2014/main" val="39219085"/>
+                  </a:ext>
+                </a:extLst>
+              </a:tr>
+              <a:tr h="508476">
+                <a:tc>
+                  <a:txBody>
+                    <a:bodyPr/>
+                    <a:lstStyle/>
+                    <a:p>
+                      <a:pPr lvl="0" algn="l">
+                        <a:buNone/>
+                      </a:pPr>
+                      <a:r>
+                        <a:rPr lang="ru-RU" sz="2400" b="0" kern="100" dirty="0">
+                          <a:effectLst/>
+                        </a:rPr>
+                        <a:t>4. Внутренняя ставка доходности</a:t>
+                      </a:r>
+                      <a:endParaRPr lang="ru-RU" sz="2000" b="0" kern="100" dirty="0">
+                        <a:effectLst/>
+                        <a:latin typeface="Times New Roman" panose="02020603050405020304" pitchFamily="18" charset="0"/>
+                        <a:ea typeface="NSimSun" panose="02010609030101010101" pitchFamily="49" charset="-122"/>
+                        <a:cs typeface="Times New Roman" panose="02020603050405020304" pitchFamily="18" charset="0"/>
+                      </a:endParaRPr>
+                    </a:p>
+                  </a:txBody>
+                  <a:tcPr marL="34925" marR="34925" marT="34925" marB="34925">
+                    <a:solidFill>
+                      <a:schemeClr val="bg1">
+                        <a:lumMod val="95000"/>
+                      </a:schemeClr>
+                    </a:solidFill>
+                  </a:tcPr>
+                </a:tc>
+                <a:tc>
+                  <a:txBody>
+                    <a:bodyPr/>
+                    <a:lstStyle/>
+                    <a:p>
+                      <a:pPr algn="ctr">
+                        <a:buNone/>
+                      </a:pPr>
+                      <a:r>
+                        <a:rPr lang="ru-RU" sz="2400" kern="100" dirty="0">
+                          <a:solidFill>
+                            <a:srgbClr val="000000"/>
+                          </a:solidFill>
+                          <a:effectLst/>
+                        </a:rPr>
+                        <a:t>IRR</a:t>
+                      </a:r>
+                      <a:endParaRPr lang="ru-RU" sz="2000" kern="100" dirty="0">
+                        <a:effectLst/>
+                        <a:latin typeface="Times New Roman" panose="02020603050405020304" pitchFamily="18" charset="0"/>
+                        <a:ea typeface="NSimSun" panose="02010609030101010101" pitchFamily="49" charset="-122"/>
+                        <a:cs typeface="Times New Roman" panose="02020603050405020304" pitchFamily="18" charset="0"/>
+                      </a:endParaRPr>
+                    </a:p>
+                  </a:txBody>
+                  <a:tcPr marL="34925" marR="34925" marT="34925" marB="34925">
+                    <a:solidFill>
+                      <a:schemeClr val="bg1">
+                        <a:lumMod val="95000"/>
+                      </a:schemeClr>
+                    </a:solidFill>
                   </a:tcPr>
                 </a:tc>
                 <a:tc>
@@ -11107,10 +10946,8 @@
                             <a:srgbClr val="000000"/>
                           </a:solidFill>
                           <a:effectLst/>
-                          <a:latin typeface="Times New Roman" panose="02020603050405020304" pitchFamily="18" charset="0"/>
-                          <a:cs typeface="Times New Roman" panose="02020603050405020304" pitchFamily="18" charset="0"/>
                         </a:rPr>
-                        <a:t>руб.</a:t>
+                        <a:t>%</a:t>
                       </a:r>
                       <a:endParaRPr lang="ru-RU" sz="2000" kern="100">
                         <a:effectLst/>
@@ -11121,26 +10958,11 @@
                     </a:p>
                   </a:txBody>
                   <a:tcPr marL="34925" marR="34925" marT="34925" marB="34925">
-                    <a:lnL>
-                      <a:noFill/>
-                    </a:lnL>
-                    <a:lnR>
-                      <a:noFill/>
-                    </a:lnR>
-                    <a:lnT w="12700" cmpd="sng">
-                      <a:noFill/>
-                    </a:lnT>
-                    <a:lnB w="12700" cmpd="sng">
-                      <a:noFill/>
-                    </a:lnB>
-                    <a:lnTlToBr w="12700" cmpd="sng">
-                      <a:noFill/>
-                      <a:prstDash val="solid"/>
-                    </a:lnTlToBr>
-                    <a:lnBlToTr w="12700" cmpd="sng">
-                      <a:noFill/>
-                      <a:prstDash val="solid"/>
-                    </a:lnBlToTr>
+                    <a:solidFill>
+                      <a:schemeClr val="bg1">
+                        <a:lumMod val="95000"/>
+                      </a:schemeClr>
+                    </a:solidFill>
                   </a:tcPr>
                 </a:tc>
                 <a:tc>
@@ -11157,10 +10979,8 @@
                             <a:srgbClr val="000000"/>
                           </a:solidFill>
                           <a:effectLst/>
-                          <a:latin typeface="Times New Roman" panose="02020603050405020304" pitchFamily="18" charset="0"/>
-                          <a:cs typeface="Times New Roman" panose="02020603050405020304" pitchFamily="18" charset="0"/>
                         </a:rPr>
-                        <a:t>966 528</a:t>
+                        <a:t>41</a:t>
                       </a:r>
                       <a:endParaRPr lang="ru-RU" sz="2000" kern="100" dirty="0">
                         <a:effectLst/>
@@ -11171,31 +10991,16 @@
                     </a:p>
                   </a:txBody>
                   <a:tcPr marL="34925" marR="34925" marT="34925" marB="34925">
-                    <a:lnL>
-                      <a:noFill/>
-                    </a:lnL>
-                    <a:lnR w="12700" cmpd="sng">
-                      <a:noFill/>
-                    </a:lnR>
-                    <a:lnT w="12700" cmpd="sng">
-                      <a:noFill/>
-                    </a:lnT>
-                    <a:lnB w="12700" cmpd="sng">
-                      <a:noFill/>
-                    </a:lnB>
-                    <a:lnTlToBr w="12700" cmpd="sng">
-                      <a:noFill/>
-                      <a:prstDash val="solid"/>
-                    </a:lnTlToBr>
-                    <a:lnBlToTr w="12700" cmpd="sng">
-                      <a:noFill/>
-                      <a:prstDash val="solid"/>
-                    </a:lnBlToTr>
+                    <a:solidFill>
+                      <a:schemeClr val="bg1">
+                        <a:lumMod val="95000"/>
+                      </a:schemeClr>
+                    </a:solidFill>
                   </a:tcPr>
                 </a:tc>
                 <a:extLst>
                   <a:ext uri="{0D108BD9-81ED-4DB2-BD59-A6C34878D82A}">
-                    <a16:rowId xmlns:a16="http://schemas.microsoft.com/office/drawing/2014/main" val="2091818599"/>
+                    <a16:rowId xmlns:a16="http://schemas.microsoft.com/office/drawing/2014/main" val="2720899962"/>
                   </a:ext>
                 </a:extLst>
               </a:tr>
@@ -11205,16 +11010,126 @@
                     <a:bodyPr/>
                     <a:lstStyle/>
                     <a:p>
-                      <a:pPr algn="ctr">
+                      <a:pPr lvl="0" algn="l">
                         <a:buNone/>
                       </a:pPr>
                       <a:r>
                         <a:rPr lang="ru-RU" sz="2400" b="0" kern="100" dirty="0">
                           <a:effectLst/>
-                          <a:latin typeface="Times New Roman" panose="02020603050405020304" pitchFamily="18" charset="0"/>
-                          <a:cs typeface="Times New Roman" panose="02020603050405020304" pitchFamily="18" charset="0"/>
                         </a:rPr>
-                        <a:t>Ставка дисконтирования</a:t>
+                        <a:t>5. Простой срок окупаемости</a:t>
+                      </a:r>
+                      <a:endParaRPr lang="ru-RU" sz="2000" b="0" kern="100" dirty="0">
+                        <a:effectLst/>
+                        <a:latin typeface="Times New Roman" panose="02020603050405020304" pitchFamily="18" charset="0"/>
+                        <a:ea typeface="NSimSun" panose="02010609030101010101" pitchFamily="49" charset="-122"/>
+                        <a:cs typeface="Times New Roman" panose="02020603050405020304" pitchFamily="18" charset="0"/>
+                      </a:endParaRPr>
+                    </a:p>
+                  </a:txBody>
+                  <a:tcPr marL="34925" marR="34925" marT="34925" marB="34925"/>
+                </a:tc>
+                <a:tc>
+                  <a:txBody>
+                    <a:bodyPr/>
+                    <a:lstStyle/>
+                    <a:p>
+                      <a:pPr algn="ctr">
+                        <a:buNone/>
+                      </a:pPr>
+                      <a:r>
+                        <a:rPr lang="ru-RU" sz="2400" kern="100" dirty="0" err="1">
+                          <a:solidFill>
+                            <a:srgbClr val="000000"/>
+                          </a:solidFill>
+                          <a:effectLst/>
+                        </a:rPr>
+                        <a:t>PPs</a:t>
+                      </a:r>
+                      <a:endParaRPr lang="ru-RU" sz="2000" kern="100" dirty="0">
+                        <a:effectLst/>
+                        <a:latin typeface="Times New Roman" panose="02020603050405020304" pitchFamily="18" charset="0"/>
+                        <a:ea typeface="NSimSun" panose="02010609030101010101" pitchFamily="49" charset="-122"/>
+                        <a:cs typeface="Times New Roman" panose="02020603050405020304" pitchFamily="18" charset="0"/>
+                      </a:endParaRPr>
+                    </a:p>
+                  </a:txBody>
+                  <a:tcPr marL="34925" marR="34925" marT="34925" marB="34925"/>
+                </a:tc>
+                <a:tc>
+                  <a:txBody>
+                    <a:bodyPr/>
+                    <a:lstStyle/>
+                    <a:p>
+                      <a:pPr algn="ctr">
+                        <a:buNone/>
+                      </a:pPr>
+                      <a:r>
+                        <a:rPr lang="ru-RU" sz="2400" kern="100" dirty="0">
+                          <a:solidFill>
+                            <a:srgbClr val="000000"/>
+                          </a:solidFill>
+                          <a:effectLst/>
+                        </a:rPr>
+                        <a:t>лет</a:t>
+                      </a:r>
+                      <a:endParaRPr lang="ru-RU" sz="2000" kern="100" dirty="0">
+                        <a:effectLst/>
+                        <a:latin typeface="Times New Roman" panose="02020603050405020304" pitchFamily="18" charset="0"/>
+                        <a:ea typeface="NSimSun" panose="02010609030101010101" pitchFamily="49" charset="-122"/>
+                        <a:cs typeface="Times New Roman" panose="02020603050405020304" pitchFamily="18" charset="0"/>
+                      </a:endParaRPr>
+                    </a:p>
+                  </a:txBody>
+                  <a:tcPr marL="34925" marR="34925" marT="34925" marB="34925"/>
+                </a:tc>
+                <a:tc>
+                  <a:txBody>
+                    <a:bodyPr/>
+                    <a:lstStyle/>
+                    <a:p>
+                      <a:pPr algn="ctr">
+                        <a:buNone/>
+                      </a:pPr>
+                      <a:r>
+                        <a:rPr lang="ru-RU" sz="2400" kern="100" dirty="0">
+                          <a:solidFill>
+                            <a:srgbClr val="000000"/>
+                          </a:solidFill>
+                          <a:effectLst/>
+                        </a:rPr>
+                        <a:t>3,93</a:t>
+                      </a:r>
+                      <a:endParaRPr lang="ru-RU" sz="2000" kern="100" dirty="0">
+                        <a:effectLst/>
+                        <a:latin typeface="Times New Roman" panose="02020603050405020304" pitchFamily="18" charset="0"/>
+                        <a:ea typeface="NSimSun" panose="02010609030101010101" pitchFamily="49" charset="-122"/>
+                        <a:cs typeface="Times New Roman" panose="02020603050405020304" pitchFamily="18" charset="0"/>
+                      </a:endParaRPr>
+                    </a:p>
+                  </a:txBody>
+                  <a:tcPr marL="34925" marR="34925" marT="34925" marB="34925"/>
+                </a:tc>
+                <a:extLst>
+                  <a:ext uri="{0D108BD9-81ED-4DB2-BD59-A6C34878D82A}">
+                    <a16:rowId xmlns:a16="http://schemas.microsoft.com/office/drawing/2014/main" val="3505463349"/>
+                  </a:ext>
+                </a:extLst>
+              </a:tr>
+              <a:tr h="508476">
+                <a:tc>
+                  <a:txBody>
+                    <a:bodyPr/>
+                    <a:lstStyle/>
+                    <a:p>
+                      <a:pPr lvl="0" algn="l">
+                        <a:buNone/>
+                      </a:pPr>
+                      <a:r>
+                        <a:rPr lang="ru-RU" sz="2400" b="0" kern="100" dirty="0">
+                          <a:effectLst/>
+                        </a:rPr>
+                        <a:t>6. Дисконтированный срок окупаемости</a:t>
                       </a:r>
                       <a:endParaRPr lang="ru-RU" sz="2000" b="0" kern="100" dirty="0">
                         <a:effectLst/>
@@ -11225,26 +11140,292 @@
                     </a:p>
                   </a:txBody>
                   <a:tcPr marL="34925" marR="34925" marT="34925" marB="34925">
-                    <a:lnL w="12700" cmpd="sng">
-                      <a:noFill/>
-                    </a:lnL>
-                    <a:lnR>
-                      <a:noFill/>
-                    </a:lnR>
-                    <a:lnT w="12700" cmpd="sng">
-                      <a:noFill/>
-                    </a:lnT>
-                    <a:lnB w="12700" cmpd="sng">
-                      <a:noFill/>
-                    </a:lnB>
-                    <a:lnTlToBr w="12700" cmpd="sng">
-                      <a:noFill/>
-                      <a:prstDash val="solid"/>
-                    </a:lnTlToBr>
-                    <a:lnBlToTr w="12700" cmpd="sng">
-                      <a:noFill/>
-                      <a:prstDash val="solid"/>
-                    </a:lnBlToTr>
+                    <a:solidFill>
+                      <a:schemeClr val="bg1">
+                        <a:lumMod val="95000"/>
+                      </a:schemeClr>
+                    </a:solidFill>
+                  </a:tcPr>
+                </a:tc>
+                <a:tc>
+                  <a:txBody>
+                    <a:bodyPr/>
+                    <a:lstStyle/>
+                    <a:p>
+                      <a:pPr algn="ctr">
+                        <a:buNone/>
+                      </a:pPr>
+                      <a:r>
+                        <a:rPr lang="ru-RU" sz="2400" kern="100" dirty="0" err="1">
+                          <a:solidFill>
+                            <a:srgbClr val="000000"/>
+                          </a:solidFill>
+                          <a:effectLst/>
+                        </a:rPr>
+                        <a:t>PPd</a:t>
+                      </a:r>
+                      <a:endParaRPr lang="ru-RU" sz="2000" kern="100" dirty="0">
+                        <a:effectLst/>
+                        <a:latin typeface="Times New Roman" panose="02020603050405020304" pitchFamily="18" charset="0"/>
+                        <a:ea typeface="NSimSun" panose="02010609030101010101" pitchFamily="49" charset="-122"/>
+                        <a:cs typeface="Times New Roman" panose="02020603050405020304" pitchFamily="18" charset="0"/>
+                      </a:endParaRPr>
+                    </a:p>
+                  </a:txBody>
+                  <a:tcPr marL="34925" marR="34925" marT="34925" marB="34925">
+                    <a:solidFill>
+                      <a:schemeClr val="bg1">
+                        <a:lumMod val="95000"/>
+                      </a:schemeClr>
+                    </a:solidFill>
+                  </a:tcPr>
+                </a:tc>
+                <a:tc>
+                  <a:txBody>
+                    <a:bodyPr/>
+                    <a:lstStyle/>
+                    <a:p>
+                      <a:pPr algn="ctr">
+                        <a:buNone/>
+                      </a:pPr>
+                      <a:r>
+                        <a:rPr lang="ru-RU" sz="2400" kern="100" dirty="0">
+                          <a:solidFill>
+                            <a:srgbClr val="000000"/>
+                          </a:solidFill>
+                          <a:effectLst/>
+                        </a:rPr>
+                        <a:t>лет</a:t>
+                      </a:r>
+                      <a:endParaRPr lang="ru-RU" sz="2000" kern="100" dirty="0">
+                        <a:effectLst/>
+                        <a:latin typeface="Times New Roman" panose="02020603050405020304" pitchFamily="18" charset="0"/>
+                        <a:ea typeface="NSimSun" panose="02010609030101010101" pitchFamily="49" charset="-122"/>
+                        <a:cs typeface="Times New Roman" panose="02020603050405020304" pitchFamily="18" charset="0"/>
+                      </a:endParaRPr>
+                    </a:p>
+                  </a:txBody>
+                  <a:tcPr marL="34925" marR="34925" marT="34925" marB="34925">
+                    <a:solidFill>
+                      <a:schemeClr val="bg1">
+                        <a:lumMod val="95000"/>
+                      </a:schemeClr>
+                    </a:solidFill>
+                  </a:tcPr>
+                </a:tc>
+                <a:tc>
+                  <a:txBody>
+                    <a:bodyPr/>
+                    <a:lstStyle/>
+                    <a:p>
+                      <a:pPr algn="ctr">
+                        <a:buNone/>
+                      </a:pPr>
+                      <a:r>
+                        <a:rPr lang="ru-RU" sz="2400" kern="100" dirty="0">
+                          <a:solidFill>
+                            <a:srgbClr val="000000"/>
+                          </a:solidFill>
+                          <a:effectLst/>
+                        </a:rPr>
+                        <a:t>4,17</a:t>
+                      </a:r>
+                      <a:endParaRPr lang="ru-RU" sz="2000" kern="100" dirty="0">
+                        <a:effectLst/>
+                        <a:latin typeface="Times New Roman" panose="02020603050405020304" pitchFamily="18" charset="0"/>
+                        <a:ea typeface="NSimSun" panose="02010609030101010101" pitchFamily="49" charset="-122"/>
+                        <a:cs typeface="Times New Roman" panose="02020603050405020304" pitchFamily="18" charset="0"/>
+                      </a:endParaRPr>
+                    </a:p>
+                  </a:txBody>
+                  <a:tcPr marL="34925" marR="34925" marT="34925" marB="34925">
+                    <a:solidFill>
+                      <a:schemeClr val="bg1">
+                        <a:lumMod val="95000"/>
+                      </a:schemeClr>
+                    </a:solidFill>
+                  </a:tcPr>
+                </a:tc>
+                <a:extLst>
+                  <a:ext uri="{0D108BD9-81ED-4DB2-BD59-A6C34878D82A}">
+                    <a16:rowId xmlns:a16="http://schemas.microsoft.com/office/drawing/2014/main" val="3101069098"/>
+                  </a:ext>
+                </a:extLst>
+              </a:tr>
+              <a:tr h="508476">
+                <a:tc>
+                  <a:txBody>
+                    <a:bodyPr/>
+                    <a:lstStyle/>
+                    <a:p>
+                      <a:pPr lvl="0" algn="l">
+                        <a:buNone/>
+                      </a:pPr>
+                      <a:r>
+                        <a:rPr lang="ru-RU" sz="2400" b="0" kern="100" dirty="0">
+                          <a:effectLst/>
+                        </a:rPr>
+                        <a:t>7. Индекс доходности инвестиций</a:t>
+                      </a:r>
+                      <a:endParaRPr lang="ru-RU" sz="2000" b="0" kern="100" dirty="0">
+                        <a:effectLst/>
+                        <a:latin typeface="Times New Roman" panose="02020603050405020304" pitchFamily="18" charset="0"/>
+                        <a:ea typeface="NSimSun" panose="02010609030101010101" pitchFamily="49" charset="-122"/>
+                        <a:cs typeface="Times New Roman" panose="02020603050405020304" pitchFamily="18" charset="0"/>
+                      </a:endParaRPr>
+                    </a:p>
+                  </a:txBody>
+                  <a:tcPr marL="34925" marR="34925" marT="34925" marB="34925"/>
+                </a:tc>
+                <a:tc>
+                  <a:txBody>
+                    <a:bodyPr/>
+                    <a:lstStyle/>
+                    <a:p>
+                      <a:pPr algn="ctr">
+                        <a:buNone/>
+                      </a:pPr>
+                      <a:r>
+                        <a:rPr lang="ru-RU" sz="2400" kern="100">
+                          <a:solidFill>
+                            <a:srgbClr val="000000"/>
+                          </a:solidFill>
+                          <a:effectLst/>
+                        </a:rPr>
+                        <a:t>PI</a:t>
+                      </a:r>
+                      <a:endParaRPr lang="ru-RU" sz="2000" kern="100">
+                        <a:effectLst/>
+                        <a:latin typeface="Times New Roman" panose="02020603050405020304" pitchFamily="18" charset="0"/>
+                        <a:ea typeface="NSimSun" panose="02010609030101010101" pitchFamily="49" charset="-122"/>
+                        <a:cs typeface="Times New Roman" panose="02020603050405020304" pitchFamily="18" charset="0"/>
+                      </a:endParaRPr>
+                    </a:p>
+                  </a:txBody>
+                  <a:tcPr marL="34925" marR="34925" marT="34925" marB="34925"/>
+                </a:tc>
+                <a:tc>
+                  <a:txBody>
+                    <a:bodyPr/>
+                    <a:lstStyle/>
+                    <a:p>
+                      <a:pPr algn="ctr">
+                        <a:buNone/>
+                      </a:pPr>
+                      <a:r>
+                        <a:rPr lang="ru-RU" sz="2400" kern="100" dirty="0">
+                          <a:solidFill>
+                            <a:srgbClr val="000000"/>
+                          </a:solidFill>
+                          <a:effectLst/>
+                        </a:rPr>
+                        <a:t>индекс</a:t>
+                      </a:r>
+                      <a:endParaRPr lang="ru-RU" sz="2000" kern="100" dirty="0">
+                        <a:effectLst/>
+                        <a:latin typeface="Times New Roman" panose="02020603050405020304" pitchFamily="18" charset="0"/>
+                        <a:ea typeface="NSimSun" panose="02010609030101010101" pitchFamily="49" charset="-122"/>
+                        <a:cs typeface="Times New Roman" panose="02020603050405020304" pitchFamily="18" charset="0"/>
+                      </a:endParaRPr>
+                    </a:p>
+                  </a:txBody>
+                  <a:tcPr marL="34925" marR="34925" marT="34925" marB="34925"/>
+                </a:tc>
+                <a:tc>
+                  <a:txBody>
+                    <a:bodyPr/>
+                    <a:lstStyle/>
+                    <a:p>
+                      <a:pPr algn="ctr">
+                        <a:buNone/>
+                      </a:pPr>
+                      <a:r>
+                        <a:rPr lang="ru-RU" sz="2400" kern="100" dirty="0">
+                          <a:solidFill>
+                            <a:srgbClr val="000000"/>
+                          </a:solidFill>
+                          <a:effectLst/>
+                        </a:rPr>
+                        <a:t>2,80</a:t>
+                      </a:r>
+                      <a:endParaRPr lang="ru-RU" sz="2000" kern="100" dirty="0">
+                        <a:effectLst/>
+                        <a:latin typeface="Times New Roman" panose="02020603050405020304" pitchFamily="18" charset="0"/>
+                        <a:ea typeface="NSimSun" panose="02010609030101010101" pitchFamily="49" charset="-122"/>
+                        <a:cs typeface="Times New Roman" panose="02020603050405020304" pitchFamily="18" charset="0"/>
+                      </a:endParaRPr>
+                    </a:p>
+                  </a:txBody>
+                  <a:tcPr marL="34925" marR="34925" marT="34925" marB="34925"/>
+                </a:tc>
+                <a:extLst>
+                  <a:ext uri="{0D108BD9-81ED-4DB2-BD59-A6C34878D82A}">
+                    <a16:rowId xmlns:a16="http://schemas.microsoft.com/office/drawing/2014/main" val="3668786056"/>
+                  </a:ext>
+                </a:extLst>
+              </a:tr>
+              <a:tr h="508476">
+                <a:tc>
+                  <a:txBody>
+                    <a:bodyPr/>
+                    <a:lstStyle/>
+                    <a:p>
+                      <a:pPr lvl="0" algn="l">
+                        <a:buNone/>
+                      </a:pPr>
+                      <a:r>
+                        <a:rPr lang="ru-RU" sz="2400" b="0" kern="100" dirty="0">
+                          <a:effectLst/>
+                        </a:rPr>
+                        <a:t>8. Чистая конечная стоимость</a:t>
+                      </a:r>
+                      <a:endParaRPr lang="ru-RU" sz="2000" b="0" kern="100" dirty="0">
+                        <a:effectLst/>
+                        <a:latin typeface="Times New Roman" panose="02020603050405020304" pitchFamily="18" charset="0"/>
+                        <a:ea typeface="NSimSun" panose="02010609030101010101" pitchFamily="49" charset="-122"/>
+                        <a:cs typeface="Times New Roman" panose="02020603050405020304" pitchFamily="18" charset="0"/>
+                      </a:endParaRPr>
+                    </a:p>
+                  </a:txBody>
+                  <a:tcPr marL="34925" marR="34925" marT="34925" marB="34925">
+                    <a:solidFill>
+                      <a:schemeClr val="bg1">
+                        <a:lumMod val="95000"/>
+                      </a:schemeClr>
+                    </a:solidFill>
+                  </a:tcPr>
+                </a:tc>
+                <a:tc>
+                  <a:txBody>
+                    <a:bodyPr/>
+                    <a:lstStyle/>
+                    <a:p>
+                      <a:pPr algn="ctr">
+                        <a:buNone/>
+                      </a:pPr>
+                      <a:r>
+                        <a:rPr lang="ru-RU" sz="2400" kern="100" dirty="0">
+                          <a:solidFill>
+                            <a:srgbClr val="000000"/>
+                          </a:solidFill>
+                          <a:effectLst/>
+                        </a:rPr>
+                        <a:t>NTV</a:t>
+                      </a:r>
+                      <a:endParaRPr lang="ru-RU" sz="2000" kern="100" dirty="0">
+                        <a:effectLst/>
+                        <a:latin typeface="Times New Roman" panose="02020603050405020304" pitchFamily="18" charset="0"/>
+                        <a:ea typeface="NSimSun" panose="02010609030101010101" pitchFamily="49" charset="-122"/>
+                        <a:cs typeface="Times New Roman" panose="02020603050405020304" pitchFamily="18" charset="0"/>
+                      </a:endParaRPr>
+                    </a:p>
+                  </a:txBody>
+                  <a:tcPr marL="34925" marR="34925" marT="34925" marB="34925">
+                    <a:solidFill>
+                      <a:schemeClr val="bg1">
+                        <a:lumMod val="95000"/>
+                      </a:schemeClr>
+                    </a:solidFill>
                   </a:tcPr>
                 </a:tc>
                 <a:tc>
@@ -11261,10 +11442,8 @@
                             <a:srgbClr val="000000"/>
                           </a:solidFill>
                           <a:effectLst/>
-                          <a:latin typeface="Times New Roman" panose="02020603050405020304" pitchFamily="18" charset="0"/>
-                          <a:cs typeface="Times New Roman" panose="02020603050405020304" pitchFamily="18" charset="0"/>
                         </a:rPr>
-                        <a:t>r</a:t>
+                        <a:t>руб.</a:t>
                       </a:r>
                       <a:endParaRPr lang="ru-RU" sz="2000" kern="100">
                         <a:effectLst/>
@@ -11275,76 +11454,11 @@
                     </a:p>
                   </a:txBody>
                   <a:tcPr marL="34925" marR="34925" marT="34925" marB="34925">
-                    <a:lnL>
-                      <a:noFill/>
-                    </a:lnL>
-                    <a:lnR>
-                      <a:noFill/>
-                    </a:lnR>
-                    <a:lnT w="12700" cmpd="sng">
-                      <a:noFill/>
-                    </a:lnT>
-                    <a:lnB w="12700" cmpd="sng">
-                      <a:noFill/>
-                    </a:lnB>
-                    <a:lnTlToBr w="12700" cmpd="sng">
-                      <a:noFill/>
-                      <a:prstDash val="solid"/>
-                    </a:lnTlToBr>
-                    <a:lnBlToTr w="12700" cmpd="sng">
-                      <a:noFill/>
-                      <a:prstDash val="solid"/>
-                    </a:lnBlToTr>
-                  </a:tcPr>
-                </a:tc>
-                <a:tc>
-                  <a:txBody>
-                    <a:bodyPr/>
-                    <a:lstStyle/>
-                    <a:p>
-                      <a:pPr algn="ctr">
-                        <a:buNone/>
-                      </a:pPr>
-                      <a:r>
-                        <a:rPr lang="ru-RU" sz="2400" kern="100">
-                          <a:solidFill>
-                            <a:srgbClr val="000000"/>
-                          </a:solidFill>
-                          <a:effectLst/>
-                          <a:latin typeface="Times New Roman" panose="02020603050405020304" pitchFamily="18" charset="0"/>
-                          <a:cs typeface="Times New Roman" panose="02020603050405020304" pitchFamily="18" charset="0"/>
-                        </a:rPr>
-                        <a:t>%</a:t>
-                      </a:r>
-                      <a:endParaRPr lang="ru-RU" sz="2000" kern="100">
-                        <a:effectLst/>
-                        <a:latin typeface="Times New Roman" panose="02020603050405020304" pitchFamily="18" charset="0"/>
-                        <a:ea typeface="NSimSun" panose="02010609030101010101" pitchFamily="49" charset="-122"/>
-                        <a:cs typeface="Times New Roman" panose="02020603050405020304" pitchFamily="18" charset="0"/>
-                      </a:endParaRPr>
-                    </a:p>
-                  </a:txBody>
-                  <a:tcPr marL="34925" marR="34925" marT="34925" marB="34925">
-                    <a:lnL>
-                      <a:noFill/>
-                    </a:lnL>
-                    <a:lnR>
-                      <a:noFill/>
-                    </a:lnR>
-                    <a:lnT w="12700" cmpd="sng">
-                      <a:noFill/>
-                    </a:lnT>
-                    <a:lnB w="12700" cmpd="sng">
-                      <a:noFill/>
-                    </a:lnB>
-                    <a:lnTlToBr w="12700" cmpd="sng">
-                      <a:noFill/>
-                      <a:prstDash val="solid"/>
-                    </a:lnTlToBr>
-                    <a:lnBlToTr w="12700" cmpd="sng">
-                      <a:noFill/>
-                      <a:prstDash val="solid"/>
-                    </a:lnBlToTr>
+                    <a:solidFill>
+                      <a:schemeClr val="bg1">
+                        <a:lumMod val="95000"/>
+                      </a:schemeClr>
+                    </a:solidFill>
                   </a:tcPr>
                 </a:tc>
                 <a:tc>
@@ -11361,1234 +11475,6 @@
                             <a:srgbClr val="000000"/>
                           </a:solidFill>
                           <a:effectLst/>
-                          <a:latin typeface="Times New Roman" panose="02020603050405020304" pitchFamily="18" charset="0"/>
-                          <a:ea typeface="NSimSun" panose="02010609030101010101" pitchFamily="49" charset="-122"/>
-                          <a:cs typeface="Times New Roman" panose="02020603050405020304" pitchFamily="18" charset="0"/>
-                        </a:rPr>
-                        <a:t>15</a:t>
-                      </a:r>
-                      <a:endParaRPr lang="ru-RU" sz="2000" kern="100" dirty="0">
-                        <a:effectLst/>
-                        <a:latin typeface="Times New Roman" panose="02020603050405020304" pitchFamily="18" charset="0"/>
-                        <a:ea typeface="NSimSun" panose="02010609030101010101" pitchFamily="49" charset="-122"/>
-                        <a:cs typeface="Times New Roman" panose="02020603050405020304" pitchFamily="18" charset="0"/>
-                      </a:endParaRPr>
-                    </a:p>
-                  </a:txBody>
-                  <a:tcPr marL="34925" marR="34925" marT="34925" marB="34925">
-                    <a:lnL>
-                      <a:noFill/>
-                    </a:lnL>
-                    <a:lnR w="12700" cmpd="sng">
-                      <a:noFill/>
-                    </a:lnR>
-                    <a:lnT w="12700" cmpd="sng">
-                      <a:noFill/>
-                    </a:lnT>
-                    <a:lnB w="12700" cmpd="sng">
-                      <a:noFill/>
-                    </a:lnB>
-                    <a:lnTlToBr w="12700" cmpd="sng">
-                      <a:noFill/>
-                      <a:prstDash val="solid"/>
-                    </a:lnTlToBr>
-                    <a:lnBlToTr w="12700" cmpd="sng">
-                      <a:noFill/>
-                      <a:prstDash val="solid"/>
-                    </a:lnBlToTr>
-                  </a:tcPr>
-                </a:tc>
-                <a:extLst>
-                  <a:ext uri="{0D108BD9-81ED-4DB2-BD59-A6C34878D82A}">
-                    <a16:rowId xmlns:a16="http://schemas.microsoft.com/office/drawing/2014/main" val="2632555450"/>
-                  </a:ext>
-                </a:extLst>
-              </a:tr>
-              <a:tr h="508476">
-                <a:tc>
-                  <a:txBody>
-                    <a:bodyPr/>
-                    <a:lstStyle/>
-                    <a:p>
-                      <a:pPr algn="ctr">
-                        <a:buNone/>
-                      </a:pPr>
-                      <a:r>
-                        <a:rPr lang="ru-RU" sz="2400" b="0" kern="100" dirty="0">
-                          <a:effectLst/>
-                          <a:latin typeface="Times New Roman" panose="02020603050405020304" pitchFamily="18" charset="0"/>
-                          <a:cs typeface="Times New Roman" panose="02020603050405020304" pitchFamily="18" charset="0"/>
-                        </a:rPr>
-                        <a:t>Чистая приведенная стоимость проекта</a:t>
-                      </a:r>
-                      <a:endParaRPr lang="ru-RU" sz="2000" b="0" kern="100" dirty="0">
-                        <a:effectLst/>
-                        <a:latin typeface="Times New Roman" panose="02020603050405020304" pitchFamily="18" charset="0"/>
-                        <a:ea typeface="NSimSun" panose="02010609030101010101" pitchFamily="49" charset="-122"/>
-                        <a:cs typeface="Times New Roman" panose="02020603050405020304" pitchFamily="18" charset="0"/>
-                      </a:endParaRPr>
-                    </a:p>
-                  </a:txBody>
-                  <a:tcPr marL="34925" marR="34925" marT="34925" marB="34925">
-                    <a:lnL w="12700" cmpd="sng">
-                      <a:noFill/>
-                    </a:lnL>
-                    <a:lnR>
-                      <a:noFill/>
-                    </a:lnR>
-                    <a:lnT w="12700" cmpd="sng">
-                      <a:noFill/>
-                    </a:lnT>
-                    <a:lnB w="12700" cmpd="sng">
-                      <a:noFill/>
-                    </a:lnB>
-                    <a:lnTlToBr w="12700" cmpd="sng">
-                      <a:noFill/>
-                      <a:prstDash val="solid"/>
-                    </a:lnTlToBr>
-                    <a:lnBlToTr w="12700" cmpd="sng">
-                      <a:noFill/>
-                      <a:prstDash val="solid"/>
-                    </a:lnBlToTr>
-                  </a:tcPr>
-                </a:tc>
-                <a:tc>
-                  <a:txBody>
-                    <a:bodyPr/>
-                    <a:lstStyle/>
-                    <a:p>
-                      <a:pPr algn="ctr">
-                        <a:buNone/>
-                      </a:pPr>
-                      <a:r>
-                        <a:rPr lang="ru-RU" sz="2400" kern="100" dirty="0">
-                          <a:solidFill>
-                            <a:srgbClr val="000000"/>
-                          </a:solidFill>
-                          <a:effectLst/>
-                          <a:latin typeface="Times New Roman" panose="02020603050405020304" pitchFamily="18" charset="0"/>
-                          <a:cs typeface="Times New Roman" panose="02020603050405020304" pitchFamily="18" charset="0"/>
-                        </a:rPr>
-                        <a:t>NPV</a:t>
-                      </a:r>
-                      <a:endParaRPr lang="ru-RU" sz="2000" kern="100" dirty="0">
-                        <a:effectLst/>
-                        <a:latin typeface="Times New Roman" panose="02020603050405020304" pitchFamily="18" charset="0"/>
-                        <a:ea typeface="NSimSun" panose="02010609030101010101" pitchFamily="49" charset="-122"/>
-                        <a:cs typeface="Times New Roman" panose="02020603050405020304" pitchFamily="18" charset="0"/>
-                      </a:endParaRPr>
-                    </a:p>
-                  </a:txBody>
-                  <a:tcPr marL="34925" marR="34925" marT="34925" marB="34925">
-                    <a:lnL>
-                      <a:noFill/>
-                    </a:lnL>
-                    <a:lnR>
-                      <a:noFill/>
-                    </a:lnR>
-                    <a:lnT w="12700" cmpd="sng">
-                      <a:noFill/>
-                    </a:lnT>
-                    <a:lnB w="12700" cmpd="sng">
-                      <a:noFill/>
-                    </a:lnB>
-                    <a:lnTlToBr w="12700" cmpd="sng">
-                      <a:noFill/>
-                      <a:prstDash val="solid"/>
-                    </a:lnTlToBr>
-                    <a:lnBlToTr w="12700" cmpd="sng">
-                      <a:noFill/>
-                      <a:prstDash val="solid"/>
-                    </a:lnBlToTr>
-                  </a:tcPr>
-                </a:tc>
-                <a:tc>
-                  <a:txBody>
-                    <a:bodyPr/>
-                    <a:lstStyle/>
-                    <a:p>
-                      <a:pPr algn="ctr">
-                        <a:buNone/>
-                      </a:pPr>
-                      <a:r>
-                        <a:rPr lang="ru-RU" sz="2400" kern="100">
-                          <a:solidFill>
-                            <a:srgbClr val="000000"/>
-                          </a:solidFill>
-                          <a:effectLst/>
-                          <a:latin typeface="Times New Roman" panose="02020603050405020304" pitchFamily="18" charset="0"/>
-                          <a:cs typeface="Times New Roman" panose="02020603050405020304" pitchFamily="18" charset="0"/>
-                        </a:rPr>
-                        <a:t>руб.</a:t>
-                      </a:r>
-                      <a:endParaRPr lang="ru-RU" sz="2000" kern="100">
-                        <a:effectLst/>
-                        <a:latin typeface="Times New Roman" panose="02020603050405020304" pitchFamily="18" charset="0"/>
-                        <a:ea typeface="NSimSun" panose="02010609030101010101" pitchFamily="49" charset="-122"/>
-                        <a:cs typeface="Times New Roman" panose="02020603050405020304" pitchFamily="18" charset="0"/>
-                      </a:endParaRPr>
-                    </a:p>
-                  </a:txBody>
-                  <a:tcPr marL="34925" marR="34925" marT="34925" marB="34925">
-                    <a:lnL>
-                      <a:noFill/>
-                    </a:lnL>
-                    <a:lnR>
-                      <a:noFill/>
-                    </a:lnR>
-                    <a:lnT w="12700" cmpd="sng">
-                      <a:noFill/>
-                    </a:lnT>
-                    <a:lnB w="12700" cmpd="sng">
-                      <a:noFill/>
-                    </a:lnB>
-                    <a:lnTlToBr w="12700" cmpd="sng">
-                      <a:noFill/>
-                      <a:prstDash val="solid"/>
-                    </a:lnTlToBr>
-                    <a:lnBlToTr w="12700" cmpd="sng">
-                      <a:noFill/>
-                      <a:prstDash val="solid"/>
-                    </a:lnBlToTr>
-                  </a:tcPr>
-                </a:tc>
-                <a:tc>
-                  <a:txBody>
-                    <a:bodyPr/>
-                    <a:lstStyle/>
-                    <a:p>
-                      <a:pPr algn="ctr">
-                        <a:buNone/>
-                      </a:pPr>
-                      <a:r>
-                        <a:rPr lang="ru-RU" sz="2400" kern="100" dirty="0">
-                          <a:solidFill>
-                            <a:srgbClr val="000000"/>
-                          </a:solidFill>
-                          <a:effectLst/>
-                          <a:latin typeface="Times New Roman" panose="02020603050405020304" pitchFamily="18" charset="0"/>
-                          <a:cs typeface="Times New Roman" panose="02020603050405020304" pitchFamily="18" charset="0"/>
-                        </a:rPr>
-                        <a:t>1 742 467</a:t>
-                      </a:r>
-                      <a:endParaRPr lang="ru-RU" sz="2000" kern="100" dirty="0">
-                        <a:effectLst/>
-                        <a:latin typeface="Times New Roman" panose="02020603050405020304" pitchFamily="18" charset="0"/>
-                        <a:ea typeface="NSimSun" panose="02010609030101010101" pitchFamily="49" charset="-122"/>
-                        <a:cs typeface="Times New Roman" panose="02020603050405020304" pitchFamily="18" charset="0"/>
-                      </a:endParaRPr>
-                    </a:p>
-                  </a:txBody>
-                  <a:tcPr marL="34925" marR="34925" marT="34925" marB="34925">
-                    <a:lnL>
-                      <a:noFill/>
-                    </a:lnL>
-                    <a:lnR w="12700" cmpd="sng">
-                      <a:noFill/>
-                    </a:lnR>
-                    <a:lnT w="12700" cmpd="sng">
-                      <a:noFill/>
-                    </a:lnT>
-                    <a:lnB w="12700" cmpd="sng">
-                      <a:noFill/>
-                    </a:lnB>
-                    <a:lnTlToBr w="12700" cmpd="sng">
-                      <a:noFill/>
-                      <a:prstDash val="solid"/>
-                    </a:lnTlToBr>
-                    <a:lnBlToTr w="12700" cmpd="sng">
-                      <a:noFill/>
-                      <a:prstDash val="solid"/>
-                    </a:lnBlToTr>
-                  </a:tcPr>
-                </a:tc>
-                <a:extLst>
-                  <a:ext uri="{0D108BD9-81ED-4DB2-BD59-A6C34878D82A}">
-                    <a16:rowId xmlns:a16="http://schemas.microsoft.com/office/drawing/2014/main" val="39219085"/>
-                  </a:ext>
-                </a:extLst>
-              </a:tr>
-              <a:tr h="508476">
-                <a:tc>
-                  <a:txBody>
-                    <a:bodyPr/>
-                    <a:lstStyle/>
-                    <a:p>
-                      <a:pPr algn="ctr">
-                        <a:buNone/>
-                      </a:pPr>
-                      <a:r>
-                        <a:rPr lang="ru-RU" sz="2400" b="0" kern="100" dirty="0">
-                          <a:effectLst/>
-                          <a:latin typeface="Times New Roman" panose="02020603050405020304" pitchFamily="18" charset="0"/>
-                          <a:cs typeface="Times New Roman" panose="02020603050405020304" pitchFamily="18" charset="0"/>
-                        </a:rPr>
-                        <a:t>Внутренняя ставка доходности</a:t>
-                      </a:r>
-                      <a:endParaRPr lang="ru-RU" sz="2000" b="0" kern="100" dirty="0">
-                        <a:effectLst/>
-                        <a:latin typeface="Times New Roman" panose="02020603050405020304" pitchFamily="18" charset="0"/>
-                        <a:ea typeface="NSimSun" panose="02010609030101010101" pitchFamily="49" charset="-122"/>
-                        <a:cs typeface="Times New Roman" panose="02020603050405020304" pitchFamily="18" charset="0"/>
-                      </a:endParaRPr>
-                    </a:p>
-                  </a:txBody>
-                  <a:tcPr marL="34925" marR="34925" marT="34925" marB="34925">
-                    <a:lnL w="12700" cmpd="sng">
-                      <a:noFill/>
-                    </a:lnL>
-                    <a:lnR>
-                      <a:noFill/>
-                    </a:lnR>
-                    <a:lnT w="12700" cmpd="sng">
-                      <a:noFill/>
-                    </a:lnT>
-                    <a:lnB w="12700" cmpd="sng">
-                      <a:noFill/>
-                    </a:lnB>
-                    <a:lnTlToBr w="12700" cmpd="sng">
-                      <a:noFill/>
-                      <a:prstDash val="solid"/>
-                    </a:lnTlToBr>
-                    <a:lnBlToTr w="12700" cmpd="sng">
-                      <a:noFill/>
-                      <a:prstDash val="solid"/>
-                    </a:lnBlToTr>
-                  </a:tcPr>
-                </a:tc>
-                <a:tc>
-                  <a:txBody>
-                    <a:bodyPr/>
-                    <a:lstStyle/>
-                    <a:p>
-                      <a:pPr algn="ctr">
-                        <a:buNone/>
-                      </a:pPr>
-                      <a:r>
-                        <a:rPr lang="ru-RU" sz="2400" kern="100" dirty="0">
-                          <a:solidFill>
-                            <a:srgbClr val="000000"/>
-                          </a:solidFill>
-                          <a:effectLst/>
-                          <a:latin typeface="Times New Roman" panose="02020603050405020304" pitchFamily="18" charset="0"/>
-                          <a:cs typeface="Times New Roman" panose="02020603050405020304" pitchFamily="18" charset="0"/>
-                        </a:rPr>
-                        <a:t>IRR</a:t>
-                      </a:r>
-                      <a:endParaRPr lang="ru-RU" sz="2000" kern="100" dirty="0">
-                        <a:effectLst/>
-                        <a:latin typeface="Times New Roman" panose="02020603050405020304" pitchFamily="18" charset="0"/>
-                        <a:ea typeface="NSimSun" panose="02010609030101010101" pitchFamily="49" charset="-122"/>
-                        <a:cs typeface="Times New Roman" panose="02020603050405020304" pitchFamily="18" charset="0"/>
-                      </a:endParaRPr>
-                    </a:p>
-                  </a:txBody>
-                  <a:tcPr marL="34925" marR="34925" marT="34925" marB="34925">
-                    <a:lnL>
-                      <a:noFill/>
-                    </a:lnL>
-                    <a:lnR>
-                      <a:noFill/>
-                    </a:lnR>
-                    <a:lnT w="12700" cmpd="sng">
-                      <a:noFill/>
-                    </a:lnT>
-                    <a:lnB w="12700" cmpd="sng">
-                      <a:noFill/>
-                    </a:lnB>
-                    <a:lnTlToBr w="12700" cmpd="sng">
-                      <a:noFill/>
-                      <a:prstDash val="solid"/>
-                    </a:lnTlToBr>
-                    <a:lnBlToTr w="12700" cmpd="sng">
-                      <a:noFill/>
-                      <a:prstDash val="solid"/>
-                    </a:lnBlToTr>
-                  </a:tcPr>
-                </a:tc>
-                <a:tc>
-                  <a:txBody>
-                    <a:bodyPr/>
-                    <a:lstStyle/>
-                    <a:p>
-                      <a:pPr algn="ctr">
-                        <a:buNone/>
-                      </a:pPr>
-                      <a:r>
-                        <a:rPr lang="ru-RU" sz="2400" kern="100">
-                          <a:solidFill>
-                            <a:srgbClr val="000000"/>
-                          </a:solidFill>
-                          <a:effectLst/>
-                          <a:latin typeface="Times New Roman" panose="02020603050405020304" pitchFamily="18" charset="0"/>
-                          <a:cs typeface="Times New Roman" panose="02020603050405020304" pitchFamily="18" charset="0"/>
-                        </a:rPr>
-                        <a:t>%</a:t>
-                      </a:r>
-                      <a:endParaRPr lang="ru-RU" sz="2000" kern="100">
-                        <a:effectLst/>
-                        <a:latin typeface="Times New Roman" panose="02020603050405020304" pitchFamily="18" charset="0"/>
-                        <a:ea typeface="NSimSun" panose="02010609030101010101" pitchFamily="49" charset="-122"/>
-                        <a:cs typeface="Times New Roman" panose="02020603050405020304" pitchFamily="18" charset="0"/>
-                      </a:endParaRPr>
-                    </a:p>
-                  </a:txBody>
-                  <a:tcPr marL="34925" marR="34925" marT="34925" marB="34925">
-                    <a:lnL>
-                      <a:noFill/>
-                    </a:lnL>
-                    <a:lnR>
-                      <a:noFill/>
-                    </a:lnR>
-                    <a:lnT w="12700" cmpd="sng">
-                      <a:noFill/>
-                    </a:lnT>
-                    <a:lnB w="12700" cmpd="sng">
-                      <a:noFill/>
-                    </a:lnB>
-                    <a:lnTlToBr w="12700" cmpd="sng">
-                      <a:noFill/>
-                      <a:prstDash val="solid"/>
-                    </a:lnTlToBr>
-                    <a:lnBlToTr w="12700" cmpd="sng">
-                      <a:noFill/>
-                      <a:prstDash val="solid"/>
-                    </a:lnBlToTr>
-                  </a:tcPr>
-                </a:tc>
-                <a:tc>
-                  <a:txBody>
-                    <a:bodyPr/>
-                    <a:lstStyle/>
-                    <a:p>
-                      <a:pPr algn="ctr">
-                        <a:buNone/>
-                      </a:pPr>
-                      <a:r>
-                        <a:rPr lang="ru-RU" sz="2400" kern="100" dirty="0">
-                          <a:solidFill>
-                            <a:srgbClr val="000000"/>
-                          </a:solidFill>
-                          <a:effectLst/>
-                          <a:latin typeface="Times New Roman" panose="02020603050405020304" pitchFamily="18" charset="0"/>
-                          <a:ea typeface="NSimSun" panose="02010609030101010101" pitchFamily="49" charset="-122"/>
-                          <a:cs typeface="Times New Roman" panose="02020603050405020304" pitchFamily="18" charset="0"/>
-                        </a:rPr>
-                        <a:t>41</a:t>
-                      </a:r>
-                      <a:endParaRPr lang="ru-RU" sz="2000" kern="100" dirty="0">
-                        <a:effectLst/>
-                        <a:latin typeface="Times New Roman" panose="02020603050405020304" pitchFamily="18" charset="0"/>
-                        <a:ea typeface="NSimSun" panose="02010609030101010101" pitchFamily="49" charset="-122"/>
-                        <a:cs typeface="Times New Roman" panose="02020603050405020304" pitchFamily="18" charset="0"/>
-                      </a:endParaRPr>
-                    </a:p>
-                  </a:txBody>
-                  <a:tcPr marL="34925" marR="34925" marT="34925" marB="34925">
-                    <a:lnL>
-                      <a:noFill/>
-                    </a:lnL>
-                    <a:lnR w="12700" cmpd="sng">
-                      <a:noFill/>
-                    </a:lnR>
-                    <a:lnT w="12700" cmpd="sng">
-                      <a:noFill/>
-                    </a:lnT>
-                    <a:lnB w="12700" cmpd="sng">
-                      <a:noFill/>
-                    </a:lnB>
-                    <a:lnTlToBr w="12700" cmpd="sng">
-                      <a:noFill/>
-                      <a:prstDash val="solid"/>
-                    </a:lnTlToBr>
-                    <a:lnBlToTr w="12700" cmpd="sng">
-                      <a:noFill/>
-                      <a:prstDash val="solid"/>
-                    </a:lnBlToTr>
-                  </a:tcPr>
-                </a:tc>
-                <a:extLst>
-                  <a:ext uri="{0D108BD9-81ED-4DB2-BD59-A6C34878D82A}">
-                    <a16:rowId xmlns:a16="http://schemas.microsoft.com/office/drawing/2014/main" val="2720899962"/>
-                  </a:ext>
-                </a:extLst>
-              </a:tr>
-              <a:tr h="508476">
-                <a:tc>
-                  <a:txBody>
-                    <a:bodyPr/>
-                    <a:lstStyle/>
-                    <a:p>
-                      <a:pPr algn="ctr">
-                        <a:buNone/>
-                      </a:pPr>
-                      <a:r>
-                        <a:rPr lang="ru-RU" sz="2400" b="0" kern="100" dirty="0">
-                          <a:effectLst/>
-                          <a:latin typeface="Times New Roman" panose="02020603050405020304" pitchFamily="18" charset="0"/>
-                          <a:cs typeface="Times New Roman" panose="02020603050405020304" pitchFamily="18" charset="0"/>
-                        </a:rPr>
-                        <a:t>Простой срок окупаемости</a:t>
-                      </a:r>
-                      <a:endParaRPr lang="ru-RU" sz="2000" b="0" kern="100" dirty="0">
-                        <a:effectLst/>
-                        <a:latin typeface="Times New Roman" panose="02020603050405020304" pitchFamily="18" charset="0"/>
-                        <a:ea typeface="NSimSun" panose="02010609030101010101" pitchFamily="49" charset="-122"/>
-                        <a:cs typeface="Times New Roman" panose="02020603050405020304" pitchFamily="18" charset="0"/>
-                      </a:endParaRPr>
-                    </a:p>
-                  </a:txBody>
-                  <a:tcPr marL="34925" marR="34925" marT="34925" marB="34925">
-                    <a:lnL w="12700" cmpd="sng">
-                      <a:noFill/>
-                    </a:lnL>
-                    <a:lnR>
-                      <a:noFill/>
-                    </a:lnR>
-                    <a:lnT w="12700" cmpd="sng">
-                      <a:noFill/>
-                    </a:lnT>
-                    <a:lnB w="12700" cmpd="sng">
-                      <a:noFill/>
-                    </a:lnB>
-                    <a:lnTlToBr w="12700" cmpd="sng">
-                      <a:noFill/>
-                      <a:prstDash val="solid"/>
-                    </a:lnTlToBr>
-                    <a:lnBlToTr w="12700" cmpd="sng">
-                      <a:noFill/>
-                      <a:prstDash val="solid"/>
-                    </a:lnBlToTr>
-                  </a:tcPr>
-                </a:tc>
-                <a:tc>
-                  <a:txBody>
-                    <a:bodyPr/>
-                    <a:lstStyle/>
-                    <a:p>
-                      <a:pPr algn="ctr">
-                        <a:buNone/>
-                      </a:pPr>
-                      <a:r>
-                        <a:rPr lang="ru-RU" sz="2400" kern="100" dirty="0" err="1">
-                          <a:solidFill>
-                            <a:srgbClr val="000000"/>
-                          </a:solidFill>
-                          <a:effectLst/>
-                          <a:latin typeface="Times New Roman" panose="02020603050405020304" pitchFamily="18" charset="0"/>
-                          <a:cs typeface="Times New Roman" panose="02020603050405020304" pitchFamily="18" charset="0"/>
-                        </a:rPr>
-                        <a:t>PPs</a:t>
-                      </a:r>
-                      <a:endParaRPr lang="ru-RU" sz="2000" kern="100" dirty="0">
-                        <a:effectLst/>
-                        <a:latin typeface="Times New Roman" panose="02020603050405020304" pitchFamily="18" charset="0"/>
-                        <a:ea typeface="NSimSun" panose="02010609030101010101" pitchFamily="49" charset="-122"/>
-                        <a:cs typeface="Times New Roman" panose="02020603050405020304" pitchFamily="18" charset="0"/>
-                      </a:endParaRPr>
-                    </a:p>
-                  </a:txBody>
-                  <a:tcPr marL="34925" marR="34925" marT="34925" marB="34925">
-                    <a:lnL>
-                      <a:noFill/>
-                    </a:lnL>
-                    <a:lnR>
-                      <a:noFill/>
-                    </a:lnR>
-                    <a:lnT w="12700" cmpd="sng">
-                      <a:noFill/>
-                    </a:lnT>
-                    <a:lnB w="12700" cmpd="sng">
-                      <a:noFill/>
-                    </a:lnB>
-                    <a:lnTlToBr w="12700" cmpd="sng">
-                      <a:noFill/>
-                      <a:prstDash val="solid"/>
-                    </a:lnTlToBr>
-                    <a:lnBlToTr w="12700" cmpd="sng">
-                      <a:noFill/>
-                      <a:prstDash val="solid"/>
-                    </a:lnBlToTr>
-                  </a:tcPr>
-                </a:tc>
-                <a:tc>
-                  <a:txBody>
-                    <a:bodyPr/>
-                    <a:lstStyle/>
-                    <a:p>
-                      <a:pPr algn="ctr">
-                        <a:buNone/>
-                      </a:pPr>
-                      <a:r>
-                        <a:rPr lang="ru-RU" sz="2400" kern="100" dirty="0">
-                          <a:solidFill>
-                            <a:srgbClr val="000000"/>
-                          </a:solidFill>
-                          <a:effectLst/>
-                          <a:latin typeface="Times New Roman" panose="02020603050405020304" pitchFamily="18" charset="0"/>
-                          <a:cs typeface="Times New Roman" panose="02020603050405020304" pitchFamily="18" charset="0"/>
-                        </a:rPr>
-                        <a:t>лет</a:t>
-                      </a:r>
-                      <a:endParaRPr lang="ru-RU" sz="2000" kern="100" dirty="0">
-                        <a:effectLst/>
-                        <a:latin typeface="Times New Roman" panose="02020603050405020304" pitchFamily="18" charset="0"/>
-                        <a:ea typeface="NSimSun" panose="02010609030101010101" pitchFamily="49" charset="-122"/>
-                        <a:cs typeface="Times New Roman" panose="02020603050405020304" pitchFamily="18" charset="0"/>
-                      </a:endParaRPr>
-                    </a:p>
-                  </a:txBody>
-                  <a:tcPr marL="34925" marR="34925" marT="34925" marB="34925">
-                    <a:lnL>
-                      <a:noFill/>
-                    </a:lnL>
-                    <a:lnR>
-                      <a:noFill/>
-                    </a:lnR>
-                    <a:lnT w="12700" cmpd="sng">
-                      <a:noFill/>
-                    </a:lnT>
-                    <a:lnB w="12700" cmpd="sng">
-                      <a:noFill/>
-                    </a:lnB>
-                    <a:lnTlToBr w="12700" cmpd="sng">
-                      <a:noFill/>
-                      <a:prstDash val="solid"/>
-                    </a:lnTlToBr>
-                    <a:lnBlToTr w="12700" cmpd="sng">
-                      <a:noFill/>
-                      <a:prstDash val="solid"/>
-                    </a:lnBlToTr>
-                  </a:tcPr>
-                </a:tc>
-                <a:tc>
-                  <a:txBody>
-                    <a:bodyPr/>
-                    <a:lstStyle/>
-                    <a:p>
-                      <a:pPr algn="ctr">
-                        <a:buNone/>
-                      </a:pPr>
-                      <a:r>
-                        <a:rPr lang="ru-RU" sz="2400" kern="100" dirty="0">
-                          <a:solidFill>
-                            <a:srgbClr val="000000"/>
-                          </a:solidFill>
-                          <a:effectLst/>
-                          <a:latin typeface="Times New Roman" panose="02020603050405020304" pitchFamily="18" charset="0"/>
-                          <a:cs typeface="Times New Roman" panose="02020603050405020304" pitchFamily="18" charset="0"/>
-                        </a:rPr>
-                        <a:t>3,93</a:t>
-                      </a:r>
-                      <a:endParaRPr lang="ru-RU" sz="2000" kern="100" dirty="0">
-                        <a:effectLst/>
-                        <a:latin typeface="Times New Roman" panose="02020603050405020304" pitchFamily="18" charset="0"/>
-                        <a:ea typeface="NSimSun" panose="02010609030101010101" pitchFamily="49" charset="-122"/>
-                        <a:cs typeface="Times New Roman" panose="02020603050405020304" pitchFamily="18" charset="0"/>
-                      </a:endParaRPr>
-                    </a:p>
-                  </a:txBody>
-                  <a:tcPr marL="34925" marR="34925" marT="34925" marB="34925">
-                    <a:lnL>
-                      <a:noFill/>
-                    </a:lnL>
-                    <a:lnR w="12700" cmpd="sng">
-                      <a:noFill/>
-                    </a:lnR>
-                    <a:lnT w="12700" cmpd="sng">
-                      <a:noFill/>
-                    </a:lnT>
-                    <a:lnB w="12700" cmpd="sng">
-                      <a:noFill/>
-                    </a:lnB>
-                    <a:lnTlToBr w="12700" cmpd="sng">
-                      <a:noFill/>
-                      <a:prstDash val="solid"/>
-                    </a:lnTlToBr>
-                    <a:lnBlToTr w="12700" cmpd="sng">
-                      <a:noFill/>
-                      <a:prstDash val="solid"/>
-                    </a:lnBlToTr>
-                  </a:tcPr>
-                </a:tc>
-                <a:extLst>
-                  <a:ext uri="{0D108BD9-81ED-4DB2-BD59-A6C34878D82A}">
-                    <a16:rowId xmlns:a16="http://schemas.microsoft.com/office/drawing/2014/main" val="3505463349"/>
-                  </a:ext>
-                </a:extLst>
-              </a:tr>
-              <a:tr h="508476">
-                <a:tc>
-                  <a:txBody>
-                    <a:bodyPr/>
-                    <a:lstStyle/>
-                    <a:p>
-                      <a:pPr algn="ctr">
-                        <a:buNone/>
-                      </a:pPr>
-                      <a:r>
-                        <a:rPr lang="ru-RU" sz="2400" b="0" kern="100" dirty="0">
-                          <a:effectLst/>
-                          <a:latin typeface="Times New Roman" panose="02020603050405020304" pitchFamily="18" charset="0"/>
-                          <a:cs typeface="Times New Roman" panose="02020603050405020304" pitchFamily="18" charset="0"/>
-                        </a:rPr>
-                        <a:t>Дисконтированный срок окупаемости</a:t>
-                      </a:r>
-                      <a:endParaRPr lang="ru-RU" sz="2000" b="0" kern="100" dirty="0">
-                        <a:effectLst/>
-                        <a:latin typeface="Times New Roman" panose="02020603050405020304" pitchFamily="18" charset="0"/>
-                        <a:ea typeface="NSimSun" panose="02010609030101010101" pitchFamily="49" charset="-122"/>
-                        <a:cs typeface="Times New Roman" panose="02020603050405020304" pitchFamily="18" charset="0"/>
-                      </a:endParaRPr>
-                    </a:p>
-                  </a:txBody>
-                  <a:tcPr marL="34925" marR="34925" marT="34925" marB="34925">
-                    <a:lnL w="12700" cmpd="sng">
-                      <a:noFill/>
-                    </a:lnL>
-                    <a:lnR>
-                      <a:noFill/>
-                    </a:lnR>
-                    <a:lnT w="12700" cmpd="sng">
-                      <a:noFill/>
-                    </a:lnT>
-                    <a:lnB w="12700" cmpd="sng">
-                      <a:noFill/>
-                    </a:lnB>
-                    <a:lnTlToBr w="12700" cmpd="sng">
-                      <a:noFill/>
-                      <a:prstDash val="solid"/>
-                    </a:lnTlToBr>
-                    <a:lnBlToTr w="12700" cmpd="sng">
-                      <a:noFill/>
-                      <a:prstDash val="solid"/>
-                    </a:lnBlToTr>
-                  </a:tcPr>
-                </a:tc>
-                <a:tc>
-                  <a:txBody>
-                    <a:bodyPr/>
-                    <a:lstStyle/>
-                    <a:p>
-                      <a:pPr algn="ctr">
-                        <a:buNone/>
-                      </a:pPr>
-                      <a:r>
-                        <a:rPr lang="ru-RU" sz="2400" kern="100">
-                          <a:solidFill>
-                            <a:srgbClr val="000000"/>
-                          </a:solidFill>
-                          <a:effectLst/>
-                          <a:latin typeface="Times New Roman" panose="02020603050405020304" pitchFamily="18" charset="0"/>
-                          <a:cs typeface="Times New Roman" panose="02020603050405020304" pitchFamily="18" charset="0"/>
-                        </a:rPr>
-                        <a:t>PPd</a:t>
-                      </a:r>
-                      <a:endParaRPr lang="ru-RU" sz="2000" kern="100">
-                        <a:effectLst/>
-                        <a:latin typeface="Times New Roman" panose="02020603050405020304" pitchFamily="18" charset="0"/>
-                        <a:ea typeface="NSimSun" panose="02010609030101010101" pitchFamily="49" charset="-122"/>
-                        <a:cs typeface="Times New Roman" panose="02020603050405020304" pitchFamily="18" charset="0"/>
-                      </a:endParaRPr>
-                    </a:p>
-                  </a:txBody>
-                  <a:tcPr marL="34925" marR="34925" marT="34925" marB="34925">
-                    <a:lnL>
-                      <a:noFill/>
-                    </a:lnL>
-                    <a:lnR>
-                      <a:noFill/>
-                    </a:lnR>
-                    <a:lnT w="12700" cmpd="sng">
-                      <a:noFill/>
-                    </a:lnT>
-                    <a:lnB w="12700" cmpd="sng">
-                      <a:noFill/>
-                    </a:lnB>
-                    <a:lnTlToBr w="12700" cmpd="sng">
-                      <a:noFill/>
-                      <a:prstDash val="solid"/>
-                    </a:lnTlToBr>
-                    <a:lnBlToTr w="12700" cmpd="sng">
-                      <a:noFill/>
-                      <a:prstDash val="solid"/>
-                    </a:lnBlToTr>
-                  </a:tcPr>
-                </a:tc>
-                <a:tc>
-                  <a:txBody>
-                    <a:bodyPr/>
-                    <a:lstStyle/>
-                    <a:p>
-                      <a:pPr algn="ctr">
-                        <a:buNone/>
-                      </a:pPr>
-                      <a:r>
-                        <a:rPr lang="ru-RU" sz="2400" kern="100" dirty="0">
-                          <a:solidFill>
-                            <a:srgbClr val="000000"/>
-                          </a:solidFill>
-                          <a:effectLst/>
-                          <a:latin typeface="Times New Roman" panose="02020603050405020304" pitchFamily="18" charset="0"/>
-                          <a:cs typeface="Times New Roman" panose="02020603050405020304" pitchFamily="18" charset="0"/>
-                        </a:rPr>
-                        <a:t>лет</a:t>
-                      </a:r>
-                      <a:endParaRPr lang="ru-RU" sz="2000" kern="100" dirty="0">
-                        <a:effectLst/>
-                        <a:latin typeface="Times New Roman" panose="02020603050405020304" pitchFamily="18" charset="0"/>
-                        <a:ea typeface="NSimSun" panose="02010609030101010101" pitchFamily="49" charset="-122"/>
-                        <a:cs typeface="Times New Roman" panose="02020603050405020304" pitchFamily="18" charset="0"/>
-                      </a:endParaRPr>
-                    </a:p>
-                  </a:txBody>
-                  <a:tcPr marL="34925" marR="34925" marT="34925" marB="34925">
-                    <a:lnL>
-                      <a:noFill/>
-                    </a:lnL>
-                    <a:lnR>
-                      <a:noFill/>
-                    </a:lnR>
-                    <a:lnT w="12700" cmpd="sng">
-                      <a:noFill/>
-                    </a:lnT>
-                    <a:lnB w="12700" cmpd="sng">
-                      <a:noFill/>
-                    </a:lnB>
-                    <a:lnTlToBr w="12700" cmpd="sng">
-                      <a:noFill/>
-                      <a:prstDash val="solid"/>
-                    </a:lnTlToBr>
-                    <a:lnBlToTr w="12700" cmpd="sng">
-                      <a:noFill/>
-                      <a:prstDash val="solid"/>
-                    </a:lnBlToTr>
-                  </a:tcPr>
-                </a:tc>
-                <a:tc>
-                  <a:txBody>
-                    <a:bodyPr/>
-                    <a:lstStyle/>
-                    <a:p>
-                      <a:pPr algn="ctr">
-                        <a:buNone/>
-                      </a:pPr>
-                      <a:r>
-                        <a:rPr lang="ru-RU" sz="2400" kern="100">
-                          <a:solidFill>
-                            <a:srgbClr val="000000"/>
-                          </a:solidFill>
-                          <a:effectLst/>
-                          <a:latin typeface="Times New Roman" panose="02020603050405020304" pitchFamily="18" charset="0"/>
-                          <a:cs typeface="Times New Roman" panose="02020603050405020304" pitchFamily="18" charset="0"/>
-                        </a:rPr>
-                        <a:t>4,17</a:t>
-                      </a:r>
-                      <a:endParaRPr lang="ru-RU" sz="2000" kern="100">
-                        <a:effectLst/>
-                        <a:latin typeface="Times New Roman" panose="02020603050405020304" pitchFamily="18" charset="0"/>
-                        <a:ea typeface="NSimSun" panose="02010609030101010101" pitchFamily="49" charset="-122"/>
-                        <a:cs typeface="Times New Roman" panose="02020603050405020304" pitchFamily="18" charset="0"/>
-                      </a:endParaRPr>
-                    </a:p>
-                  </a:txBody>
-                  <a:tcPr marL="34925" marR="34925" marT="34925" marB="34925">
-                    <a:lnL>
-                      <a:noFill/>
-                    </a:lnL>
-                    <a:lnR w="12700" cmpd="sng">
-                      <a:noFill/>
-                    </a:lnR>
-                    <a:lnT w="12700" cmpd="sng">
-                      <a:noFill/>
-                    </a:lnT>
-                    <a:lnB w="12700" cmpd="sng">
-                      <a:noFill/>
-                    </a:lnB>
-                    <a:lnTlToBr w="12700" cmpd="sng">
-                      <a:noFill/>
-                      <a:prstDash val="solid"/>
-                    </a:lnTlToBr>
-                    <a:lnBlToTr w="12700" cmpd="sng">
-                      <a:noFill/>
-                      <a:prstDash val="solid"/>
-                    </a:lnBlToTr>
-                  </a:tcPr>
-                </a:tc>
-                <a:extLst>
-                  <a:ext uri="{0D108BD9-81ED-4DB2-BD59-A6C34878D82A}">
-                    <a16:rowId xmlns:a16="http://schemas.microsoft.com/office/drawing/2014/main" val="3101069098"/>
-                  </a:ext>
-                </a:extLst>
-              </a:tr>
-              <a:tr h="508476">
-                <a:tc>
-                  <a:txBody>
-                    <a:bodyPr/>
-                    <a:lstStyle/>
-                    <a:p>
-                      <a:pPr algn="ctr">
-                        <a:buNone/>
-                      </a:pPr>
-                      <a:r>
-                        <a:rPr lang="ru-RU" sz="2400" b="0" kern="100" dirty="0">
-                          <a:effectLst/>
-                          <a:latin typeface="Times New Roman" panose="02020603050405020304" pitchFamily="18" charset="0"/>
-                          <a:cs typeface="Times New Roman" panose="02020603050405020304" pitchFamily="18" charset="0"/>
-                        </a:rPr>
-                        <a:t>Индекс доходности инвестиций</a:t>
-                      </a:r>
-                      <a:endParaRPr lang="ru-RU" sz="2000" b="0" kern="100" dirty="0">
-                        <a:effectLst/>
-                        <a:latin typeface="Times New Roman" panose="02020603050405020304" pitchFamily="18" charset="0"/>
-                        <a:ea typeface="NSimSun" panose="02010609030101010101" pitchFamily="49" charset="-122"/>
-                        <a:cs typeface="Times New Roman" panose="02020603050405020304" pitchFamily="18" charset="0"/>
-                      </a:endParaRPr>
-                    </a:p>
-                  </a:txBody>
-                  <a:tcPr marL="34925" marR="34925" marT="34925" marB="34925">
-                    <a:lnL w="12700" cmpd="sng">
-                      <a:noFill/>
-                    </a:lnL>
-                    <a:lnR>
-                      <a:noFill/>
-                    </a:lnR>
-                    <a:lnT w="12700" cmpd="sng">
-                      <a:noFill/>
-                    </a:lnT>
-                    <a:lnB w="12700" cmpd="sng">
-                      <a:noFill/>
-                    </a:lnB>
-                    <a:lnTlToBr w="12700" cmpd="sng">
-                      <a:noFill/>
-                      <a:prstDash val="solid"/>
-                    </a:lnTlToBr>
-                    <a:lnBlToTr w="12700" cmpd="sng">
-                      <a:noFill/>
-                      <a:prstDash val="solid"/>
-                    </a:lnBlToTr>
-                  </a:tcPr>
-                </a:tc>
-                <a:tc>
-                  <a:txBody>
-                    <a:bodyPr/>
-                    <a:lstStyle/>
-                    <a:p>
-                      <a:pPr algn="ctr">
-                        <a:buNone/>
-                      </a:pPr>
-                      <a:r>
-                        <a:rPr lang="ru-RU" sz="2400" kern="100">
-                          <a:solidFill>
-                            <a:srgbClr val="000000"/>
-                          </a:solidFill>
-                          <a:effectLst/>
-                          <a:latin typeface="Times New Roman" panose="02020603050405020304" pitchFamily="18" charset="0"/>
-                          <a:cs typeface="Times New Roman" panose="02020603050405020304" pitchFamily="18" charset="0"/>
-                        </a:rPr>
-                        <a:t>PI</a:t>
-                      </a:r>
-                      <a:endParaRPr lang="ru-RU" sz="2000" kern="100">
-                        <a:effectLst/>
-                        <a:latin typeface="Times New Roman" panose="02020603050405020304" pitchFamily="18" charset="0"/>
-                        <a:ea typeface="NSimSun" panose="02010609030101010101" pitchFamily="49" charset="-122"/>
-                        <a:cs typeface="Times New Roman" panose="02020603050405020304" pitchFamily="18" charset="0"/>
-                      </a:endParaRPr>
-                    </a:p>
-                  </a:txBody>
-                  <a:tcPr marL="34925" marR="34925" marT="34925" marB="34925">
-                    <a:lnL>
-                      <a:noFill/>
-                    </a:lnL>
-                    <a:lnR>
-                      <a:noFill/>
-                    </a:lnR>
-                    <a:lnT w="12700" cmpd="sng">
-                      <a:noFill/>
-                    </a:lnT>
-                    <a:lnB w="12700" cmpd="sng">
-                      <a:noFill/>
-                    </a:lnB>
-                    <a:lnTlToBr w="12700" cmpd="sng">
-                      <a:noFill/>
-                      <a:prstDash val="solid"/>
-                    </a:lnTlToBr>
-                    <a:lnBlToTr w="12700" cmpd="sng">
-                      <a:noFill/>
-                      <a:prstDash val="solid"/>
-                    </a:lnBlToTr>
-                  </a:tcPr>
-                </a:tc>
-                <a:tc>
-                  <a:txBody>
-                    <a:bodyPr/>
-                    <a:lstStyle/>
-                    <a:p>
-                      <a:pPr algn="ctr">
-                        <a:buNone/>
-                      </a:pPr>
-                      <a:r>
-                        <a:rPr lang="ru-RU" sz="2400" kern="100">
-                          <a:solidFill>
-                            <a:srgbClr val="000000"/>
-                          </a:solidFill>
-                          <a:effectLst/>
-                          <a:latin typeface="Times New Roman" panose="02020603050405020304" pitchFamily="18" charset="0"/>
-                          <a:cs typeface="Times New Roman" panose="02020603050405020304" pitchFamily="18" charset="0"/>
-                        </a:rPr>
-                        <a:t>индекс</a:t>
-                      </a:r>
-                      <a:endParaRPr lang="ru-RU" sz="2000" kern="100">
-                        <a:effectLst/>
-                        <a:latin typeface="Times New Roman" panose="02020603050405020304" pitchFamily="18" charset="0"/>
-                        <a:ea typeface="NSimSun" panose="02010609030101010101" pitchFamily="49" charset="-122"/>
-                        <a:cs typeface="Times New Roman" panose="02020603050405020304" pitchFamily="18" charset="0"/>
-                      </a:endParaRPr>
-                    </a:p>
-                  </a:txBody>
-                  <a:tcPr marL="34925" marR="34925" marT="34925" marB="34925">
-                    <a:lnL>
-                      <a:noFill/>
-                    </a:lnL>
-                    <a:lnR>
-                      <a:noFill/>
-                    </a:lnR>
-                    <a:lnT w="12700" cmpd="sng">
-                      <a:noFill/>
-                    </a:lnT>
-                    <a:lnB w="12700" cmpd="sng">
-                      <a:noFill/>
-                    </a:lnB>
-                    <a:lnTlToBr w="12700" cmpd="sng">
-                      <a:noFill/>
-                      <a:prstDash val="solid"/>
-                    </a:lnTlToBr>
-                    <a:lnBlToTr w="12700" cmpd="sng">
-                      <a:noFill/>
-                      <a:prstDash val="solid"/>
-                    </a:lnBlToTr>
-                  </a:tcPr>
-                </a:tc>
-                <a:tc>
-                  <a:txBody>
-                    <a:bodyPr/>
-                    <a:lstStyle/>
-                    <a:p>
-                      <a:pPr algn="ctr">
-                        <a:buNone/>
-                      </a:pPr>
-                      <a:r>
-                        <a:rPr lang="ru-RU" sz="2400" kern="100" dirty="0">
-                          <a:solidFill>
-                            <a:srgbClr val="000000"/>
-                          </a:solidFill>
-                          <a:effectLst/>
-                          <a:latin typeface="Times New Roman" panose="02020603050405020304" pitchFamily="18" charset="0"/>
-                          <a:cs typeface="Times New Roman" panose="02020603050405020304" pitchFamily="18" charset="0"/>
-                        </a:rPr>
-                        <a:t>2,80</a:t>
-                      </a:r>
-                      <a:endParaRPr lang="ru-RU" sz="2000" kern="100" dirty="0">
-                        <a:effectLst/>
-                        <a:latin typeface="Times New Roman" panose="02020603050405020304" pitchFamily="18" charset="0"/>
-                        <a:ea typeface="NSimSun" panose="02010609030101010101" pitchFamily="49" charset="-122"/>
-                        <a:cs typeface="Times New Roman" panose="02020603050405020304" pitchFamily="18" charset="0"/>
-                      </a:endParaRPr>
-                    </a:p>
-                  </a:txBody>
-                  <a:tcPr marL="34925" marR="34925" marT="34925" marB="34925">
-                    <a:lnL>
-                      <a:noFill/>
-                    </a:lnL>
-                    <a:lnR w="12700" cmpd="sng">
-                      <a:noFill/>
-                    </a:lnR>
-                    <a:lnT w="12700" cmpd="sng">
-                      <a:noFill/>
-                    </a:lnT>
-                    <a:lnB w="12700" cmpd="sng">
-                      <a:noFill/>
-                    </a:lnB>
-                    <a:lnTlToBr w="12700" cmpd="sng">
-                      <a:noFill/>
-                      <a:prstDash val="solid"/>
-                    </a:lnTlToBr>
-                    <a:lnBlToTr w="12700" cmpd="sng">
-                      <a:noFill/>
-                      <a:prstDash val="solid"/>
-                    </a:lnBlToTr>
-                  </a:tcPr>
-                </a:tc>
-                <a:extLst>
-                  <a:ext uri="{0D108BD9-81ED-4DB2-BD59-A6C34878D82A}">
-                    <a16:rowId xmlns:a16="http://schemas.microsoft.com/office/drawing/2014/main" val="3668786056"/>
-                  </a:ext>
-                </a:extLst>
-              </a:tr>
-              <a:tr h="508476">
-                <a:tc>
-                  <a:txBody>
-                    <a:bodyPr/>
-                    <a:lstStyle/>
-                    <a:p>
-                      <a:pPr algn="ctr">
-                        <a:buNone/>
-                      </a:pPr>
-                      <a:r>
-                        <a:rPr lang="ru-RU" sz="2400" b="0" kern="100" dirty="0">
-                          <a:effectLst/>
-                          <a:latin typeface="Times New Roman" panose="02020603050405020304" pitchFamily="18" charset="0"/>
-                          <a:cs typeface="Times New Roman" panose="02020603050405020304" pitchFamily="18" charset="0"/>
-                        </a:rPr>
-                        <a:t>Чистая конечная стоимость</a:t>
-                      </a:r>
-                      <a:endParaRPr lang="ru-RU" sz="2000" b="0" kern="100" dirty="0">
-                        <a:effectLst/>
-                        <a:latin typeface="Times New Roman" panose="02020603050405020304" pitchFamily="18" charset="0"/>
-                        <a:ea typeface="NSimSun" panose="02010609030101010101" pitchFamily="49" charset="-122"/>
-                        <a:cs typeface="Times New Roman" panose="02020603050405020304" pitchFamily="18" charset="0"/>
-                      </a:endParaRPr>
-                    </a:p>
-                  </a:txBody>
-                  <a:tcPr marL="34925" marR="34925" marT="34925" marB="34925">
-                    <a:lnL w="12700" cmpd="sng">
-                      <a:noFill/>
-                    </a:lnL>
-                    <a:lnR>
-                      <a:noFill/>
-                    </a:lnR>
-                    <a:lnT w="12700" cmpd="sng">
-                      <a:noFill/>
-                    </a:lnT>
-                    <a:lnB w="12700" cmpd="sng">
-                      <a:noFill/>
-                    </a:lnB>
-                    <a:lnTlToBr w="12700" cmpd="sng">
-                      <a:noFill/>
-                      <a:prstDash val="solid"/>
-                    </a:lnTlToBr>
-                    <a:lnBlToTr w="12700" cmpd="sng">
-                      <a:noFill/>
-                      <a:prstDash val="solid"/>
-                    </a:lnBlToTr>
-                  </a:tcPr>
-                </a:tc>
-                <a:tc>
-                  <a:txBody>
-                    <a:bodyPr/>
-                    <a:lstStyle/>
-                    <a:p>
-                      <a:pPr algn="ctr">
-                        <a:buNone/>
-                      </a:pPr>
-                      <a:r>
-                        <a:rPr lang="ru-RU" sz="2400" kern="100" dirty="0">
-                          <a:solidFill>
-                            <a:srgbClr val="000000"/>
-                          </a:solidFill>
-                          <a:effectLst/>
-                          <a:latin typeface="Times New Roman" panose="02020603050405020304" pitchFamily="18" charset="0"/>
-                          <a:cs typeface="Times New Roman" panose="02020603050405020304" pitchFamily="18" charset="0"/>
-                        </a:rPr>
-                        <a:t>NTV</a:t>
-                      </a:r>
-                      <a:endParaRPr lang="ru-RU" sz="2000" kern="100" dirty="0">
-                        <a:effectLst/>
-                        <a:latin typeface="Times New Roman" panose="02020603050405020304" pitchFamily="18" charset="0"/>
-                        <a:ea typeface="NSimSun" panose="02010609030101010101" pitchFamily="49" charset="-122"/>
-                        <a:cs typeface="Times New Roman" panose="02020603050405020304" pitchFamily="18" charset="0"/>
-                      </a:endParaRPr>
-                    </a:p>
-                  </a:txBody>
-                  <a:tcPr marL="34925" marR="34925" marT="34925" marB="34925">
-                    <a:lnL>
-                      <a:noFill/>
-                    </a:lnL>
-                    <a:lnR>
-                      <a:noFill/>
-                    </a:lnR>
-                    <a:lnT w="12700" cmpd="sng">
-                      <a:noFill/>
-                    </a:lnT>
-                    <a:lnB w="12700" cmpd="sng">
-                      <a:noFill/>
-                    </a:lnB>
-                    <a:lnTlToBr w="12700" cmpd="sng">
-                      <a:noFill/>
-                      <a:prstDash val="solid"/>
-                    </a:lnTlToBr>
-                    <a:lnBlToTr w="12700" cmpd="sng">
-                      <a:noFill/>
-                      <a:prstDash val="solid"/>
-                    </a:lnBlToTr>
-                  </a:tcPr>
-                </a:tc>
-                <a:tc>
-                  <a:txBody>
-                    <a:bodyPr/>
-                    <a:lstStyle/>
-                    <a:p>
-                      <a:pPr algn="ctr">
-                        <a:buNone/>
-                      </a:pPr>
-                      <a:r>
-                        <a:rPr lang="ru-RU" sz="2400" kern="100">
-                          <a:solidFill>
-                            <a:srgbClr val="000000"/>
-                          </a:solidFill>
-                          <a:effectLst/>
-                          <a:latin typeface="Times New Roman" panose="02020603050405020304" pitchFamily="18" charset="0"/>
-                          <a:cs typeface="Times New Roman" panose="02020603050405020304" pitchFamily="18" charset="0"/>
-                        </a:rPr>
-                        <a:t>руб.</a:t>
-                      </a:r>
-                      <a:endParaRPr lang="ru-RU" sz="2000" kern="100">
-                        <a:effectLst/>
-                        <a:latin typeface="Times New Roman" panose="02020603050405020304" pitchFamily="18" charset="0"/>
-                        <a:ea typeface="NSimSun" panose="02010609030101010101" pitchFamily="49" charset="-122"/>
-                        <a:cs typeface="Times New Roman" panose="02020603050405020304" pitchFamily="18" charset="0"/>
-                      </a:endParaRPr>
-                    </a:p>
-                  </a:txBody>
-                  <a:tcPr marL="34925" marR="34925" marT="34925" marB="34925">
-                    <a:lnL>
-                      <a:noFill/>
-                    </a:lnL>
-                    <a:lnR>
-                      <a:noFill/>
-                    </a:lnR>
-                    <a:lnT w="12700" cmpd="sng">
-                      <a:noFill/>
-                    </a:lnT>
-                    <a:lnB w="12700" cmpd="sng">
-                      <a:noFill/>
-                    </a:lnB>
-                    <a:lnTlToBr w="12700" cmpd="sng">
-                      <a:noFill/>
-                      <a:prstDash val="solid"/>
-                    </a:lnTlToBr>
-                    <a:lnBlToTr w="12700" cmpd="sng">
-                      <a:noFill/>
-                      <a:prstDash val="solid"/>
-                    </a:lnBlToTr>
-                  </a:tcPr>
-                </a:tc>
-                <a:tc>
-                  <a:txBody>
-                    <a:bodyPr/>
-                    <a:lstStyle/>
-                    <a:p>
-                      <a:pPr algn="ctr">
-                        <a:buNone/>
-                      </a:pPr>
-                      <a:r>
-                        <a:rPr lang="ru-RU" sz="2400" kern="100" dirty="0">
-                          <a:solidFill>
-                            <a:srgbClr val="000000"/>
-                          </a:solidFill>
-                          <a:effectLst/>
-                          <a:latin typeface="Times New Roman" panose="02020603050405020304" pitchFamily="18" charset="0"/>
-                          <a:cs typeface="Times New Roman" panose="02020603050405020304" pitchFamily="18" charset="0"/>
                         </a:rPr>
                         <a:t>3 015 910</a:t>
                       </a:r>
@@ -12601,26 +11487,11 @@
                     </a:p>
                   </a:txBody>
                   <a:tcPr marL="34925" marR="34925" marT="34925" marB="34925">
-                    <a:lnL>
-                      <a:noFill/>
-                    </a:lnL>
-                    <a:lnR w="12700" cmpd="sng">
-                      <a:noFill/>
-                    </a:lnR>
-                    <a:lnT w="12700" cmpd="sng">
-                      <a:noFill/>
-                    </a:lnT>
-                    <a:lnB w="12700" cmpd="sng">
-                      <a:noFill/>
-                    </a:lnB>
-                    <a:lnTlToBr w="12700" cmpd="sng">
-                      <a:noFill/>
-                      <a:prstDash val="solid"/>
-                    </a:lnTlToBr>
-                    <a:lnBlToTr w="12700" cmpd="sng">
-                      <a:noFill/>
-                      <a:prstDash val="solid"/>
-                    </a:lnBlToTr>
+                    <a:solidFill>
+                      <a:schemeClr val="bg1">
+                        <a:lumMod val="95000"/>
+                      </a:schemeClr>
+                    </a:solidFill>
                   </a:tcPr>
                 </a:tc>
                 <a:extLst>
@@ -12745,7 +11616,7 @@
                   <a:ea typeface="Inter Variable Text" panose="02000503000000020004" pitchFamily="2" charset="0"/>
                   <a:cs typeface="Inter Variable Text" panose="02000503000000020004" pitchFamily="2" charset="0"/>
                 </a:rPr>
-                <a:t>13</a:t>
+                <a:t>11</a:t>
               </a:r>
               <a:endParaRPr lang="en-US" sz="1400" dirty="0">
                 <a:solidFill>
@@ -12763,2306 +11634,6 @@
     <p:extLst>
       <p:ext uri="{BB962C8B-B14F-4D97-AF65-F5344CB8AC3E}">
         <p14:creationId xmlns:p14="http://schemas.microsoft.com/office/powerpoint/2010/main" val="3874486899"/>
-      </p:ext>
-    </p:extLst>
-  </p:cSld>
-  <p:clrMapOvr>
-    <a:masterClrMapping/>
-  </p:clrMapOvr>
-</p:sld>
-</file>
-
-<file path=ppt/slides/slide14.xml><?xml version="1.0" encoding="utf-8"?>
-<p:sld xmlns:a="http://schemas.openxmlformats.org/drawingml/2006/main" xmlns:r="http://schemas.openxmlformats.org/officeDocument/2006/relationships" xmlns:p="http://schemas.openxmlformats.org/presentationml/2006/main">
-  <p:cSld>
-    <p:spTree>
-      <p:nvGrpSpPr>
-        <p:cNvPr id="1" name="">
-          <a:extLst>
-            <a:ext uri="{FF2B5EF4-FFF2-40B4-BE49-F238E27FC236}">
-              <a16:creationId xmlns:a16="http://schemas.microsoft.com/office/drawing/2014/main" id="{9075AC08-44C7-CFC3-9957-E7D7446447DE}"/>
-            </a:ext>
-          </a:extLst>
-        </p:cNvPr>
-        <p:cNvGrpSpPr/>
-        <p:nvPr/>
-      </p:nvGrpSpPr>
-      <p:grpSpPr>
-        <a:xfrm>
-          <a:off x="0" y="0"/>
-          <a:ext cx="0" cy="0"/>
-          <a:chOff x="0" y="0"/>
-          <a:chExt cx="0" cy="0"/>
-        </a:xfrm>
-      </p:grpSpPr>
-      <p:sp>
-        <p:nvSpPr>
-          <p:cNvPr id="6" name="TextBox 5">
-            <a:extLst>
-              <a:ext uri="{FF2B5EF4-FFF2-40B4-BE49-F238E27FC236}">
-                <a16:creationId xmlns:a16="http://schemas.microsoft.com/office/drawing/2014/main" id="{C81A744E-7E3D-E4DD-6C4B-417A56DD8BF6}"/>
-              </a:ext>
-            </a:extLst>
-          </p:cNvPr>
-          <p:cNvSpPr txBox="1"/>
-          <p:nvPr/>
-        </p:nvSpPr>
-        <p:spPr>
-          <a:xfrm>
-            <a:off x="3784600" y="273858"/>
-            <a:ext cx="8107363" cy="646331"/>
-          </a:xfrm>
-          <a:prstGeom prst="rect">
-            <a:avLst/>
-          </a:prstGeom>
-          <a:noFill/>
-        </p:spPr>
-        <p:txBody>
-          <a:bodyPr wrap="square" rtlCol="0">
-            <a:spAutoFit/>
-          </a:bodyPr>
-          <a:lstStyle/>
-          <a:p>
-            <a:r>
-              <a:rPr lang="ru-RU" sz="3600" dirty="0">
-                <a:solidFill>
-                  <a:srgbClr val="274E9C"/>
-                </a:solidFill>
-                <a:latin typeface="Inter Variable Text Medium" panose="02000503000000020004" pitchFamily="2" charset="0"/>
-                <a:ea typeface="Inter Variable Text Medium" panose="02000503000000020004" pitchFamily="2" charset="0"/>
-                <a:cs typeface="Inter Variable Text Medium" panose="02000503000000020004" pitchFamily="2" charset="0"/>
-              </a:rPr>
-              <a:t>Шаблон слайда</a:t>
-            </a:r>
-          </a:p>
-        </p:txBody>
-      </p:sp>
-      <p:pic>
-        <p:nvPicPr>
-          <p:cNvPr id="2" name="Рисунок 1">
-            <a:extLst>
-              <a:ext uri="{FF2B5EF4-FFF2-40B4-BE49-F238E27FC236}">
-                <a16:creationId xmlns:a16="http://schemas.microsoft.com/office/drawing/2014/main" id="{1606C72B-0799-E765-672C-4E1F0496D305}"/>
-              </a:ext>
-            </a:extLst>
-          </p:cNvPr>
-          <p:cNvPicPr>
-            <a:picLocks noChangeAspect="1"/>
-          </p:cNvPicPr>
-          <p:nvPr/>
-        </p:nvPicPr>
-        <p:blipFill>
-          <a:blip r:embed="rId3"/>
-          <a:stretch>
-            <a:fillRect/>
-          </a:stretch>
-        </p:blipFill>
-        <p:spPr>
-          <a:xfrm>
-            <a:off x="300037" y="273858"/>
-            <a:ext cx="2990861" cy="640543"/>
-          </a:xfrm>
-          <a:prstGeom prst="rect">
-            <a:avLst/>
-          </a:prstGeom>
-        </p:spPr>
-      </p:pic>
-      <p:grpSp>
-        <p:nvGrpSpPr>
-          <p:cNvPr id="3" name="Группа 2">
-            <a:extLst>
-              <a:ext uri="{FF2B5EF4-FFF2-40B4-BE49-F238E27FC236}">
-                <a16:creationId xmlns:a16="http://schemas.microsoft.com/office/drawing/2014/main" id="{A8976D90-3193-8B5E-8D13-4516BE507D0E}"/>
-              </a:ext>
-            </a:extLst>
-          </p:cNvPr>
-          <p:cNvGrpSpPr/>
-          <p:nvPr/>
-        </p:nvGrpSpPr>
-        <p:grpSpPr>
-          <a:xfrm>
-            <a:off x="11641128" y="6312477"/>
-            <a:ext cx="490760" cy="490760"/>
-            <a:chOff x="11383518" y="6084717"/>
-            <a:chExt cx="618259" cy="618259"/>
-          </a:xfrm>
-        </p:grpSpPr>
-        <p:sp>
-          <p:nvSpPr>
-            <p:cNvPr id="4" name="Прямоугольник: скругленные углы 3">
-              <a:extLst>
-                <a:ext uri="{FF2B5EF4-FFF2-40B4-BE49-F238E27FC236}">
-                  <a16:creationId xmlns:a16="http://schemas.microsoft.com/office/drawing/2014/main" id="{74AC0062-55DC-5825-E6CD-3E299566513D}"/>
-                </a:ext>
-              </a:extLst>
-            </p:cNvPr>
-            <p:cNvSpPr/>
-            <p:nvPr/>
-          </p:nvSpPr>
-          <p:spPr>
-            <a:xfrm>
-              <a:off x="11383518" y="6084717"/>
-              <a:ext cx="618259" cy="618259"/>
-            </a:xfrm>
-            <a:prstGeom prst="roundRect">
-              <a:avLst/>
-            </a:prstGeom>
-            <a:solidFill>
-              <a:srgbClr val="1A3773"/>
-            </a:solidFill>
-            <a:ln>
-              <a:solidFill>
-                <a:srgbClr val="1A3773"/>
-              </a:solidFill>
-            </a:ln>
-          </p:spPr>
-          <p:style>
-            <a:lnRef idx="2">
-              <a:schemeClr val="accent1">
-                <a:shade val="15000"/>
-              </a:schemeClr>
-            </a:lnRef>
-            <a:fillRef idx="1">
-              <a:schemeClr val="accent1"/>
-            </a:fillRef>
-            <a:effectRef idx="0">
-              <a:schemeClr val="accent1"/>
-            </a:effectRef>
-            <a:fontRef idx="minor">
-              <a:schemeClr val="lt1"/>
-            </a:fontRef>
-          </p:style>
-          <p:txBody>
-            <a:bodyPr rtlCol="0" anchor="ctr"/>
-            <a:lstStyle/>
-            <a:p>
-              <a:pPr algn="ctr"/>
-              <a:endParaRPr lang="en-US"/>
-            </a:p>
-          </p:txBody>
-        </p:sp>
-        <p:sp>
-          <p:nvSpPr>
-            <p:cNvPr id="5" name="TextBox 4">
-              <a:extLst>
-                <a:ext uri="{FF2B5EF4-FFF2-40B4-BE49-F238E27FC236}">
-                  <a16:creationId xmlns:a16="http://schemas.microsoft.com/office/drawing/2014/main" id="{551545AF-B37A-2915-A352-64F84DC6BB30}"/>
-                </a:ext>
-              </a:extLst>
-            </p:cNvPr>
-            <p:cNvSpPr txBox="1"/>
-            <p:nvPr/>
-          </p:nvSpPr>
-          <p:spPr>
-            <a:xfrm>
-              <a:off x="11445932" y="6199977"/>
-              <a:ext cx="493429" cy="387737"/>
-            </a:xfrm>
-            <a:prstGeom prst="rect">
-              <a:avLst/>
-            </a:prstGeom>
-            <a:noFill/>
-          </p:spPr>
-          <p:txBody>
-            <a:bodyPr wrap="square" rtlCol="0">
-              <a:spAutoFit/>
-            </a:bodyPr>
-            <a:lstStyle/>
-            <a:p>
-              <a:pPr algn="ctr"/>
-              <a:r>
-                <a:rPr lang="ru-RU" sz="1400" dirty="0">
-                  <a:solidFill>
-                    <a:schemeClr val="bg1"/>
-                  </a:solidFill>
-                  <a:latin typeface="Inter Variable Text" panose="02000503000000020004" pitchFamily="2" charset="0"/>
-                  <a:ea typeface="Inter Variable Text" panose="02000503000000020004" pitchFamily="2" charset="0"/>
-                  <a:cs typeface="Inter Variable Text" panose="02000503000000020004" pitchFamily="2" charset="0"/>
-                </a:rPr>
-                <a:t>14</a:t>
-              </a:r>
-              <a:endParaRPr lang="en-US" sz="1400" dirty="0">
-                <a:solidFill>
-                  <a:schemeClr val="bg1"/>
-                </a:solidFill>
-                <a:latin typeface="Inter Variable Text" panose="02000503000000020004" pitchFamily="2" charset="0"/>
-                <a:ea typeface="Inter Variable Text" panose="02000503000000020004" pitchFamily="2" charset="0"/>
-                <a:cs typeface="Inter Variable Text" panose="02000503000000020004" pitchFamily="2" charset="0"/>
-              </a:endParaRPr>
-            </a:p>
-          </p:txBody>
-        </p:sp>
-      </p:grpSp>
-    </p:spTree>
-    <p:extLst>
-      <p:ext uri="{BB962C8B-B14F-4D97-AF65-F5344CB8AC3E}">
-        <p14:creationId xmlns:p14="http://schemas.microsoft.com/office/powerpoint/2010/main" val="176024689"/>
-      </p:ext>
-    </p:extLst>
-  </p:cSld>
-  <p:clrMapOvr>
-    <a:masterClrMapping/>
-  </p:clrMapOvr>
-</p:sld>
-</file>
-
-<file path=ppt/slides/slide15.xml><?xml version="1.0" encoding="utf-8"?>
-<p:sld xmlns:a="http://schemas.openxmlformats.org/drawingml/2006/main" xmlns:r="http://schemas.openxmlformats.org/officeDocument/2006/relationships" xmlns:p="http://schemas.openxmlformats.org/presentationml/2006/main">
-  <p:cSld>
-    <p:spTree>
-      <p:nvGrpSpPr>
-        <p:cNvPr id="1" name="">
-          <a:extLst>
-            <a:ext uri="{FF2B5EF4-FFF2-40B4-BE49-F238E27FC236}">
-              <a16:creationId xmlns:a16="http://schemas.microsoft.com/office/drawing/2014/main" id="{3DFA84BE-5C2C-BF51-2DE4-934B8A0D9D31}"/>
-            </a:ext>
-          </a:extLst>
-        </p:cNvPr>
-        <p:cNvGrpSpPr/>
-        <p:nvPr/>
-      </p:nvGrpSpPr>
-      <p:grpSpPr>
-        <a:xfrm>
-          <a:off x="0" y="0"/>
-          <a:ext cx="0" cy="0"/>
-          <a:chOff x="0" y="0"/>
-          <a:chExt cx="0" cy="0"/>
-        </a:xfrm>
-      </p:grpSpPr>
-      <p:sp>
-        <p:nvSpPr>
-          <p:cNvPr id="6" name="TextBox 5">
-            <a:extLst>
-              <a:ext uri="{FF2B5EF4-FFF2-40B4-BE49-F238E27FC236}">
-                <a16:creationId xmlns:a16="http://schemas.microsoft.com/office/drawing/2014/main" id="{124B5CBD-2C58-E43B-092F-BB4DD602FE0F}"/>
-              </a:ext>
-            </a:extLst>
-          </p:cNvPr>
-          <p:cNvSpPr txBox="1"/>
-          <p:nvPr/>
-        </p:nvSpPr>
-        <p:spPr>
-          <a:xfrm>
-            <a:off x="3784600" y="273858"/>
-            <a:ext cx="8107363" cy="646331"/>
-          </a:xfrm>
-          <a:prstGeom prst="rect">
-            <a:avLst/>
-          </a:prstGeom>
-          <a:noFill/>
-        </p:spPr>
-        <p:txBody>
-          <a:bodyPr wrap="square" rtlCol="0">
-            <a:spAutoFit/>
-          </a:bodyPr>
-          <a:lstStyle/>
-          <a:p>
-            <a:r>
-              <a:rPr lang="ru-RU" sz="3600" dirty="0">
-                <a:solidFill>
-                  <a:srgbClr val="274E9C"/>
-                </a:solidFill>
-                <a:latin typeface="Inter Variable Text Medium" panose="02000503000000020004" pitchFamily="2" charset="0"/>
-                <a:ea typeface="Inter Variable Text Medium" panose="02000503000000020004" pitchFamily="2" charset="0"/>
-                <a:cs typeface="Inter Variable Text Medium" panose="02000503000000020004" pitchFamily="2" charset="0"/>
-              </a:rPr>
-              <a:t>Шаблон слайда</a:t>
-            </a:r>
-          </a:p>
-        </p:txBody>
-      </p:sp>
-      <p:pic>
-        <p:nvPicPr>
-          <p:cNvPr id="2" name="Рисунок 1">
-            <a:extLst>
-              <a:ext uri="{FF2B5EF4-FFF2-40B4-BE49-F238E27FC236}">
-                <a16:creationId xmlns:a16="http://schemas.microsoft.com/office/drawing/2014/main" id="{D73402AD-554B-94EA-0DD3-82148EB2F533}"/>
-              </a:ext>
-            </a:extLst>
-          </p:cNvPr>
-          <p:cNvPicPr>
-            <a:picLocks noChangeAspect="1"/>
-          </p:cNvPicPr>
-          <p:nvPr/>
-        </p:nvPicPr>
-        <p:blipFill>
-          <a:blip r:embed="rId3"/>
-          <a:stretch>
-            <a:fillRect/>
-          </a:stretch>
-        </p:blipFill>
-        <p:spPr>
-          <a:xfrm>
-            <a:off x="300037" y="273858"/>
-            <a:ext cx="2990861" cy="640543"/>
-          </a:xfrm>
-          <a:prstGeom prst="rect">
-            <a:avLst/>
-          </a:prstGeom>
-        </p:spPr>
-      </p:pic>
-      <p:grpSp>
-        <p:nvGrpSpPr>
-          <p:cNvPr id="15" name="Группа 14">
-            <a:extLst>
-              <a:ext uri="{FF2B5EF4-FFF2-40B4-BE49-F238E27FC236}">
-                <a16:creationId xmlns:a16="http://schemas.microsoft.com/office/drawing/2014/main" id="{BDDF1669-7D75-4B65-C706-EB05D20392C8}"/>
-              </a:ext>
-            </a:extLst>
-          </p:cNvPr>
-          <p:cNvGrpSpPr/>
-          <p:nvPr/>
-        </p:nvGrpSpPr>
-        <p:grpSpPr>
-          <a:xfrm>
-            <a:off x="11641128" y="6312477"/>
-            <a:ext cx="490760" cy="490760"/>
-            <a:chOff x="11383518" y="6084717"/>
-            <a:chExt cx="618259" cy="618259"/>
-          </a:xfrm>
-        </p:grpSpPr>
-        <p:sp>
-          <p:nvSpPr>
-            <p:cNvPr id="16" name="Прямоугольник: скругленные углы 15">
-              <a:extLst>
-                <a:ext uri="{FF2B5EF4-FFF2-40B4-BE49-F238E27FC236}">
-                  <a16:creationId xmlns:a16="http://schemas.microsoft.com/office/drawing/2014/main" id="{48B5057B-DC8B-9E47-CAA0-5AE85FBE78DC}"/>
-                </a:ext>
-              </a:extLst>
-            </p:cNvPr>
-            <p:cNvSpPr/>
-            <p:nvPr/>
-          </p:nvSpPr>
-          <p:spPr>
-            <a:xfrm>
-              <a:off x="11383518" y="6084717"/>
-              <a:ext cx="618259" cy="618259"/>
-            </a:xfrm>
-            <a:prstGeom prst="roundRect">
-              <a:avLst/>
-            </a:prstGeom>
-            <a:solidFill>
-              <a:srgbClr val="1A3773"/>
-            </a:solidFill>
-            <a:ln>
-              <a:solidFill>
-                <a:srgbClr val="1A3773"/>
-              </a:solidFill>
-            </a:ln>
-          </p:spPr>
-          <p:style>
-            <a:lnRef idx="2">
-              <a:schemeClr val="accent1">
-                <a:shade val="15000"/>
-              </a:schemeClr>
-            </a:lnRef>
-            <a:fillRef idx="1">
-              <a:schemeClr val="accent1"/>
-            </a:fillRef>
-            <a:effectRef idx="0">
-              <a:schemeClr val="accent1"/>
-            </a:effectRef>
-            <a:fontRef idx="minor">
-              <a:schemeClr val="lt1"/>
-            </a:fontRef>
-          </p:style>
-          <p:txBody>
-            <a:bodyPr rtlCol="0" anchor="ctr"/>
-            <a:lstStyle/>
-            <a:p>
-              <a:pPr algn="ctr"/>
-              <a:endParaRPr lang="en-US"/>
-            </a:p>
-          </p:txBody>
-        </p:sp>
-        <p:sp>
-          <p:nvSpPr>
-            <p:cNvPr id="17" name="TextBox 16">
-              <a:extLst>
-                <a:ext uri="{FF2B5EF4-FFF2-40B4-BE49-F238E27FC236}">
-                  <a16:creationId xmlns:a16="http://schemas.microsoft.com/office/drawing/2014/main" id="{02CCEBAE-01C2-0A53-0BF8-4D298B3D6B31}"/>
-                </a:ext>
-              </a:extLst>
-            </p:cNvPr>
-            <p:cNvSpPr txBox="1"/>
-            <p:nvPr/>
-          </p:nvSpPr>
-          <p:spPr>
-            <a:xfrm>
-              <a:off x="11508348" y="6199977"/>
-              <a:ext cx="368600" cy="387737"/>
-            </a:xfrm>
-            <a:prstGeom prst="rect">
-              <a:avLst/>
-            </a:prstGeom>
-            <a:noFill/>
-          </p:spPr>
-          <p:txBody>
-            <a:bodyPr wrap="square" rtlCol="0">
-              <a:spAutoFit/>
-            </a:bodyPr>
-            <a:lstStyle/>
-            <a:p>
-              <a:pPr algn="ctr"/>
-              <a:r>
-                <a:rPr lang="ru-RU" sz="1400" dirty="0">
-                  <a:solidFill>
-                    <a:schemeClr val="bg1"/>
-                  </a:solidFill>
-                  <a:latin typeface="Inter Variable Text" panose="02000503000000020004" pitchFamily="2" charset="0"/>
-                  <a:ea typeface="Inter Variable Text" panose="02000503000000020004" pitchFamily="2" charset="0"/>
-                  <a:cs typeface="Inter Variable Text" panose="02000503000000020004" pitchFamily="2" charset="0"/>
-                </a:rPr>
-                <a:t>5</a:t>
-              </a:r>
-              <a:endParaRPr lang="en-US" sz="1400" dirty="0">
-                <a:solidFill>
-                  <a:schemeClr val="bg1"/>
-                </a:solidFill>
-                <a:latin typeface="Inter Variable Text" panose="02000503000000020004" pitchFamily="2" charset="0"/>
-                <a:ea typeface="Inter Variable Text" panose="02000503000000020004" pitchFamily="2" charset="0"/>
-                <a:cs typeface="Inter Variable Text" panose="02000503000000020004" pitchFamily="2" charset="0"/>
-              </a:endParaRPr>
-            </a:p>
-          </p:txBody>
-        </p:sp>
-      </p:grpSp>
-    </p:spTree>
-    <p:extLst>
-      <p:ext uri="{BB962C8B-B14F-4D97-AF65-F5344CB8AC3E}">
-        <p14:creationId xmlns:p14="http://schemas.microsoft.com/office/powerpoint/2010/main" val="1120641441"/>
-      </p:ext>
-    </p:extLst>
-  </p:cSld>
-  <p:clrMapOvr>
-    <a:masterClrMapping/>
-  </p:clrMapOvr>
-</p:sld>
-</file>
-
-<file path=ppt/slides/slide16.xml><?xml version="1.0" encoding="utf-8"?>
-<p:sld xmlns:a="http://schemas.openxmlformats.org/drawingml/2006/main" xmlns:r="http://schemas.openxmlformats.org/officeDocument/2006/relationships" xmlns:p="http://schemas.openxmlformats.org/presentationml/2006/main">
-  <p:cSld>
-    <p:spTree>
-      <p:nvGrpSpPr>
-        <p:cNvPr id="1" name="">
-          <a:extLst>
-            <a:ext uri="{FF2B5EF4-FFF2-40B4-BE49-F238E27FC236}">
-              <a16:creationId xmlns:a16="http://schemas.microsoft.com/office/drawing/2014/main" id="{564EC864-314F-A759-CE9C-E7CD892506B7}"/>
-            </a:ext>
-          </a:extLst>
-        </p:cNvPr>
-        <p:cNvGrpSpPr/>
-        <p:nvPr/>
-      </p:nvGrpSpPr>
-      <p:grpSpPr>
-        <a:xfrm>
-          <a:off x="0" y="0"/>
-          <a:ext cx="0" cy="0"/>
-          <a:chOff x="0" y="0"/>
-          <a:chExt cx="0" cy="0"/>
-        </a:xfrm>
-      </p:grpSpPr>
-      <p:sp>
-        <p:nvSpPr>
-          <p:cNvPr id="6" name="TextBox 5">
-            <a:extLst>
-              <a:ext uri="{FF2B5EF4-FFF2-40B4-BE49-F238E27FC236}">
-                <a16:creationId xmlns:a16="http://schemas.microsoft.com/office/drawing/2014/main" id="{F68C0765-86C2-13A6-BC75-789B244C141B}"/>
-              </a:ext>
-            </a:extLst>
-          </p:cNvPr>
-          <p:cNvSpPr txBox="1"/>
-          <p:nvPr/>
-        </p:nvSpPr>
-        <p:spPr>
-          <a:xfrm>
-            <a:off x="3784600" y="273858"/>
-            <a:ext cx="8107363" cy="646331"/>
-          </a:xfrm>
-          <a:prstGeom prst="rect">
-            <a:avLst/>
-          </a:prstGeom>
-          <a:noFill/>
-        </p:spPr>
-        <p:txBody>
-          <a:bodyPr wrap="square" rtlCol="0">
-            <a:spAutoFit/>
-          </a:bodyPr>
-          <a:lstStyle/>
-          <a:p>
-            <a:r>
-              <a:rPr lang="ru-RU" sz="3600" dirty="0">
-                <a:solidFill>
-                  <a:srgbClr val="274E9C"/>
-                </a:solidFill>
-                <a:latin typeface="Inter Variable Text Medium" panose="02000503000000020004" pitchFamily="2" charset="0"/>
-                <a:ea typeface="Inter Variable Text Medium" panose="02000503000000020004" pitchFamily="2" charset="0"/>
-                <a:cs typeface="Inter Variable Text Medium" panose="02000503000000020004" pitchFamily="2" charset="0"/>
-              </a:rPr>
-              <a:t>Шаблон слайда</a:t>
-            </a:r>
-          </a:p>
-        </p:txBody>
-      </p:sp>
-      <p:pic>
-        <p:nvPicPr>
-          <p:cNvPr id="2" name="Рисунок 1">
-            <a:extLst>
-              <a:ext uri="{FF2B5EF4-FFF2-40B4-BE49-F238E27FC236}">
-                <a16:creationId xmlns:a16="http://schemas.microsoft.com/office/drawing/2014/main" id="{9B9124FA-91BD-1AFE-C760-4548E2AB4407}"/>
-              </a:ext>
-            </a:extLst>
-          </p:cNvPr>
-          <p:cNvPicPr>
-            <a:picLocks noChangeAspect="1"/>
-          </p:cNvPicPr>
-          <p:nvPr/>
-        </p:nvPicPr>
-        <p:blipFill>
-          <a:blip r:embed="rId3"/>
-          <a:stretch>
-            <a:fillRect/>
-          </a:stretch>
-        </p:blipFill>
-        <p:spPr>
-          <a:xfrm>
-            <a:off x="300037" y="273858"/>
-            <a:ext cx="2990861" cy="640543"/>
-          </a:xfrm>
-          <a:prstGeom prst="rect">
-            <a:avLst/>
-          </a:prstGeom>
-        </p:spPr>
-      </p:pic>
-      <p:grpSp>
-        <p:nvGrpSpPr>
-          <p:cNvPr id="15" name="Группа 14">
-            <a:extLst>
-              <a:ext uri="{FF2B5EF4-FFF2-40B4-BE49-F238E27FC236}">
-                <a16:creationId xmlns:a16="http://schemas.microsoft.com/office/drawing/2014/main" id="{D7294BAD-71D2-C1D6-05EC-4E13416DBCF4}"/>
-              </a:ext>
-            </a:extLst>
-          </p:cNvPr>
-          <p:cNvGrpSpPr/>
-          <p:nvPr/>
-        </p:nvGrpSpPr>
-        <p:grpSpPr>
-          <a:xfrm>
-            <a:off x="11641128" y="6312477"/>
-            <a:ext cx="490760" cy="490760"/>
-            <a:chOff x="11383518" y="6084717"/>
-            <a:chExt cx="618259" cy="618259"/>
-          </a:xfrm>
-        </p:grpSpPr>
-        <p:sp>
-          <p:nvSpPr>
-            <p:cNvPr id="16" name="Прямоугольник: скругленные углы 15">
-              <a:extLst>
-                <a:ext uri="{FF2B5EF4-FFF2-40B4-BE49-F238E27FC236}">
-                  <a16:creationId xmlns:a16="http://schemas.microsoft.com/office/drawing/2014/main" id="{50620855-73C0-4DAC-1CE7-A20C0D64198D}"/>
-                </a:ext>
-              </a:extLst>
-            </p:cNvPr>
-            <p:cNvSpPr/>
-            <p:nvPr/>
-          </p:nvSpPr>
-          <p:spPr>
-            <a:xfrm>
-              <a:off x="11383518" y="6084717"/>
-              <a:ext cx="618259" cy="618259"/>
-            </a:xfrm>
-            <a:prstGeom prst="roundRect">
-              <a:avLst/>
-            </a:prstGeom>
-            <a:solidFill>
-              <a:srgbClr val="1A3773"/>
-            </a:solidFill>
-            <a:ln>
-              <a:solidFill>
-                <a:srgbClr val="1A3773"/>
-              </a:solidFill>
-            </a:ln>
-          </p:spPr>
-          <p:style>
-            <a:lnRef idx="2">
-              <a:schemeClr val="accent1">
-                <a:shade val="15000"/>
-              </a:schemeClr>
-            </a:lnRef>
-            <a:fillRef idx="1">
-              <a:schemeClr val="accent1"/>
-            </a:fillRef>
-            <a:effectRef idx="0">
-              <a:schemeClr val="accent1"/>
-            </a:effectRef>
-            <a:fontRef idx="minor">
-              <a:schemeClr val="lt1"/>
-            </a:fontRef>
-          </p:style>
-          <p:txBody>
-            <a:bodyPr rtlCol="0" anchor="ctr"/>
-            <a:lstStyle/>
-            <a:p>
-              <a:pPr algn="ctr"/>
-              <a:endParaRPr lang="en-US"/>
-            </a:p>
-          </p:txBody>
-        </p:sp>
-        <p:sp>
-          <p:nvSpPr>
-            <p:cNvPr id="17" name="TextBox 16">
-              <a:extLst>
-                <a:ext uri="{FF2B5EF4-FFF2-40B4-BE49-F238E27FC236}">
-                  <a16:creationId xmlns:a16="http://schemas.microsoft.com/office/drawing/2014/main" id="{AED1640C-24CE-D9ED-C537-6D3EF9129DEB}"/>
-                </a:ext>
-              </a:extLst>
-            </p:cNvPr>
-            <p:cNvSpPr txBox="1"/>
-            <p:nvPr/>
-          </p:nvSpPr>
-          <p:spPr>
-            <a:xfrm>
-              <a:off x="11508348" y="6199977"/>
-              <a:ext cx="368600" cy="387737"/>
-            </a:xfrm>
-            <a:prstGeom prst="rect">
-              <a:avLst/>
-            </a:prstGeom>
-            <a:noFill/>
-          </p:spPr>
-          <p:txBody>
-            <a:bodyPr wrap="square" rtlCol="0">
-              <a:spAutoFit/>
-            </a:bodyPr>
-            <a:lstStyle/>
-            <a:p>
-              <a:pPr algn="ctr"/>
-              <a:r>
-                <a:rPr lang="ru-RU" sz="1400" dirty="0">
-                  <a:solidFill>
-                    <a:schemeClr val="bg1"/>
-                  </a:solidFill>
-                  <a:latin typeface="Inter Variable Text" panose="02000503000000020004" pitchFamily="2" charset="0"/>
-                  <a:ea typeface="Inter Variable Text" panose="02000503000000020004" pitchFamily="2" charset="0"/>
-                  <a:cs typeface="Inter Variable Text" panose="02000503000000020004" pitchFamily="2" charset="0"/>
-                </a:rPr>
-                <a:t>5</a:t>
-              </a:r>
-              <a:endParaRPr lang="en-US" sz="1400" dirty="0">
-                <a:solidFill>
-                  <a:schemeClr val="bg1"/>
-                </a:solidFill>
-                <a:latin typeface="Inter Variable Text" panose="02000503000000020004" pitchFamily="2" charset="0"/>
-                <a:ea typeface="Inter Variable Text" panose="02000503000000020004" pitchFamily="2" charset="0"/>
-                <a:cs typeface="Inter Variable Text" panose="02000503000000020004" pitchFamily="2" charset="0"/>
-              </a:endParaRPr>
-            </a:p>
-          </p:txBody>
-        </p:sp>
-      </p:grpSp>
-    </p:spTree>
-    <p:extLst>
-      <p:ext uri="{BB962C8B-B14F-4D97-AF65-F5344CB8AC3E}">
-        <p14:creationId xmlns:p14="http://schemas.microsoft.com/office/powerpoint/2010/main" val="4270094573"/>
-      </p:ext>
-    </p:extLst>
-  </p:cSld>
-  <p:clrMapOvr>
-    <a:masterClrMapping/>
-  </p:clrMapOvr>
-</p:sld>
-</file>
-
-<file path=ppt/slides/slide17.xml><?xml version="1.0" encoding="utf-8"?>
-<p:sld xmlns:a="http://schemas.openxmlformats.org/drawingml/2006/main" xmlns:r="http://schemas.openxmlformats.org/officeDocument/2006/relationships" xmlns:p="http://schemas.openxmlformats.org/presentationml/2006/main">
-  <p:cSld>
-    <p:spTree>
-      <p:nvGrpSpPr>
-        <p:cNvPr id="1" name="">
-          <a:extLst>
-            <a:ext uri="{FF2B5EF4-FFF2-40B4-BE49-F238E27FC236}">
-              <a16:creationId xmlns:a16="http://schemas.microsoft.com/office/drawing/2014/main" id="{DEE726CE-5435-5A21-58A9-D2AAA4911E65}"/>
-            </a:ext>
-          </a:extLst>
-        </p:cNvPr>
-        <p:cNvGrpSpPr/>
-        <p:nvPr/>
-      </p:nvGrpSpPr>
-      <p:grpSpPr>
-        <a:xfrm>
-          <a:off x="0" y="0"/>
-          <a:ext cx="0" cy="0"/>
-          <a:chOff x="0" y="0"/>
-          <a:chExt cx="0" cy="0"/>
-        </a:xfrm>
-      </p:grpSpPr>
-      <p:sp>
-        <p:nvSpPr>
-          <p:cNvPr id="6" name="TextBox 5">
-            <a:extLst>
-              <a:ext uri="{FF2B5EF4-FFF2-40B4-BE49-F238E27FC236}">
-                <a16:creationId xmlns:a16="http://schemas.microsoft.com/office/drawing/2014/main" id="{8562EB5D-F46C-E526-4460-5B7562D4BD08}"/>
-              </a:ext>
-            </a:extLst>
-          </p:cNvPr>
-          <p:cNvSpPr txBox="1"/>
-          <p:nvPr/>
-        </p:nvSpPr>
-        <p:spPr>
-          <a:xfrm>
-            <a:off x="3841466" y="76046"/>
-            <a:ext cx="6793005" cy="1200329"/>
-          </a:xfrm>
-          <a:prstGeom prst="rect">
-            <a:avLst/>
-          </a:prstGeom>
-          <a:noFill/>
-        </p:spPr>
-        <p:txBody>
-          <a:bodyPr wrap="square" rtlCol="0">
-            <a:spAutoFit/>
-          </a:bodyPr>
-          <a:lstStyle/>
-          <a:p>
-            <a:r>
-              <a:rPr lang="ru-RU" sz="3600" dirty="0">
-                <a:solidFill>
-                  <a:srgbClr val="274E9C"/>
-                </a:solidFill>
-                <a:latin typeface="Inter Variable Text Medium" panose="02000503000000020004" pitchFamily="2" charset="0"/>
-                <a:ea typeface="Inter Variable Text Medium" panose="02000503000000020004" pitchFamily="2" charset="0"/>
-                <a:cs typeface="Inter Variable Text Medium" panose="02000503000000020004" pitchFamily="2" charset="0"/>
-              </a:rPr>
-              <a:t>Оценка экономической эффективности</a:t>
-            </a:r>
-          </a:p>
-        </p:txBody>
-      </p:sp>
-      <p:pic>
-        <p:nvPicPr>
-          <p:cNvPr id="2" name="Рисунок 1">
-            <a:extLst>
-              <a:ext uri="{FF2B5EF4-FFF2-40B4-BE49-F238E27FC236}">
-                <a16:creationId xmlns:a16="http://schemas.microsoft.com/office/drawing/2014/main" id="{C6AA96AB-E05F-1C53-92DC-87697C618E7A}"/>
-              </a:ext>
-            </a:extLst>
-          </p:cNvPr>
-          <p:cNvPicPr>
-            <a:picLocks noChangeAspect="1"/>
-          </p:cNvPicPr>
-          <p:nvPr/>
-        </p:nvPicPr>
-        <p:blipFill>
-          <a:blip r:embed="rId3"/>
-          <a:stretch>
-            <a:fillRect/>
-          </a:stretch>
-        </p:blipFill>
-        <p:spPr>
-          <a:xfrm>
-            <a:off x="300037" y="273858"/>
-            <a:ext cx="2990861" cy="640543"/>
-          </a:xfrm>
-          <a:prstGeom prst="rect">
-            <a:avLst/>
-          </a:prstGeom>
-        </p:spPr>
-      </p:pic>
-      <p:grpSp>
-        <p:nvGrpSpPr>
-          <p:cNvPr id="15" name="Группа 14">
-            <a:extLst>
-              <a:ext uri="{FF2B5EF4-FFF2-40B4-BE49-F238E27FC236}">
-                <a16:creationId xmlns:a16="http://schemas.microsoft.com/office/drawing/2014/main" id="{AB22CAB9-BABD-EA76-0AB5-0EF9EDCA7336}"/>
-              </a:ext>
-            </a:extLst>
-          </p:cNvPr>
-          <p:cNvGrpSpPr/>
-          <p:nvPr/>
-        </p:nvGrpSpPr>
-        <p:grpSpPr>
-          <a:xfrm>
-            <a:off x="11641128" y="6312477"/>
-            <a:ext cx="490760" cy="490760"/>
-            <a:chOff x="11383518" y="6084717"/>
-            <a:chExt cx="618259" cy="618259"/>
-          </a:xfrm>
-        </p:grpSpPr>
-        <p:sp>
-          <p:nvSpPr>
-            <p:cNvPr id="16" name="Прямоугольник: скругленные углы 15">
-              <a:extLst>
-                <a:ext uri="{FF2B5EF4-FFF2-40B4-BE49-F238E27FC236}">
-                  <a16:creationId xmlns:a16="http://schemas.microsoft.com/office/drawing/2014/main" id="{8FFC8F32-A17D-7EE1-B626-193594062BC8}"/>
-                </a:ext>
-              </a:extLst>
-            </p:cNvPr>
-            <p:cNvSpPr/>
-            <p:nvPr/>
-          </p:nvSpPr>
-          <p:spPr>
-            <a:xfrm>
-              <a:off x="11383518" y="6084717"/>
-              <a:ext cx="618259" cy="618259"/>
-            </a:xfrm>
-            <a:prstGeom prst="roundRect">
-              <a:avLst/>
-            </a:prstGeom>
-            <a:solidFill>
-              <a:srgbClr val="1A3773"/>
-            </a:solidFill>
-            <a:ln>
-              <a:solidFill>
-                <a:srgbClr val="1A3773"/>
-              </a:solidFill>
-            </a:ln>
-          </p:spPr>
-          <p:style>
-            <a:lnRef idx="2">
-              <a:schemeClr val="accent1">
-                <a:shade val="15000"/>
-              </a:schemeClr>
-            </a:lnRef>
-            <a:fillRef idx="1">
-              <a:schemeClr val="accent1"/>
-            </a:fillRef>
-            <a:effectRef idx="0">
-              <a:schemeClr val="accent1"/>
-            </a:effectRef>
-            <a:fontRef idx="minor">
-              <a:schemeClr val="lt1"/>
-            </a:fontRef>
-          </p:style>
-          <p:txBody>
-            <a:bodyPr rtlCol="0" anchor="ctr"/>
-            <a:lstStyle/>
-            <a:p>
-              <a:pPr algn="ctr"/>
-              <a:endParaRPr lang="en-US"/>
-            </a:p>
-          </p:txBody>
-        </p:sp>
-        <p:sp>
-          <p:nvSpPr>
-            <p:cNvPr id="17" name="TextBox 16">
-              <a:extLst>
-                <a:ext uri="{FF2B5EF4-FFF2-40B4-BE49-F238E27FC236}">
-                  <a16:creationId xmlns:a16="http://schemas.microsoft.com/office/drawing/2014/main" id="{A09A0FA5-5E41-86B1-817E-A9A8849EA63D}"/>
-                </a:ext>
-              </a:extLst>
-            </p:cNvPr>
-            <p:cNvSpPr txBox="1"/>
-            <p:nvPr/>
-          </p:nvSpPr>
-          <p:spPr>
-            <a:xfrm>
-              <a:off x="11508348" y="6199977"/>
-              <a:ext cx="368600" cy="387737"/>
-            </a:xfrm>
-            <a:prstGeom prst="rect">
-              <a:avLst/>
-            </a:prstGeom>
-            <a:noFill/>
-          </p:spPr>
-          <p:txBody>
-            <a:bodyPr wrap="square" rtlCol="0">
-              <a:spAutoFit/>
-            </a:bodyPr>
-            <a:lstStyle/>
-            <a:p>
-              <a:pPr algn="ctr"/>
-              <a:r>
-                <a:rPr lang="ru-RU" sz="1400" dirty="0">
-                  <a:solidFill>
-                    <a:schemeClr val="bg1"/>
-                  </a:solidFill>
-                  <a:latin typeface="Inter Variable Text" panose="02000503000000020004" pitchFamily="2" charset="0"/>
-                  <a:ea typeface="Inter Variable Text" panose="02000503000000020004" pitchFamily="2" charset="0"/>
-                  <a:cs typeface="Inter Variable Text" panose="02000503000000020004" pitchFamily="2" charset="0"/>
-                </a:rPr>
-                <a:t>5</a:t>
-              </a:r>
-              <a:endParaRPr lang="en-US" sz="1400" dirty="0">
-                <a:solidFill>
-                  <a:schemeClr val="bg1"/>
-                </a:solidFill>
-                <a:latin typeface="Inter Variable Text" panose="02000503000000020004" pitchFamily="2" charset="0"/>
-                <a:ea typeface="Inter Variable Text" panose="02000503000000020004" pitchFamily="2" charset="0"/>
-                <a:cs typeface="Inter Variable Text" panose="02000503000000020004" pitchFamily="2" charset="0"/>
-              </a:endParaRPr>
-            </a:p>
-          </p:txBody>
-        </p:sp>
-      </p:grpSp>
-      <p:graphicFrame>
-        <p:nvGraphicFramePr>
-          <p:cNvPr id="7" name="Таблица 6">
-            <a:extLst>
-              <a:ext uri="{FF2B5EF4-FFF2-40B4-BE49-F238E27FC236}">
-                <a16:creationId xmlns:a16="http://schemas.microsoft.com/office/drawing/2014/main" id="{6CBF7AB0-CF05-0CC0-0742-99E29894C27F}"/>
-              </a:ext>
-            </a:extLst>
-          </p:cNvPr>
-          <p:cNvGraphicFramePr>
-            <a:graphicFrameLocks noGrp="1"/>
-          </p:cNvGraphicFramePr>
-          <p:nvPr>
-            <p:extLst>
-              <p:ext uri="{D42A27DB-BD31-4B8C-83A1-F6EECF244321}">
-                <p14:modId xmlns:p14="http://schemas.microsoft.com/office/powerpoint/2010/main" val="2946591191"/>
-              </p:ext>
-            </p:extLst>
-          </p:nvPr>
-        </p:nvGraphicFramePr>
-        <p:xfrm>
-          <a:off x="636297" y="1344197"/>
-          <a:ext cx="10705794" cy="5287931"/>
-        </p:xfrm>
-        <a:graphic>
-          <a:graphicData uri="http://schemas.openxmlformats.org/drawingml/2006/table">
-            <a:tbl>
-              <a:tblPr firstRow="1" bandRow="1">
-                <a:tableStyleId>{5C22544A-7EE6-4342-B048-85BDC9FD1C3A}</a:tableStyleId>
-              </a:tblPr>
-              <a:tblGrid>
-                <a:gridCol w="4676367">
-                  <a:extLst>
-                    <a:ext uri="{9D8B030D-6E8A-4147-A177-3AD203B41FA5}">
-                      <a16:colId xmlns:a16="http://schemas.microsoft.com/office/drawing/2014/main" val="2506972211"/>
-                    </a:ext>
-                  </a:extLst>
-                </a:gridCol>
-                <a:gridCol w="2377440">
-                  <a:extLst>
-                    <a:ext uri="{9D8B030D-6E8A-4147-A177-3AD203B41FA5}">
-                      <a16:colId xmlns:a16="http://schemas.microsoft.com/office/drawing/2014/main" val="4199941448"/>
-                    </a:ext>
-                  </a:extLst>
-                </a:gridCol>
-                <a:gridCol w="1645920">
-                  <a:extLst>
-                    <a:ext uri="{9D8B030D-6E8A-4147-A177-3AD203B41FA5}">
-                      <a16:colId xmlns:a16="http://schemas.microsoft.com/office/drawing/2014/main" val="3671968417"/>
-                    </a:ext>
-                  </a:extLst>
-                </a:gridCol>
-                <a:gridCol w="2006067">
-                  <a:extLst>
-                    <a:ext uri="{9D8B030D-6E8A-4147-A177-3AD203B41FA5}">
-                      <a16:colId xmlns:a16="http://schemas.microsoft.com/office/drawing/2014/main" val="3814319430"/>
-                    </a:ext>
-                  </a:extLst>
-                </a:gridCol>
-              </a:tblGrid>
-              <a:tr h="837994">
-                <a:tc>
-                  <a:txBody>
-                    <a:bodyPr/>
-                    <a:lstStyle/>
-                    <a:p>
-                      <a:pPr algn="ctr">
-                        <a:lnSpc>
-                          <a:spcPct val="115000"/>
-                        </a:lnSpc>
-                        <a:spcAft>
-                          <a:spcPts val="0"/>
-                        </a:spcAft>
-                      </a:pPr>
-                      <a:r>
-                        <a:rPr lang="ru-RU" sz="1600" b="1" i="0" dirty="0">
-                          <a:effectLst/>
-                          <a:latin typeface="Inter Variable Text" panose="02000503000000020004" pitchFamily="2" charset="0"/>
-                          <a:ea typeface="Inter Variable Text" panose="02000503000000020004" pitchFamily="2" charset="0"/>
-                          <a:cs typeface="Inter Variable Text" panose="02000503000000020004" pitchFamily="2" charset="0"/>
-                        </a:rPr>
-                        <a:t>Наименование показателя</a:t>
-                      </a:r>
-                    </a:p>
-                  </a:txBody>
-                  <a:tcPr marL="68580" marR="68580" marT="0" marB="0" anchor="ctr">
-                    <a:solidFill>
-                      <a:srgbClr val="274E9C"/>
-                    </a:solidFill>
-                  </a:tcPr>
-                </a:tc>
-                <a:tc>
-                  <a:txBody>
-                    <a:bodyPr/>
-                    <a:lstStyle/>
-                    <a:p>
-                      <a:pPr algn="ctr">
-                        <a:lnSpc>
-                          <a:spcPct val="115000"/>
-                        </a:lnSpc>
-                        <a:spcAft>
-                          <a:spcPts val="0"/>
-                        </a:spcAft>
-                      </a:pPr>
-                      <a:r>
-                        <a:rPr lang="ru-RU" sz="1600" b="1" i="0" dirty="0">
-                          <a:effectLst/>
-                          <a:latin typeface="Inter Variable Text" panose="02000503000000020004" pitchFamily="2" charset="0"/>
-                          <a:ea typeface="Inter Variable Text" panose="02000503000000020004" pitchFamily="2" charset="0"/>
-                          <a:cs typeface="Inter Variable Text" panose="02000503000000020004" pitchFamily="2" charset="0"/>
-                        </a:rPr>
-                        <a:t>Обозначение</a:t>
-                      </a:r>
-                    </a:p>
-                  </a:txBody>
-                  <a:tcPr marL="68580" marR="68580" marT="0" marB="0" anchor="ctr">
-                    <a:solidFill>
-                      <a:srgbClr val="274E9C"/>
-                    </a:solidFill>
-                  </a:tcPr>
-                </a:tc>
-                <a:tc>
-                  <a:txBody>
-                    <a:bodyPr/>
-                    <a:lstStyle/>
-                    <a:p>
-                      <a:pPr algn="ctr">
-                        <a:lnSpc>
-                          <a:spcPct val="115000"/>
-                        </a:lnSpc>
-                        <a:spcAft>
-                          <a:spcPts val="0"/>
-                        </a:spcAft>
-                      </a:pPr>
-                      <a:r>
-                        <a:rPr lang="ru-RU" sz="1600" b="1" i="0" dirty="0">
-                          <a:effectLst/>
-                          <a:latin typeface="Inter Variable Text" panose="02000503000000020004" pitchFamily="2" charset="0"/>
-                          <a:ea typeface="Inter Variable Text" panose="02000503000000020004" pitchFamily="2" charset="0"/>
-                          <a:cs typeface="Inter Variable Text" panose="02000503000000020004" pitchFamily="2" charset="0"/>
-                        </a:rPr>
-                        <a:t>Ед. изм.</a:t>
-                      </a:r>
-                    </a:p>
-                  </a:txBody>
-                  <a:tcPr marL="68580" marR="68580" marT="0" marB="0" anchor="ctr">
-                    <a:solidFill>
-                      <a:srgbClr val="274E9C"/>
-                    </a:solidFill>
-                  </a:tcPr>
-                </a:tc>
-                <a:tc>
-                  <a:txBody>
-                    <a:bodyPr/>
-                    <a:lstStyle/>
-                    <a:p>
-                      <a:pPr algn="ctr">
-                        <a:lnSpc>
-                          <a:spcPct val="115000"/>
-                        </a:lnSpc>
-                        <a:spcAft>
-                          <a:spcPts val="0"/>
-                        </a:spcAft>
-                      </a:pPr>
-                      <a:r>
-                        <a:rPr lang="ru-RU" sz="1600" b="1" i="0">
-                          <a:effectLst/>
-                          <a:latin typeface="Inter Variable Text" panose="02000503000000020004" pitchFamily="2" charset="0"/>
-                          <a:ea typeface="Inter Variable Text" panose="02000503000000020004" pitchFamily="2" charset="0"/>
-                          <a:cs typeface="Inter Variable Text" panose="02000503000000020004" pitchFamily="2" charset="0"/>
-                        </a:rPr>
-                        <a:t>Величина показателя</a:t>
-                      </a:r>
-                      <a:endParaRPr lang="ru-RU" sz="1600" b="1" i="0" dirty="0">
-                        <a:effectLst/>
-                        <a:latin typeface="Inter Variable Text" panose="02000503000000020004" pitchFamily="2" charset="0"/>
-                        <a:ea typeface="Inter Variable Text" panose="02000503000000020004" pitchFamily="2" charset="0"/>
-                        <a:cs typeface="Inter Variable Text" panose="02000503000000020004" pitchFamily="2" charset="0"/>
-                      </a:endParaRPr>
-                    </a:p>
-                  </a:txBody>
-                  <a:tcPr marL="68580" marR="68580" marT="0" marB="0" anchor="ctr">
-                    <a:solidFill>
-                      <a:srgbClr val="274E9C"/>
-                    </a:solidFill>
-                  </a:tcPr>
-                </a:tc>
-                <a:extLst>
-                  <a:ext uri="{0D108BD9-81ED-4DB2-BD59-A6C34878D82A}">
-                    <a16:rowId xmlns:a16="http://schemas.microsoft.com/office/drawing/2014/main" val="1117080750"/>
-                  </a:ext>
-                </a:extLst>
-              </a:tr>
-              <a:tr h="536609">
-                <a:tc>
-                  <a:txBody>
-                    <a:bodyPr/>
-                    <a:lstStyle/>
-                    <a:p>
-                      <a:pPr>
-                        <a:lnSpc>
-                          <a:spcPct val="150000"/>
-                        </a:lnSpc>
-                        <a:spcAft>
-                          <a:spcPts val="0"/>
-                        </a:spcAft>
-                      </a:pPr>
-                      <a:r>
-                        <a:rPr lang="ru-RU" sz="1600" kern="1200" dirty="0">
-                          <a:solidFill>
-                            <a:schemeClr val="dk1"/>
-                          </a:solidFill>
-                          <a:effectLst/>
-                          <a:latin typeface="Inter Variable Text" panose="02000503000000020004" pitchFamily="2" charset="0"/>
-                          <a:ea typeface="Inter Variable Text" panose="02000503000000020004" pitchFamily="2" charset="0"/>
-                          <a:cs typeface="Inter Variable Text" panose="02000503000000020004" pitchFamily="2" charset="0"/>
-                        </a:rPr>
-                        <a:t>1. Объем инвестиций</a:t>
-                      </a:r>
-                    </a:p>
-                  </a:txBody>
-                  <a:tcPr marL="68580" marR="68580" marT="0" marB="0" anchor="ctr">
-                    <a:noFill/>
-                  </a:tcPr>
-                </a:tc>
-                <a:tc>
-                  <a:txBody>
-                    <a:bodyPr/>
-                    <a:lstStyle/>
-                    <a:p>
-                      <a:pPr algn="ctr">
-                        <a:lnSpc>
-                          <a:spcPct val="107000"/>
-                        </a:lnSpc>
-                        <a:spcAft>
-                          <a:spcPts val="0"/>
-                        </a:spcAft>
-                      </a:pPr>
-                      <a:r>
-                        <a:rPr lang="ru-RU" sz="1600" kern="1200" dirty="0">
-                          <a:solidFill>
-                            <a:schemeClr val="dk1"/>
-                          </a:solidFill>
-                          <a:effectLst/>
-                          <a:latin typeface="Inter Variable Text" panose="02000503000000020004" pitchFamily="2" charset="0"/>
-                          <a:ea typeface="Inter Variable Text" panose="02000503000000020004" pitchFamily="2" charset="0"/>
-                          <a:cs typeface="Inter Variable Text" panose="02000503000000020004" pitchFamily="2" charset="0"/>
-                        </a:rPr>
-                        <a:t>I проект</a:t>
-                      </a:r>
-                    </a:p>
-                  </a:txBody>
-                  <a:tcPr marL="68580" marR="68580" marT="0" marB="0" anchor="ctr">
-                    <a:noFill/>
-                  </a:tcPr>
-                </a:tc>
-                <a:tc>
-                  <a:txBody>
-                    <a:bodyPr/>
-                    <a:lstStyle/>
-                    <a:p>
-                      <a:pPr algn="ctr">
-                        <a:lnSpc>
-                          <a:spcPct val="107000"/>
-                        </a:lnSpc>
-                        <a:spcAft>
-                          <a:spcPts val="0"/>
-                        </a:spcAft>
-                      </a:pPr>
-                      <a:r>
-                        <a:rPr lang="ru-RU" sz="1600" kern="1200" dirty="0">
-                          <a:solidFill>
-                            <a:schemeClr val="dk1"/>
-                          </a:solidFill>
-                          <a:effectLst/>
-                          <a:latin typeface="Inter Variable Text" panose="02000503000000020004" pitchFamily="2" charset="0"/>
-                          <a:ea typeface="Inter Variable Text" panose="02000503000000020004" pitchFamily="2" charset="0"/>
-                          <a:cs typeface="Inter Variable Text" panose="02000503000000020004" pitchFamily="2" charset="0"/>
-                        </a:rPr>
-                        <a:t>руб.</a:t>
-                      </a:r>
-                    </a:p>
-                  </a:txBody>
-                  <a:tcPr marL="68580" marR="68580" marT="0" marB="0" anchor="ctr">
-                    <a:noFill/>
-                  </a:tcPr>
-                </a:tc>
-                <a:tc>
-                  <a:txBody>
-                    <a:bodyPr/>
-                    <a:lstStyle/>
-                    <a:p>
-                      <a:pPr indent="36000" algn="ctr">
-                        <a:lnSpc>
-                          <a:spcPct val="150000"/>
-                        </a:lnSpc>
-                        <a:spcAft>
-                          <a:spcPts val="0"/>
-                        </a:spcAft>
-                      </a:pPr>
-                      <a:r>
-                        <a:rPr lang="ru-RU" sz="1600" kern="1200" dirty="0">
-                          <a:solidFill>
-                            <a:schemeClr val="dk1"/>
-                          </a:solidFill>
-                          <a:effectLst/>
-                          <a:latin typeface="Inter Variable Text" panose="02000503000000020004" pitchFamily="2" charset="0"/>
-                          <a:ea typeface="Inter Variable Text" panose="02000503000000020004" pitchFamily="2" charset="0"/>
-                          <a:cs typeface="Inter Variable Text" panose="02000503000000020004" pitchFamily="2" charset="0"/>
-                        </a:rPr>
-                        <a:t>1 234 895</a:t>
-                      </a:r>
-                    </a:p>
-                  </a:txBody>
-                  <a:tcPr marL="68580" marR="68580" marT="0" marB="0" anchor="ctr">
-                    <a:noFill/>
-                  </a:tcPr>
-                </a:tc>
-                <a:extLst>
-                  <a:ext uri="{0D108BD9-81ED-4DB2-BD59-A6C34878D82A}">
-                    <a16:rowId xmlns:a16="http://schemas.microsoft.com/office/drawing/2014/main" val="3195695488"/>
-                  </a:ext>
-                </a:extLst>
-              </a:tr>
-              <a:tr h="536609">
-                <a:tc>
-                  <a:txBody>
-                    <a:bodyPr/>
-                    <a:lstStyle/>
-                    <a:p>
-                      <a:pPr>
-                        <a:lnSpc>
-                          <a:spcPct val="150000"/>
-                        </a:lnSpc>
-                        <a:spcAft>
-                          <a:spcPts val="0"/>
-                        </a:spcAft>
-                      </a:pPr>
-                      <a:r>
-                        <a:rPr lang="ru-RU" sz="1600" kern="1200" dirty="0">
-                          <a:solidFill>
-                            <a:schemeClr val="dk1"/>
-                          </a:solidFill>
-                          <a:effectLst/>
-                          <a:latin typeface="Inter Variable Text" panose="02000503000000020004" pitchFamily="2" charset="0"/>
-                          <a:ea typeface="Inter Variable Text" panose="02000503000000020004" pitchFamily="2" charset="0"/>
-                          <a:cs typeface="Inter Variable Text" panose="02000503000000020004" pitchFamily="2" charset="0"/>
-                        </a:rPr>
-                        <a:t>2. Ставка дисконтирования</a:t>
-                      </a:r>
-                    </a:p>
-                  </a:txBody>
-                  <a:tcPr marL="68580" marR="68580" marT="0" marB="0" anchor="ctr">
-                    <a:solidFill>
-                      <a:schemeClr val="bg1">
-                        <a:lumMod val="95000"/>
-                      </a:schemeClr>
-                    </a:solidFill>
-                  </a:tcPr>
-                </a:tc>
-                <a:tc>
-                  <a:txBody>
-                    <a:bodyPr/>
-                    <a:lstStyle/>
-                    <a:p>
-                      <a:pPr algn="ctr">
-                        <a:lnSpc>
-                          <a:spcPct val="107000"/>
-                        </a:lnSpc>
-                        <a:spcAft>
-                          <a:spcPts val="0"/>
-                        </a:spcAft>
-                      </a:pPr>
-                      <a:r>
-                        <a:rPr lang="ru-RU" sz="1600" kern="1200" dirty="0">
-                          <a:solidFill>
-                            <a:schemeClr val="dk1"/>
-                          </a:solidFill>
-                          <a:effectLst/>
-                          <a:latin typeface="Inter Variable Text" panose="02000503000000020004" pitchFamily="2" charset="0"/>
-                          <a:ea typeface="Inter Variable Text" panose="02000503000000020004" pitchFamily="2" charset="0"/>
-                          <a:cs typeface="Inter Variable Text" panose="02000503000000020004" pitchFamily="2" charset="0"/>
-                        </a:rPr>
-                        <a:t>r</a:t>
-                      </a:r>
-                    </a:p>
-                  </a:txBody>
-                  <a:tcPr marL="68580" marR="68580" marT="0" marB="0" anchor="ctr">
-                    <a:solidFill>
-                      <a:schemeClr val="bg1">
-                        <a:lumMod val="95000"/>
-                      </a:schemeClr>
-                    </a:solidFill>
-                  </a:tcPr>
-                </a:tc>
-                <a:tc>
-                  <a:txBody>
-                    <a:bodyPr/>
-                    <a:lstStyle/>
-                    <a:p>
-                      <a:pPr algn="ctr">
-                        <a:lnSpc>
-                          <a:spcPct val="107000"/>
-                        </a:lnSpc>
-                        <a:spcAft>
-                          <a:spcPts val="0"/>
-                        </a:spcAft>
-                      </a:pPr>
-                      <a:r>
-                        <a:rPr lang="ru-RU" sz="1600" kern="1200" dirty="0">
-                          <a:solidFill>
-                            <a:schemeClr val="dk1"/>
-                          </a:solidFill>
-                          <a:effectLst/>
-                          <a:latin typeface="Inter Variable Text" panose="02000503000000020004" pitchFamily="2" charset="0"/>
-                          <a:ea typeface="Inter Variable Text" panose="02000503000000020004" pitchFamily="2" charset="0"/>
-                          <a:cs typeface="Inter Variable Text" panose="02000503000000020004" pitchFamily="2" charset="0"/>
-                        </a:rPr>
-                        <a:t>%</a:t>
-                      </a:r>
-                    </a:p>
-                  </a:txBody>
-                  <a:tcPr marL="68580" marR="68580" marT="0" marB="0" anchor="ctr">
-                    <a:solidFill>
-                      <a:schemeClr val="bg1">
-                        <a:lumMod val="95000"/>
-                      </a:schemeClr>
-                    </a:solidFill>
-                  </a:tcPr>
-                </a:tc>
-                <a:tc>
-                  <a:txBody>
-                    <a:bodyPr/>
-                    <a:lstStyle/>
-                    <a:p>
-                      <a:pPr indent="36000" algn="ctr">
-                        <a:lnSpc>
-                          <a:spcPct val="150000"/>
-                        </a:lnSpc>
-                        <a:spcAft>
-                          <a:spcPts val="0"/>
-                        </a:spcAft>
-                      </a:pPr>
-                      <a:r>
-                        <a:rPr lang="ru-RU" sz="1600" kern="1200" dirty="0">
-                          <a:solidFill>
-                            <a:schemeClr val="dk1"/>
-                          </a:solidFill>
-                          <a:effectLst/>
-                          <a:latin typeface="Inter Variable Text" panose="02000503000000020004" pitchFamily="2" charset="0"/>
-                          <a:ea typeface="Inter Variable Text" panose="02000503000000020004" pitchFamily="2" charset="0"/>
-                          <a:cs typeface="Inter Variable Text" panose="02000503000000020004" pitchFamily="2" charset="0"/>
-                        </a:rPr>
-                        <a:t>12,1%</a:t>
-                      </a:r>
-                    </a:p>
-                  </a:txBody>
-                  <a:tcPr marL="68580" marR="68580" marT="0" marB="0" anchor="ctr">
-                    <a:solidFill>
-                      <a:schemeClr val="bg1">
-                        <a:lumMod val="95000"/>
-                      </a:schemeClr>
-                    </a:solidFill>
-                  </a:tcPr>
-                </a:tc>
-                <a:extLst>
-                  <a:ext uri="{0D108BD9-81ED-4DB2-BD59-A6C34878D82A}">
-                    <a16:rowId xmlns:a16="http://schemas.microsoft.com/office/drawing/2014/main" val="2400234404"/>
-                  </a:ext>
-                </a:extLst>
-              </a:tr>
-              <a:tr h="536609">
-                <a:tc>
-                  <a:txBody>
-                    <a:bodyPr/>
-                    <a:lstStyle/>
-                    <a:p>
-                      <a:pPr>
-                        <a:lnSpc>
-                          <a:spcPct val="150000"/>
-                        </a:lnSpc>
-                        <a:spcAft>
-                          <a:spcPts val="0"/>
-                        </a:spcAft>
-                      </a:pPr>
-                      <a:r>
-                        <a:rPr lang="ru-RU" sz="1600" kern="1200" dirty="0">
-                          <a:solidFill>
-                            <a:schemeClr val="dk1"/>
-                          </a:solidFill>
-                          <a:effectLst/>
-                          <a:latin typeface="Inter Variable Text" panose="02000503000000020004" pitchFamily="2" charset="0"/>
-                          <a:ea typeface="Inter Variable Text" panose="02000503000000020004" pitchFamily="2" charset="0"/>
-                          <a:cs typeface="Inter Variable Text" panose="02000503000000020004" pitchFamily="2" charset="0"/>
-                        </a:rPr>
-                        <a:t>3. Чистая приведенная стоимость проекта</a:t>
-                      </a:r>
-                    </a:p>
-                  </a:txBody>
-                  <a:tcPr marL="68580" marR="68580" marT="0" marB="0" anchor="ctr">
-                    <a:noFill/>
-                  </a:tcPr>
-                </a:tc>
-                <a:tc>
-                  <a:txBody>
-                    <a:bodyPr/>
-                    <a:lstStyle/>
-                    <a:p>
-                      <a:pPr algn="ctr">
-                        <a:lnSpc>
-                          <a:spcPct val="107000"/>
-                        </a:lnSpc>
-                        <a:spcAft>
-                          <a:spcPts val="0"/>
-                        </a:spcAft>
-                      </a:pPr>
-                      <a:r>
-                        <a:rPr lang="ru-RU" sz="1600" kern="1200" dirty="0">
-                          <a:solidFill>
-                            <a:schemeClr val="dk1"/>
-                          </a:solidFill>
-                          <a:effectLst/>
-                          <a:latin typeface="Inter Variable Text" panose="02000503000000020004" pitchFamily="2" charset="0"/>
-                          <a:ea typeface="Inter Variable Text" panose="02000503000000020004" pitchFamily="2" charset="0"/>
-                          <a:cs typeface="Inter Variable Text" panose="02000503000000020004" pitchFamily="2" charset="0"/>
-                        </a:rPr>
-                        <a:t>NPV</a:t>
-                      </a:r>
-                    </a:p>
-                  </a:txBody>
-                  <a:tcPr marL="68580" marR="68580" marT="0" marB="0" anchor="ctr">
-                    <a:noFill/>
-                  </a:tcPr>
-                </a:tc>
-                <a:tc>
-                  <a:txBody>
-                    <a:bodyPr/>
-                    <a:lstStyle/>
-                    <a:p>
-                      <a:pPr algn="ctr">
-                        <a:lnSpc>
-                          <a:spcPct val="107000"/>
-                        </a:lnSpc>
-                        <a:spcAft>
-                          <a:spcPts val="0"/>
-                        </a:spcAft>
-                      </a:pPr>
-                      <a:r>
-                        <a:rPr lang="ru-RU" sz="1600" kern="1200" dirty="0">
-                          <a:solidFill>
-                            <a:schemeClr val="dk1"/>
-                          </a:solidFill>
-                          <a:effectLst/>
-                          <a:latin typeface="Inter Variable Text" panose="02000503000000020004" pitchFamily="2" charset="0"/>
-                          <a:ea typeface="Inter Variable Text" panose="02000503000000020004" pitchFamily="2" charset="0"/>
-                          <a:cs typeface="Inter Variable Text" panose="02000503000000020004" pitchFamily="2" charset="0"/>
-                        </a:rPr>
-                        <a:t>руб.</a:t>
-                      </a:r>
-                    </a:p>
-                  </a:txBody>
-                  <a:tcPr marL="68580" marR="68580" marT="0" marB="0" anchor="ctr">
-                    <a:noFill/>
-                  </a:tcPr>
-                </a:tc>
-                <a:tc>
-                  <a:txBody>
-                    <a:bodyPr/>
-                    <a:lstStyle/>
-                    <a:p>
-                      <a:pPr indent="36000" algn="ctr">
-                        <a:lnSpc>
-                          <a:spcPct val="150000"/>
-                        </a:lnSpc>
-                        <a:spcAft>
-                          <a:spcPts val="0"/>
-                        </a:spcAft>
-                      </a:pPr>
-                      <a:r>
-                        <a:rPr lang="ru-RU" sz="1600" kern="1200" dirty="0">
-                          <a:solidFill>
-                            <a:schemeClr val="dk1"/>
-                          </a:solidFill>
-                          <a:effectLst/>
-                          <a:latin typeface="Inter Variable Text" panose="02000503000000020004" pitchFamily="2" charset="0"/>
-                          <a:ea typeface="Inter Variable Text" panose="02000503000000020004" pitchFamily="2" charset="0"/>
-                          <a:cs typeface="Inter Variable Text" panose="02000503000000020004" pitchFamily="2" charset="0"/>
-                        </a:rPr>
-                        <a:t>19 127 878</a:t>
-                      </a:r>
-                    </a:p>
-                  </a:txBody>
-                  <a:tcPr marL="68580" marR="68580" marT="0" marB="0" anchor="ctr">
-                    <a:noFill/>
-                  </a:tcPr>
-                </a:tc>
-                <a:extLst>
-                  <a:ext uri="{0D108BD9-81ED-4DB2-BD59-A6C34878D82A}">
-                    <a16:rowId xmlns:a16="http://schemas.microsoft.com/office/drawing/2014/main" val="3137476496"/>
-                  </a:ext>
-                </a:extLst>
-              </a:tr>
-              <a:tr h="536609">
-                <a:tc>
-                  <a:txBody>
-                    <a:bodyPr/>
-                    <a:lstStyle/>
-                    <a:p>
-                      <a:pPr>
-                        <a:lnSpc>
-                          <a:spcPct val="150000"/>
-                        </a:lnSpc>
-                        <a:spcAft>
-                          <a:spcPts val="0"/>
-                        </a:spcAft>
-                      </a:pPr>
-                      <a:r>
-                        <a:rPr lang="ru-RU" sz="1600" kern="1200" dirty="0">
-                          <a:solidFill>
-                            <a:schemeClr val="dk1"/>
-                          </a:solidFill>
-                          <a:effectLst/>
-                          <a:latin typeface="Inter Variable Text" panose="02000503000000020004" pitchFamily="2" charset="0"/>
-                          <a:ea typeface="Inter Variable Text" panose="02000503000000020004" pitchFamily="2" charset="0"/>
-                          <a:cs typeface="Inter Variable Text" panose="02000503000000020004" pitchFamily="2" charset="0"/>
-                        </a:rPr>
-                        <a:t>4. Внутренняя ставка доходности</a:t>
-                      </a:r>
-                    </a:p>
-                  </a:txBody>
-                  <a:tcPr marL="68580" marR="68580" marT="0" marB="0" anchor="ctr">
-                    <a:solidFill>
-                      <a:schemeClr val="bg1">
-                        <a:lumMod val="95000"/>
-                      </a:schemeClr>
-                    </a:solidFill>
-                  </a:tcPr>
-                </a:tc>
-                <a:tc>
-                  <a:txBody>
-                    <a:bodyPr/>
-                    <a:lstStyle/>
-                    <a:p>
-                      <a:pPr algn="ctr">
-                        <a:lnSpc>
-                          <a:spcPct val="107000"/>
-                        </a:lnSpc>
-                        <a:spcAft>
-                          <a:spcPts val="0"/>
-                        </a:spcAft>
-                      </a:pPr>
-                      <a:r>
-                        <a:rPr lang="ru-RU" sz="1600" kern="1200" dirty="0">
-                          <a:solidFill>
-                            <a:schemeClr val="dk1"/>
-                          </a:solidFill>
-                          <a:effectLst/>
-                          <a:latin typeface="Inter Variable Text" panose="02000503000000020004" pitchFamily="2" charset="0"/>
-                          <a:ea typeface="Inter Variable Text" panose="02000503000000020004" pitchFamily="2" charset="0"/>
-                          <a:cs typeface="Inter Variable Text" panose="02000503000000020004" pitchFamily="2" charset="0"/>
-                        </a:rPr>
-                        <a:t>IRR</a:t>
-                      </a:r>
-                    </a:p>
-                  </a:txBody>
-                  <a:tcPr marL="68580" marR="68580" marT="0" marB="0" anchor="ctr">
-                    <a:solidFill>
-                      <a:schemeClr val="bg1">
-                        <a:lumMod val="95000"/>
-                      </a:schemeClr>
-                    </a:solidFill>
-                  </a:tcPr>
-                </a:tc>
-                <a:tc>
-                  <a:txBody>
-                    <a:bodyPr/>
-                    <a:lstStyle/>
-                    <a:p>
-                      <a:pPr algn="ctr">
-                        <a:lnSpc>
-                          <a:spcPct val="107000"/>
-                        </a:lnSpc>
-                        <a:spcAft>
-                          <a:spcPts val="0"/>
-                        </a:spcAft>
-                      </a:pPr>
-                      <a:r>
-                        <a:rPr lang="ru-RU" sz="1600" kern="1200" dirty="0">
-                          <a:solidFill>
-                            <a:schemeClr val="dk1"/>
-                          </a:solidFill>
-                          <a:effectLst/>
-                          <a:latin typeface="Inter Variable Text" panose="02000503000000020004" pitchFamily="2" charset="0"/>
-                          <a:ea typeface="Inter Variable Text" panose="02000503000000020004" pitchFamily="2" charset="0"/>
-                          <a:cs typeface="Inter Variable Text" panose="02000503000000020004" pitchFamily="2" charset="0"/>
-                        </a:rPr>
-                        <a:t>%</a:t>
-                      </a:r>
-                    </a:p>
-                  </a:txBody>
-                  <a:tcPr marL="68580" marR="68580" marT="0" marB="0" anchor="ctr">
-                    <a:solidFill>
-                      <a:schemeClr val="bg1">
-                        <a:lumMod val="95000"/>
-                      </a:schemeClr>
-                    </a:solidFill>
-                  </a:tcPr>
-                </a:tc>
-                <a:tc>
-                  <a:txBody>
-                    <a:bodyPr/>
-                    <a:lstStyle/>
-                    <a:p>
-                      <a:pPr indent="36000" algn="ctr">
-                        <a:lnSpc>
-                          <a:spcPct val="150000"/>
-                        </a:lnSpc>
-                        <a:spcAft>
-                          <a:spcPts val="0"/>
-                        </a:spcAft>
-                      </a:pPr>
-                      <a:r>
-                        <a:rPr lang="ru-RU" sz="1600" kern="1200" dirty="0">
-                          <a:solidFill>
-                            <a:schemeClr val="dk1"/>
-                          </a:solidFill>
-                          <a:effectLst/>
-                          <a:latin typeface="Inter Variable Text" panose="02000503000000020004" pitchFamily="2" charset="0"/>
-                          <a:ea typeface="Inter Variable Text" panose="02000503000000020004" pitchFamily="2" charset="0"/>
-                          <a:cs typeface="Inter Variable Text" panose="02000503000000020004" pitchFamily="2" charset="0"/>
-                        </a:rPr>
-                        <a:t>27,6%</a:t>
-                      </a:r>
-                    </a:p>
-                  </a:txBody>
-                  <a:tcPr marL="68580" marR="68580" marT="0" marB="0" anchor="ctr">
-                    <a:solidFill>
-                      <a:schemeClr val="bg1">
-                        <a:lumMod val="95000"/>
-                      </a:schemeClr>
-                    </a:solidFill>
-                  </a:tcPr>
-                </a:tc>
-                <a:extLst>
-                  <a:ext uri="{0D108BD9-81ED-4DB2-BD59-A6C34878D82A}">
-                    <a16:rowId xmlns:a16="http://schemas.microsoft.com/office/drawing/2014/main" val="2692205829"/>
-                  </a:ext>
-                </a:extLst>
-              </a:tr>
-              <a:tr h="536609">
-                <a:tc>
-                  <a:txBody>
-                    <a:bodyPr/>
-                    <a:lstStyle/>
-                    <a:p>
-                      <a:pPr>
-                        <a:lnSpc>
-                          <a:spcPct val="150000"/>
-                        </a:lnSpc>
-                        <a:spcAft>
-                          <a:spcPts val="0"/>
-                        </a:spcAft>
-                      </a:pPr>
-                      <a:r>
-                        <a:rPr lang="ru-RU" sz="1600" kern="1200" dirty="0">
-                          <a:solidFill>
-                            <a:schemeClr val="dk1"/>
-                          </a:solidFill>
-                          <a:effectLst/>
-                          <a:latin typeface="Inter Variable Text" panose="02000503000000020004" pitchFamily="2" charset="0"/>
-                          <a:ea typeface="Inter Variable Text" panose="02000503000000020004" pitchFamily="2" charset="0"/>
-                          <a:cs typeface="Inter Variable Text" panose="02000503000000020004" pitchFamily="2" charset="0"/>
-                        </a:rPr>
-                        <a:t>5. Простой срок окупаемости</a:t>
-                      </a:r>
-                    </a:p>
-                  </a:txBody>
-                  <a:tcPr marL="68580" marR="68580" marT="0" marB="0" anchor="ctr">
-                    <a:noFill/>
-                  </a:tcPr>
-                </a:tc>
-                <a:tc>
-                  <a:txBody>
-                    <a:bodyPr/>
-                    <a:lstStyle/>
-                    <a:p>
-                      <a:pPr algn="ctr">
-                        <a:lnSpc>
-                          <a:spcPct val="107000"/>
-                        </a:lnSpc>
-                        <a:spcAft>
-                          <a:spcPts val="0"/>
-                        </a:spcAft>
-                      </a:pPr>
-                      <a:r>
-                        <a:rPr lang="ru-RU" sz="1600" kern="1200" dirty="0" err="1">
-                          <a:solidFill>
-                            <a:schemeClr val="dk1"/>
-                          </a:solidFill>
-                          <a:effectLst/>
-                          <a:latin typeface="Inter Variable Text" panose="02000503000000020004" pitchFamily="2" charset="0"/>
-                          <a:ea typeface="Inter Variable Text" panose="02000503000000020004" pitchFamily="2" charset="0"/>
-                          <a:cs typeface="Inter Variable Text" panose="02000503000000020004" pitchFamily="2" charset="0"/>
-                        </a:rPr>
-                        <a:t>PPs</a:t>
-                      </a:r>
-                      <a:endParaRPr lang="ru-RU" sz="1600" kern="1200" dirty="0">
-                        <a:solidFill>
-                          <a:schemeClr val="dk1"/>
-                        </a:solidFill>
-                        <a:effectLst/>
-                        <a:latin typeface="Inter Variable Text" panose="02000503000000020004" pitchFamily="2" charset="0"/>
-                        <a:ea typeface="Inter Variable Text" panose="02000503000000020004" pitchFamily="2" charset="0"/>
-                        <a:cs typeface="Inter Variable Text" panose="02000503000000020004" pitchFamily="2" charset="0"/>
-                      </a:endParaRPr>
-                    </a:p>
-                  </a:txBody>
-                  <a:tcPr marL="68580" marR="68580" marT="0" marB="0" anchor="ctr">
-                    <a:noFill/>
-                  </a:tcPr>
-                </a:tc>
-                <a:tc>
-                  <a:txBody>
-                    <a:bodyPr/>
-                    <a:lstStyle/>
-                    <a:p>
-                      <a:pPr algn="ctr">
-                        <a:lnSpc>
-                          <a:spcPct val="107000"/>
-                        </a:lnSpc>
-                        <a:spcAft>
-                          <a:spcPts val="0"/>
-                        </a:spcAft>
-                      </a:pPr>
-                      <a:r>
-                        <a:rPr lang="ru-RU" sz="1600" kern="1200" dirty="0">
-                          <a:solidFill>
-                            <a:schemeClr val="dk1"/>
-                          </a:solidFill>
-                          <a:effectLst/>
-                          <a:latin typeface="Inter Variable Text" panose="02000503000000020004" pitchFamily="2" charset="0"/>
-                          <a:ea typeface="Inter Variable Text" panose="02000503000000020004" pitchFamily="2" charset="0"/>
-                          <a:cs typeface="Inter Variable Text" panose="02000503000000020004" pitchFamily="2" charset="0"/>
-                        </a:rPr>
-                        <a:t>месяцев</a:t>
-                      </a:r>
-                    </a:p>
-                  </a:txBody>
-                  <a:tcPr marL="68580" marR="68580" marT="0" marB="0" anchor="ctr">
-                    <a:noFill/>
-                  </a:tcPr>
-                </a:tc>
-                <a:tc>
-                  <a:txBody>
-                    <a:bodyPr/>
-                    <a:lstStyle/>
-                    <a:p>
-                      <a:pPr indent="36000" algn="ctr">
-                        <a:lnSpc>
-                          <a:spcPct val="150000"/>
-                        </a:lnSpc>
-                        <a:spcAft>
-                          <a:spcPts val="0"/>
-                        </a:spcAft>
-                      </a:pPr>
-                      <a:r>
-                        <a:rPr lang="ru-RU" sz="1600" kern="1200" dirty="0">
-                          <a:solidFill>
-                            <a:schemeClr val="dk1"/>
-                          </a:solidFill>
-                          <a:effectLst/>
-                          <a:latin typeface="Inter Variable Text" panose="02000503000000020004" pitchFamily="2" charset="0"/>
-                          <a:ea typeface="Inter Variable Text" panose="02000503000000020004" pitchFamily="2" charset="0"/>
-                          <a:cs typeface="Inter Variable Text" panose="02000503000000020004" pitchFamily="2" charset="0"/>
-                        </a:rPr>
-                        <a:t>5,53</a:t>
-                      </a:r>
-                    </a:p>
-                  </a:txBody>
-                  <a:tcPr marL="68580" marR="68580" marT="0" marB="0" anchor="ctr">
-                    <a:noFill/>
-                  </a:tcPr>
-                </a:tc>
-                <a:extLst>
-                  <a:ext uri="{0D108BD9-81ED-4DB2-BD59-A6C34878D82A}">
-                    <a16:rowId xmlns:a16="http://schemas.microsoft.com/office/drawing/2014/main" val="1818996264"/>
-                  </a:ext>
-                </a:extLst>
-              </a:tr>
-              <a:tr h="536609">
-                <a:tc>
-                  <a:txBody>
-                    <a:bodyPr/>
-                    <a:lstStyle/>
-                    <a:p>
-                      <a:pPr>
-                        <a:lnSpc>
-                          <a:spcPct val="150000"/>
-                        </a:lnSpc>
-                        <a:spcAft>
-                          <a:spcPts val="0"/>
-                        </a:spcAft>
-                      </a:pPr>
-                      <a:r>
-                        <a:rPr lang="ru-RU" sz="1600" kern="1200" dirty="0">
-                          <a:solidFill>
-                            <a:schemeClr val="dk1"/>
-                          </a:solidFill>
-                          <a:effectLst/>
-                          <a:latin typeface="Inter Variable Text" panose="02000503000000020004" pitchFamily="2" charset="0"/>
-                          <a:ea typeface="Inter Variable Text" panose="02000503000000020004" pitchFamily="2" charset="0"/>
-                          <a:cs typeface="Inter Variable Text" panose="02000503000000020004" pitchFamily="2" charset="0"/>
-                        </a:rPr>
-                        <a:t>6. Дисконтированный срок окупаемости</a:t>
-                      </a:r>
-                    </a:p>
-                  </a:txBody>
-                  <a:tcPr marL="68580" marR="68580" marT="0" marB="0" anchor="ctr">
-                    <a:solidFill>
-                      <a:schemeClr val="bg1">
-                        <a:lumMod val="95000"/>
-                      </a:schemeClr>
-                    </a:solidFill>
-                  </a:tcPr>
-                </a:tc>
-                <a:tc>
-                  <a:txBody>
-                    <a:bodyPr/>
-                    <a:lstStyle/>
-                    <a:p>
-                      <a:pPr algn="ctr">
-                        <a:lnSpc>
-                          <a:spcPct val="107000"/>
-                        </a:lnSpc>
-                        <a:spcAft>
-                          <a:spcPts val="0"/>
-                        </a:spcAft>
-                      </a:pPr>
-                      <a:r>
-                        <a:rPr lang="ru-RU" sz="1600" kern="1200" dirty="0" err="1">
-                          <a:solidFill>
-                            <a:schemeClr val="dk1"/>
-                          </a:solidFill>
-                          <a:effectLst/>
-                          <a:latin typeface="Inter Variable Text" panose="02000503000000020004" pitchFamily="2" charset="0"/>
-                          <a:ea typeface="Inter Variable Text" panose="02000503000000020004" pitchFamily="2" charset="0"/>
-                          <a:cs typeface="Inter Variable Text" panose="02000503000000020004" pitchFamily="2" charset="0"/>
-                        </a:rPr>
-                        <a:t>PPd</a:t>
-                      </a:r>
-                      <a:endParaRPr lang="ru-RU" sz="1600" kern="1200" dirty="0">
-                        <a:solidFill>
-                          <a:schemeClr val="dk1"/>
-                        </a:solidFill>
-                        <a:effectLst/>
-                        <a:latin typeface="Inter Variable Text" panose="02000503000000020004" pitchFamily="2" charset="0"/>
-                        <a:ea typeface="Inter Variable Text" panose="02000503000000020004" pitchFamily="2" charset="0"/>
-                        <a:cs typeface="Inter Variable Text" panose="02000503000000020004" pitchFamily="2" charset="0"/>
-                      </a:endParaRPr>
-                    </a:p>
-                  </a:txBody>
-                  <a:tcPr marL="68580" marR="68580" marT="0" marB="0" anchor="ctr">
-                    <a:solidFill>
-                      <a:schemeClr val="bg1">
-                        <a:lumMod val="95000"/>
-                      </a:schemeClr>
-                    </a:solidFill>
-                  </a:tcPr>
-                </a:tc>
-                <a:tc>
-                  <a:txBody>
-                    <a:bodyPr/>
-                    <a:lstStyle/>
-                    <a:p>
-                      <a:pPr algn="ctr">
-                        <a:lnSpc>
-                          <a:spcPct val="107000"/>
-                        </a:lnSpc>
-                        <a:spcAft>
-                          <a:spcPts val="0"/>
-                        </a:spcAft>
-                      </a:pPr>
-                      <a:r>
-                        <a:rPr lang="ru-RU" sz="1600" kern="1200" dirty="0">
-                          <a:solidFill>
-                            <a:schemeClr val="dk1"/>
-                          </a:solidFill>
-                          <a:effectLst/>
-                          <a:latin typeface="Inter Variable Text" panose="02000503000000020004" pitchFamily="2" charset="0"/>
-                          <a:ea typeface="Inter Variable Text" panose="02000503000000020004" pitchFamily="2" charset="0"/>
-                          <a:cs typeface="Inter Variable Text" panose="02000503000000020004" pitchFamily="2" charset="0"/>
-                        </a:rPr>
-                        <a:t>месяцев</a:t>
-                      </a:r>
-                    </a:p>
-                  </a:txBody>
-                  <a:tcPr marL="68580" marR="68580" marT="0" marB="0" anchor="ctr">
-                    <a:solidFill>
-                      <a:schemeClr val="bg1">
-                        <a:lumMod val="95000"/>
-                      </a:schemeClr>
-                    </a:solidFill>
-                  </a:tcPr>
-                </a:tc>
-                <a:tc>
-                  <a:txBody>
-                    <a:bodyPr/>
-                    <a:lstStyle/>
-                    <a:p>
-                      <a:pPr indent="36000" algn="ctr">
-                        <a:lnSpc>
-                          <a:spcPct val="150000"/>
-                        </a:lnSpc>
-                        <a:spcAft>
-                          <a:spcPts val="0"/>
-                        </a:spcAft>
-                      </a:pPr>
-                      <a:r>
-                        <a:rPr lang="ru-RU" sz="1600" kern="1200" dirty="0">
-                          <a:solidFill>
-                            <a:schemeClr val="dk1"/>
-                          </a:solidFill>
-                          <a:effectLst/>
-                          <a:latin typeface="Inter Variable Text" panose="02000503000000020004" pitchFamily="2" charset="0"/>
-                          <a:ea typeface="Inter Variable Text" panose="02000503000000020004" pitchFamily="2" charset="0"/>
-                          <a:cs typeface="Inter Variable Text" panose="02000503000000020004" pitchFamily="2" charset="0"/>
-                        </a:rPr>
-                        <a:t>5,57</a:t>
-                      </a:r>
-                    </a:p>
-                  </a:txBody>
-                  <a:tcPr marL="68580" marR="68580" marT="0" marB="0" anchor="ctr">
-                    <a:solidFill>
-                      <a:schemeClr val="bg1">
-                        <a:lumMod val="95000"/>
-                      </a:schemeClr>
-                    </a:solidFill>
-                  </a:tcPr>
-                </a:tc>
-                <a:extLst>
-                  <a:ext uri="{0D108BD9-81ED-4DB2-BD59-A6C34878D82A}">
-                    <a16:rowId xmlns:a16="http://schemas.microsoft.com/office/drawing/2014/main" val="2423059309"/>
-                  </a:ext>
-                </a:extLst>
-              </a:tr>
-              <a:tr h="536609">
-                <a:tc>
-                  <a:txBody>
-                    <a:bodyPr/>
-                    <a:lstStyle/>
-                    <a:p>
-                      <a:pPr>
-                        <a:lnSpc>
-                          <a:spcPct val="150000"/>
-                        </a:lnSpc>
-                        <a:spcAft>
-                          <a:spcPts val="0"/>
-                        </a:spcAft>
-                      </a:pPr>
-                      <a:r>
-                        <a:rPr lang="ru-RU" sz="1600" kern="1200" dirty="0">
-                          <a:solidFill>
-                            <a:schemeClr val="dk1"/>
-                          </a:solidFill>
-                          <a:effectLst/>
-                          <a:latin typeface="Inter Variable Text" panose="02000503000000020004" pitchFamily="2" charset="0"/>
-                          <a:ea typeface="Inter Variable Text" panose="02000503000000020004" pitchFamily="2" charset="0"/>
-                          <a:cs typeface="Inter Variable Text" panose="02000503000000020004" pitchFamily="2" charset="0"/>
-                        </a:rPr>
-                        <a:t>7. Коэффициент удельной эффективности проекта (модифицированный)</a:t>
-                      </a:r>
-                    </a:p>
-                  </a:txBody>
-                  <a:tcPr marL="68580" marR="68580" marT="0" marB="0" anchor="ctr">
-                    <a:solidFill>
-                      <a:schemeClr val="bg1">
-                        <a:lumMod val="95000"/>
-                      </a:schemeClr>
-                    </a:solidFill>
-                  </a:tcPr>
-                </a:tc>
-                <a:tc>
-                  <a:txBody>
-                    <a:bodyPr/>
-                    <a:lstStyle/>
-                    <a:p>
-                      <a:pPr algn="ctr">
-                        <a:lnSpc>
-                          <a:spcPct val="107000"/>
-                        </a:lnSpc>
-                        <a:spcAft>
-                          <a:spcPts val="0"/>
-                        </a:spcAft>
-                      </a:pPr>
-                      <a:r>
-                        <a:rPr lang="ru-RU" sz="1600" kern="1200" dirty="0" err="1">
-                          <a:solidFill>
-                            <a:schemeClr val="dk1"/>
-                          </a:solidFill>
-                          <a:effectLst/>
-                          <a:latin typeface="Inter Variable Text" panose="02000503000000020004" pitchFamily="2" charset="0"/>
-                          <a:ea typeface="Inter Variable Text" panose="02000503000000020004" pitchFamily="2" charset="0"/>
-                          <a:cs typeface="Inter Variable Text" panose="02000503000000020004" pitchFamily="2" charset="0"/>
-                        </a:rPr>
-                        <a:t>PI_мод</a:t>
-                      </a:r>
-                      <a:endParaRPr lang="ru-RU" sz="1600" kern="1200" dirty="0">
-                        <a:solidFill>
-                          <a:schemeClr val="dk1"/>
-                        </a:solidFill>
-                        <a:effectLst/>
-                        <a:latin typeface="Inter Variable Text" panose="02000503000000020004" pitchFamily="2" charset="0"/>
-                        <a:ea typeface="Inter Variable Text" panose="02000503000000020004" pitchFamily="2" charset="0"/>
-                        <a:cs typeface="Inter Variable Text" panose="02000503000000020004" pitchFamily="2" charset="0"/>
-                      </a:endParaRPr>
-                    </a:p>
-                  </a:txBody>
-                  <a:tcPr marL="68580" marR="68580" marT="0" marB="0" anchor="ctr">
-                    <a:solidFill>
-                      <a:schemeClr val="bg1">
-                        <a:lumMod val="95000"/>
-                      </a:schemeClr>
-                    </a:solidFill>
-                  </a:tcPr>
-                </a:tc>
-                <a:tc>
-                  <a:txBody>
-                    <a:bodyPr/>
-                    <a:lstStyle/>
-                    <a:p>
-                      <a:pPr algn="ctr">
-                        <a:lnSpc>
-                          <a:spcPct val="107000"/>
-                        </a:lnSpc>
-                        <a:spcAft>
-                          <a:spcPts val="0"/>
-                        </a:spcAft>
-                      </a:pPr>
-                      <a:r>
-                        <a:rPr lang="ru-RU" sz="1600" kern="1200" dirty="0" err="1">
-                          <a:solidFill>
-                            <a:schemeClr val="dk1"/>
-                          </a:solidFill>
-                          <a:effectLst/>
-                          <a:latin typeface="Inter Variable Text" panose="02000503000000020004" pitchFamily="2" charset="0"/>
-                          <a:ea typeface="Inter Variable Text" panose="02000503000000020004" pitchFamily="2" charset="0"/>
-                          <a:cs typeface="Inter Variable Text" panose="02000503000000020004" pitchFamily="2" charset="0"/>
-                        </a:rPr>
-                        <a:t>коэф</a:t>
-                      </a:r>
-                      <a:r>
-                        <a:rPr lang="ru-RU" sz="1600" kern="1200" dirty="0">
-                          <a:solidFill>
-                            <a:schemeClr val="dk1"/>
-                          </a:solidFill>
-                          <a:effectLst/>
-                          <a:latin typeface="Inter Variable Text" panose="02000503000000020004" pitchFamily="2" charset="0"/>
-                          <a:ea typeface="Inter Variable Text" panose="02000503000000020004" pitchFamily="2" charset="0"/>
-                          <a:cs typeface="Inter Variable Text" panose="02000503000000020004" pitchFamily="2" charset="0"/>
-                        </a:rPr>
-                        <a:t>-т</a:t>
-                      </a:r>
-                    </a:p>
-                  </a:txBody>
-                  <a:tcPr marL="68580" marR="68580" marT="0" marB="0" anchor="ctr">
-                    <a:solidFill>
-                      <a:schemeClr val="bg1">
-                        <a:lumMod val="95000"/>
-                      </a:schemeClr>
-                    </a:solidFill>
-                  </a:tcPr>
-                </a:tc>
-                <a:tc>
-                  <a:txBody>
-                    <a:bodyPr/>
-                    <a:lstStyle/>
-                    <a:p>
-                      <a:pPr indent="36000" algn="ctr">
-                        <a:lnSpc>
-                          <a:spcPct val="150000"/>
-                        </a:lnSpc>
-                        <a:spcAft>
-                          <a:spcPts val="0"/>
-                        </a:spcAft>
-                      </a:pPr>
-                      <a:r>
-                        <a:rPr lang="ru-RU" sz="1600" kern="1200" dirty="0">
-                          <a:solidFill>
-                            <a:schemeClr val="dk1"/>
-                          </a:solidFill>
-                          <a:effectLst/>
-                          <a:latin typeface="Inter Variable Text" panose="02000503000000020004" pitchFamily="2" charset="0"/>
-                          <a:ea typeface="Inter Variable Text" panose="02000503000000020004" pitchFamily="2" charset="0"/>
-                          <a:cs typeface="Inter Variable Text" panose="02000503000000020004" pitchFamily="2" charset="0"/>
-                        </a:rPr>
-                        <a:t>15,49</a:t>
-                      </a:r>
-                    </a:p>
-                  </a:txBody>
-                  <a:tcPr marL="68580" marR="68580" marT="0" marB="0" anchor="ctr">
-                    <a:solidFill>
-                      <a:schemeClr val="bg1">
-                        <a:lumMod val="95000"/>
-                      </a:schemeClr>
-                    </a:solidFill>
-                  </a:tcPr>
-                </a:tc>
-                <a:extLst>
-                  <a:ext uri="{0D108BD9-81ED-4DB2-BD59-A6C34878D82A}">
-                    <a16:rowId xmlns:a16="http://schemas.microsoft.com/office/drawing/2014/main" val="332902814"/>
-                  </a:ext>
-                </a:extLst>
-              </a:tr>
-              <a:tr h="536609">
-                <a:tc>
-                  <a:txBody>
-                    <a:bodyPr/>
-                    <a:lstStyle/>
-                    <a:p>
-                      <a:pPr>
-                        <a:lnSpc>
-                          <a:spcPct val="150000"/>
-                        </a:lnSpc>
-                        <a:spcAft>
-                          <a:spcPts val="0"/>
-                        </a:spcAft>
-                      </a:pPr>
-                      <a:r>
-                        <a:rPr lang="ru-RU" sz="1600" kern="1200" dirty="0">
-                          <a:solidFill>
-                            <a:schemeClr val="dk1"/>
-                          </a:solidFill>
-                          <a:effectLst/>
-                          <a:latin typeface="Inter Variable Text" panose="02000503000000020004" pitchFamily="2" charset="0"/>
-                          <a:ea typeface="Inter Variable Text" panose="02000503000000020004" pitchFamily="2" charset="0"/>
-                          <a:cs typeface="Inter Variable Text" panose="02000503000000020004" pitchFamily="2" charset="0"/>
-                        </a:rPr>
-                        <a:t>8. Чистая конечная стоимость</a:t>
-                      </a:r>
-                    </a:p>
-                  </a:txBody>
-                  <a:tcPr marL="68580" marR="68580" marT="0" marB="0" anchor="ctr">
-                    <a:solidFill>
-                      <a:schemeClr val="bg1">
-                        <a:lumMod val="95000"/>
-                      </a:schemeClr>
-                    </a:solidFill>
-                  </a:tcPr>
-                </a:tc>
-                <a:tc>
-                  <a:txBody>
-                    <a:bodyPr/>
-                    <a:lstStyle/>
-                    <a:p>
-                      <a:pPr algn="ctr">
-                        <a:lnSpc>
-                          <a:spcPct val="107000"/>
-                        </a:lnSpc>
-                        <a:spcAft>
-                          <a:spcPts val="0"/>
-                        </a:spcAft>
-                      </a:pPr>
-                      <a:r>
-                        <a:rPr lang="ru-RU" sz="1600" kern="1200" dirty="0">
-                          <a:solidFill>
-                            <a:schemeClr val="dk1"/>
-                          </a:solidFill>
-                          <a:effectLst/>
-                          <a:latin typeface="Inter Variable Text" panose="02000503000000020004" pitchFamily="2" charset="0"/>
-                          <a:ea typeface="Inter Variable Text" panose="02000503000000020004" pitchFamily="2" charset="0"/>
-                          <a:cs typeface="Inter Variable Text" panose="02000503000000020004" pitchFamily="2" charset="0"/>
-                        </a:rPr>
-                        <a:t>NTV</a:t>
-                      </a:r>
-                    </a:p>
-                  </a:txBody>
-                  <a:tcPr marL="68580" marR="68580" marT="0" marB="0" anchor="ctr">
-                    <a:solidFill>
-                      <a:schemeClr val="bg1">
-                        <a:lumMod val="95000"/>
-                      </a:schemeClr>
-                    </a:solidFill>
-                  </a:tcPr>
-                </a:tc>
-                <a:tc>
-                  <a:txBody>
-                    <a:bodyPr/>
-                    <a:lstStyle/>
-                    <a:p>
-                      <a:pPr algn="ctr">
-                        <a:lnSpc>
-                          <a:spcPct val="107000"/>
-                        </a:lnSpc>
-                        <a:spcAft>
-                          <a:spcPts val="0"/>
-                        </a:spcAft>
-                      </a:pPr>
-                      <a:r>
-                        <a:rPr lang="ru-RU" sz="1600" kern="1200" dirty="0">
-                          <a:solidFill>
-                            <a:schemeClr val="dk1"/>
-                          </a:solidFill>
-                          <a:effectLst/>
-                          <a:latin typeface="Inter Variable Text" panose="02000503000000020004" pitchFamily="2" charset="0"/>
-                          <a:ea typeface="Inter Variable Text" panose="02000503000000020004" pitchFamily="2" charset="0"/>
-                          <a:cs typeface="Inter Variable Text" panose="02000503000000020004" pitchFamily="2" charset="0"/>
-                        </a:rPr>
-                        <a:t>руб.</a:t>
-                      </a:r>
-                    </a:p>
-                  </a:txBody>
-                  <a:tcPr marL="68580" marR="68580" marT="0" marB="0" anchor="ctr">
-                    <a:solidFill>
-                      <a:schemeClr val="bg1">
-                        <a:lumMod val="95000"/>
-                      </a:schemeClr>
-                    </a:solidFill>
-                  </a:tcPr>
-                </a:tc>
-                <a:tc>
-                  <a:txBody>
-                    <a:bodyPr/>
-                    <a:lstStyle/>
-                    <a:p>
-                      <a:pPr indent="36000" algn="ctr">
-                        <a:lnSpc>
-                          <a:spcPct val="150000"/>
-                        </a:lnSpc>
-                        <a:spcAft>
-                          <a:spcPts val="0"/>
-                        </a:spcAft>
-                      </a:pPr>
-                      <a:r>
-                        <a:rPr lang="ru-RU" sz="1600" kern="1200" dirty="0">
-                          <a:solidFill>
-                            <a:schemeClr val="dk1"/>
-                          </a:solidFill>
-                          <a:effectLst/>
-                          <a:latin typeface="Inter Variable Text" panose="02000503000000020004" pitchFamily="2" charset="0"/>
-                          <a:ea typeface="Inter Variable Text" panose="02000503000000020004" pitchFamily="2" charset="0"/>
-                          <a:cs typeface="Inter Variable Text" panose="02000503000000020004" pitchFamily="2" charset="0"/>
-                        </a:rPr>
-                        <a:t>30 198 205,16</a:t>
-                      </a:r>
-                    </a:p>
-                  </a:txBody>
-                  <a:tcPr marL="68580" marR="68580" marT="0" marB="0" anchor="ctr">
-                    <a:solidFill>
-                      <a:schemeClr val="bg1">
-                        <a:lumMod val="95000"/>
-                      </a:schemeClr>
-                    </a:solidFill>
-                  </a:tcPr>
-                </a:tc>
-                <a:extLst>
-                  <a:ext uri="{0D108BD9-81ED-4DB2-BD59-A6C34878D82A}">
-                    <a16:rowId xmlns:a16="http://schemas.microsoft.com/office/drawing/2014/main" val="1647228305"/>
-                  </a:ext>
-                </a:extLst>
-              </a:tr>
-            </a:tbl>
-          </a:graphicData>
-        </a:graphic>
-      </p:graphicFrame>
-    </p:spTree>
-    <p:extLst>
-      <p:ext uri="{BB962C8B-B14F-4D97-AF65-F5344CB8AC3E}">
-        <p14:creationId xmlns:p14="http://schemas.microsoft.com/office/powerpoint/2010/main" val="419137575"/>
       </p:ext>
     </p:extLst>
   </p:cSld>
@@ -15182,9 +11753,9 @@
         <p:grpSpPr>
           <a:xfrm>
             <a:off x="300037" y="1602589"/>
-            <a:ext cx="11784187" cy="5056061"/>
+            <a:ext cx="11342719" cy="5109156"/>
             <a:chOff x="374555" y="2318761"/>
-            <a:chExt cx="12427237" cy="4768066"/>
+            <a:chExt cx="11961679" cy="4818137"/>
           </a:xfrm>
         </p:grpSpPr>
         <p:sp>
@@ -15389,7 +11960,7 @@
                   <a:latin typeface="Times New Roman" panose="02020603050405020304" pitchFamily="18" charset="0"/>
                   <a:cs typeface="Times New Roman" panose="02020603050405020304" pitchFamily="18" charset="0"/>
                 </a:rPr>
-                <a:t>Повышенная нагрузка на психику человека, рост числа заболеваний, вызванных нездоровыми привычками</a:t>
+                <a:t>Повышенная нагрузка на психику, рост заболеваний, вызванных нездоровыми привычками</a:t>
               </a:r>
               <a:endParaRPr lang="ru-RU" sz="2400" dirty="0">
                 <a:latin typeface="Times New Roman" panose="02020603050405020304" pitchFamily="18" charset="0"/>
@@ -15536,7 +12107,7 @@
           <p:spPr>
             <a:xfrm>
               <a:off x="3203419" y="3935633"/>
-              <a:ext cx="3203134" cy="3121380"/>
+              <a:ext cx="3023920" cy="3201265"/>
             </a:xfrm>
             <a:custGeom>
               <a:avLst/>
@@ -15651,7 +12222,7 @@
                   <a:latin typeface="Times New Roman" panose="02020603050405020304" pitchFamily="18" charset="0"/>
                   <a:cs typeface="Times New Roman" panose="02020603050405020304" pitchFamily="18" charset="0"/>
                 </a:rPr>
-                <a:t>Процесс формирования устойчивых здоровых привычек у пользователей в условиях цифровизации</a:t>
+                <a:t>Процесс формирования устойчивых здоровых привычек у пользователей</a:t>
               </a:r>
             </a:p>
           </p:txBody>
@@ -15792,8 +12363,8 @@
           </p:nvSpPr>
           <p:spPr>
             <a:xfrm>
-              <a:off x="6025504" y="3259667"/>
-              <a:ext cx="3375891" cy="3827160"/>
+              <a:off x="6025505" y="3259667"/>
+              <a:ext cx="3225743" cy="3877231"/>
             </a:xfrm>
             <a:custGeom>
               <a:avLst/>
@@ -15908,7 +12479,7 @@
                   <a:latin typeface="Times New Roman" panose="02020603050405020304" pitchFamily="18" charset="0"/>
                   <a:cs typeface="Times New Roman" panose="02020603050405020304" pitchFamily="18" charset="0"/>
                 </a:rPr>
-                <a:t>Авторская методика формирования привычек в виде чат-бота с применением геймификации и анонимного социального взаимодействия</a:t>
+                <a:t>Авторская методика формирования привычек в виде чат-бота с применением геймификации и анонимного взаимодействия</a:t>
               </a:r>
             </a:p>
           </p:txBody>
@@ -16050,7 +12621,7 @@
           <p:spPr>
             <a:xfrm>
               <a:off x="9135709" y="2387027"/>
-              <a:ext cx="3666083" cy="4652576"/>
+              <a:ext cx="3200525" cy="4749871"/>
             </a:xfrm>
             <a:custGeom>
               <a:avLst/>
@@ -17149,20 +13720,10 @@
           <a:p>
             <a:r>
               <a:rPr lang="ru-RU" sz="2400" dirty="0">
-                <a:solidFill>
-                  <a:srgbClr val="274E9C"/>
-                </a:solidFill>
                 <a:latin typeface="Times New Roman" panose="02020603050405020304" pitchFamily="18" charset="0"/>
                 <a:cs typeface="Times New Roman" panose="02020603050405020304" pitchFamily="18" charset="0"/>
               </a:rPr>
-              <a:t>Цель исследования заключается </a:t>
-            </a:r>
-            <a:r>
-              <a:rPr lang="ru-RU" sz="2400" dirty="0">
-                <a:latin typeface="Times New Roman" panose="02020603050405020304" pitchFamily="18" charset="0"/>
-                <a:cs typeface="Times New Roman" panose="02020603050405020304" pitchFamily="18" charset="0"/>
-              </a:rPr>
-              <a:t>в разработке авторской методики формирования здоровых привычек, создании прототипа на её основе и комплексной оценке технической и экономической эффективности данного решения.</a:t>
+              <a:t>Разработка авторской методики формирования здоровых привычек, создании прототипа на её основе и комплексной оценке технической и экономической эффективности данного решения.</a:t>
             </a:r>
           </a:p>
         </p:txBody>
@@ -17221,7 +13782,7 @@
           <p:nvPr>
             <p:extLst>
               <p:ext uri="{D42A27DB-BD31-4B8C-83A1-F6EECF244321}">
-                <p14:modId xmlns:p14="http://schemas.microsoft.com/office/powerpoint/2010/main" val="2587633412"/>
+                <p14:modId xmlns:p14="http://schemas.microsoft.com/office/powerpoint/2010/main" val="2304943620"/>
               </p:ext>
             </p:extLst>
           </p:nvPr>
@@ -18474,7 +15035,7 @@
         </p:nvSpPr>
         <p:spPr>
           <a:xfrm>
-            <a:off x="4499958" y="1248366"/>
+            <a:off x="3908081" y="3914940"/>
             <a:ext cx="3800367" cy="1200329"/>
           </a:xfrm>
           <a:prstGeom prst="rect">
@@ -18488,6 +15049,7 @@
           </a:bodyPr>
           <a:lstStyle/>
           <a:p>
+            <a:pPr indent="266700"/>
             <a:r>
               <a:rPr lang="ru-RU" sz="2400" b="1" dirty="0">
                 <a:latin typeface="Times New Roman" panose="02020603050405020304" pitchFamily="18" charset="0"/>
@@ -18530,6 +15092,1883 @@
             <a:extLst>
               <a:ext uri="{FF2B5EF4-FFF2-40B4-BE49-F238E27FC236}">
                 <a16:creationId xmlns:a16="http://schemas.microsoft.com/office/drawing/2014/main" id="{58086132-B181-B1C0-D5A9-BD831FD54F8D}"/>
+              </a:ext>
+            </a:extLst>
+          </p:cNvPr>
+          <p:cNvSpPr txBox="1">
+            <a:spLocks/>
+          </p:cNvSpPr>
+          <p:nvPr/>
+        </p:nvSpPr>
+        <p:spPr>
+          <a:xfrm>
+            <a:off x="418852" y="1259899"/>
+            <a:ext cx="3247333" cy="4338204"/>
+          </a:xfrm>
+          <a:prstGeom prst="roundRect">
+            <a:avLst>
+              <a:gd name="adj" fmla="val 4817"/>
+            </a:avLst>
+          </a:prstGeom>
+          <a:ln w="12700">
+            <a:solidFill>
+              <a:srgbClr val="1A3773"/>
+            </a:solidFill>
+            <a:prstDash val="dash"/>
+          </a:ln>
+        </p:spPr>
+        <p:txBody>
+          <a:bodyPr anchor="ctr"/>
+          <a:lstStyle>
+            <a:lvl1pPr marL="0" indent="0" algn="ctr" defTabSz="914400" rtl="0" eaLnBrk="1" latinLnBrk="0" hangingPunct="1">
+              <a:lnSpc>
+                <a:spcPct val="90000"/>
+              </a:lnSpc>
+              <a:spcBef>
+                <a:spcPts val="1000"/>
+              </a:spcBef>
+              <a:buFont typeface="Arial"/>
+              <a:buNone/>
+              <a:defRPr sz="2800" b="0" i="0" kern="1200">
+                <a:solidFill>
+                  <a:schemeClr val="tx1">
+                    <a:lumMod val="85000"/>
+                    <a:lumOff val="15000"/>
+                  </a:schemeClr>
+                </a:solidFill>
+                <a:latin typeface="+mn-lt"/>
+                <a:ea typeface="Open Sans Light" charset="0"/>
+                <a:cs typeface="Open Sans Light" charset="0"/>
+              </a:defRPr>
+            </a:lvl1pPr>
+            <a:lvl2pPr marL="685800" indent="-228600" algn="l" defTabSz="914400" rtl="0" eaLnBrk="1" latinLnBrk="0" hangingPunct="1">
+              <a:lnSpc>
+                <a:spcPct val="90000"/>
+              </a:lnSpc>
+              <a:spcBef>
+                <a:spcPts val="500"/>
+              </a:spcBef>
+              <a:buFont typeface="Arial"/>
+              <a:buChar char="•"/>
+              <a:defRPr sz="2400" b="0" i="0" kern="1200">
+                <a:solidFill>
+                  <a:schemeClr val="tx1"/>
+                </a:solidFill>
+                <a:latin typeface="+mn-lt"/>
+                <a:ea typeface="Open Sans Light" charset="0"/>
+                <a:cs typeface="Open Sans Light" charset="0"/>
+              </a:defRPr>
+            </a:lvl2pPr>
+            <a:lvl3pPr marL="1143000" indent="-228600" algn="l" defTabSz="914400" rtl="0" eaLnBrk="1" latinLnBrk="0" hangingPunct="1">
+              <a:lnSpc>
+                <a:spcPct val="90000"/>
+              </a:lnSpc>
+              <a:spcBef>
+                <a:spcPts val="500"/>
+              </a:spcBef>
+              <a:buFont typeface="Arial"/>
+              <a:buChar char="•"/>
+              <a:defRPr sz="2000" b="0" i="0" kern="1200">
+                <a:solidFill>
+                  <a:schemeClr val="tx1"/>
+                </a:solidFill>
+                <a:latin typeface="+mn-lt"/>
+                <a:ea typeface="Open Sans Light" charset="0"/>
+                <a:cs typeface="Open Sans Light" charset="0"/>
+              </a:defRPr>
+            </a:lvl3pPr>
+            <a:lvl4pPr marL="1600200" indent="-228600" algn="l" defTabSz="914400" rtl="0" eaLnBrk="1" latinLnBrk="0" hangingPunct="1">
+              <a:lnSpc>
+                <a:spcPct val="90000"/>
+              </a:lnSpc>
+              <a:spcBef>
+                <a:spcPts val="500"/>
+              </a:spcBef>
+              <a:buFont typeface="Arial"/>
+              <a:buChar char="•"/>
+              <a:defRPr sz="1800" b="0" i="0" kern="1200">
+                <a:solidFill>
+                  <a:schemeClr val="tx1"/>
+                </a:solidFill>
+                <a:latin typeface="+mn-lt"/>
+                <a:ea typeface="Open Sans Light" charset="0"/>
+                <a:cs typeface="Open Sans Light" charset="0"/>
+              </a:defRPr>
+            </a:lvl4pPr>
+            <a:lvl5pPr marL="2057400" indent="-228600" algn="l" defTabSz="914400" rtl="0" eaLnBrk="1" latinLnBrk="0" hangingPunct="1">
+              <a:lnSpc>
+                <a:spcPct val="90000"/>
+              </a:lnSpc>
+              <a:spcBef>
+                <a:spcPts val="500"/>
+              </a:spcBef>
+              <a:buFont typeface="Arial"/>
+              <a:buChar char="•"/>
+              <a:defRPr sz="1800" b="0" i="0" kern="1200">
+                <a:solidFill>
+                  <a:schemeClr val="tx1"/>
+                </a:solidFill>
+                <a:latin typeface="+mn-lt"/>
+                <a:ea typeface="Open Sans Light" charset="0"/>
+                <a:cs typeface="Open Sans Light" charset="0"/>
+              </a:defRPr>
+            </a:lvl5pPr>
+            <a:lvl6pPr marL="2514600" indent="-228600" algn="l" defTabSz="914400" rtl="0" eaLnBrk="1" latinLnBrk="0" hangingPunct="1">
+              <a:lnSpc>
+                <a:spcPct val="90000"/>
+              </a:lnSpc>
+              <a:spcBef>
+                <a:spcPts val="500"/>
+              </a:spcBef>
+              <a:buFont typeface="Arial"/>
+              <a:buChar char="•"/>
+              <a:defRPr sz="1800" kern="1200">
+                <a:solidFill>
+                  <a:schemeClr val="tx1"/>
+                </a:solidFill>
+                <a:latin typeface="+mn-lt"/>
+                <a:ea typeface="+mn-ea"/>
+                <a:cs typeface="+mn-cs"/>
+              </a:defRPr>
+            </a:lvl6pPr>
+            <a:lvl7pPr marL="2971800" indent="-228600" algn="l" defTabSz="914400" rtl="0" eaLnBrk="1" latinLnBrk="0" hangingPunct="1">
+              <a:lnSpc>
+                <a:spcPct val="90000"/>
+              </a:lnSpc>
+              <a:spcBef>
+                <a:spcPts val="500"/>
+              </a:spcBef>
+              <a:buFont typeface="Arial"/>
+              <a:buChar char="•"/>
+              <a:defRPr sz="1800" kern="1200">
+                <a:solidFill>
+                  <a:schemeClr val="tx1"/>
+                </a:solidFill>
+                <a:latin typeface="+mn-lt"/>
+                <a:ea typeface="+mn-ea"/>
+                <a:cs typeface="+mn-cs"/>
+              </a:defRPr>
+            </a:lvl7pPr>
+            <a:lvl8pPr marL="3429000" indent="-228600" algn="l" defTabSz="914400" rtl="0" eaLnBrk="1" latinLnBrk="0" hangingPunct="1">
+              <a:lnSpc>
+                <a:spcPct val="90000"/>
+              </a:lnSpc>
+              <a:spcBef>
+                <a:spcPts val="500"/>
+              </a:spcBef>
+              <a:buFont typeface="Arial"/>
+              <a:buChar char="•"/>
+              <a:defRPr sz="1800" kern="1200">
+                <a:solidFill>
+                  <a:schemeClr val="tx1"/>
+                </a:solidFill>
+                <a:latin typeface="+mn-lt"/>
+                <a:ea typeface="+mn-ea"/>
+                <a:cs typeface="+mn-cs"/>
+              </a:defRPr>
+            </a:lvl8pPr>
+            <a:lvl9pPr marL="3886200" indent="-228600" algn="l" defTabSz="914400" rtl="0" eaLnBrk="1" latinLnBrk="0" hangingPunct="1">
+              <a:lnSpc>
+                <a:spcPct val="90000"/>
+              </a:lnSpc>
+              <a:spcBef>
+                <a:spcPts val="500"/>
+              </a:spcBef>
+              <a:buFont typeface="Arial"/>
+              <a:buChar char="•"/>
+              <a:defRPr sz="1800" kern="1200">
+                <a:solidFill>
+                  <a:schemeClr val="tx1"/>
+                </a:solidFill>
+                <a:latin typeface="+mn-lt"/>
+                <a:ea typeface="+mn-ea"/>
+                <a:cs typeface="+mn-cs"/>
+              </a:defRPr>
+            </a:lvl9pPr>
+          </a:lstStyle>
+          <a:p>
+            <a:endParaRPr lang="ru-RU" sz="2400"/>
+          </a:p>
+        </p:txBody>
+      </p:sp>
+      <p:cxnSp>
+        <p:nvCxnSpPr>
+          <p:cNvPr id="11" name="Прямая соединительная линия 10">
+            <a:extLst>
+              <a:ext uri="{FF2B5EF4-FFF2-40B4-BE49-F238E27FC236}">
+                <a16:creationId xmlns:a16="http://schemas.microsoft.com/office/drawing/2014/main" id="{B8858543-2C17-18C5-6BBB-74205E9208E1}"/>
+              </a:ext>
+            </a:extLst>
+          </p:cNvPr>
+          <p:cNvCxnSpPr>
+            <a:cxnSpLocks/>
+          </p:cNvCxnSpPr>
+          <p:nvPr/>
+        </p:nvCxnSpPr>
+        <p:spPr>
+          <a:xfrm>
+            <a:off x="3824759" y="1259183"/>
+            <a:ext cx="0" cy="1443800"/>
+          </a:xfrm>
+          <a:prstGeom prst="line">
+            <a:avLst/>
+          </a:prstGeom>
+          <a:ln w="28575">
+            <a:solidFill>
+              <a:srgbClr val="1A3773"/>
+            </a:solidFill>
+          </a:ln>
+        </p:spPr>
+        <p:style>
+          <a:lnRef idx="1">
+            <a:schemeClr val="accent1"/>
+          </a:lnRef>
+          <a:fillRef idx="0">
+            <a:schemeClr val="accent1"/>
+          </a:fillRef>
+          <a:effectRef idx="0">
+            <a:schemeClr val="accent1"/>
+          </a:effectRef>
+          <a:fontRef idx="minor">
+            <a:schemeClr val="tx1"/>
+          </a:fontRef>
+        </p:style>
+      </p:cxnSp>
+      <p:sp>
+        <p:nvSpPr>
+          <p:cNvPr id="13" name="TextBox 12">
+            <a:extLst>
+              <a:ext uri="{FF2B5EF4-FFF2-40B4-BE49-F238E27FC236}">
+                <a16:creationId xmlns:a16="http://schemas.microsoft.com/office/drawing/2014/main" id="{B97E2936-9EBC-C39C-E15F-DB1B7036CD04}"/>
+              </a:ext>
+            </a:extLst>
+          </p:cNvPr>
+          <p:cNvSpPr txBox="1"/>
+          <p:nvPr/>
+        </p:nvSpPr>
+        <p:spPr>
+          <a:xfrm>
+            <a:off x="462747" y="1720840"/>
+            <a:ext cx="3286760" cy="3416320"/>
+          </a:xfrm>
+          <a:prstGeom prst="rect">
+            <a:avLst/>
+          </a:prstGeom>
+          <a:noFill/>
+        </p:spPr>
+        <p:txBody>
+          <a:bodyPr wrap="square">
+            <a:spAutoFit/>
+          </a:bodyPr>
+          <a:lstStyle/>
+          <a:p>
+            <a:r>
+              <a:rPr lang="ru-RU" sz="2400" dirty="0">
+                <a:latin typeface="Times New Roman" panose="02020603050405020304" pitchFamily="18" charset="0"/>
+                <a:cs typeface="Times New Roman" panose="02020603050405020304" pitchFamily="18" charset="0"/>
+              </a:rPr>
+              <a:t>Современный человек имеет доступ к информации о здоровом образе жизни. Проблема заключается в </a:t>
+            </a:r>
+            <a:r>
+              <a:rPr lang="ru-RU" sz="2400" dirty="0">
+                <a:solidFill>
+                  <a:srgbClr val="274E9C"/>
+                </a:solidFill>
+                <a:latin typeface="Times New Roman" panose="02020603050405020304" pitchFamily="18" charset="0"/>
+                <a:cs typeface="Times New Roman" panose="02020603050405020304" pitchFamily="18" charset="0"/>
+              </a:rPr>
+              <a:t>невозможности</a:t>
+            </a:r>
+            <a:r>
+              <a:rPr lang="ru-RU" sz="2400" dirty="0">
+                <a:latin typeface="Times New Roman" panose="02020603050405020304" pitchFamily="18" charset="0"/>
+                <a:cs typeface="Times New Roman" panose="02020603050405020304" pitchFamily="18" charset="0"/>
+              </a:rPr>
+              <a:t> перевести знания в устойчивое поведение. </a:t>
+            </a:r>
+          </a:p>
+        </p:txBody>
+      </p:sp>
+      <p:sp>
+        <p:nvSpPr>
+          <p:cNvPr id="18" name="TextBox 17">
+            <a:extLst>
+              <a:ext uri="{FF2B5EF4-FFF2-40B4-BE49-F238E27FC236}">
+                <a16:creationId xmlns:a16="http://schemas.microsoft.com/office/drawing/2014/main" id="{A69083DB-B9F5-7440-5C16-F4E9CAD99C19}"/>
+              </a:ext>
+            </a:extLst>
+          </p:cNvPr>
+          <p:cNvSpPr txBox="1"/>
+          <p:nvPr/>
+        </p:nvSpPr>
+        <p:spPr>
+          <a:xfrm>
+            <a:off x="7984119" y="1259183"/>
+            <a:ext cx="3745134" cy="1938992"/>
+          </a:xfrm>
+          <a:prstGeom prst="rect">
+            <a:avLst/>
+          </a:prstGeom>
+          <a:noFill/>
+        </p:spPr>
+        <p:txBody>
+          <a:bodyPr wrap="square">
+            <a:spAutoFit/>
+          </a:bodyPr>
+          <a:lstStyle/>
+          <a:p>
+            <a:pPr indent="360363"/>
+            <a:r>
+              <a:rPr lang="ru-RU" sz="2400" b="1" dirty="0">
+                <a:latin typeface="Times New Roman" panose="02020603050405020304" pitchFamily="18" charset="0"/>
+                <a:cs typeface="Times New Roman" panose="02020603050405020304" pitchFamily="18" charset="0"/>
+              </a:rPr>
+              <a:t>Высокий порог входа</a:t>
+            </a:r>
+            <a:endParaRPr lang="en-US" sz="2400" b="1" dirty="0">
+              <a:latin typeface="Times New Roman" panose="02020603050405020304" pitchFamily="18" charset="0"/>
+              <a:cs typeface="Times New Roman" panose="02020603050405020304" pitchFamily="18" charset="0"/>
+            </a:endParaRPr>
+          </a:p>
+          <a:p>
+            <a:pPr marL="342900" indent="-342900">
+              <a:buFontTx/>
+              <a:buChar char="-"/>
+            </a:pPr>
+            <a:r>
+              <a:rPr lang="ru-RU" sz="2400" dirty="0">
+                <a:latin typeface="Times New Roman" panose="02020603050405020304" pitchFamily="18" charset="0"/>
+                <a:cs typeface="Times New Roman" panose="02020603050405020304" pitchFamily="18" charset="0"/>
+              </a:rPr>
+              <a:t>Отдельные приложения</a:t>
+            </a:r>
+            <a:endParaRPr lang="en-US" sz="2400" dirty="0">
+              <a:latin typeface="Times New Roman" panose="02020603050405020304" pitchFamily="18" charset="0"/>
+              <a:cs typeface="Times New Roman" panose="02020603050405020304" pitchFamily="18" charset="0"/>
+            </a:endParaRPr>
+          </a:p>
+          <a:p>
+            <a:pPr marL="342900" indent="-342900">
+              <a:buFontTx/>
+              <a:buChar char="-"/>
+            </a:pPr>
+            <a:r>
+              <a:rPr lang="ru-RU" sz="2400" dirty="0">
+                <a:latin typeface="Times New Roman" panose="02020603050405020304" pitchFamily="18" charset="0"/>
+                <a:cs typeface="Times New Roman" panose="02020603050405020304" pitchFamily="18" charset="0"/>
+              </a:rPr>
+              <a:t>Платная подписка </a:t>
+            </a:r>
+            <a:endParaRPr lang="en-US" sz="2400" dirty="0">
+              <a:latin typeface="Times New Roman" panose="02020603050405020304" pitchFamily="18" charset="0"/>
+              <a:cs typeface="Times New Roman" panose="02020603050405020304" pitchFamily="18" charset="0"/>
+            </a:endParaRPr>
+          </a:p>
+          <a:p>
+            <a:pPr marL="342900" indent="-342900">
+              <a:buFontTx/>
+              <a:buChar char="-"/>
+            </a:pPr>
+            <a:r>
+              <a:rPr lang="ru-RU" sz="2400" dirty="0">
+                <a:latin typeface="Times New Roman" panose="02020603050405020304" pitchFamily="18" charset="0"/>
+                <a:cs typeface="Times New Roman" panose="02020603050405020304" pitchFamily="18" charset="0"/>
+              </a:rPr>
+              <a:t>Требование</a:t>
+            </a:r>
+            <a:r>
+              <a:rPr lang="en-US" sz="2400" dirty="0">
+                <a:latin typeface="Times New Roman" panose="02020603050405020304" pitchFamily="18" charset="0"/>
+                <a:cs typeface="Times New Roman" panose="02020603050405020304" pitchFamily="18" charset="0"/>
+              </a:rPr>
+              <a:t> </a:t>
+            </a:r>
+            <a:r>
+              <a:rPr lang="ru-RU" sz="2400" dirty="0">
+                <a:latin typeface="Times New Roman" panose="02020603050405020304" pitchFamily="18" charset="0"/>
+                <a:cs typeface="Times New Roman" panose="02020603050405020304" pitchFamily="18" charset="0"/>
+              </a:rPr>
+              <a:t>создания аккаунтов</a:t>
+            </a:r>
+          </a:p>
+        </p:txBody>
+      </p:sp>
+      <p:sp>
+        <p:nvSpPr>
+          <p:cNvPr id="20" name="TextBox 19">
+            <a:extLst>
+              <a:ext uri="{FF2B5EF4-FFF2-40B4-BE49-F238E27FC236}">
+                <a16:creationId xmlns:a16="http://schemas.microsoft.com/office/drawing/2014/main" id="{D6A0E321-C939-C296-E8BC-B0B04166D7F0}"/>
+              </a:ext>
+            </a:extLst>
+          </p:cNvPr>
+          <p:cNvSpPr txBox="1"/>
+          <p:nvPr/>
+        </p:nvSpPr>
+        <p:spPr>
+          <a:xfrm>
+            <a:off x="3908081" y="1259183"/>
+            <a:ext cx="3888197" cy="2308324"/>
+          </a:xfrm>
+          <a:prstGeom prst="rect">
+            <a:avLst/>
+          </a:prstGeom>
+          <a:noFill/>
+        </p:spPr>
+        <p:txBody>
+          <a:bodyPr wrap="square">
+            <a:spAutoFit/>
+          </a:bodyPr>
+          <a:lstStyle/>
+          <a:p>
+            <a:pPr indent="360363"/>
+            <a:r>
+              <a:rPr lang="ru-RU" sz="2400" b="1" dirty="0">
+                <a:latin typeface="Times New Roman" panose="02020603050405020304" pitchFamily="18" charset="0"/>
+                <a:cs typeface="Times New Roman" panose="02020603050405020304" pitchFamily="18" charset="0"/>
+              </a:rPr>
+              <a:t>Отсутствие мгновенной обратной связи</a:t>
+            </a:r>
+          </a:p>
+          <a:p>
+            <a:pPr marL="342900" indent="-342900">
+              <a:buFontTx/>
+              <a:buChar char="-"/>
+            </a:pPr>
+            <a:r>
+              <a:rPr lang="ru-RU" sz="2400" dirty="0">
+                <a:latin typeface="Times New Roman" panose="02020603050405020304" pitchFamily="18" charset="0"/>
+                <a:cs typeface="Times New Roman" panose="02020603050405020304" pitchFamily="18" charset="0"/>
+              </a:rPr>
+              <a:t>Недостаток человеческой поддержки</a:t>
+            </a:r>
+          </a:p>
+          <a:p>
+            <a:pPr marL="342900" indent="-342900">
+              <a:buFontTx/>
+              <a:buChar char="-"/>
+            </a:pPr>
+            <a:r>
+              <a:rPr lang="ru-RU" sz="2400" dirty="0">
+                <a:latin typeface="Times New Roman" panose="02020603050405020304" pitchFamily="18" charset="0"/>
+                <a:cs typeface="Times New Roman" panose="02020603050405020304" pitchFamily="18" charset="0"/>
+              </a:rPr>
+              <a:t>Отсутствие разнообразия в сообщениях</a:t>
+            </a:r>
+          </a:p>
+        </p:txBody>
+      </p:sp>
+      <p:sp>
+        <p:nvSpPr>
+          <p:cNvPr id="22" name="TextBox 21">
+            <a:extLst>
+              <a:ext uri="{FF2B5EF4-FFF2-40B4-BE49-F238E27FC236}">
+                <a16:creationId xmlns:a16="http://schemas.microsoft.com/office/drawing/2014/main" id="{3A15A2C3-6639-196C-F2B1-E6390E6D2EDF}"/>
+              </a:ext>
+            </a:extLst>
+          </p:cNvPr>
+          <p:cNvSpPr txBox="1"/>
+          <p:nvPr/>
+        </p:nvSpPr>
+        <p:spPr>
+          <a:xfrm>
+            <a:off x="7984118" y="3914940"/>
+            <a:ext cx="3538181" cy="1938992"/>
+          </a:xfrm>
+          <a:prstGeom prst="rect">
+            <a:avLst/>
+          </a:prstGeom>
+          <a:noFill/>
+        </p:spPr>
+        <p:txBody>
+          <a:bodyPr wrap="square">
+            <a:spAutoFit/>
+          </a:bodyPr>
+          <a:lstStyle/>
+          <a:p>
+            <a:pPr indent="360363"/>
+            <a:r>
+              <a:rPr lang="ru-RU" sz="2400" b="1" dirty="0">
+                <a:latin typeface="Times New Roman" panose="02020603050405020304" pitchFamily="18" charset="0"/>
+                <a:cs typeface="Times New Roman" panose="02020603050405020304" pitchFamily="18" charset="0"/>
+              </a:rPr>
+              <a:t>Отсутствие персонализации</a:t>
+            </a:r>
+          </a:p>
+          <a:p>
+            <a:pPr marL="342900" indent="-342900">
+              <a:buFontTx/>
+              <a:buChar char="-"/>
+            </a:pPr>
+            <a:r>
+              <a:rPr lang="ru-RU" sz="2400" dirty="0">
+                <a:latin typeface="Times New Roman" panose="02020603050405020304" pitchFamily="18" charset="0"/>
+                <a:cs typeface="Times New Roman" panose="02020603050405020304" pitchFamily="18" charset="0"/>
+              </a:rPr>
+              <a:t>Универсальные рекомендации</a:t>
+            </a:r>
+          </a:p>
+          <a:p>
+            <a:pPr marL="342900" indent="-342900">
+              <a:buFontTx/>
+              <a:buChar char="-"/>
+            </a:pPr>
+            <a:r>
+              <a:rPr lang="ru-RU" sz="2400" dirty="0">
+                <a:latin typeface="Times New Roman" panose="02020603050405020304" pitchFamily="18" charset="0"/>
+                <a:cs typeface="Times New Roman" panose="02020603050405020304" pitchFamily="18" charset="0"/>
+              </a:rPr>
+              <a:t>Цифровая усталость</a:t>
+            </a:r>
+          </a:p>
+        </p:txBody>
+      </p:sp>
+      <p:cxnSp>
+        <p:nvCxnSpPr>
+          <p:cNvPr id="23" name="Прямая соединительная линия 22">
+            <a:extLst>
+              <a:ext uri="{FF2B5EF4-FFF2-40B4-BE49-F238E27FC236}">
+                <a16:creationId xmlns:a16="http://schemas.microsoft.com/office/drawing/2014/main" id="{500BAC58-6097-6C85-CBF8-AB369BE82B8E}"/>
+              </a:ext>
+            </a:extLst>
+          </p:cNvPr>
+          <p:cNvCxnSpPr>
+            <a:cxnSpLocks/>
+          </p:cNvCxnSpPr>
+          <p:nvPr/>
+        </p:nvCxnSpPr>
+        <p:spPr>
+          <a:xfrm>
+            <a:off x="7897061" y="1259183"/>
+            <a:ext cx="0" cy="1443800"/>
+          </a:xfrm>
+          <a:prstGeom prst="line">
+            <a:avLst/>
+          </a:prstGeom>
+          <a:ln w="28575">
+            <a:solidFill>
+              <a:srgbClr val="1A3773"/>
+            </a:solidFill>
+          </a:ln>
+        </p:spPr>
+        <p:style>
+          <a:lnRef idx="1">
+            <a:schemeClr val="accent1"/>
+          </a:lnRef>
+          <a:fillRef idx="0">
+            <a:schemeClr val="accent1"/>
+          </a:fillRef>
+          <a:effectRef idx="0">
+            <a:schemeClr val="accent1"/>
+          </a:effectRef>
+          <a:fontRef idx="minor">
+            <a:schemeClr val="tx1"/>
+          </a:fontRef>
+        </p:style>
+      </p:cxnSp>
+      <p:cxnSp>
+        <p:nvCxnSpPr>
+          <p:cNvPr id="24" name="Прямая соединительная линия 23">
+            <a:extLst>
+              <a:ext uri="{FF2B5EF4-FFF2-40B4-BE49-F238E27FC236}">
+                <a16:creationId xmlns:a16="http://schemas.microsoft.com/office/drawing/2014/main" id="{E2F05F64-9669-56C5-478B-BC0E5437AB6E}"/>
+              </a:ext>
+            </a:extLst>
+          </p:cNvPr>
+          <p:cNvCxnSpPr>
+            <a:cxnSpLocks/>
+          </p:cNvCxnSpPr>
+          <p:nvPr/>
+        </p:nvCxnSpPr>
+        <p:spPr>
+          <a:xfrm>
+            <a:off x="3829521" y="3914940"/>
+            <a:ext cx="0" cy="1435100"/>
+          </a:xfrm>
+          <a:prstGeom prst="line">
+            <a:avLst/>
+          </a:prstGeom>
+          <a:ln w="28575">
+            <a:solidFill>
+              <a:srgbClr val="1A3773"/>
+            </a:solidFill>
+          </a:ln>
+        </p:spPr>
+        <p:style>
+          <a:lnRef idx="1">
+            <a:schemeClr val="accent1"/>
+          </a:lnRef>
+          <a:fillRef idx="0">
+            <a:schemeClr val="accent1"/>
+          </a:fillRef>
+          <a:effectRef idx="0">
+            <a:schemeClr val="accent1"/>
+          </a:effectRef>
+          <a:fontRef idx="minor">
+            <a:schemeClr val="tx1"/>
+          </a:fontRef>
+        </p:style>
+      </p:cxnSp>
+      <p:cxnSp>
+        <p:nvCxnSpPr>
+          <p:cNvPr id="25" name="Прямая соединительная линия 24">
+            <a:extLst>
+              <a:ext uri="{FF2B5EF4-FFF2-40B4-BE49-F238E27FC236}">
+                <a16:creationId xmlns:a16="http://schemas.microsoft.com/office/drawing/2014/main" id="{2D0848E9-C705-8F0C-DAD8-999FDD6D1DD1}"/>
+              </a:ext>
+            </a:extLst>
+          </p:cNvPr>
+          <p:cNvCxnSpPr>
+            <a:cxnSpLocks/>
+          </p:cNvCxnSpPr>
+          <p:nvPr/>
+        </p:nvCxnSpPr>
+        <p:spPr>
+          <a:xfrm>
+            <a:off x="7899100" y="3914940"/>
+            <a:ext cx="0" cy="1435100"/>
+          </a:xfrm>
+          <a:prstGeom prst="line">
+            <a:avLst/>
+          </a:prstGeom>
+          <a:ln w="28575">
+            <a:solidFill>
+              <a:srgbClr val="1A3773"/>
+            </a:solidFill>
+          </a:ln>
+        </p:spPr>
+        <p:style>
+          <a:lnRef idx="1">
+            <a:schemeClr val="accent1"/>
+          </a:lnRef>
+          <a:fillRef idx="0">
+            <a:schemeClr val="accent1"/>
+          </a:fillRef>
+          <a:effectRef idx="0">
+            <a:schemeClr val="accent1"/>
+          </a:effectRef>
+          <a:fontRef idx="minor">
+            <a:schemeClr val="tx1"/>
+          </a:fontRef>
+        </p:style>
+      </p:cxnSp>
+    </p:spTree>
+    <p:extLst>
+      <p:ext uri="{BB962C8B-B14F-4D97-AF65-F5344CB8AC3E}">
+        <p14:creationId xmlns:p14="http://schemas.microsoft.com/office/powerpoint/2010/main" val="3684285377"/>
+      </p:ext>
+    </p:extLst>
+  </p:cSld>
+  <p:clrMapOvr>
+    <a:masterClrMapping/>
+  </p:clrMapOvr>
+</p:sld>
+</file>
+
+<file path=ppt/slides/slide5.xml><?xml version="1.0" encoding="utf-8"?>
+<p:sld xmlns:a="http://schemas.openxmlformats.org/drawingml/2006/main" xmlns:r="http://schemas.openxmlformats.org/officeDocument/2006/relationships" xmlns:p="http://schemas.openxmlformats.org/presentationml/2006/main">
+  <p:cSld>
+    <p:spTree>
+      <p:nvGrpSpPr>
+        <p:cNvPr id="1" name="">
+          <a:extLst>
+            <a:ext uri="{FF2B5EF4-FFF2-40B4-BE49-F238E27FC236}">
+              <a16:creationId xmlns:a16="http://schemas.microsoft.com/office/drawing/2014/main" id="{B9ADF3A9-89F0-C507-2228-C39F8AC8CC54}"/>
+            </a:ext>
+          </a:extLst>
+        </p:cNvPr>
+        <p:cNvGrpSpPr/>
+        <p:nvPr/>
+      </p:nvGrpSpPr>
+      <p:grpSpPr>
+        <a:xfrm>
+          <a:off x="0" y="0"/>
+          <a:ext cx="0" cy="0"/>
+          <a:chOff x="0" y="0"/>
+          <a:chExt cx="0" cy="0"/>
+        </a:xfrm>
+      </p:grpSpPr>
+      <p:sp>
+        <p:nvSpPr>
+          <p:cNvPr id="6" name="TextBox 5">
+            <a:extLst>
+              <a:ext uri="{FF2B5EF4-FFF2-40B4-BE49-F238E27FC236}">
+                <a16:creationId xmlns:a16="http://schemas.microsoft.com/office/drawing/2014/main" id="{2E0C2DEE-F6FF-173F-809E-C44A9FFA9E06}"/>
+              </a:ext>
+            </a:extLst>
+          </p:cNvPr>
+          <p:cNvSpPr txBox="1"/>
+          <p:nvPr/>
+        </p:nvSpPr>
+        <p:spPr>
+          <a:xfrm>
+            <a:off x="3784600" y="273858"/>
+            <a:ext cx="8107363" cy="646331"/>
+          </a:xfrm>
+          <a:prstGeom prst="rect">
+            <a:avLst/>
+          </a:prstGeom>
+          <a:noFill/>
+        </p:spPr>
+        <p:txBody>
+          <a:bodyPr wrap="square" rtlCol="0">
+            <a:spAutoFit/>
+          </a:bodyPr>
+          <a:lstStyle/>
+          <a:p>
+            <a:r>
+              <a:rPr lang="ru-RU" sz="3600" dirty="0">
+                <a:solidFill>
+                  <a:srgbClr val="274E9C"/>
+                </a:solidFill>
+                <a:latin typeface="Inter Variable Text Medium" panose="02000503000000020004" pitchFamily="2" charset="0"/>
+                <a:ea typeface="Inter Variable Text Medium" panose="02000503000000020004" pitchFamily="2" charset="0"/>
+                <a:cs typeface="Inter Variable Text Medium" panose="02000503000000020004" pitchFamily="2" charset="0"/>
+              </a:rPr>
+              <a:t>Архитектура авторской методики</a:t>
+            </a:r>
+          </a:p>
+        </p:txBody>
+      </p:sp>
+      <p:pic>
+        <p:nvPicPr>
+          <p:cNvPr id="2" name="Рисунок 1">
+            <a:extLst>
+              <a:ext uri="{FF2B5EF4-FFF2-40B4-BE49-F238E27FC236}">
+                <a16:creationId xmlns:a16="http://schemas.microsoft.com/office/drawing/2014/main" id="{886AB62A-348F-9827-EB9C-ECBE0E2A0F0C}"/>
+              </a:ext>
+            </a:extLst>
+          </p:cNvPr>
+          <p:cNvPicPr>
+            <a:picLocks noChangeAspect="1"/>
+          </p:cNvPicPr>
+          <p:nvPr/>
+        </p:nvPicPr>
+        <p:blipFill>
+          <a:blip r:embed="rId3"/>
+          <a:stretch>
+            <a:fillRect/>
+          </a:stretch>
+        </p:blipFill>
+        <p:spPr>
+          <a:xfrm>
+            <a:off x="300037" y="273858"/>
+            <a:ext cx="2990861" cy="640543"/>
+          </a:xfrm>
+          <a:prstGeom prst="rect">
+            <a:avLst/>
+          </a:prstGeom>
+        </p:spPr>
+      </p:pic>
+      <p:grpSp>
+        <p:nvGrpSpPr>
+          <p:cNvPr id="15" name="Группа 14">
+            <a:extLst>
+              <a:ext uri="{FF2B5EF4-FFF2-40B4-BE49-F238E27FC236}">
+                <a16:creationId xmlns:a16="http://schemas.microsoft.com/office/drawing/2014/main" id="{5C89114B-91A8-5CB8-1621-84455384AC07}"/>
+              </a:ext>
+            </a:extLst>
+          </p:cNvPr>
+          <p:cNvGrpSpPr/>
+          <p:nvPr/>
+        </p:nvGrpSpPr>
+        <p:grpSpPr>
+          <a:xfrm>
+            <a:off x="11641128" y="6312477"/>
+            <a:ext cx="490760" cy="490760"/>
+            <a:chOff x="11383518" y="6084717"/>
+            <a:chExt cx="618259" cy="618259"/>
+          </a:xfrm>
+        </p:grpSpPr>
+        <p:sp>
+          <p:nvSpPr>
+            <p:cNvPr id="16" name="Прямоугольник: скругленные углы 15">
+              <a:extLst>
+                <a:ext uri="{FF2B5EF4-FFF2-40B4-BE49-F238E27FC236}">
+                  <a16:creationId xmlns:a16="http://schemas.microsoft.com/office/drawing/2014/main" id="{A625FBA2-57D2-1DD0-663A-46838EF01CD1}"/>
+                </a:ext>
+              </a:extLst>
+            </p:cNvPr>
+            <p:cNvSpPr/>
+            <p:nvPr/>
+          </p:nvSpPr>
+          <p:spPr>
+            <a:xfrm>
+              <a:off x="11383518" y="6084717"/>
+              <a:ext cx="618259" cy="618259"/>
+            </a:xfrm>
+            <a:prstGeom prst="roundRect">
+              <a:avLst/>
+            </a:prstGeom>
+            <a:solidFill>
+              <a:srgbClr val="1A3773"/>
+            </a:solidFill>
+            <a:ln>
+              <a:solidFill>
+                <a:srgbClr val="1A3773"/>
+              </a:solidFill>
+            </a:ln>
+          </p:spPr>
+          <p:style>
+            <a:lnRef idx="2">
+              <a:schemeClr val="accent1">
+                <a:shade val="15000"/>
+              </a:schemeClr>
+            </a:lnRef>
+            <a:fillRef idx="1">
+              <a:schemeClr val="accent1"/>
+            </a:fillRef>
+            <a:effectRef idx="0">
+              <a:schemeClr val="accent1"/>
+            </a:effectRef>
+            <a:fontRef idx="minor">
+              <a:schemeClr val="lt1"/>
+            </a:fontRef>
+          </p:style>
+          <p:txBody>
+            <a:bodyPr rtlCol="0" anchor="ctr"/>
+            <a:lstStyle/>
+            <a:p>
+              <a:pPr algn="ctr"/>
+              <a:endParaRPr lang="en-US"/>
+            </a:p>
+          </p:txBody>
+        </p:sp>
+        <p:sp>
+          <p:nvSpPr>
+            <p:cNvPr id="17" name="TextBox 16">
+              <a:extLst>
+                <a:ext uri="{FF2B5EF4-FFF2-40B4-BE49-F238E27FC236}">
+                  <a16:creationId xmlns:a16="http://schemas.microsoft.com/office/drawing/2014/main" id="{519F281B-300F-E545-8A5E-991DD30C5D6B}"/>
+                </a:ext>
+              </a:extLst>
+            </p:cNvPr>
+            <p:cNvSpPr txBox="1"/>
+            <p:nvPr/>
+          </p:nvSpPr>
+          <p:spPr>
+            <a:xfrm>
+              <a:off x="11508348" y="6199977"/>
+              <a:ext cx="368600" cy="387737"/>
+            </a:xfrm>
+            <a:prstGeom prst="rect">
+              <a:avLst/>
+            </a:prstGeom>
+            <a:noFill/>
+          </p:spPr>
+          <p:txBody>
+            <a:bodyPr wrap="square" rtlCol="0">
+              <a:spAutoFit/>
+            </a:bodyPr>
+            <a:lstStyle/>
+            <a:p>
+              <a:pPr algn="ctr"/>
+              <a:r>
+                <a:rPr lang="ru-RU" sz="1400" dirty="0">
+                  <a:solidFill>
+                    <a:schemeClr val="bg1"/>
+                  </a:solidFill>
+                  <a:latin typeface="Inter Variable Text" panose="02000503000000020004" pitchFamily="2" charset="0"/>
+                  <a:ea typeface="Inter Variable Text" panose="02000503000000020004" pitchFamily="2" charset="0"/>
+                  <a:cs typeface="Inter Variable Text" panose="02000503000000020004" pitchFamily="2" charset="0"/>
+                </a:rPr>
+                <a:t>5</a:t>
+              </a:r>
+              <a:endParaRPr lang="en-US" sz="1400" dirty="0">
+                <a:solidFill>
+                  <a:schemeClr val="bg1"/>
+                </a:solidFill>
+                <a:latin typeface="Inter Variable Text" panose="02000503000000020004" pitchFamily="2" charset="0"/>
+                <a:ea typeface="Inter Variable Text" panose="02000503000000020004" pitchFamily="2" charset="0"/>
+                <a:cs typeface="Inter Variable Text" panose="02000503000000020004" pitchFamily="2" charset="0"/>
+              </a:endParaRPr>
+            </a:p>
+          </p:txBody>
+        </p:sp>
+      </p:grpSp>
+      <p:sp>
+        <p:nvSpPr>
+          <p:cNvPr id="7" name="TextBox 6">
+            <a:extLst>
+              <a:ext uri="{FF2B5EF4-FFF2-40B4-BE49-F238E27FC236}">
+                <a16:creationId xmlns:a16="http://schemas.microsoft.com/office/drawing/2014/main" id="{F64648A3-B21E-1539-D918-7C9A88BFBA83}"/>
+              </a:ext>
+            </a:extLst>
+          </p:cNvPr>
+          <p:cNvSpPr txBox="1"/>
+          <p:nvPr/>
+        </p:nvSpPr>
+        <p:spPr>
+          <a:xfrm>
+            <a:off x="4066366" y="1248366"/>
+            <a:ext cx="3452052" cy="1569660"/>
+          </a:xfrm>
+          <a:prstGeom prst="rect">
+            <a:avLst/>
+          </a:prstGeom>
+          <a:noFill/>
+        </p:spPr>
+        <p:txBody>
+          <a:bodyPr wrap="square">
+            <a:spAutoFit/>
+          </a:bodyPr>
+          <a:lstStyle/>
+          <a:p>
+            <a:r>
+              <a:rPr lang="ru-RU" sz="2400" b="1" dirty="0">
+                <a:latin typeface="Times New Roman" panose="02020603050405020304" pitchFamily="18" charset="0"/>
+                <a:cs typeface="Times New Roman" panose="02020603050405020304" pitchFamily="18" charset="0"/>
+              </a:rPr>
+              <a:t>Игровая механика мотивации</a:t>
+            </a:r>
+          </a:p>
+          <a:p>
+            <a:pPr marL="285750" indent="-285750">
+              <a:buFontTx/>
+              <a:buChar char="-"/>
+            </a:pPr>
+            <a:r>
+              <a:rPr lang="ru-RU" sz="2400" dirty="0">
+                <a:latin typeface="Times New Roman" panose="02020603050405020304" pitchFamily="18" charset="0"/>
+                <a:cs typeface="Times New Roman" panose="02020603050405020304" pitchFamily="18" charset="0"/>
+              </a:rPr>
+              <a:t>Прогресс опыта</a:t>
+            </a:r>
+          </a:p>
+          <a:p>
+            <a:pPr marL="285750" indent="-285750">
+              <a:buFontTx/>
+              <a:buChar char="-"/>
+            </a:pPr>
+            <a:r>
+              <a:rPr lang="ru-RU" sz="2400" dirty="0">
+                <a:latin typeface="Times New Roman" panose="02020603050405020304" pitchFamily="18" charset="0"/>
+                <a:cs typeface="Times New Roman" panose="02020603050405020304" pitchFamily="18" charset="0"/>
+              </a:rPr>
+              <a:t>Система достижений</a:t>
+            </a:r>
+          </a:p>
+        </p:txBody>
+      </p:sp>
+      <p:sp>
+        <p:nvSpPr>
+          <p:cNvPr id="10" name="Объект 2">
+            <a:extLst>
+              <a:ext uri="{FF2B5EF4-FFF2-40B4-BE49-F238E27FC236}">
+                <a16:creationId xmlns:a16="http://schemas.microsoft.com/office/drawing/2014/main" id="{6ACCBC09-E132-50B1-9E33-B5C720C9B983}"/>
+              </a:ext>
+            </a:extLst>
+          </p:cNvPr>
+          <p:cNvSpPr txBox="1">
+            <a:spLocks/>
+          </p:cNvSpPr>
+          <p:nvPr/>
+        </p:nvSpPr>
+        <p:spPr>
+          <a:xfrm>
+            <a:off x="418852" y="1259899"/>
+            <a:ext cx="3427638" cy="4338204"/>
+          </a:xfrm>
+          <a:prstGeom prst="roundRect">
+            <a:avLst>
+              <a:gd name="adj" fmla="val 4817"/>
+            </a:avLst>
+          </a:prstGeom>
+          <a:ln w="12700">
+            <a:solidFill>
+              <a:srgbClr val="1A3773"/>
+            </a:solidFill>
+            <a:prstDash val="dash"/>
+          </a:ln>
+        </p:spPr>
+        <p:txBody>
+          <a:bodyPr anchor="ctr"/>
+          <a:lstStyle>
+            <a:lvl1pPr marL="0" indent="0" algn="ctr" defTabSz="914400" rtl="0" eaLnBrk="1" latinLnBrk="0" hangingPunct="1">
+              <a:lnSpc>
+                <a:spcPct val="90000"/>
+              </a:lnSpc>
+              <a:spcBef>
+                <a:spcPts val="1000"/>
+              </a:spcBef>
+              <a:buFont typeface="Arial"/>
+              <a:buNone/>
+              <a:defRPr sz="2800" b="0" i="0" kern="1200">
+                <a:solidFill>
+                  <a:schemeClr val="tx1">
+                    <a:lumMod val="85000"/>
+                    <a:lumOff val="15000"/>
+                  </a:schemeClr>
+                </a:solidFill>
+                <a:latin typeface="+mn-lt"/>
+                <a:ea typeface="Open Sans Light" charset="0"/>
+                <a:cs typeface="Open Sans Light" charset="0"/>
+              </a:defRPr>
+            </a:lvl1pPr>
+            <a:lvl2pPr marL="685800" indent="-228600" algn="l" defTabSz="914400" rtl="0" eaLnBrk="1" latinLnBrk="0" hangingPunct="1">
+              <a:lnSpc>
+                <a:spcPct val="90000"/>
+              </a:lnSpc>
+              <a:spcBef>
+                <a:spcPts val="500"/>
+              </a:spcBef>
+              <a:buFont typeface="Arial"/>
+              <a:buChar char="•"/>
+              <a:defRPr sz="2400" b="0" i="0" kern="1200">
+                <a:solidFill>
+                  <a:schemeClr val="tx1"/>
+                </a:solidFill>
+                <a:latin typeface="+mn-lt"/>
+                <a:ea typeface="Open Sans Light" charset="0"/>
+                <a:cs typeface="Open Sans Light" charset="0"/>
+              </a:defRPr>
+            </a:lvl2pPr>
+            <a:lvl3pPr marL="1143000" indent="-228600" algn="l" defTabSz="914400" rtl="0" eaLnBrk="1" latinLnBrk="0" hangingPunct="1">
+              <a:lnSpc>
+                <a:spcPct val="90000"/>
+              </a:lnSpc>
+              <a:spcBef>
+                <a:spcPts val="500"/>
+              </a:spcBef>
+              <a:buFont typeface="Arial"/>
+              <a:buChar char="•"/>
+              <a:defRPr sz="2000" b="0" i="0" kern="1200">
+                <a:solidFill>
+                  <a:schemeClr val="tx1"/>
+                </a:solidFill>
+                <a:latin typeface="+mn-lt"/>
+                <a:ea typeface="Open Sans Light" charset="0"/>
+                <a:cs typeface="Open Sans Light" charset="0"/>
+              </a:defRPr>
+            </a:lvl3pPr>
+            <a:lvl4pPr marL="1600200" indent="-228600" algn="l" defTabSz="914400" rtl="0" eaLnBrk="1" latinLnBrk="0" hangingPunct="1">
+              <a:lnSpc>
+                <a:spcPct val="90000"/>
+              </a:lnSpc>
+              <a:spcBef>
+                <a:spcPts val="500"/>
+              </a:spcBef>
+              <a:buFont typeface="Arial"/>
+              <a:buChar char="•"/>
+              <a:defRPr sz="1800" b="0" i="0" kern="1200">
+                <a:solidFill>
+                  <a:schemeClr val="tx1"/>
+                </a:solidFill>
+                <a:latin typeface="+mn-lt"/>
+                <a:ea typeface="Open Sans Light" charset="0"/>
+                <a:cs typeface="Open Sans Light" charset="0"/>
+              </a:defRPr>
+            </a:lvl4pPr>
+            <a:lvl5pPr marL="2057400" indent="-228600" algn="l" defTabSz="914400" rtl="0" eaLnBrk="1" latinLnBrk="0" hangingPunct="1">
+              <a:lnSpc>
+                <a:spcPct val="90000"/>
+              </a:lnSpc>
+              <a:spcBef>
+                <a:spcPts val="500"/>
+              </a:spcBef>
+              <a:buFont typeface="Arial"/>
+              <a:buChar char="•"/>
+              <a:defRPr sz="1800" b="0" i="0" kern="1200">
+                <a:solidFill>
+                  <a:schemeClr val="tx1"/>
+                </a:solidFill>
+                <a:latin typeface="+mn-lt"/>
+                <a:ea typeface="Open Sans Light" charset="0"/>
+                <a:cs typeface="Open Sans Light" charset="0"/>
+              </a:defRPr>
+            </a:lvl5pPr>
+            <a:lvl6pPr marL="2514600" indent="-228600" algn="l" defTabSz="914400" rtl="0" eaLnBrk="1" latinLnBrk="0" hangingPunct="1">
+              <a:lnSpc>
+                <a:spcPct val="90000"/>
+              </a:lnSpc>
+              <a:spcBef>
+                <a:spcPts val="500"/>
+              </a:spcBef>
+              <a:buFont typeface="Arial"/>
+              <a:buChar char="•"/>
+              <a:defRPr sz="1800" kern="1200">
+                <a:solidFill>
+                  <a:schemeClr val="tx1"/>
+                </a:solidFill>
+                <a:latin typeface="+mn-lt"/>
+                <a:ea typeface="+mn-ea"/>
+                <a:cs typeface="+mn-cs"/>
+              </a:defRPr>
+            </a:lvl6pPr>
+            <a:lvl7pPr marL="2971800" indent="-228600" algn="l" defTabSz="914400" rtl="0" eaLnBrk="1" latinLnBrk="0" hangingPunct="1">
+              <a:lnSpc>
+                <a:spcPct val="90000"/>
+              </a:lnSpc>
+              <a:spcBef>
+                <a:spcPts val="500"/>
+              </a:spcBef>
+              <a:buFont typeface="Arial"/>
+              <a:buChar char="•"/>
+              <a:defRPr sz="1800" kern="1200">
+                <a:solidFill>
+                  <a:schemeClr val="tx1"/>
+                </a:solidFill>
+                <a:latin typeface="+mn-lt"/>
+                <a:ea typeface="+mn-ea"/>
+                <a:cs typeface="+mn-cs"/>
+              </a:defRPr>
+            </a:lvl7pPr>
+            <a:lvl8pPr marL="3429000" indent="-228600" algn="l" defTabSz="914400" rtl="0" eaLnBrk="1" latinLnBrk="0" hangingPunct="1">
+              <a:lnSpc>
+                <a:spcPct val="90000"/>
+              </a:lnSpc>
+              <a:spcBef>
+                <a:spcPts val="500"/>
+              </a:spcBef>
+              <a:buFont typeface="Arial"/>
+              <a:buChar char="•"/>
+              <a:defRPr sz="1800" kern="1200">
+                <a:solidFill>
+                  <a:schemeClr val="tx1"/>
+                </a:solidFill>
+                <a:latin typeface="+mn-lt"/>
+                <a:ea typeface="+mn-ea"/>
+                <a:cs typeface="+mn-cs"/>
+              </a:defRPr>
+            </a:lvl8pPr>
+            <a:lvl9pPr marL="3886200" indent="-228600" algn="l" defTabSz="914400" rtl="0" eaLnBrk="1" latinLnBrk="0" hangingPunct="1">
+              <a:lnSpc>
+                <a:spcPct val="90000"/>
+              </a:lnSpc>
+              <a:spcBef>
+                <a:spcPts val="500"/>
+              </a:spcBef>
+              <a:buFont typeface="Arial"/>
+              <a:buChar char="•"/>
+              <a:defRPr sz="1800" kern="1200">
+                <a:solidFill>
+                  <a:schemeClr val="tx1"/>
+                </a:solidFill>
+                <a:latin typeface="+mn-lt"/>
+                <a:ea typeface="+mn-ea"/>
+                <a:cs typeface="+mn-cs"/>
+              </a:defRPr>
+            </a:lvl9pPr>
+          </a:lstStyle>
+          <a:p>
+            <a:endParaRPr lang="ru-RU" sz="2400"/>
+          </a:p>
+        </p:txBody>
+      </p:sp>
+      <p:cxnSp>
+        <p:nvCxnSpPr>
+          <p:cNvPr id="11" name="Прямая соединительная линия 10">
+            <a:extLst>
+              <a:ext uri="{FF2B5EF4-FFF2-40B4-BE49-F238E27FC236}">
+                <a16:creationId xmlns:a16="http://schemas.microsoft.com/office/drawing/2014/main" id="{95A8C5A7-EF5E-7D21-A826-9FD7CD988654}"/>
+              </a:ext>
+            </a:extLst>
+          </p:cNvPr>
+          <p:cNvCxnSpPr>
+            <a:cxnSpLocks/>
+          </p:cNvCxnSpPr>
+          <p:nvPr/>
+        </p:nvCxnSpPr>
+        <p:spPr>
+          <a:xfrm>
+            <a:off x="3979307" y="1259183"/>
+            <a:ext cx="0" cy="1443800"/>
+          </a:xfrm>
+          <a:prstGeom prst="line">
+            <a:avLst/>
+          </a:prstGeom>
+          <a:ln w="28575">
+            <a:solidFill>
+              <a:srgbClr val="1A3773"/>
+            </a:solidFill>
+          </a:ln>
+        </p:spPr>
+        <p:style>
+          <a:lnRef idx="1">
+            <a:schemeClr val="accent1"/>
+          </a:lnRef>
+          <a:fillRef idx="0">
+            <a:schemeClr val="accent1"/>
+          </a:fillRef>
+          <a:effectRef idx="0">
+            <a:schemeClr val="accent1"/>
+          </a:effectRef>
+          <a:fontRef idx="minor">
+            <a:schemeClr val="tx1"/>
+          </a:fontRef>
+        </p:style>
+      </p:cxnSp>
+      <p:sp>
+        <p:nvSpPr>
+          <p:cNvPr id="13" name="TextBox 12">
+            <a:extLst>
+              <a:ext uri="{FF2B5EF4-FFF2-40B4-BE49-F238E27FC236}">
+                <a16:creationId xmlns:a16="http://schemas.microsoft.com/office/drawing/2014/main" id="{13BE9ADE-8FCB-07E9-7693-A90600D595DB}"/>
+              </a:ext>
+            </a:extLst>
+          </p:cNvPr>
+          <p:cNvSpPr txBox="1"/>
+          <p:nvPr/>
+        </p:nvSpPr>
+        <p:spPr>
+          <a:xfrm>
+            <a:off x="497840" y="2090172"/>
+            <a:ext cx="3286760" cy="2677656"/>
+          </a:xfrm>
+          <a:prstGeom prst="rect">
+            <a:avLst/>
+          </a:prstGeom>
+          <a:noFill/>
+        </p:spPr>
+        <p:txBody>
+          <a:bodyPr wrap="square">
+            <a:spAutoFit/>
+          </a:bodyPr>
+          <a:lstStyle/>
+          <a:p>
+            <a:r>
+              <a:rPr lang="ru-RU" sz="2400" dirty="0">
+                <a:latin typeface="Times New Roman" panose="02020603050405020304" pitchFamily="18" charset="0"/>
+                <a:cs typeface="Times New Roman" panose="02020603050405020304" pitchFamily="18" charset="0"/>
+              </a:rPr>
+              <a:t>Архитектура методики включает четыре ключевых компонента, каждый из которых имеет четкий функционал и механизмы реализации.</a:t>
+            </a:r>
+          </a:p>
+        </p:txBody>
+      </p:sp>
+      <p:sp>
+        <p:nvSpPr>
+          <p:cNvPr id="18" name="TextBox 17">
+            <a:extLst>
+              <a:ext uri="{FF2B5EF4-FFF2-40B4-BE49-F238E27FC236}">
+                <a16:creationId xmlns:a16="http://schemas.microsoft.com/office/drawing/2014/main" id="{8426B2C5-15FF-835C-1F25-1CE2B9BBE976}"/>
+              </a:ext>
+            </a:extLst>
+          </p:cNvPr>
+          <p:cNvSpPr txBox="1"/>
+          <p:nvPr/>
+        </p:nvSpPr>
+        <p:spPr>
+          <a:xfrm>
+            <a:off x="7967610" y="1259183"/>
+            <a:ext cx="3558984" cy="1938992"/>
+          </a:xfrm>
+          <a:prstGeom prst="rect">
+            <a:avLst/>
+          </a:prstGeom>
+          <a:noFill/>
+        </p:spPr>
+        <p:txBody>
+          <a:bodyPr wrap="square">
+            <a:spAutoFit/>
+          </a:bodyPr>
+          <a:lstStyle/>
+          <a:p>
+            <a:r>
+              <a:rPr lang="ru-RU" sz="2400" b="1" dirty="0">
+                <a:latin typeface="Times New Roman" panose="02020603050405020304" pitchFamily="18" charset="0"/>
+                <a:cs typeface="Times New Roman" panose="02020603050405020304" pitchFamily="18" charset="0"/>
+              </a:rPr>
+              <a:t>Система автоматизированного наставничества</a:t>
+            </a:r>
+          </a:p>
+          <a:p>
+            <a:pPr marL="285750" indent="-285750">
+              <a:buFontTx/>
+              <a:buChar char="-"/>
+            </a:pPr>
+            <a:r>
+              <a:rPr lang="ru-RU" sz="2400" dirty="0">
+                <a:latin typeface="Times New Roman" panose="02020603050405020304" pitchFamily="18" charset="0"/>
+                <a:cs typeface="Times New Roman" panose="02020603050405020304" pitchFamily="18" charset="0"/>
+              </a:rPr>
+              <a:t>Поиск собеседника</a:t>
+            </a:r>
+          </a:p>
+          <a:p>
+            <a:pPr marL="285750" indent="-285750">
+              <a:buFontTx/>
+              <a:buChar char="-"/>
+            </a:pPr>
+            <a:r>
+              <a:rPr lang="ru-RU" sz="2400" dirty="0">
+                <a:latin typeface="Times New Roman" panose="02020603050405020304" pitchFamily="18" charset="0"/>
+                <a:cs typeface="Times New Roman" panose="02020603050405020304" pitchFamily="18" charset="0"/>
+              </a:rPr>
+              <a:t>Система жалоб</a:t>
+            </a:r>
+          </a:p>
+        </p:txBody>
+      </p:sp>
+      <p:sp>
+        <p:nvSpPr>
+          <p:cNvPr id="20" name="TextBox 19">
+            <a:extLst>
+              <a:ext uri="{FF2B5EF4-FFF2-40B4-BE49-F238E27FC236}">
+                <a16:creationId xmlns:a16="http://schemas.microsoft.com/office/drawing/2014/main" id="{59715700-4928-9F2E-5721-B24F5061766A}"/>
+              </a:ext>
+            </a:extLst>
+          </p:cNvPr>
+          <p:cNvSpPr txBox="1"/>
+          <p:nvPr/>
+        </p:nvSpPr>
+        <p:spPr>
+          <a:xfrm>
+            <a:off x="4066364" y="3429000"/>
+            <a:ext cx="3733817" cy="2308324"/>
+          </a:xfrm>
+          <a:prstGeom prst="rect">
+            <a:avLst/>
+          </a:prstGeom>
+          <a:noFill/>
+        </p:spPr>
+        <p:txBody>
+          <a:bodyPr wrap="square">
+            <a:spAutoFit/>
+          </a:bodyPr>
+          <a:lstStyle/>
+          <a:p>
+            <a:r>
+              <a:rPr lang="ru-RU" sz="2400" b="1" dirty="0">
+                <a:latin typeface="Times New Roman" panose="02020603050405020304" pitchFamily="18" charset="0"/>
+                <a:cs typeface="Times New Roman" panose="02020603050405020304" pitchFamily="18" charset="0"/>
+              </a:rPr>
+              <a:t>Адаптивная программа формирования привычек</a:t>
+            </a:r>
+          </a:p>
+          <a:p>
+            <a:pPr marL="285750" indent="-285750">
+              <a:buFontTx/>
+              <a:buChar char="-"/>
+            </a:pPr>
+            <a:r>
+              <a:rPr lang="ru-RU" sz="2400" dirty="0">
+                <a:latin typeface="Times New Roman" panose="02020603050405020304" pitchFamily="18" charset="0"/>
+                <a:cs typeface="Times New Roman" panose="02020603050405020304" pitchFamily="18" charset="0"/>
+              </a:rPr>
+              <a:t>Минималистичный дизайн</a:t>
+            </a:r>
+          </a:p>
+          <a:p>
+            <a:pPr marL="285750" indent="-285750">
+              <a:buFontTx/>
+              <a:buChar char="-"/>
+            </a:pPr>
+            <a:r>
+              <a:rPr lang="ru-RU" sz="2400" dirty="0">
+                <a:latin typeface="Times New Roman" panose="02020603050405020304" pitchFamily="18" charset="0"/>
+                <a:cs typeface="Times New Roman" panose="02020603050405020304" pitchFamily="18" charset="0"/>
+              </a:rPr>
+              <a:t>Персонализированная коммуникация</a:t>
+            </a:r>
+          </a:p>
+        </p:txBody>
+      </p:sp>
+      <p:sp>
+        <p:nvSpPr>
+          <p:cNvPr id="22" name="TextBox 21">
+            <a:extLst>
+              <a:ext uri="{FF2B5EF4-FFF2-40B4-BE49-F238E27FC236}">
+                <a16:creationId xmlns:a16="http://schemas.microsoft.com/office/drawing/2014/main" id="{4241E459-65BF-BE20-BC9B-8340289BD608}"/>
+              </a:ext>
+            </a:extLst>
+          </p:cNvPr>
+          <p:cNvSpPr txBox="1"/>
+          <p:nvPr/>
+        </p:nvSpPr>
+        <p:spPr>
+          <a:xfrm>
+            <a:off x="7967608" y="3429000"/>
+            <a:ext cx="3648797" cy="2308324"/>
+          </a:xfrm>
+          <a:prstGeom prst="rect">
+            <a:avLst/>
+          </a:prstGeom>
+          <a:noFill/>
+        </p:spPr>
+        <p:txBody>
+          <a:bodyPr wrap="square">
+            <a:spAutoFit/>
+          </a:bodyPr>
+          <a:lstStyle/>
+          <a:p>
+            <a:r>
+              <a:rPr lang="ru-RU" sz="2400" b="1" dirty="0">
+                <a:latin typeface="Times New Roman" panose="02020603050405020304" pitchFamily="18" charset="0"/>
+                <a:cs typeface="Times New Roman" panose="02020603050405020304" pitchFamily="18" charset="0"/>
+              </a:rPr>
+              <a:t>Система сбора данных и аналитики прогресса</a:t>
+            </a:r>
+          </a:p>
+          <a:p>
+            <a:pPr marL="285750" indent="-285750">
+              <a:buFontTx/>
+              <a:buChar char="-"/>
+            </a:pPr>
+            <a:r>
+              <a:rPr lang="ru-RU" sz="2400" dirty="0">
+                <a:latin typeface="Times New Roman" panose="02020603050405020304" pitchFamily="18" charset="0"/>
+                <a:cs typeface="Times New Roman" panose="02020603050405020304" pitchFamily="18" charset="0"/>
+              </a:rPr>
+              <a:t>Прогресс в личном кабинете</a:t>
+            </a:r>
+          </a:p>
+          <a:p>
+            <a:pPr marL="285750" indent="-285750">
+              <a:buFontTx/>
+              <a:buChar char="-"/>
+            </a:pPr>
+            <a:r>
+              <a:rPr lang="ru-RU" sz="2400" dirty="0">
+                <a:latin typeface="Times New Roman" panose="02020603050405020304" pitchFamily="18" charset="0"/>
+                <a:cs typeface="Times New Roman" panose="02020603050405020304" pitchFamily="18" charset="0"/>
+              </a:rPr>
+              <a:t>Статистика</a:t>
+            </a:r>
+            <a:endParaRPr lang="en-US" sz="2400" dirty="0">
+              <a:latin typeface="Times New Roman" panose="02020603050405020304" pitchFamily="18" charset="0"/>
+              <a:cs typeface="Times New Roman" panose="02020603050405020304" pitchFamily="18" charset="0"/>
+            </a:endParaRPr>
+          </a:p>
+          <a:p>
+            <a:pPr marL="285750" indent="-285750">
+              <a:buFontTx/>
+              <a:buChar char="-"/>
+            </a:pPr>
+            <a:r>
+              <a:rPr lang="ru-RU" sz="2400" dirty="0">
+                <a:latin typeface="Times New Roman" panose="02020603050405020304" pitchFamily="18" charset="0"/>
+                <a:cs typeface="Times New Roman" panose="02020603050405020304" pitchFamily="18" charset="0"/>
+              </a:rPr>
+              <a:t>Отчеты</a:t>
+            </a:r>
+          </a:p>
+        </p:txBody>
+      </p:sp>
+      <p:cxnSp>
+        <p:nvCxnSpPr>
+          <p:cNvPr id="23" name="Прямая соединительная линия 22">
+            <a:extLst>
+              <a:ext uri="{FF2B5EF4-FFF2-40B4-BE49-F238E27FC236}">
+                <a16:creationId xmlns:a16="http://schemas.microsoft.com/office/drawing/2014/main" id="{3A7F7889-E289-4E2D-2474-566CD3191DB7}"/>
+              </a:ext>
+            </a:extLst>
+          </p:cNvPr>
+          <p:cNvCxnSpPr>
+            <a:cxnSpLocks/>
+          </p:cNvCxnSpPr>
+          <p:nvPr/>
+        </p:nvCxnSpPr>
+        <p:spPr>
+          <a:xfrm>
+            <a:off x="7880552" y="1259183"/>
+            <a:ext cx="0" cy="1443800"/>
+          </a:xfrm>
+          <a:prstGeom prst="line">
+            <a:avLst/>
+          </a:prstGeom>
+          <a:ln w="28575">
+            <a:solidFill>
+              <a:srgbClr val="1A3773"/>
+            </a:solidFill>
+          </a:ln>
+        </p:spPr>
+        <p:style>
+          <a:lnRef idx="1">
+            <a:schemeClr val="accent1"/>
+          </a:lnRef>
+          <a:fillRef idx="0">
+            <a:schemeClr val="accent1"/>
+          </a:fillRef>
+          <a:effectRef idx="0">
+            <a:schemeClr val="accent1"/>
+          </a:effectRef>
+          <a:fontRef idx="minor">
+            <a:schemeClr val="tx1"/>
+          </a:fontRef>
+        </p:style>
+      </p:cxnSp>
+      <p:cxnSp>
+        <p:nvCxnSpPr>
+          <p:cNvPr id="24" name="Прямая соединительная линия 23">
+            <a:extLst>
+              <a:ext uri="{FF2B5EF4-FFF2-40B4-BE49-F238E27FC236}">
+                <a16:creationId xmlns:a16="http://schemas.microsoft.com/office/drawing/2014/main" id="{5D83F036-57E0-3DCC-5B5F-37F6A6E5DD2C}"/>
+              </a:ext>
+            </a:extLst>
+          </p:cNvPr>
+          <p:cNvCxnSpPr>
+            <a:cxnSpLocks/>
+          </p:cNvCxnSpPr>
+          <p:nvPr/>
+        </p:nvCxnSpPr>
+        <p:spPr>
+          <a:xfrm>
+            <a:off x="3984069" y="3429000"/>
+            <a:ext cx="0" cy="1435100"/>
+          </a:xfrm>
+          <a:prstGeom prst="line">
+            <a:avLst/>
+          </a:prstGeom>
+          <a:ln w="28575">
+            <a:solidFill>
+              <a:srgbClr val="1A3773"/>
+            </a:solidFill>
+          </a:ln>
+        </p:spPr>
+        <p:style>
+          <a:lnRef idx="1">
+            <a:schemeClr val="accent1"/>
+          </a:lnRef>
+          <a:fillRef idx="0">
+            <a:schemeClr val="accent1"/>
+          </a:fillRef>
+          <a:effectRef idx="0">
+            <a:schemeClr val="accent1"/>
+          </a:effectRef>
+          <a:fontRef idx="minor">
+            <a:schemeClr val="tx1"/>
+          </a:fontRef>
+        </p:style>
+      </p:cxnSp>
+      <p:cxnSp>
+        <p:nvCxnSpPr>
+          <p:cNvPr id="25" name="Прямая соединительная линия 24">
+            <a:extLst>
+              <a:ext uri="{FF2B5EF4-FFF2-40B4-BE49-F238E27FC236}">
+                <a16:creationId xmlns:a16="http://schemas.microsoft.com/office/drawing/2014/main" id="{93544180-32ED-A74E-1DA1-FE8AF2984B6D}"/>
+              </a:ext>
+            </a:extLst>
+          </p:cNvPr>
+          <p:cNvCxnSpPr>
+            <a:cxnSpLocks/>
+          </p:cNvCxnSpPr>
+          <p:nvPr/>
+        </p:nvCxnSpPr>
+        <p:spPr>
+          <a:xfrm>
+            <a:off x="7882591" y="3429000"/>
+            <a:ext cx="0" cy="1435100"/>
+          </a:xfrm>
+          <a:prstGeom prst="line">
+            <a:avLst/>
+          </a:prstGeom>
+          <a:ln w="28575">
+            <a:solidFill>
+              <a:srgbClr val="1A3773"/>
+            </a:solidFill>
+          </a:ln>
+        </p:spPr>
+        <p:style>
+          <a:lnRef idx="1">
+            <a:schemeClr val="accent1"/>
+          </a:lnRef>
+          <a:fillRef idx="0">
+            <a:schemeClr val="accent1"/>
+          </a:fillRef>
+          <a:effectRef idx="0">
+            <a:schemeClr val="accent1"/>
+          </a:effectRef>
+          <a:fontRef idx="minor">
+            <a:schemeClr val="tx1"/>
+          </a:fontRef>
+        </p:style>
+      </p:cxnSp>
+    </p:spTree>
+    <p:extLst>
+      <p:ext uri="{BB962C8B-B14F-4D97-AF65-F5344CB8AC3E}">
+        <p14:creationId xmlns:p14="http://schemas.microsoft.com/office/powerpoint/2010/main" val="2228330630"/>
+      </p:ext>
+    </p:extLst>
+  </p:cSld>
+  <p:clrMapOvr>
+    <a:masterClrMapping/>
+  </p:clrMapOvr>
+</p:sld>
+</file>
+
+<file path=ppt/slides/slide6.xml><?xml version="1.0" encoding="utf-8"?>
+<p:sld xmlns:a="http://schemas.openxmlformats.org/drawingml/2006/main" xmlns:r="http://schemas.openxmlformats.org/officeDocument/2006/relationships" xmlns:p="http://schemas.openxmlformats.org/presentationml/2006/main" show="0">
+  <p:cSld>
+    <p:spTree>
+      <p:nvGrpSpPr>
+        <p:cNvPr id="1" name="">
+          <a:extLst>
+            <a:ext uri="{FF2B5EF4-FFF2-40B4-BE49-F238E27FC236}">
+              <a16:creationId xmlns:a16="http://schemas.microsoft.com/office/drawing/2014/main" id="{4D003D84-5393-0BEC-27FF-AC1488118A54}"/>
+            </a:ext>
+          </a:extLst>
+        </p:cNvPr>
+        <p:cNvGrpSpPr/>
+        <p:nvPr/>
+      </p:nvGrpSpPr>
+      <p:grpSpPr>
+        <a:xfrm>
+          <a:off x="0" y="0"/>
+          <a:ext cx="0" cy="0"/>
+          <a:chOff x="0" y="0"/>
+          <a:chExt cx="0" cy="0"/>
+        </a:xfrm>
+      </p:grpSpPr>
+      <p:sp>
+        <p:nvSpPr>
+          <p:cNvPr id="6" name="TextBox 5">
+            <a:extLst>
+              <a:ext uri="{FF2B5EF4-FFF2-40B4-BE49-F238E27FC236}">
+                <a16:creationId xmlns:a16="http://schemas.microsoft.com/office/drawing/2014/main" id="{B9119832-1916-BAA2-C1DB-864AE227846C}"/>
+              </a:ext>
+            </a:extLst>
+          </p:cNvPr>
+          <p:cNvSpPr txBox="1"/>
+          <p:nvPr/>
+        </p:nvSpPr>
+        <p:spPr>
+          <a:xfrm>
+            <a:off x="3784600" y="273858"/>
+            <a:ext cx="8107363" cy="646331"/>
+          </a:xfrm>
+          <a:prstGeom prst="rect">
+            <a:avLst/>
+          </a:prstGeom>
+          <a:noFill/>
+        </p:spPr>
+        <p:txBody>
+          <a:bodyPr wrap="square" rtlCol="0">
+            <a:spAutoFit/>
+          </a:bodyPr>
+          <a:lstStyle/>
+          <a:p>
+            <a:r>
+              <a:rPr lang="ru-RU" sz="3600" dirty="0">
+                <a:solidFill>
+                  <a:srgbClr val="274E9C"/>
+                </a:solidFill>
+                <a:latin typeface="Inter Variable Text Medium" panose="02000503000000020004" pitchFamily="2" charset="0"/>
+                <a:ea typeface="Inter Variable Text Medium" panose="02000503000000020004" pitchFamily="2" charset="0"/>
+                <a:cs typeface="Inter Variable Text Medium" panose="02000503000000020004" pitchFamily="2" charset="0"/>
+              </a:rPr>
+              <a:t>Методы геймификации</a:t>
+            </a:r>
+          </a:p>
+        </p:txBody>
+      </p:sp>
+      <p:pic>
+        <p:nvPicPr>
+          <p:cNvPr id="2" name="Рисунок 1">
+            <a:extLst>
+              <a:ext uri="{FF2B5EF4-FFF2-40B4-BE49-F238E27FC236}">
+                <a16:creationId xmlns:a16="http://schemas.microsoft.com/office/drawing/2014/main" id="{205A0A39-A97C-4C9E-0E68-2FC53C490942}"/>
+              </a:ext>
+            </a:extLst>
+          </p:cNvPr>
+          <p:cNvPicPr>
+            <a:picLocks noChangeAspect="1"/>
+          </p:cNvPicPr>
+          <p:nvPr/>
+        </p:nvPicPr>
+        <p:blipFill>
+          <a:blip r:embed="rId3"/>
+          <a:stretch>
+            <a:fillRect/>
+          </a:stretch>
+        </p:blipFill>
+        <p:spPr>
+          <a:xfrm>
+            <a:off x="300037" y="273858"/>
+            <a:ext cx="2990861" cy="640543"/>
+          </a:xfrm>
+          <a:prstGeom prst="rect">
+            <a:avLst/>
+          </a:prstGeom>
+        </p:spPr>
+      </p:pic>
+      <p:grpSp>
+        <p:nvGrpSpPr>
+          <p:cNvPr id="15" name="Группа 14">
+            <a:extLst>
+              <a:ext uri="{FF2B5EF4-FFF2-40B4-BE49-F238E27FC236}">
+                <a16:creationId xmlns:a16="http://schemas.microsoft.com/office/drawing/2014/main" id="{0132DFB6-F8CF-6157-A8FF-98677646CFD9}"/>
+              </a:ext>
+            </a:extLst>
+          </p:cNvPr>
+          <p:cNvGrpSpPr/>
+          <p:nvPr/>
+        </p:nvGrpSpPr>
+        <p:grpSpPr>
+          <a:xfrm>
+            <a:off x="11641128" y="6312477"/>
+            <a:ext cx="490760" cy="490760"/>
+            <a:chOff x="11383518" y="6084717"/>
+            <a:chExt cx="618259" cy="618259"/>
+          </a:xfrm>
+        </p:grpSpPr>
+        <p:sp>
+          <p:nvSpPr>
+            <p:cNvPr id="16" name="Прямоугольник: скругленные углы 15">
+              <a:extLst>
+                <a:ext uri="{FF2B5EF4-FFF2-40B4-BE49-F238E27FC236}">
+                  <a16:creationId xmlns:a16="http://schemas.microsoft.com/office/drawing/2014/main" id="{A3E8565E-0516-EC6D-13A3-675475319155}"/>
+                </a:ext>
+              </a:extLst>
+            </p:cNvPr>
+            <p:cNvSpPr/>
+            <p:nvPr/>
+          </p:nvSpPr>
+          <p:spPr>
+            <a:xfrm>
+              <a:off x="11383518" y="6084717"/>
+              <a:ext cx="618259" cy="618259"/>
+            </a:xfrm>
+            <a:prstGeom prst="roundRect">
+              <a:avLst/>
+            </a:prstGeom>
+            <a:solidFill>
+              <a:srgbClr val="1A3773"/>
+            </a:solidFill>
+            <a:ln>
+              <a:solidFill>
+                <a:srgbClr val="1A3773"/>
+              </a:solidFill>
+            </a:ln>
+          </p:spPr>
+          <p:style>
+            <a:lnRef idx="2">
+              <a:schemeClr val="accent1">
+                <a:shade val="15000"/>
+              </a:schemeClr>
+            </a:lnRef>
+            <a:fillRef idx="1">
+              <a:schemeClr val="accent1"/>
+            </a:fillRef>
+            <a:effectRef idx="0">
+              <a:schemeClr val="accent1"/>
+            </a:effectRef>
+            <a:fontRef idx="minor">
+              <a:schemeClr val="lt1"/>
+            </a:fontRef>
+          </p:style>
+          <p:txBody>
+            <a:bodyPr rtlCol="0" anchor="ctr"/>
+            <a:lstStyle/>
+            <a:p>
+              <a:pPr algn="ctr"/>
+              <a:endParaRPr lang="en-US"/>
+            </a:p>
+          </p:txBody>
+        </p:sp>
+        <p:sp>
+          <p:nvSpPr>
+            <p:cNvPr id="17" name="TextBox 16">
+              <a:extLst>
+                <a:ext uri="{FF2B5EF4-FFF2-40B4-BE49-F238E27FC236}">
+                  <a16:creationId xmlns:a16="http://schemas.microsoft.com/office/drawing/2014/main" id="{5D3D67FC-8294-9E90-50E8-4E4F28FE0544}"/>
+                </a:ext>
+              </a:extLst>
+            </p:cNvPr>
+            <p:cNvSpPr txBox="1"/>
+            <p:nvPr/>
+          </p:nvSpPr>
+          <p:spPr>
+            <a:xfrm>
+              <a:off x="11508348" y="6199977"/>
+              <a:ext cx="368600" cy="387737"/>
+            </a:xfrm>
+            <a:prstGeom prst="rect">
+              <a:avLst/>
+            </a:prstGeom>
+            <a:noFill/>
+          </p:spPr>
+          <p:txBody>
+            <a:bodyPr wrap="square" rtlCol="0">
+              <a:spAutoFit/>
+            </a:bodyPr>
+            <a:lstStyle/>
+            <a:p>
+              <a:pPr algn="ctr"/>
+              <a:r>
+                <a:rPr lang="ru-RU" sz="1400" dirty="0">
+                  <a:solidFill>
+                    <a:schemeClr val="bg1"/>
+                  </a:solidFill>
+                  <a:latin typeface="Inter Variable Text" panose="02000503000000020004" pitchFamily="2" charset="0"/>
+                  <a:ea typeface="Inter Variable Text" panose="02000503000000020004" pitchFamily="2" charset="0"/>
+                  <a:cs typeface="Inter Variable Text" panose="02000503000000020004" pitchFamily="2" charset="0"/>
+                </a:rPr>
+                <a:t>6</a:t>
+              </a:r>
+              <a:endParaRPr lang="en-US" sz="1400" dirty="0">
+                <a:solidFill>
+                  <a:schemeClr val="bg1"/>
+                </a:solidFill>
+                <a:latin typeface="Inter Variable Text" panose="02000503000000020004" pitchFamily="2" charset="0"/>
+                <a:ea typeface="Inter Variable Text" panose="02000503000000020004" pitchFamily="2" charset="0"/>
+                <a:cs typeface="Inter Variable Text" panose="02000503000000020004" pitchFamily="2" charset="0"/>
+              </a:endParaRPr>
+            </a:p>
+          </p:txBody>
+        </p:sp>
+      </p:grpSp>
+      <p:sp>
+        <p:nvSpPr>
+          <p:cNvPr id="7" name="TextBox 6">
+            <a:extLst>
+              <a:ext uri="{FF2B5EF4-FFF2-40B4-BE49-F238E27FC236}">
+                <a16:creationId xmlns:a16="http://schemas.microsoft.com/office/drawing/2014/main" id="{2052DBB2-280D-D3F6-24F4-86BC8210F7AE}"/>
+              </a:ext>
+            </a:extLst>
+          </p:cNvPr>
+          <p:cNvSpPr txBox="1"/>
+          <p:nvPr/>
+        </p:nvSpPr>
+        <p:spPr>
+          <a:xfrm>
+            <a:off x="4499958" y="1965739"/>
+            <a:ext cx="3042579" cy="4154984"/>
+          </a:xfrm>
+          <a:prstGeom prst="rect">
+            <a:avLst/>
+          </a:prstGeom>
+          <a:noFill/>
+        </p:spPr>
+        <p:txBody>
+          <a:bodyPr wrap="square">
+            <a:spAutoFit/>
+          </a:bodyPr>
+          <a:lstStyle/>
+          <a:p>
+            <a:r>
+              <a:rPr lang="ru-RU" sz="2400" b="1" dirty="0">
+                <a:latin typeface="Times New Roman" panose="02020603050405020304" pitchFamily="18" charset="0"/>
+                <a:cs typeface="Times New Roman" panose="02020603050405020304" pitchFamily="18" charset="0"/>
+              </a:rPr>
+              <a:t>Система уровней</a:t>
+            </a:r>
+            <a:endParaRPr lang="en-US" sz="2400" b="1" dirty="0">
+              <a:latin typeface="Times New Roman" panose="02020603050405020304" pitchFamily="18" charset="0"/>
+              <a:cs typeface="Times New Roman" panose="02020603050405020304" pitchFamily="18" charset="0"/>
+            </a:endParaRPr>
+          </a:p>
+          <a:p>
+            <a:pPr marL="342900" indent="-342900">
+              <a:buFontTx/>
+              <a:buChar char="-"/>
+            </a:pPr>
+            <a:r>
+              <a:rPr lang="ru-RU" sz="2400" dirty="0">
+                <a:latin typeface="Times New Roman" panose="02020603050405020304" pitchFamily="18" charset="0"/>
+                <a:cs typeface="Times New Roman" panose="02020603050405020304" pitchFamily="18" charset="0"/>
+              </a:rPr>
+              <a:t>Прогресс конвертируется в очки опыта, в зависимости от сложности выполненного задания начисляется различное количество очков</a:t>
+            </a:r>
+          </a:p>
+        </p:txBody>
+      </p:sp>
+      <p:sp>
+        <p:nvSpPr>
+          <p:cNvPr id="10" name="Объект 2">
+            <a:extLst>
+              <a:ext uri="{FF2B5EF4-FFF2-40B4-BE49-F238E27FC236}">
+                <a16:creationId xmlns:a16="http://schemas.microsoft.com/office/drawing/2014/main" id="{7830C2F8-3A8F-5051-8273-39121780F2DF}"/>
               </a:ext>
             </a:extLst>
           </p:cNvPr>
@@ -18734,1880 +17173,6 @@
           <p:cNvPr id="11" name="Прямая соединительная линия 10">
             <a:extLst>
               <a:ext uri="{FF2B5EF4-FFF2-40B4-BE49-F238E27FC236}">
-                <a16:creationId xmlns:a16="http://schemas.microsoft.com/office/drawing/2014/main" id="{B8858543-2C17-18C5-6BBB-74205E9208E1}"/>
-              </a:ext>
-            </a:extLst>
-          </p:cNvPr>
-          <p:cNvCxnSpPr>
-            <a:cxnSpLocks/>
-          </p:cNvCxnSpPr>
-          <p:nvPr/>
-        </p:nvCxnSpPr>
-        <p:spPr>
-          <a:xfrm>
-            <a:off x="4412900" y="1259183"/>
-            <a:ext cx="0" cy="1443800"/>
-          </a:xfrm>
-          <a:prstGeom prst="line">
-            <a:avLst/>
-          </a:prstGeom>
-          <a:ln w="28575">
-            <a:solidFill>
-              <a:srgbClr val="1A3773"/>
-            </a:solidFill>
-          </a:ln>
-        </p:spPr>
-        <p:style>
-          <a:lnRef idx="1">
-            <a:schemeClr val="accent1"/>
-          </a:lnRef>
-          <a:fillRef idx="0">
-            <a:schemeClr val="accent1"/>
-          </a:fillRef>
-          <a:effectRef idx="0">
-            <a:schemeClr val="accent1"/>
-          </a:effectRef>
-          <a:fontRef idx="minor">
-            <a:schemeClr val="tx1"/>
-          </a:fontRef>
-        </p:style>
-      </p:cxnSp>
-      <p:sp>
-        <p:nvSpPr>
-          <p:cNvPr id="13" name="TextBox 12">
-            <a:extLst>
-              <a:ext uri="{FF2B5EF4-FFF2-40B4-BE49-F238E27FC236}">
-                <a16:creationId xmlns:a16="http://schemas.microsoft.com/office/drawing/2014/main" id="{B97E2936-9EBC-C39C-E15F-DB1B7036CD04}"/>
-              </a:ext>
-            </a:extLst>
-          </p:cNvPr>
-          <p:cNvSpPr txBox="1"/>
-          <p:nvPr/>
-        </p:nvSpPr>
-        <p:spPr>
-          <a:xfrm>
-            <a:off x="619657" y="1720840"/>
-            <a:ext cx="3286760" cy="3416320"/>
-          </a:xfrm>
-          <a:prstGeom prst="rect">
-            <a:avLst/>
-          </a:prstGeom>
-          <a:noFill/>
-        </p:spPr>
-        <p:txBody>
-          <a:bodyPr wrap="square">
-            <a:spAutoFit/>
-          </a:bodyPr>
-          <a:lstStyle/>
-          <a:p>
-            <a:r>
-              <a:rPr lang="ru-RU" sz="2400" dirty="0">
-                <a:latin typeface="Times New Roman" panose="02020603050405020304" pitchFamily="18" charset="0"/>
-                <a:cs typeface="Times New Roman" panose="02020603050405020304" pitchFamily="18" charset="0"/>
-              </a:rPr>
-              <a:t>Современный человек имеет доступ к информации о здоровом образе жизни. Проблема заключается в </a:t>
-            </a:r>
-            <a:r>
-              <a:rPr lang="ru-RU" sz="2400" dirty="0">
-                <a:solidFill>
-                  <a:srgbClr val="274E9C"/>
-                </a:solidFill>
-                <a:latin typeface="Times New Roman" panose="02020603050405020304" pitchFamily="18" charset="0"/>
-                <a:cs typeface="Times New Roman" panose="02020603050405020304" pitchFamily="18" charset="0"/>
-              </a:rPr>
-              <a:t>невозможности</a:t>
-            </a:r>
-            <a:r>
-              <a:rPr lang="ru-RU" sz="2400" dirty="0">
-                <a:latin typeface="Times New Roman" panose="02020603050405020304" pitchFamily="18" charset="0"/>
-                <a:cs typeface="Times New Roman" panose="02020603050405020304" pitchFamily="18" charset="0"/>
-              </a:rPr>
-              <a:t> перевести знания в устойчивое поведение. </a:t>
-            </a:r>
-          </a:p>
-        </p:txBody>
-      </p:sp>
-      <p:sp>
-        <p:nvSpPr>
-          <p:cNvPr id="18" name="TextBox 17">
-            <a:extLst>
-              <a:ext uri="{FF2B5EF4-FFF2-40B4-BE49-F238E27FC236}">
-                <a16:creationId xmlns:a16="http://schemas.microsoft.com/office/drawing/2014/main" id="{A69083DB-B9F5-7440-5C16-F4E9CAD99C19}"/>
-              </a:ext>
-            </a:extLst>
-          </p:cNvPr>
-          <p:cNvSpPr txBox="1"/>
-          <p:nvPr/>
-        </p:nvSpPr>
-        <p:spPr>
-          <a:xfrm>
-            <a:off x="8572260" y="1259183"/>
-            <a:ext cx="3347018" cy="2308324"/>
-          </a:xfrm>
-          <a:prstGeom prst="rect">
-            <a:avLst/>
-          </a:prstGeom>
-          <a:noFill/>
-        </p:spPr>
-        <p:txBody>
-          <a:bodyPr wrap="square">
-            <a:spAutoFit/>
-          </a:bodyPr>
-          <a:lstStyle/>
-          <a:p>
-            <a:r>
-              <a:rPr lang="ru-RU" sz="2400" b="1" dirty="0">
-                <a:latin typeface="Times New Roman" panose="02020603050405020304" pitchFamily="18" charset="0"/>
-                <a:cs typeface="Times New Roman" panose="02020603050405020304" pitchFamily="18" charset="0"/>
-              </a:rPr>
-              <a:t>Высокий порог входа</a:t>
-            </a:r>
-            <a:endParaRPr lang="en-US" sz="2400" b="1" dirty="0">
-              <a:latin typeface="Times New Roman" panose="02020603050405020304" pitchFamily="18" charset="0"/>
-              <a:cs typeface="Times New Roman" panose="02020603050405020304" pitchFamily="18" charset="0"/>
-            </a:endParaRPr>
-          </a:p>
-          <a:p>
-            <a:pPr marL="342900" indent="-342900">
-              <a:buFontTx/>
-              <a:buChar char="-"/>
-            </a:pPr>
-            <a:r>
-              <a:rPr lang="ru-RU" sz="2400" dirty="0">
-                <a:latin typeface="Times New Roman" panose="02020603050405020304" pitchFamily="18" charset="0"/>
-                <a:cs typeface="Times New Roman" panose="02020603050405020304" pitchFamily="18" charset="0"/>
-              </a:rPr>
-              <a:t>Отдельные приложения</a:t>
-            </a:r>
-            <a:endParaRPr lang="en-US" sz="2400" dirty="0">
-              <a:latin typeface="Times New Roman" panose="02020603050405020304" pitchFamily="18" charset="0"/>
-              <a:cs typeface="Times New Roman" panose="02020603050405020304" pitchFamily="18" charset="0"/>
-            </a:endParaRPr>
-          </a:p>
-          <a:p>
-            <a:pPr marL="342900" indent="-342900">
-              <a:buFontTx/>
-              <a:buChar char="-"/>
-            </a:pPr>
-            <a:r>
-              <a:rPr lang="ru-RU" sz="2400" dirty="0">
-                <a:latin typeface="Times New Roman" panose="02020603050405020304" pitchFamily="18" charset="0"/>
-                <a:cs typeface="Times New Roman" panose="02020603050405020304" pitchFamily="18" charset="0"/>
-              </a:rPr>
-              <a:t>Платная подписка </a:t>
-            </a:r>
-            <a:endParaRPr lang="en-US" sz="2400" dirty="0">
-              <a:latin typeface="Times New Roman" panose="02020603050405020304" pitchFamily="18" charset="0"/>
-              <a:cs typeface="Times New Roman" panose="02020603050405020304" pitchFamily="18" charset="0"/>
-            </a:endParaRPr>
-          </a:p>
-          <a:p>
-            <a:pPr marL="342900" indent="-342900">
-              <a:buFontTx/>
-              <a:buChar char="-"/>
-            </a:pPr>
-            <a:r>
-              <a:rPr lang="ru-RU" sz="2400" dirty="0">
-                <a:latin typeface="Times New Roman" panose="02020603050405020304" pitchFamily="18" charset="0"/>
-                <a:cs typeface="Times New Roman" panose="02020603050405020304" pitchFamily="18" charset="0"/>
-              </a:rPr>
-              <a:t>Требование</a:t>
-            </a:r>
-            <a:r>
-              <a:rPr lang="en-US" sz="2400" dirty="0">
-                <a:latin typeface="Times New Roman" panose="02020603050405020304" pitchFamily="18" charset="0"/>
-                <a:cs typeface="Times New Roman" panose="02020603050405020304" pitchFamily="18" charset="0"/>
-              </a:rPr>
-              <a:t> </a:t>
-            </a:r>
-            <a:r>
-              <a:rPr lang="ru-RU" sz="2400" dirty="0">
-                <a:latin typeface="Times New Roman" panose="02020603050405020304" pitchFamily="18" charset="0"/>
-                <a:cs typeface="Times New Roman" panose="02020603050405020304" pitchFamily="18" charset="0"/>
-              </a:rPr>
-              <a:t>создания аккаунтов</a:t>
-            </a:r>
-          </a:p>
-        </p:txBody>
-      </p:sp>
-      <p:sp>
-        <p:nvSpPr>
-          <p:cNvPr id="20" name="TextBox 19">
-            <a:extLst>
-              <a:ext uri="{FF2B5EF4-FFF2-40B4-BE49-F238E27FC236}">
-                <a16:creationId xmlns:a16="http://schemas.microsoft.com/office/drawing/2014/main" id="{D6A0E321-C939-C296-E8BC-B0B04166D7F0}"/>
-              </a:ext>
-            </a:extLst>
-          </p:cNvPr>
-          <p:cNvSpPr txBox="1"/>
-          <p:nvPr/>
-        </p:nvSpPr>
-        <p:spPr>
-          <a:xfrm>
-            <a:off x="4499957" y="3691704"/>
-            <a:ext cx="3888197" cy="2308324"/>
-          </a:xfrm>
-          <a:prstGeom prst="rect">
-            <a:avLst/>
-          </a:prstGeom>
-          <a:noFill/>
-        </p:spPr>
-        <p:txBody>
-          <a:bodyPr wrap="square">
-            <a:spAutoFit/>
-          </a:bodyPr>
-          <a:lstStyle/>
-          <a:p>
-            <a:r>
-              <a:rPr lang="ru-RU" sz="2400" b="1" dirty="0">
-                <a:latin typeface="Times New Roman" panose="02020603050405020304" pitchFamily="18" charset="0"/>
-                <a:cs typeface="Times New Roman" panose="02020603050405020304" pitchFamily="18" charset="0"/>
-              </a:rPr>
-              <a:t>Отсутствие мгновенной обратной связи</a:t>
-            </a:r>
-          </a:p>
-          <a:p>
-            <a:pPr marL="342900" indent="-342900">
-              <a:buFontTx/>
-              <a:buChar char="-"/>
-            </a:pPr>
-            <a:r>
-              <a:rPr lang="ru-RU" sz="2400" dirty="0">
-                <a:latin typeface="Times New Roman" panose="02020603050405020304" pitchFamily="18" charset="0"/>
-                <a:cs typeface="Times New Roman" panose="02020603050405020304" pitchFamily="18" charset="0"/>
-              </a:rPr>
-              <a:t>Недостаток человеческой поддержки</a:t>
-            </a:r>
-          </a:p>
-          <a:p>
-            <a:pPr marL="342900" indent="-342900">
-              <a:buFontTx/>
-              <a:buChar char="-"/>
-            </a:pPr>
-            <a:r>
-              <a:rPr lang="ru-RU" sz="2400" dirty="0">
-                <a:latin typeface="Times New Roman" panose="02020603050405020304" pitchFamily="18" charset="0"/>
-                <a:cs typeface="Times New Roman" panose="02020603050405020304" pitchFamily="18" charset="0"/>
-              </a:rPr>
-              <a:t>Отсутствие разнообразия в сообщениях</a:t>
-            </a:r>
-          </a:p>
-        </p:txBody>
-      </p:sp>
-      <p:sp>
-        <p:nvSpPr>
-          <p:cNvPr id="22" name="TextBox 21">
-            <a:extLst>
-              <a:ext uri="{FF2B5EF4-FFF2-40B4-BE49-F238E27FC236}">
-                <a16:creationId xmlns:a16="http://schemas.microsoft.com/office/drawing/2014/main" id="{3A15A2C3-6639-196C-F2B1-E6390E6D2EDF}"/>
-              </a:ext>
-            </a:extLst>
-          </p:cNvPr>
-          <p:cNvSpPr txBox="1"/>
-          <p:nvPr/>
-        </p:nvSpPr>
-        <p:spPr>
-          <a:xfrm>
-            <a:off x="8572259" y="3691704"/>
-            <a:ext cx="3274229" cy="1938992"/>
-          </a:xfrm>
-          <a:prstGeom prst="rect">
-            <a:avLst/>
-          </a:prstGeom>
-          <a:noFill/>
-        </p:spPr>
-        <p:txBody>
-          <a:bodyPr wrap="square">
-            <a:spAutoFit/>
-          </a:bodyPr>
-          <a:lstStyle/>
-          <a:p>
-            <a:r>
-              <a:rPr lang="ru-RU" sz="2400" b="1" dirty="0">
-                <a:latin typeface="Times New Roman" panose="02020603050405020304" pitchFamily="18" charset="0"/>
-                <a:cs typeface="Times New Roman" panose="02020603050405020304" pitchFamily="18" charset="0"/>
-              </a:rPr>
-              <a:t>Отсутствие персонализации</a:t>
-            </a:r>
-          </a:p>
-          <a:p>
-            <a:pPr marL="342900" indent="-342900">
-              <a:buFontTx/>
-              <a:buChar char="-"/>
-            </a:pPr>
-            <a:r>
-              <a:rPr lang="ru-RU" sz="2400" dirty="0">
-                <a:latin typeface="Times New Roman" panose="02020603050405020304" pitchFamily="18" charset="0"/>
-                <a:cs typeface="Times New Roman" panose="02020603050405020304" pitchFamily="18" charset="0"/>
-              </a:rPr>
-              <a:t>Универсальные рекомендации</a:t>
-            </a:r>
-          </a:p>
-          <a:p>
-            <a:pPr marL="342900" indent="-342900">
-              <a:buFontTx/>
-              <a:buChar char="-"/>
-            </a:pPr>
-            <a:r>
-              <a:rPr lang="ru-RU" sz="2400" dirty="0">
-                <a:latin typeface="Times New Roman" panose="02020603050405020304" pitchFamily="18" charset="0"/>
-                <a:cs typeface="Times New Roman" panose="02020603050405020304" pitchFamily="18" charset="0"/>
-              </a:rPr>
-              <a:t>Цифровая усталость</a:t>
-            </a:r>
-          </a:p>
-        </p:txBody>
-      </p:sp>
-      <p:cxnSp>
-        <p:nvCxnSpPr>
-          <p:cNvPr id="23" name="Прямая соединительная линия 22">
-            <a:extLst>
-              <a:ext uri="{FF2B5EF4-FFF2-40B4-BE49-F238E27FC236}">
-                <a16:creationId xmlns:a16="http://schemas.microsoft.com/office/drawing/2014/main" id="{500BAC58-6097-6C85-CBF8-AB369BE82B8E}"/>
-              </a:ext>
-            </a:extLst>
-          </p:cNvPr>
-          <p:cNvCxnSpPr>
-            <a:cxnSpLocks/>
-          </p:cNvCxnSpPr>
-          <p:nvPr/>
-        </p:nvCxnSpPr>
-        <p:spPr>
-          <a:xfrm>
-            <a:off x="8485202" y="1259183"/>
-            <a:ext cx="0" cy="1443800"/>
-          </a:xfrm>
-          <a:prstGeom prst="line">
-            <a:avLst/>
-          </a:prstGeom>
-          <a:ln w="28575">
-            <a:solidFill>
-              <a:srgbClr val="1A3773"/>
-            </a:solidFill>
-          </a:ln>
-        </p:spPr>
-        <p:style>
-          <a:lnRef idx="1">
-            <a:schemeClr val="accent1"/>
-          </a:lnRef>
-          <a:fillRef idx="0">
-            <a:schemeClr val="accent1"/>
-          </a:fillRef>
-          <a:effectRef idx="0">
-            <a:schemeClr val="accent1"/>
-          </a:effectRef>
-          <a:fontRef idx="minor">
-            <a:schemeClr val="tx1"/>
-          </a:fontRef>
-        </p:style>
-      </p:cxnSp>
-      <p:cxnSp>
-        <p:nvCxnSpPr>
-          <p:cNvPr id="24" name="Прямая соединительная линия 23">
-            <a:extLst>
-              <a:ext uri="{FF2B5EF4-FFF2-40B4-BE49-F238E27FC236}">
-                <a16:creationId xmlns:a16="http://schemas.microsoft.com/office/drawing/2014/main" id="{E2F05F64-9669-56C5-478B-BC0E5437AB6E}"/>
-              </a:ext>
-            </a:extLst>
-          </p:cNvPr>
-          <p:cNvCxnSpPr>
-            <a:cxnSpLocks/>
-          </p:cNvCxnSpPr>
-          <p:nvPr/>
-        </p:nvCxnSpPr>
-        <p:spPr>
-          <a:xfrm>
-            <a:off x="4417662" y="3691704"/>
-            <a:ext cx="0" cy="1435100"/>
-          </a:xfrm>
-          <a:prstGeom prst="line">
-            <a:avLst/>
-          </a:prstGeom>
-          <a:ln w="28575">
-            <a:solidFill>
-              <a:srgbClr val="1A3773"/>
-            </a:solidFill>
-          </a:ln>
-        </p:spPr>
-        <p:style>
-          <a:lnRef idx="1">
-            <a:schemeClr val="accent1"/>
-          </a:lnRef>
-          <a:fillRef idx="0">
-            <a:schemeClr val="accent1"/>
-          </a:fillRef>
-          <a:effectRef idx="0">
-            <a:schemeClr val="accent1"/>
-          </a:effectRef>
-          <a:fontRef idx="minor">
-            <a:schemeClr val="tx1"/>
-          </a:fontRef>
-        </p:style>
-      </p:cxnSp>
-      <p:cxnSp>
-        <p:nvCxnSpPr>
-          <p:cNvPr id="25" name="Прямая соединительная линия 24">
-            <a:extLst>
-              <a:ext uri="{FF2B5EF4-FFF2-40B4-BE49-F238E27FC236}">
-                <a16:creationId xmlns:a16="http://schemas.microsoft.com/office/drawing/2014/main" id="{2D0848E9-C705-8F0C-DAD8-999FDD6D1DD1}"/>
-              </a:ext>
-            </a:extLst>
-          </p:cNvPr>
-          <p:cNvCxnSpPr>
-            <a:cxnSpLocks/>
-          </p:cNvCxnSpPr>
-          <p:nvPr/>
-        </p:nvCxnSpPr>
-        <p:spPr>
-          <a:xfrm>
-            <a:off x="8487241" y="3691704"/>
-            <a:ext cx="0" cy="1435100"/>
-          </a:xfrm>
-          <a:prstGeom prst="line">
-            <a:avLst/>
-          </a:prstGeom>
-          <a:ln w="28575">
-            <a:solidFill>
-              <a:srgbClr val="1A3773"/>
-            </a:solidFill>
-          </a:ln>
-        </p:spPr>
-        <p:style>
-          <a:lnRef idx="1">
-            <a:schemeClr val="accent1"/>
-          </a:lnRef>
-          <a:fillRef idx="0">
-            <a:schemeClr val="accent1"/>
-          </a:fillRef>
-          <a:effectRef idx="0">
-            <a:schemeClr val="accent1"/>
-          </a:effectRef>
-          <a:fontRef idx="minor">
-            <a:schemeClr val="tx1"/>
-          </a:fontRef>
-        </p:style>
-      </p:cxnSp>
-    </p:spTree>
-    <p:extLst>
-      <p:ext uri="{BB962C8B-B14F-4D97-AF65-F5344CB8AC3E}">
-        <p14:creationId xmlns:p14="http://schemas.microsoft.com/office/powerpoint/2010/main" val="3684285377"/>
-      </p:ext>
-    </p:extLst>
-  </p:cSld>
-  <p:clrMapOvr>
-    <a:masterClrMapping/>
-  </p:clrMapOvr>
-</p:sld>
-</file>
-
-<file path=ppt/slides/slide5.xml><?xml version="1.0" encoding="utf-8"?>
-<p:sld xmlns:a="http://schemas.openxmlformats.org/drawingml/2006/main" xmlns:r="http://schemas.openxmlformats.org/officeDocument/2006/relationships" xmlns:p="http://schemas.openxmlformats.org/presentationml/2006/main">
-  <p:cSld>
-    <p:spTree>
-      <p:nvGrpSpPr>
-        <p:cNvPr id="1" name="">
-          <a:extLst>
-            <a:ext uri="{FF2B5EF4-FFF2-40B4-BE49-F238E27FC236}">
-              <a16:creationId xmlns:a16="http://schemas.microsoft.com/office/drawing/2014/main" id="{B9ADF3A9-89F0-C507-2228-C39F8AC8CC54}"/>
-            </a:ext>
-          </a:extLst>
-        </p:cNvPr>
-        <p:cNvGrpSpPr/>
-        <p:nvPr/>
-      </p:nvGrpSpPr>
-      <p:grpSpPr>
-        <a:xfrm>
-          <a:off x="0" y="0"/>
-          <a:ext cx="0" cy="0"/>
-          <a:chOff x="0" y="0"/>
-          <a:chExt cx="0" cy="0"/>
-        </a:xfrm>
-      </p:grpSpPr>
-      <p:sp>
-        <p:nvSpPr>
-          <p:cNvPr id="6" name="TextBox 5">
-            <a:extLst>
-              <a:ext uri="{FF2B5EF4-FFF2-40B4-BE49-F238E27FC236}">
-                <a16:creationId xmlns:a16="http://schemas.microsoft.com/office/drawing/2014/main" id="{2E0C2DEE-F6FF-173F-809E-C44A9FFA9E06}"/>
-              </a:ext>
-            </a:extLst>
-          </p:cNvPr>
-          <p:cNvSpPr txBox="1"/>
-          <p:nvPr/>
-        </p:nvSpPr>
-        <p:spPr>
-          <a:xfrm>
-            <a:off x="3784600" y="273858"/>
-            <a:ext cx="8107363" cy="646331"/>
-          </a:xfrm>
-          <a:prstGeom prst="rect">
-            <a:avLst/>
-          </a:prstGeom>
-          <a:noFill/>
-        </p:spPr>
-        <p:txBody>
-          <a:bodyPr wrap="square" rtlCol="0">
-            <a:spAutoFit/>
-          </a:bodyPr>
-          <a:lstStyle/>
-          <a:p>
-            <a:r>
-              <a:rPr lang="ru-RU" sz="3600" dirty="0">
-                <a:solidFill>
-                  <a:srgbClr val="274E9C"/>
-                </a:solidFill>
-                <a:latin typeface="Inter Variable Text Medium" panose="02000503000000020004" pitchFamily="2" charset="0"/>
-                <a:ea typeface="Inter Variable Text Medium" panose="02000503000000020004" pitchFamily="2" charset="0"/>
-                <a:cs typeface="Inter Variable Text Medium" panose="02000503000000020004" pitchFamily="2" charset="0"/>
-              </a:rPr>
-              <a:t>Архитектура авторской методики</a:t>
-            </a:r>
-          </a:p>
-        </p:txBody>
-      </p:sp>
-      <p:pic>
-        <p:nvPicPr>
-          <p:cNvPr id="2" name="Рисунок 1">
-            <a:extLst>
-              <a:ext uri="{FF2B5EF4-FFF2-40B4-BE49-F238E27FC236}">
-                <a16:creationId xmlns:a16="http://schemas.microsoft.com/office/drawing/2014/main" id="{886AB62A-348F-9827-EB9C-ECBE0E2A0F0C}"/>
-              </a:ext>
-            </a:extLst>
-          </p:cNvPr>
-          <p:cNvPicPr>
-            <a:picLocks noChangeAspect="1"/>
-          </p:cNvPicPr>
-          <p:nvPr/>
-        </p:nvPicPr>
-        <p:blipFill>
-          <a:blip r:embed="rId3"/>
-          <a:stretch>
-            <a:fillRect/>
-          </a:stretch>
-        </p:blipFill>
-        <p:spPr>
-          <a:xfrm>
-            <a:off x="300037" y="273858"/>
-            <a:ext cx="2990861" cy="640543"/>
-          </a:xfrm>
-          <a:prstGeom prst="rect">
-            <a:avLst/>
-          </a:prstGeom>
-        </p:spPr>
-      </p:pic>
-      <p:grpSp>
-        <p:nvGrpSpPr>
-          <p:cNvPr id="15" name="Группа 14">
-            <a:extLst>
-              <a:ext uri="{FF2B5EF4-FFF2-40B4-BE49-F238E27FC236}">
-                <a16:creationId xmlns:a16="http://schemas.microsoft.com/office/drawing/2014/main" id="{5C89114B-91A8-5CB8-1621-84455384AC07}"/>
-              </a:ext>
-            </a:extLst>
-          </p:cNvPr>
-          <p:cNvGrpSpPr/>
-          <p:nvPr/>
-        </p:nvGrpSpPr>
-        <p:grpSpPr>
-          <a:xfrm>
-            <a:off x="11641128" y="6312477"/>
-            <a:ext cx="490760" cy="490760"/>
-            <a:chOff x="11383518" y="6084717"/>
-            <a:chExt cx="618259" cy="618259"/>
-          </a:xfrm>
-        </p:grpSpPr>
-        <p:sp>
-          <p:nvSpPr>
-            <p:cNvPr id="16" name="Прямоугольник: скругленные углы 15">
-              <a:extLst>
-                <a:ext uri="{FF2B5EF4-FFF2-40B4-BE49-F238E27FC236}">
-                  <a16:creationId xmlns:a16="http://schemas.microsoft.com/office/drawing/2014/main" id="{A625FBA2-57D2-1DD0-663A-46838EF01CD1}"/>
-                </a:ext>
-              </a:extLst>
-            </p:cNvPr>
-            <p:cNvSpPr/>
-            <p:nvPr/>
-          </p:nvSpPr>
-          <p:spPr>
-            <a:xfrm>
-              <a:off x="11383518" y="6084717"/>
-              <a:ext cx="618259" cy="618259"/>
-            </a:xfrm>
-            <a:prstGeom prst="roundRect">
-              <a:avLst/>
-            </a:prstGeom>
-            <a:solidFill>
-              <a:srgbClr val="1A3773"/>
-            </a:solidFill>
-            <a:ln>
-              <a:solidFill>
-                <a:srgbClr val="1A3773"/>
-              </a:solidFill>
-            </a:ln>
-          </p:spPr>
-          <p:style>
-            <a:lnRef idx="2">
-              <a:schemeClr val="accent1">
-                <a:shade val="15000"/>
-              </a:schemeClr>
-            </a:lnRef>
-            <a:fillRef idx="1">
-              <a:schemeClr val="accent1"/>
-            </a:fillRef>
-            <a:effectRef idx="0">
-              <a:schemeClr val="accent1"/>
-            </a:effectRef>
-            <a:fontRef idx="minor">
-              <a:schemeClr val="lt1"/>
-            </a:fontRef>
-          </p:style>
-          <p:txBody>
-            <a:bodyPr rtlCol="0" anchor="ctr"/>
-            <a:lstStyle/>
-            <a:p>
-              <a:pPr algn="ctr"/>
-              <a:endParaRPr lang="en-US"/>
-            </a:p>
-          </p:txBody>
-        </p:sp>
-        <p:sp>
-          <p:nvSpPr>
-            <p:cNvPr id="17" name="TextBox 16">
-              <a:extLst>
-                <a:ext uri="{FF2B5EF4-FFF2-40B4-BE49-F238E27FC236}">
-                  <a16:creationId xmlns:a16="http://schemas.microsoft.com/office/drawing/2014/main" id="{519F281B-300F-E545-8A5E-991DD30C5D6B}"/>
-                </a:ext>
-              </a:extLst>
-            </p:cNvPr>
-            <p:cNvSpPr txBox="1"/>
-            <p:nvPr/>
-          </p:nvSpPr>
-          <p:spPr>
-            <a:xfrm>
-              <a:off x="11508348" y="6199977"/>
-              <a:ext cx="368600" cy="387737"/>
-            </a:xfrm>
-            <a:prstGeom prst="rect">
-              <a:avLst/>
-            </a:prstGeom>
-            <a:noFill/>
-          </p:spPr>
-          <p:txBody>
-            <a:bodyPr wrap="square" rtlCol="0">
-              <a:spAutoFit/>
-            </a:bodyPr>
-            <a:lstStyle/>
-            <a:p>
-              <a:pPr algn="ctr"/>
-              <a:r>
-                <a:rPr lang="ru-RU" sz="1400" dirty="0">
-                  <a:solidFill>
-                    <a:schemeClr val="bg1"/>
-                  </a:solidFill>
-                  <a:latin typeface="Inter Variable Text" panose="02000503000000020004" pitchFamily="2" charset="0"/>
-                  <a:ea typeface="Inter Variable Text" panose="02000503000000020004" pitchFamily="2" charset="0"/>
-                  <a:cs typeface="Inter Variable Text" panose="02000503000000020004" pitchFamily="2" charset="0"/>
-                </a:rPr>
-                <a:t>5</a:t>
-              </a:r>
-              <a:endParaRPr lang="en-US" sz="1400" dirty="0">
-                <a:solidFill>
-                  <a:schemeClr val="bg1"/>
-                </a:solidFill>
-                <a:latin typeface="Inter Variable Text" panose="02000503000000020004" pitchFamily="2" charset="0"/>
-                <a:ea typeface="Inter Variable Text" panose="02000503000000020004" pitchFamily="2" charset="0"/>
-                <a:cs typeface="Inter Variable Text" panose="02000503000000020004" pitchFamily="2" charset="0"/>
-              </a:endParaRPr>
-            </a:p>
-          </p:txBody>
-        </p:sp>
-      </p:grpSp>
-      <p:sp>
-        <p:nvSpPr>
-          <p:cNvPr id="7" name="TextBox 6">
-            <a:extLst>
-              <a:ext uri="{FF2B5EF4-FFF2-40B4-BE49-F238E27FC236}">
-                <a16:creationId xmlns:a16="http://schemas.microsoft.com/office/drawing/2014/main" id="{F64648A3-B21E-1539-D918-7C9A88BFBA83}"/>
-              </a:ext>
-            </a:extLst>
-          </p:cNvPr>
-          <p:cNvSpPr txBox="1"/>
-          <p:nvPr/>
-        </p:nvSpPr>
-        <p:spPr>
-          <a:xfrm>
-            <a:off x="4499958" y="1248366"/>
-            <a:ext cx="3467771" cy="1569660"/>
-          </a:xfrm>
-          <a:prstGeom prst="rect">
-            <a:avLst/>
-          </a:prstGeom>
-          <a:noFill/>
-        </p:spPr>
-        <p:txBody>
-          <a:bodyPr wrap="square">
-            <a:spAutoFit/>
-          </a:bodyPr>
-          <a:lstStyle/>
-          <a:p>
-            <a:r>
-              <a:rPr lang="ru-RU" sz="2400" b="1" dirty="0">
-                <a:latin typeface="Times New Roman" panose="02020603050405020304" pitchFamily="18" charset="0"/>
-                <a:cs typeface="Times New Roman" panose="02020603050405020304" pitchFamily="18" charset="0"/>
-              </a:rPr>
-              <a:t>Игровая механика мотивации</a:t>
-            </a:r>
-          </a:p>
-          <a:p>
-            <a:pPr marL="285750" indent="-285750">
-              <a:buFontTx/>
-              <a:buChar char="-"/>
-            </a:pPr>
-            <a:r>
-              <a:rPr lang="ru-RU" sz="2400" dirty="0">
-                <a:latin typeface="Times New Roman" panose="02020603050405020304" pitchFamily="18" charset="0"/>
-                <a:cs typeface="Times New Roman" panose="02020603050405020304" pitchFamily="18" charset="0"/>
-              </a:rPr>
-              <a:t>Прогресс опыта</a:t>
-            </a:r>
-          </a:p>
-          <a:p>
-            <a:pPr marL="285750" indent="-285750">
-              <a:buFontTx/>
-              <a:buChar char="-"/>
-            </a:pPr>
-            <a:r>
-              <a:rPr lang="ru-RU" sz="2400" dirty="0">
-                <a:latin typeface="Times New Roman" panose="02020603050405020304" pitchFamily="18" charset="0"/>
-                <a:cs typeface="Times New Roman" panose="02020603050405020304" pitchFamily="18" charset="0"/>
-              </a:rPr>
-              <a:t>Система достижений</a:t>
-            </a:r>
-          </a:p>
-        </p:txBody>
-      </p:sp>
-      <p:sp>
-        <p:nvSpPr>
-          <p:cNvPr id="10" name="Объект 2">
-            <a:extLst>
-              <a:ext uri="{FF2B5EF4-FFF2-40B4-BE49-F238E27FC236}">
-                <a16:creationId xmlns:a16="http://schemas.microsoft.com/office/drawing/2014/main" id="{6ACCBC09-E132-50B1-9E33-B5C720C9B983}"/>
-              </a:ext>
-            </a:extLst>
-          </p:cNvPr>
-          <p:cNvSpPr txBox="1">
-            <a:spLocks/>
-          </p:cNvSpPr>
-          <p:nvPr/>
-        </p:nvSpPr>
-        <p:spPr>
-          <a:xfrm>
-            <a:off x="418852" y="1259899"/>
-            <a:ext cx="3688370" cy="4338204"/>
-          </a:xfrm>
-          <a:prstGeom prst="roundRect">
-            <a:avLst>
-              <a:gd name="adj" fmla="val 4817"/>
-            </a:avLst>
-          </a:prstGeom>
-          <a:ln w="12700">
-            <a:solidFill>
-              <a:srgbClr val="1A3773"/>
-            </a:solidFill>
-            <a:prstDash val="dash"/>
-          </a:ln>
-        </p:spPr>
-        <p:txBody>
-          <a:bodyPr anchor="ctr"/>
-          <a:lstStyle>
-            <a:lvl1pPr marL="0" indent="0" algn="ctr" defTabSz="914400" rtl="0" eaLnBrk="1" latinLnBrk="0" hangingPunct="1">
-              <a:lnSpc>
-                <a:spcPct val="90000"/>
-              </a:lnSpc>
-              <a:spcBef>
-                <a:spcPts val="1000"/>
-              </a:spcBef>
-              <a:buFont typeface="Arial"/>
-              <a:buNone/>
-              <a:defRPr sz="2800" b="0" i="0" kern="1200">
-                <a:solidFill>
-                  <a:schemeClr val="tx1">
-                    <a:lumMod val="85000"/>
-                    <a:lumOff val="15000"/>
-                  </a:schemeClr>
-                </a:solidFill>
-                <a:latin typeface="+mn-lt"/>
-                <a:ea typeface="Open Sans Light" charset="0"/>
-                <a:cs typeface="Open Sans Light" charset="0"/>
-              </a:defRPr>
-            </a:lvl1pPr>
-            <a:lvl2pPr marL="685800" indent="-228600" algn="l" defTabSz="914400" rtl="0" eaLnBrk="1" latinLnBrk="0" hangingPunct="1">
-              <a:lnSpc>
-                <a:spcPct val="90000"/>
-              </a:lnSpc>
-              <a:spcBef>
-                <a:spcPts val="500"/>
-              </a:spcBef>
-              <a:buFont typeface="Arial"/>
-              <a:buChar char="•"/>
-              <a:defRPr sz="2400" b="0" i="0" kern="1200">
-                <a:solidFill>
-                  <a:schemeClr val="tx1"/>
-                </a:solidFill>
-                <a:latin typeface="+mn-lt"/>
-                <a:ea typeface="Open Sans Light" charset="0"/>
-                <a:cs typeface="Open Sans Light" charset="0"/>
-              </a:defRPr>
-            </a:lvl2pPr>
-            <a:lvl3pPr marL="1143000" indent="-228600" algn="l" defTabSz="914400" rtl="0" eaLnBrk="1" latinLnBrk="0" hangingPunct="1">
-              <a:lnSpc>
-                <a:spcPct val="90000"/>
-              </a:lnSpc>
-              <a:spcBef>
-                <a:spcPts val="500"/>
-              </a:spcBef>
-              <a:buFont typeface="Arial"/>
-              <a:buChar char="•"/>
-              <a:defRPr sz="2000" b="0" i="0" kern="1200">
-                <a:solidFill>
-                  <a:schemeClr val="tx1"/>
-                </a:solidFill>
-                <a:latin typeface="+mn-lt"/>
-                <a:ea typeface="Open Sans Light" charset="0"/>
-                <a:cs typeface="Open Sans Light" charset="0"/>
-              </a:defRPr>
-            </a:lvl3pPr>
-            <a:lvl4pPr marL="1600200" indent="-228600" algn="l" defTabSz="914400" rtl="0" eaLnBrk="1" latinLnBrk="0" hangingPunct="1">
-              <a:lnSpc>
-                <a:spcPct val="90000"/>
-              </a:lnSpc>
-              <a:spcBef>
-                <a:spcPts val="500"/>
-              </a:spcBef>
-              <a:buFont typeface="Arial"/>
-              <a:buChar char="•"/>
-              <a:defRPr sz="1800" b="0" i="0" kern="1200">
-                <a:solidFill>
-                  <a:schemeClr val="tx1"/>
-                </a:solidFill>
-                <a:latin typeface="+mn-lt"/>
-                <a:ea typeface="Open Sans Light" charset="0"/>
-                <a:cs typeface="Open Sans Light" charset="0"/>
-              </a:defRPr>
-            </a:lvl4pPr>
-            <a:lvl5pPr marL="2057400" indent="-228600" algn="l" defTabSz="914400" rtl="0" eaLnBrk="1" latinLnBrk="0" hangingPunct="1">
-              <a:lnSpc>
-                <a:spcPct val="90000"/>
-              </a:lnSpc>
-              <a:spcBef>
-                <a:spcPts val="500"/>
-              </a:spcBef>
-              <a:buFont typeface="Arial"/>
-              <a:buChar char="•"/>
-              <a:defRPr sz="1800" b="0" i="0" kern="1200">
-                <a:solidFill>
-                  <a:schemeClr val="tx1"/>
-                </a:solidFill>
-                <a:latin typeface="+mn-lt"/>
-                <a:ea typeface="Open Sans Light" charset="0"/>
-                <a:cs typeface="Open Sans Light" charset="0"/>
-              </a:defRPr>
-            </a:lvl5pPr>
-            <a:lvl6pPr marL="2514600" indent="-228600" algn="l" defTabSz="914400" rtl="0" eaLnBrk="1" latinLnBrk="0" hangingPunct="1">
-              <a:lnSpc>
-                <a:spcPct val="90000"/>
-              </a:lnSpc>
-              <a:spcBef>
-                <a:spcPts val="500"/>
-              </a:spcBef>
-              <a:buFont typeface="Arial"/>
-              <a:buChar char="•"/>
-              <a:defRPr sz="1800" kern="1200">
-                <a:solidFill>
-                  <a:schemeClr val="tx1"/>
-                </a:solidFill>
-                <a:latin typeface="+mn-lt"/>
-                <a:ea typeface="+mn-ea"/>
-                <a:cs typeface="+mn-cs"/>
-              </a:defRPr>
-            </a:lvl6pPr>
-            <a:lvl7pPr marL="2971800" indent="-228600" algn="l" defTabSz="914400" rtl="0" eaLnBrk="1" latinLnBrk="0" hangingPunct="1">
-              <a:lnSpc>
-                <a:spcPct val="90000"/>
-              </a:lnSpc>
-              <a:spcBef>
-                <a:spcPts val="500"/>
-              </a:spcBef>
-              <a:buFont typeface="Arial"/>
-              <a:buChar char="•"/>
-              <a:defRPr sz="1800" kern="1200">
-                <a:solidFill>
-                  <a:schemeClr val="tx1"/>
-                </a:solidFill>
-                <a:latin typeface="+mn-lt"/>
-                <a:ea typeface="+mn-ea"/>
-                <a:cs typeface="+mn-cs"/>
-              </a:defRPr>
-            </a:lvl7pPr>
-            <a:lvl8pPr marL="3429000" indent="-228600" algn="l" defTabSz="914400" rtl="0" eaLnBrk="1" latinLnBrk="0" hangingPunct="1">
-              <a:lnSpc>
-                <a:spcPct val="90000"/>
-              </a:lnSpc>
-              <a:spcBef>
-                <a:spcPts val="500"/>
-              </a:spcBef>
-              <a:buFont typeface="Arial"/>
-              <a:buChar char="•"/>
-              <a:defRPr sz="1800" kern="1200">
-                <a:solidFill>
-                  <a:schemeClr val="tx1"/>
-                </a:solidFill>
-                <a:latin typeface="+mn-lt"/>
-                <a:ea typeface="+mn-ea"/>
-                <a:cs typeface="+mn-cs"/>
-              </a:defRPr>
-            </a:lvl8pPr>
-            <a:lvl9pPr marL="3886200" indent="-228600" algn="l" defTabSz="914400" rtl="0" eaLnBrk="1" latinLnBrk="0" hangingPunct="1">
-              <a:lnSpc>
-                <a:spcPct val="90000"/>
-              </a:lnSpc>
-              <a:spcBef>
-                <a:spcPts val="500"/>
-              </a:spcBef>
-              <a:buFont typeface="Arial"/>
-              <a:buChar char="•"/>
-              <a:defRPr sz="1800" kern="1200">
-                <a:solidFill>
-                  <a:schemeClr val="tx1"/>
-                </a:solidFill>
-                <a:latin typeface="+mn-lt"/>
-                <a:ea typeface="+mn-ea"/>
-                <a:cs typeface="+mn-cs"/>
-              </a:defRPr>
-            </a:lvl9pPr>
-          </a:lstStyle>
-          <a:p>
-            <a:endParaRPr lang="ru-RU" sz="2400"/>
-          </a:p>
-        </p:txBody>
-      </p:sp>
-      <p:cxnSp>
-        <p:nvCxnSpPr>
-          <p:cNvPr id="11" name="Прямая соединительная линия 10">
-            <a:extLst>
-              <a:ext uri="{FF2B5EF4-FFF2-40B4-BE49-F238E27FC236}">
-                <a16:creationId xmlns:a16="http://schemas.microsoft.com/office/drawing/2014/main" id="{95A8C5A7-EF5E-7D21-A826-9FD7CD988654}"/>
-              </a:ext>
-            </a:extLst>
-          </p:cNvPr>
-          <p:cNvCxnSpPr>
-            <a:cxnSpLocks/>
-          </p:cNvCxnSpPr>
-          <p:nvPr/>
-        </p:nvCxnSpPr>
-        <p:spPr>
-          <a:xfrm>
-            <a:off x="4412900" y="1259183"/>
-            <a:ext cx="0" cy="1443800"/>
-          </a:xfrm>
-          <a:prstGeom prst="line">
-            <a:avLst/>
-          </a:prstGeom>
-          <a:ln w="28575">
-            <a:solidFill>
-              <a:srgbClr val="1A3773"/>
-            </a:solidFill>
-          </a:ln>
-        </p:spPr>
-        <p:style>
-          <a:lnRef idx="1">
-            <a:schemeClr val="accent1"/>
-          </a:lnRef>
-          <a:fillRef idx="0">
-            <a:schemeClr val="accent1"/>
-          </a:fillRef>
-          <a:effectRef idx="0">
-            <a:schemeClr val="accent1"/>
-          </a:effectRef>
-          <a:fontRef idx="minor">
-            <a:schemeClr val="tx1"/>
-          </a:fontRef>
-        </p:style>
-      </p:cxnSp>
-      <p:sp>
-        <p:nvSpPr>
-          <p:cNvPr id="13" name="TextBox 12">
-            <a:extLst>
-              <a:ext uri="{FF2B5EF4-FFF2-40B4-BE49-F238E27FC236}">
-                <a16:creationId xmlns:a16="http://schemas.microsoft.com/office/drawing/2014/main" id="{13BE9ADE-8FCB-07E9-7693-A90600D595DB}"/>
-              </a:ext>
-            </a:extLst>
-          </p:cNvPr>
-          <p:cNvSpPr txBox="1"/>
-          <p:nvPr/>
-        </p:nvSpPr>
-        <p:spPr>
-          <a:xfrm>
-            <a:off x="611206" y="2090172"/>
-            <a:ext cx="3286760" cy="2677656"/>
-          </a:xfrm>
-          <a:prstGeom prst="rect">
-            <a:avLst/>
-          </a:prstGeom>
-          <a:noFill/>
-        </p:spPr>
-        <p:txBody>
-          <a:bodyPr wrap="square">
-            <a:spAutoFit/>
-          </a:bodyPr>
-          <a:lstStyle/>
-          <a:p>
-            <a:r>
-              <a:rPr lang="ru-RU" sz="2400" dirty="0">
-                <a:latin typeface="Times New Roman" panose="02020603050405020304" pitchFamily="18" charset="0"/>
-                <a:cs typeface="Times New Roman" panose="02020603050405020304" pitchFamily="18" charset="0"/>
-              </a:rPr>
-              <a:t>Архитектура методики включает четыре ключевых компонента, каждый из которых имеет четкий функционал и механизмы реализации:</a:t>
-            </a:r>
-          </a:p>
-        </p:txBody>
-      </p:sp>
-      <p:sp>
-        <p:nvSpPr>
-          <p:cNvPr id="18" name="TextBox 17">
-            <a:extLst>
-              <a:ext uri="{FF2B5EF4-FFF2-40B4-BE49-F238E27FC236}">
-                <a16:creationId xmlns:a16="http://schemas.microsoft.com/office/drawing/2014/main" id="{8426B2C5-15FF-835C-1F25-1CE2B9BBE976}"/>
-              </a:ext>
-            </a:extLst>
-          </p:cNvPr>
-          <p:cNvSpPr txBox="1"/>
-          <p:nvPr/>
-        </p:nvSpPr>
-        <p:spPr>
-          <a:xfrm>
-            <a:off x="8233775" y="1259183"/>
-            <a:ext cx="3597615" cy="1938992"/>
-          </a:xfrm>
-          <a:prstGeom prst="rect">
-            <a:avLst/>
-          </a:prstGeom>
-          <a:noFill/>
-        </p:spPr>
-        <p:txBody>
-          <a:bodyPr wrap="square">
-            <a:spAutoFit/>
-          </a:bodyPr>
-          <a:lstStyle/>
-          <a:p>
-            <a:r>
-              <a:rPr lang="ru-RU" sz="2400" b="1" dirty="0">
-                <a:latin typeface="Times New Roman" panose="02020603050405020304" pitchFamily="18" charset="0"/>
-                <a:cs typeface="Times New Roman" panose="02020603050405020304" pitchFamily="18" charset="0"/>
-              </a:rPr>
-              <a:t>Система автоматизированного наставничества</a:t>
-            </a:r>
-          </a:p>
-          <a:p>
-            <a:pPr marL="285750" indent="-285750">
-              <a:buFontTx/>
-              <a:buChar char="-"/>
-            </a:pPr>
-            <a:r>
-              <a:rPr lang="ru-RU" sz="2400" dirty="0">
-                <a:latin typeface="Times New Roman" panose="02020603050405020304" pitchFamily="18" charset="0"/>
-                <a:cs typeface="Times New Roman" panose="02020603050405020304" pitchFamily="18" charset="0"/>
-              </a:rPr>
-              <a:t>Поиск собеседника</a:t>
-            </a:r>
-          </a:p>
-          <a:p>
-            <a:pPr marL="285750" indent="-285750">
-              <a:buFontTx/>
-              <a:buChar char="-"/>
-            </a:pPr>
-            <a:r>
-              <a:rPr lang="ru-RU" sz="2400" dirty="0">
-                <a:latin typeface="Times New Roman" panose="02020603050405020304" pitchFamily="18" charset="0"/>
-                <a:cs typeface="Times New Roman" panose="02020603050405020304" pitchFamily="18" charset="0"/>
-              </a:rPr>
-              <a:t>Система жалоб</a:t>
-            </a:r>
-          </a:p>
-        </p:txBody>
-      </p:sp>
-      <p:sp>
-        <p:nvSpPr>
-          <p:cNvPr id="20" name="TextBox 19">
-            <a:extLst>
-              <a:ext uri="{FF2B5EF4-FFF2-40B4-BE49-F238E27FC236}">
-                <a16:creationId xmlns:a16="http://schemas.microsoft.com/office/drawing/2014/main" id="{59715700-4928-9F2E-5721-B24F5061766A}"/>
-              </a:ext>
-            </a:extLst>
-          </p:cNvPr>
-          <p:cNvSpPr txBox="1"/>
-          <p:nvPr/>
-        </p:nvSpPr>
-        <p:spPr>
-          <a:xfrm>
-            <a:off x="4499957" y="3429000"/>
-            <a:ext cx="3524559" cy="2677656"/>
-          </a:xfrm>
-          <a:prstGeom prst="rect">
-            <a:avLst/>
-          </a:prstGeom>
-          <a:noFill/>
-        </p:spPr>
-        <p:txBody>
-          <a:bodyPr wrap="square">
-            <a:spAutoFit/>
-          </a:bodyPr>
-          <a:lstStyle/>
-          <a:p>
-            <a:r>
-              <a:rPr lang="ru-RU" sz="2400" b="1" dirty="0">
-                <a:latin typeface="Times New Roman" panose="02020603050405020304" pitchFamily="18" charset="0"/>
-                <a:cs typeface="Times New Roman" panose="02020603050405020304" pitchFamily="18" charset="0"/>
-              </a:rPr>
-              <a:t>Адаптивная программа формирования привычек</a:t>
-            </a:r>
-          </a:p>
-          <a:p>
-            <a:pPr marL="285750" indent="-285750">
-              <a:buFontTx/>
-              <a:buChar char="-"/>
-            </a:pPr>
-            <a:r>
-              <a:rPr lang="ru-RU" sz="2400" dirty="0">
-                <a:latin typeface="Times New Roman" panose="02020603050405020304" pitchFamily="18" charset="0"/>
-                <a:cs typeface="Times New Roman" panose="02020603050405020304" pitchFamily="18" charset="0"/>
-              </a:rPr>
-              <a:t>Минималистичный дизайн</a:t>
-            </a:r>
-          </a:p>
-          <a:p>
-            <a:pPr marL="285750" indent="-285750">
-              <a:buFontTx/>
-              <a:buChar char="-"/>
-            </a:pPr>
-            <a:r>
-              <a:rPr lang="ru-RU" sz="2400" dirty="0">
-                <a:latin typeface="Times New Roman" panose="02020603050405020304" pitchFamily="18" charset="0"/>
-                <a:cs typeface="Times New Roman" panose="02020603050405020304" pitchFamily="18" charset="0"/>
-              </a:rPr>
-              <a:t>Персонализированная коммуникация</a:t>
-            </a:r>
-          </a:p>
-        </p:txBody>
-      </p:sp>
-      <p:sp>
-        <p:nvSpPr>
-          <p:cNvPr id="22" name="TextBox 21">
-            <a:extLst>
-              <a:ext uri="{FF2B5EF4-FFF2-40B4-BE49-F238E27FC236}">
-                <a16:creationId xmlns:a16="http://schemas.microsoft.com/office/drawing/2014/main" id="{4241E459-65BF-BE20-BC9B-8340289BD608}"/>
-              </a:ext>
-            </a:extLst>
-          </p:cNvPr>
-          <p:cNvSpPr txBox="1"/>
-          <p:nvPr/>
-        </p:nvSpPr>
-        <p:spPr>
-          <a:xfrm>
-            <a:off x="8233775" y="3429000"/>
-            <a:ext cx="3309988" cy="2677656"/>
-          </a:xfrm>
-          <a:prstGeom prst="rect">
-            <a:avLst/>
-          </a:prstGeom>
-          <a:noFill/>
-        </p:spPr>
-        <p:txBody>
-          <a:bodyPr wrap="square">
-            <a:spAutoFit/>
-          </a:bodyPr>
-          <a:lstStyle/>
-          <a:p>
-            <a:r>
-              <a:rPr lang="ru-RU" sz="2400" b="1" dirty="0">
-                <a:latin typeface="Times New Roman" panose="02020603050405020304" pitchFamily="18" charset="0"/>
-                <a:cs typeface="Times New Roman" panose="02020603050405020304" pitchFamily="18" charset="0"/>
-              </a:rPr>
-              <a:t>Система сбора данных и аналитики прогресса</a:t>
-            </a:r>
-          </a:p>
-          <a:p>
-            <a:pPr marL="285750" indent="-285750">
-              <a:buFontTx/>
-              <a:buChar char="-"/>
-            </a:pPr>
-            <a:r>
-              <a:rPr lang="ru-RU" sz="2400" dirty="0">
-                <a:latin typeface="Times New Roman" panose="02020603050405020304" pitchFamily="18" charset="0"/>
-                <a:cs typeface="Times New Roman" panose="02020603050405020304" pitchFamily="18" charset="0"/>
-              </a:rPr>
-              <a:t>Прогресс в личном кабинете</a:t>
-            </a:r>
-          </a:p>
-          <a:p>
-            <a:pPr marL="285750" indent="-285750">
-              <a:buFontTx/>
-              <a:buChar char="-"/>
-            </a:pPr>
-            <a:r>
-              <a:rPr lang="ru-RU" sz="2400" dirty="0">
-                <a:latin typeface="Times New Roman" panose="02020603050405020304" pitchFamily="18" charset="0"/>
-                <a:cs typeface="Times New Roman" panose="02020603050405020304" pitchFamily="18" charset="0"/>
-              </a:rPr>
-              <a:t>Статистика</a:t>
-            </a:r>
-            <a:endParaRPr lang="en-US" sz="2400" dirty="0">
-              <a:latin typeface="Times New Roman" panose="02020603050405020304" pitchFamily="18" charset="0"/>
-              <a:cs typeface="Times New Roman" panose="02020603050405020304" pitchFamily="18" charset="0"/>
-            </a:endParaRPr>
-          </a:p>
-          <a:p>
-            <a:pPr marL="285750" indent="-285750">
-              <a:buFontTx/>
-              <a:buChar char="-"/>
-            </a:pPr>
-            <a:r>
-              <a:rPr lang="ru-RU" sz="2400" dirty="0">
-                <a:latin typeface="Times New Roman" panose="02020603050405020304" pitchFamily="18" charset="0"/>
-                <a:cs typeface="Times New Roman" panose="02020603050405020304" pitchFamily="18" charset="0"/>
-              </a:rPr>
-              <a:t>Отчеты</a:t>
-            </a:r>
-          </a:p>
-        </p:txBody>
-      </p:sp>
-      <p:cxnSp>
-        <p:nvCxnSpPr>
-          <p:cNvPr id="23" name="Прямая соединительная линия 22">
-            <a:extLst>
-              <a:ext uri="{FF2B5EF4-FFF2-40B4-BE49-F238E27FC236}">
-                <a16:creationId xmlns:a16="http://schemas.microsoft.com/office/drawing/2014/main" id="{3A7F7889-E289-4E2D-2474-566CD3191DB7}"/>
-              </a:ext>
-            </a:extLst>
-          </p:cNvPr>
-          <p:cNvCxnSpPr>
-            <a:cxnSpLocks/>
-          </p:cNvCxnSpPr>
-          <p:nvPr/>
-        </p:nvCxnSpPr>
-        <p:spPr>
-          <a:xfrm>
-            <a:off x="8146718" y="1259183"/>
-            <a:ext cx="0" cy="1443800"/>
-          </a:xfrm>
-          <a:prstGeom prst="line">
-            <a:avLst/>
-          </a:prstGeom>
-          <a:ln w="28575">
-            <a:solidFill>
-              <a:srgbClr val="1A3773"/>
-            </a:solidFill>
-          </a:ln>
-        </p:spPr>
-        <p:style>
-          <a:lnRef idx="1">
-            <a:schemeClr val="accent1"/>
-          </a:lnRef>
-          <a:fillRef idx="0">
-            <a:schemeClr val="accent1"/>
-          </a:fillRef>
-          <a:effectRef idx="0">
-            <a:schemeClr val="accent1"/>
-          </a:effectRef>
-          <a:fontRef idx="minor">
-            <a:schemeClr val="tx1"/>
-          </a:fontRef>
-        </p:style>
-      </p:cxnSp>
-      <p:cxnSp>
-        <p:nvCxnSpPr>
-          <p:cNvPr id="24" name="Прямая соединительная линия 23">
-            <a:extLst>
-              <a:ext uri="{FF2B5EF4-FFF2-40B4-BE49-F238E27FC236}">
-                <a16:creationId xmlns:a16="http://schemas.microsoft.com/office/drawing/2014/main" id="{5D83F036-57E0-3DCC-5B5F-37F6A6E5DD2C}"/>
-              </a:ext>
-            </a:extLst>
-          </p:cNvPr>
-          <p:cNvCxnSpPr>
-            <a:cxnSpLocks/>
-          </p:cNvCxnSpPr>
-          <p:nvPr/>
-        </p:nvCxnSpPr>
-        <p:spPr>
-          <a:xfrm>
-            <a:off x="4417662" y="3429000"/>
-            <a:ext cx="0" cy="1435100"/>
-          </a:xfrm>
-          <a:prstGeom prst="line">
-            <a:avLst/>
-          </a:prstGeom>
-          <a:ln w="28575">
-            <a:solidFill>
-              <a:srgbClr val="1A3773"/>
-            </a:solidFill>
-          </a:ln>
-        </p:spPr>
-        <p:style>
-          <a:lnRef idx="1">
-            <a:schemeClr val="accent1"/>
-          </a:lnRef>
-          <a:fillRef idx="0">
-            <a:schemeClr val="accent1"/>
-          </a:fillRef>
-          <a:effectRef idx="0">
-            <a:schemeClr val="accent1"/>
-          </a:effectRef>
-          <a:fontRef idx="minor">
-            <a:schemeClr val="tx1"/>
-          </a:fontRef>
-        </p:style>
-      </p:cxnSp>
-      <p:cxnSp>
-        <p:nvCxnSpPr>
-          <p:cNvPr id="25" name="Прямая соединительная линия 24">
-            <a:extLst>
-              <a:ext uri="{FF2B5EF4-FFF2-40B4-BE49-F238E27FC236}">
-                <a16:creationId xmlns:a16="http://schemas.microsoft.com/office/drawing/2014/main" id="{93544180-32ED-A74E-1DA1-FE8AF2984B6D}"/>
-              </a:ext>
-            </a:extLst>
-          </p:cNvPr>
-          <p:cNvCxnSpPr>
-            <a:cxnSpLocks/>
-          </p:cNvCxnSpPr>
-          <p:nvPr/>
-        </p:nvCxnSpPr>
-        <p:spPr>
-          <a:xfrm>
-            <a:off x="8148757" y="3429000"/>
-            <a:ext cx="0" cy="1435100"/>
-          </a:xfrm>
-          <a:prstGeom prst="line">
-            <a:avLst/>
-          </a:prstGeom>
-          <a:ln w="28575">
-            <a:solidFill>
-              <a:srgbClr val="1A3773"/>
-            </a:solidFill>
-          </a:ln>
-        </p:spPr>
-        <p:style>
-          <a:lnRef idx="1">
-            <a:schemeClr val="accent1"/>
-          </a:lnRef>
-          <a:fillRef idx="0">
-            <a:schemeClr val="accent1"/>
-          </a:fillRef>
-          <a:effectRef idx="0">
-            <a:schemeClr val="accent1"/>
-          </a:effectRef>
-          <a:fontRef idx="minor">
-            <a:schemeClr val="tx1"/>
-          </a:fontRef>
-        </p:style>
-      </p:cxnSp>
-    </p:spTree>
-    <p:extLst>
-      <p:ext uri="{BB962C8B-B14F-4D97-AF65-F5344CB8AC3E}">
-        <p14:creationId xmlns:p14="http://schemas.microsoft.com/office/powerpoint/2010/main" val="2228330630"/>
-      </p:ext>
-    </p:extLst>
-  </p:cSld>
-  <p:clrMapOvr>
-    <a:masterClrMapping/>
-  </p:clrMapOvr>
-</p:sld>
-</file>
-
-<file path=ppt/slides/slide6.xml><?xml version="1.0" encoding="utf-8"?>
-<p:sld xmlns:a="http://schemas.openxmlformats.org/drawingml/2006/main" xmlns:r="http://schemas.openxmlformats.org/officeDocument/2006/relationships" xmlns:p="http://schemas.openxmlformats.org/presentationml/2006/main">
-  <p:cSld>
-    <p:spTree>
-      <p:nvGrpSpPr>
-        <p:cNvPr id="1" name="">
-          <a:extLst>
-            <a:ext uri="{FF2B5EF4-FFF2-40B4-BE49-F238E27FC236}">
-              <a16:creationId xmlns:a16="http://schemas.microsoft.com/office/drawing/2014/main" id="{4D003D84-5393-0BEC-27FF-AC1488118A54}"/>
-            </a:ext>
-          </a:extLst>
-        </p:cNvPr>
-        <p:cNvGrpSpPr/>
-        <p:nvPr/>
-      </p:nvGrpSpPr>
-      <p:grpSpPr>
-        <a:xfrm>
-          <a:off x="0" y="0"/>
-          <a:ext cx="0" cy="0"/>
-          <a:chOff x="0" y="0"/>
-          <a:chExt cx="0" cy="0"/>
-        </a:xfrm>
-      </p:grpSpPr>
-      <p:sp>
-        <p:nvSpPr>
-          <p:cNvPr id="6" name="TextBox 5">
-            <a:extLst>
-              <a:ext uri="{FF2B5EF4-FFF2-40B4-BE49-F238E27FC236}">
-                <a16:creationId xmlns:a16="http://schemas.microsoft.com/office/drawing/2014/main" id="{B9119832-1916-BAA2-C1DB-864AE227846C}"/>
-              </a:ext>
-            </a:extLst>
-          </p:cNvPr>
-          <p:cNvSpPr txBox="1"/>
-          <p:nvPr/>
-        </p:nvSpPr>
-        <p:spPr>
-          <a:xfrm>
-            <a:off x="3784600" y="273858"/>
-            <a:ext cx="8107363" cy="646331"/>
-          </a:xfrm>
-          <a:prstGeom prst="rect">
-            <a:avLst/>
-          </a:prstGeom>
-          <a:noFill/>
-        </p:spPr>
-        <p:txBody>
-          <a:bodyPr wrap="square" rtlCol="0">
-            <a:spAutoFit/>
-          </a:bodyPr>
-          <a:lstStyle/>
-          <a:p>
-            <a:r>
-              <a:rPr lang="ru-RU" sz="3600" dirty="0">
-                <a:solidFill>
-                  <a:srgbClr val="274E9C"/>
-                </a:solidFill>
-                <a:latin typeface="Inter Variable Text Medium" panose="02000503000000020004" pitchFamily="2" charset="0"/>
-                <a:ea typeface="Inter Variable Text Medium" panose="02000503000000020004" pitchFamily="2" charset="0"/>
-                <a:cs typeface="Inter Variable Text Medium" panose="02000503000000020004" pitchFamily="2" charset="0"/>
-              </a:rPr>
-              <a:t>Методы геймификации</a:t>
-            </a:r>
-          </a:p>
-        </p:txBody>
-      </p:sp>
-      <p:pic>
-        <p:nvPicPr>
-          <p:cNvPr id="2" name="Рисунок 1">
-            <a:extLst>
-              <a:ext uri="{FF2B5EF4-FFF2-40B4-BE49-F238E27FC236}">
-                <a16:creationId xmlns:a16="http://schemas.microsoft.com/office/drawing/2014/main" id="{205A0A39-A97C-4C9E-0E68-2FC53C490942}"/>
-              </a:ext>
-            </a:extLst>
-          </p:cNvPr>
-          <p:cNvPicPr>
-            <a:picLocks noChangeAspect="1"/>
-          </p:cNvPicPr>
-          <p:nvPr/>
-        </p:nvPicPr>
-        <p:blipFill>
-          <a:blip r:embed="rId3"/>
-          <a:stretch>
-            <a:fillRect/>
-          </a:stretch>
-        </p:blipFill>
-        <p:spPr>
-          <a:xfrm>
-            <a:off x="300037" y="273858"/>
-            <a:ext cx="2990861" cy="640543"/>
-          </a:xfrm>
-          <a:prstGeom prst="rect">
-            <a:avLst/>
-          </a:prstGeom>
-        </p:spPr>
-      </p:pic>
-      <p:grpSp>
-        <p:nvGrpSpPr>
-          <p:cNvPr id="15" name="Группа 14">
-            <a:extLst>
-              <a:ext uri="{FF2B5EF4-FFF2-40B4-BE49-F238E27FC236}">
-                <a16:creationId xmlns:a16="http://schemas.microsoft.com/office/drawing/2014/main" id="{0132DFB6-F8CF-6157-A8FF-98677646CFD9}"/>
-              </a:ext>
-            </a:extLst>
-          </p:cNvPr>
-          <p:cNvGrpSpPr/>
-          <p:nvPr/>
-        </p:nvGrpSpPr>
-        <p:grpSpPr>
-          <a:xfrm>
-            <a:off x="11641128" y="6312477"/>
-            <a:ext cx="490760" cy="490760"/>
-            <a:chOff x="11383518" y="6084717"/>
-            <a:chExt cx="618259" cy="618259"/>
-          </a:xfrm>
-        </p:grpSpPr>
-        <p:sp>
-          <p:nvSpPr>
-            <p:cNvPr id="16" name="Прямоугольник: скругленные углы 15">
-              <a:extLst>
-                <a:ext uri="{FF2B5EF4-FFF2-40B4-BE49-F238E27FC236}">
-                  <a16:creationId xmlns:a16="http://schemas.microsoft.com/office/drawing/2014/main" id="{A3E8565E-0516-EC6D-13A3-675475319155}"/>
-                </a:ext>
-              </a:extLst>
-            </p:cNvPr>
-            <p:cNvSpPr/>
-            <p:nvPr/>
-          </p:nvSpPr>
-          <p:spPr>
-            <a:xfrm>
-              <a:off x="11383518" y="6084717"/>
-              <a:ext cx="618259" cy="618259"/>
-            </a:xfrm>
-            <a:prstGeom prst="roundRect">
-              <a:avLst/>
-            </a:prstGeom>
-            <a:solidFill>
-              <a:srgbClr val="1A3773"/>
-            </a:solidFill>
-            <a:ln>
-              <a:solidFill>
-                <a:srgbClr val="1A3773"/>
-              </a:solidFill>
-            </a:ln>
-          </p:spPr>
-          <p:style>
-            <a:lnRef idx="2">
-              <a:schemeClr val="accent1">
-                <a:shade val="15000"/>
-              </a:schemeClr>
-            </a:lnRef>
-            <a:fillRef idx="1">
-              <a:schemeClr val="accent1"/>
-            </a:fillRef>
-            <a:effectRef idx="0">
-              <a:schemeClr val="accent1"/>
-            </a:effectRef>
-            <a:fontRef idx="minor">
-              <a:schemeClr val="lt1"/>
-            </a:fontRef>
-          </p:style>
-          <p:txBody>
-            <a:bodyPr rtlCol="0" anchor="ctr"/>
-            <a:lstStyle/>
-            <a:p>
-              <a:pPr algn="ctr"/>
-              <a:endParaRPr lang="en-US"/>
-            </a:p>
-          </p:txBody>
-        </p:sp>
-        <p:sp>
-          <p:nvSpPr>
-            <p:cNvPr id="17" name="TextBox 16">
-              <a:extLst>
-                <a:ext uri="{FF2B5EF4-FFF2-40B4-BE49-F238E27FC236}">
-                  <a16:creationId xmlns:a16="http://schemas.microsoft.com/office/drawing/2014/main" id="{5D3D67FC-8294-9E90-50E8-4E4F28FE0544}"/>
-                </a:ext>
-              </a:extLst>
-            </p:cNvPr>
-            <p:cNvSpPr txBox="1"/>
-            <p:nvPr/>
-          </p:nvSpPr>
-          <p:spPr>
-            <a:xfrm>
-              <a:off x="11508348" y="6199977"/>
-              <a:ext cx="368600" cy="387737"/>
-            </a:xfrm>
-            <a:prstGeom prst="rect">
-              <a:avLst/>
-            </a:prstGeom>
-            <a:noFill/>
-          </p:spPr>
-          <p:txBody>
-            <a:bodyPr wrap="square" rtlCol="0">
-              <a:spAutoFit/>
-            </a:bodyPr>
-            <a:lstStyle/>
-            <a:p>
-              <a:pPr algn="ctr"/>
-              <a:r>
-                <a:rPr lang="ru-RU" sz="1400" dirty="0">
-                  <a:solidFill>
-                    <a:schemeClr val="bg1"/>
-                  </a:solidFill>
-                  <a:latin typeface="Inter Variable Text" panose="02000503000000020004" pitchFamily="2" charset="0"/>
-                  <a:ea typeface="Inter Variable Text" panose="02000503000000020004" pitchFamily="2" charset="0"/>
-                  <a:cs typeface="Inter Variable Text" panose="02000503000000020004" pitchFamily="2" charset="0"/>
-                </a:rPr>
-                <a:t>6</a:t>
-              </a:r>
-              <a:endParaRPr lang="en-US" sz="1400" dirty="0">
-                <a:solidFill>
-                  <a:schemeClr val="bg1"/>
-                </a:solidFill>
-                <a:latin typeface="Inter Variable Text" panose="02000503000000020004" pitchFamily="2" charset="0"/>
-                <a:ea typeface="Inter Variable Text" panose="02000503000000020004" pitchFamily="2" charset="0"/>
-                <a:cs typeface="Inter Variable Text" panose="02000503000000020004" pitchFamily="2" charset="0"/>
-              </a:endParaRPr>
-            </a:p>
-          </p:txBody>
-        </p:sp>
-      </p:grpSp>
-      <p:sp>
-        <p:nvSpPr>
-          <p:cNvPr id="7" name="TextBox 6">
-            <a:extLst>
-              <a:ext uri="{FF2B5EF4-FFF2-40B4-BE49-F238E27FC236}">
-                <a16:creationId xmlns:a16="http://schemas.microsoft.com/office/drawing/2014/main" id="{2052DBB2-280D-D3F6-24F4-86BC8210F7AE}"/>
-              </a:ext>
-            </a:extLst>
-          </p:cNvPr>
-          <p:cNvSpPr txBox="1"/>
-          <p:nvPr/>
-        </p:nvSpPr>
-        <p:spPr>
-          <a:xfrm>
-            <a:off x="4499958" y="1965739"/>
-            <a:ext cx="3042579" cy="4154984"/>
-          </a:xfrm>
-          <a:prstGeom prst="rect">
-            <a:avLst/>
-          </a:prstGeom>
-          <a:noFill/>
-        </p:spPr>
-        <p:txBody>
-          <a:bodyPr wrap="square">
-            <a:spAutoFit/>
-          </a:bodyPr>
-          <a:lstStyle/>
-          <a:p>
-            <a:r>
-              <a:rPr lang="ru-RU" sz="2400" b="1" dirty="0">
-                <a:latin typeface="Times New Roman" panose="02020603050405020304" pitchFamily="18" charset="0"/>
-                <a:cs typeface="Times New Roman" panose="02020603050405020304" pitchFamily="18" charset="0"/>
-              </a:rPr>
-              <a:t>Система уровней</a:t>
-            </a:r>
-            <a:endParaRPr lang="en-US" sz="2400" b="1" dirty="0">
-              <a:latin typeface="Times New Roman" panose="02020603050405020304" pitchFamily="18" charset="0"/>
-              <a:cs typeface="Times New Roman" panose="02020603050405020304" pitchFamily="18" charset="0"/>
-            </a:endParaRPr>
-          </a:p>
-          <a:p>
-            <a:pPr marL="342900" indent="-342900">
-              <a:buFontTx/>
-              <a:buChar char="-"/>
-            </a:pPr>
-            <a:r>
-              <a:rPr lang="ru-RU" sz="2400" dirty="0">
-                <a:latin typeface="Times New Roman" panose="02020603050405020304" pitchFamily="18" charset="0"/>
-                <a:cs typeface="Times New Roman" panose="02020603050405020304" pitchFamily="18" charset="0"/>
-              </a:rPr>
-              <a:t>Прогресс конвертируется в очки опыта, в зависимости от сложности выполненного задания начисляется различное количество очков</a:t>
-            </a:r>
-          </a:p>
-        </p:txBody>
-      </p:sp>
-      <p:sp>
-        <p:nvSpPr>
-          <p:cNvPr id="10" name="Объект 2">
-            <a:extLst>
-              <a:ext uri="{FF2B5EF4-FFF2-40B4-BE49-F238E27FC236}">
-                <a16:creationId xmlns:a16="http://schemas.microsoft.com/office/drawing/2014/main" id="{7830C2F8-3A8F-5051-8273-39121780F2DF}"/>
-              </a:ext>
-            </a:extLst>
-          </p:cNvPr>
-          <p:cNvSpPr txBox="1">
-            <a:spLocks/>
-          </p:cNvSpPr>
-          <p:nvPr/>
-        </p:nvSpPr>
-        <p:spPr>
-          <a:xfrm>
-            <a:off x="418852" y="1259899"/>
-            <a:ext cx="3688370" cy="4338204"/>
-          </a:xfrm>
-          <a:prstGeom prst="roundRect">
-            <a:avLst>
-              <a:gd name="adj" fmla="val 4817"/>
-            </a:avLst>
-          </a:prstGeom>
-          <a:ln w="12700">
-            <a:solidFill>
-              <a:srgbClr val="1A3773"/>
-            </a:solidFill>
-            <a:prstDash val="dash"/>
-          </a:ln>
-        </p:spPr>
-        <p:txBody>
-          <a:bodyPr anchor="ctr"/>
-          <a:lstStyle>
-            <a:lvl1pPr marL="0" indent="0" algn="ctr" defTabSz="914400" rtl="0" eaLnBrk="1" latinLnBrk="0" hangingPunct="1">
-              <a:lnSpc>
-                <a:spcPct val="90000"/>
-              </a:lnSpc>
-              <a:spcBef>
-                <a:spcPts val="1000"/>
-              </a:spcBef>
-              <a:buFont typeface="Arial"/>
-              <a:buNone/>
-              <a:defRPr sz="2800" b="0" i="0" kern="1200">
-                <a:solidFill>
-                  <a:schemeClr val="tx1">
-                    <a:lumMod val="85000"/>
-                    <a:lumOff val="15000"/>
-                  </a:schemeClr>
-                </a:solidFill>
-                <a:latin typeface="+mn-lt"/>
-                <a:ea typeface="Open Sans Light" charset="0"/>
-                <a:cs typeface="Open Sans Light" charset="0"/>
-              </a:defRPr>
-            </a:lvl1pPr>
-            <a:lvl2pPr marL="685800" indent="-228600" algn="l" defTabSz="914400" rtl="0" eaLnBrk="1" latinLnBrk="0" hangingPunct="1">
-              <a:lnSpc>
-                <a:spcPct val="90000"/>
-              </a:lnSpc>
-              <a:spcBef>
-                <a:spcPts val="500"/>
-              </a:spcBef>
-              <a:buFont typeface="Arial"/>
-              <a:buChar char="•"/>
-              <a:defRPr sz="2400" b="0" i="0" kern="1200">
-                <a:solidFill>
-                  <a:schemeClr val="tx1"/>
-                </a:solidFill>
-                <a:latin typeface="+mn-lt"/>
-                <a:ea typeface="Open Sans Light" charset="0"/>
-                <a:cs typeface="Open Sans Light" charset="0"/>
-              </a:defRPr>
-            </a:lvl2pPr>
-            <a:lvl3pPr marL="1143000" indent="-228600" algn="l" defTabSz="914400" rtl="0" eaLnBrk="1" latinLnBrk="0" hangingPunct="1">
-              <a:lnSpc>
-                <a:spcPct val="90000"/>
-              </a:lnSpc>
-              <a:spcBef>
-                <a:spcPts val="500"/>
-              </a:spcBef>
-              <a:buFont typeface="Arial"/>
-              <a:buChar char="•"/>
-              <a:defRPr sz="2000" b="0" i="0" kern="1200">
-                <a:solidFill>
-                  <a:schemeClr val="tx1"/>
-                </a:solidFill>
-                <a:latin typeface="+mn-lt"/>
-                <a:ea typeface="Open Sans Light" charset="0"/>
-                <a:cs typeface="Open Sans Light" charset="0"/>
-              </a:defRPr>
-            </a:lvl3pPr>
-            <a:lvl4pPr marL="1600200" indent="-228600" algn="l" defTabSz="914400" rtl="0" eaLnBrk="1" latinLnBrk="0" hangingPunct="1">
-              <a:lnSpc>
-                <a:spcPct val="90000"/>
-              </a:lnSpc>
-              <a:spcBef>
-                <a:spcPts val="500"/>
-              </a:spcBef>
-              <a:buFont typeface="Arial"/>
-              <a:buChar char="•"/>
-              <a:defRPr sz="1800" b="0" i="0" kern="1200">
-                <a:solidFill>
-                  <a:schemeClr val="tx1"/>
-                </a:solidFill>
-                <a:latin typeface="+mn-lt"/>
-                <a:ea typeface="Open Sans Light" charset="0"/>
-                <a:cs typeface="Open Sans Light" charset="0"/>
-              </a:defRPr>
-            </a:lvl4pPr>
-            <a:lvl5pPr marL="2057400" indent="-228600" algn="l" defTabSz="914400" rtl="0" eaLnBrk="1" latinLnBrk="0" hangingPunct="1">
-              <a:lnSpc>
-                <a:spcPct val="90000"/>
-              </a:lnSpc>
-              <a:spcBef>
-                <a:spcPts val="500"/>
-              </a:spcBef>
-              <a:buFont typeface="Arial"/>
-              <a:buChar char="•"/>
-              <a:defRPr sz="1800" b="0" i="0" kern="1200">
-                <a:solidFill>
-                  <a:schemeClr val="tx1"/>
-                </a:solidFill>
-                <a:latin typeface="+mn-lt"/>
-                <a:ea typeface="Open Sans Light" charset="0"/>
-                <a:cs typeface="Open Sans Light" charset="0"/>
-              </a:defRPr>
-            </a:lvl5pPr>
-            <a:lvl6pPr marL="2514600" indent="-228600" algn="l" defTabSz="914400" rtl="0" eaLnBrk="1" latinLnBrk="0" hangingPunct="1">
-              <a:lnSpc>
-                <a:spcPct val="90000"/>
-              </a:lnSpc>
-              <a:spcBef>
-                <a:spcPts val="500"/>
-              </a:spcBef>
-              <a:buFont typeface="Arial"/>
-              <a:buChar char="•"/>
-              <a:defRPr sz="1800" kern="1200">
-                <a:solidFill>
-                  <a:schemeClr val="tx1"/>
-                </a:solidFill>
-                <a:latin typeface="+mn-lt"/>
-                <a:ea typeface="+mn-ea"/>
-                <a:cs typeface="+mn-cs"/>
-              </a:defRPr>
-            </a:lvl6pPr>
-            <a:lvl7pPr marL="2971800" indent="-228600" algn="l" defTabSz="914400" rtl="0" eaLnBrk="1" latinLnBrk="0" hangingPunct="1">
-              <a:lnSpc>
-                <a:spcPct val="90000"/>
-              </a:lnSpc>
-              <a:spcBef>
-                <a:spcPts val="500"/>
-              </a:spcBef>
-              <a:buFont typeface="Arial"/>
-              <a:buChar char="•"/>
-              <a:defRPr sz="1800" kern="1200">
-                <a:solidFill>
-                  <a:schemeClr val="tx1"/>
-                </a:solidFill>
-                <a:latin typeface="+mn-lt"/>
-                <a:ea typeface="+mn-ea"/>
-                <a:cs typeface="+mn-cs"/>
-              </a:defRPr>
-            </a:lvl7pPr>
-            <a:lvl8pPr marL="3429000" indent="-228600" algn="l" defTabSz="914400" rtl="0" eaLnBrk="1" latinLnBrk="0" hangingPunct="1">
-              <a:lnSpc>
-                <a:spcPct val="90000"/>
-              </a:lnSpc>
-              <a:spcBef>
-                <a:spcPts val="500"/>
-              </a:spcBef>
-              <a:buFont typeface="Arial"/>
-              <a:buChar char="•"/>
-              <a:defRPr sz="1800" kern="1200">
-                <a:solidFill>
-                  <a:schemeClr val="tx1"/>
-                </a:solidFill>
-                <a:latin typeface="+mn-lt"/>
-                <a:ea typeface="+mn-ea"/>
-                <a:cs typeface="+mn-cs"/>
-              </a:defRPr>
-            </a:lvl8pPr>
-            <a:lvl9pPr marL="3886200" indent="-228600" algn="l" defTabSz="914400" rtl="0" eaLnBrk="1" latinLnBrk="0" hangingPunct="1">
-              <a:lnSpc>
-                <a:spcPct val="90000"/>
-              </a:lnSpc>
-              <a:spcBef>
-                <a:spcPts val="500"/>
-              </a:spcBef>
-              <a:buFont typeface="Arial"/>
-              <a:buChar char="•"/>
-              <a:defRPr sz="1800" kern="1200">
-                <a:solidFill>
-                  <a:schemeClr val="tx1"/>
-                </a:solidFill>
-                <a:latin typeface="+mn-lt"/>
-                <a:ea typeface="+mn-ea"/>
-                <a:cs typeface="+mn-cs"/>
-              </a:defRPr>
-            </a:lvl9pPr>
-          </a:lstStyle>
-          <a:p>
-            <a:endParaRPr lang="ru-RU" sz="2400"/>
-          </a:p>
-        </p:txBody>
-      </p:sp>
-      <p:cxnSp>
-        <p:nvCxnSpPr>
-          <p:cNvPr id="11" name="Прямая соединительная линия 10">
-            <a:extLst>
-              <a:ext uri="{FF2B5EF4-FFF2-40B4-BE49-F238E27FC236}">
                 <a16:creationId xmlns:a16="http://schemas.microsoft.com/office/drawing/2014/main" id="{E4DD9E71-56B5-B63F-6812-A67C816056BD}"/>
               </a:ext>
             </a:extLst>
@@ -20860,7 +17425,7 @@
 </file>
 
 <file path=ppt/slides/slide7.xml><?xml version="1.0" encoding="utf-8"?>
-<p:sld xmlns:a="http://schemas.openxmlformats.org/drawingml/2006/main" xmlns:r="http://schemas.openxmlformats.org/officeDocument/2006/relationships" xmlns:p="http://schemas.openxmlformats.org/presentationml/2006/main">
+<p:sld xmlns:a="http://schemas.openxmlformats.org/drawingml/2006/main" xmlns:r="http://schemas.openxmlformats.org/officeDocument/2006/relationships" xmlns:p="http://schemas.openxmlformats.org/presentationml/2006/main" show="0">
   <p:cSld>
     <p:spTree>
       <p:nvGrpSpPr>
@@ -21758,7 +18323,7 @@
                   <a:ea typeface="Inter Variable Text" panose="02000503000000020004" pitchFamily="2" charset="0"/>
                   <a:cs typeface="Inter Variable Text" panose="02000503000000020004" pitchFamily="2" charset="0"/>
                 </a:rPr>
-                <a:t>8</a:t>
+                <a:t>6</a:t>
               </a:r>
               <a:endParaRPr lang="en-US" sz="1400" dirty="0">
                 <a:solidFill>
@@ -22090,8 +18655,8 @@
         </p:nvSpPr>
         <p:spPr>
           <a:xfrm>
-            <a:off x="1351865" y="4409015"/>
-            <a:ext cx="4038576" cy="1938992"/>
+            <a:off x="1351864" y="4409015"/>
+            <a:ext cx="4132767" cy="1938992"/>
           </a:xfrm>
           <a:prstGeom prst="rect">
             <a:avLst/>
@@ -22104,6 +18669,7 @@
           </a:bodyPr>
           <a:lstStyle/>
           <a:p>
+            <a:pPr indent="268288"/>
             <a:r>
               <a:rPr lang="en-US" sz="2400" dirty="0">
                 <a:solidFill>
@@ -22191,7 +18757,7 @@
         <p:spPr>
           <a:xfrm>
             <a:off x="1351865" y="1269283"/>
-            <a:ext cx="4132767" cy="2308324"/>
+            <a:ext cx="4132768" cy="2677656"/>
           </a:xfrm>
           <a:prstGeom prst="rect">
             <a:avLst/>
@@ -22204,6 +18770,7 @@
           </a:bodyPr>
           <a:lstStyle/>
           <a:p>
+            <a:pPr indent="268288"/>
             <a:r>
               <a:rPr lang="en-US" sz="2400" dirty="0">
                 <a:solidFill>
@@ -22266,6 +18833,30 @@
               <a:t> ботов</a:t>
             </a:r>
           </a:p>
+          <a:p>
+            <a:pPr marL="285750" indent="-285750">
+              <a:buFontTx/>
+              <a:buChar char="-"/>
+            </a:pPr>
+            <a:r>
+              <a:rPr lang="ru-RU" sz="2400" dirty="0">
+                <a:latin typeface="Times New Roman" panose="02020603050405020304" pitchFamily="18" charset="0"/>
+                <a:cs typeface="Times New Roman" panose="02020603050405020304" pitchFamily="18" charset="0"/>
+              </a:rPr>
+              <a:t>Шифрование </a:t>
+            </a:r>
+            <a:r>
+              <a:rPr lang="en-US" sz="2400" dirty="0">
+                <a:latin typeface="Times New Roman" panose="02020603050405020304" pitchFamily="18" charset="0"/>
+                <a:cs typeface="Times New Roman" panose="02020603050405020304" pitchFamily="18" charset="0"/>
+              </a:rPr>
+              <a:t>AES-256</a:t>
+            </a:r>
+            <a:endParaRPr lang="ru-RU" sz="2400" dirty="0">
+              <a:latin typeface="Times New Roman" panose="02020603050405020304" pitchFamily="18" charset="0"/>
+              <a:cs typeface="Times New Roman" panose="02020603050405020304" pitchFamily="18" charset="0"/>
+            </a:endParaRPr>
+          </a:p>
         </p:txBody>
       </p:sp>
       <p:sp>
@@ -22282,8 +18873,8 @@
         </p:nvSpPr>
         <p:spPr>
           <a:xfrm>
-            <a:off x="6633834" y="4908073"/>
-            <a:ext cx="4971861" cy="1569660"/>
+            <a:off x="6669264" y="4908073"/>
+            <a:ext cx="4936431" cy="1569660"/>
           </a:xfrm>
           <a:prstGeom prst="rect">
             <a:avLst/>
@@ -22296,6 +18887,7 @@
           </a:bodyPr>
           <a:lstStyle/>
           <a:p>
+            <a:pPr indent="268288"/>
             <a:r>
               <a:rPr lang="en-US" sz="2400" dirty="0">
                 <a:solidFill>
@@ -22362,8 +18954,8 @@
         </p:nvSpPr>
         <p:spPr>
           <a:xfrm>
-            <a:off x="6637847" y="1265552"/>
-            <a:ext cx="5003281" cy="1569660"/>
+            <a:off x="6669264" y="1265552"/>
+            <a:ext cx="4971864" cy="1569660"/>
           </a:xfrm>
           <a:prstGeom prst="rect">
             <a:avLst/>
@@ -22376,6 +18968,7 @@
           </a:bodyPr>
           <a:lstStyle/>
           <a:p>
+            <a:pPr indent="268288"/>
             <a:r>
               <a:rPr lang="en-US" sz="2400" dirty="0">
                 <a:solidFill>
@@ -22494,6 +19087,7 @@
           </a:bodyPr>
           <a:lstStyle/>
           <a:p>
+            <a:pPr indent="268288"/>
             <a:r>
               <a:rPr lang="en-US" sz="2400" dirty="0">
                 <a:solidFill>
@@ -22822,7 +19416,7 @@
                   <a:ea typeface="Inter Variable Text" panose="02000503000000020004" pitchFamily="2" charset="0"/>
                   <a:cs typeface="Inter Variable Text" panose="02000503000000020004" pitchFamily="2" charset="0"/>
                 </a:rPr>
-                <a:t>9</a:t>
+                <a:t>7</a:t>
               </a:r>
               <a:endParaRPr lang="en-US" sz="1400" dirty="0">
                 <a:solidFill>
@@ -22836,37 +19430,6 @@
           </p:txBody>
         </p:sp>
       </p:grpSp>
-      <p:pic>
-        <p:nvPicPr>
-          <p:cNvPr id="3" name="Изображение3">
-            <a:extLst>
-              <a:ext uri="{FF2B5EF4-FFF2-40B4-BE49-F238E27FC236}">
-                <a16:creationId xmlns:a16="http://schemas.microsoft.com/office/drawing/2014/main" id="{A581F306-065C-102E-36C2-6A51D76D4663}"/>
-              </a:ext>
-            </a:extLst>
-          </p:cNvPr>
-          <p:cNvPicPr>
-            <a:picLocks noChangeAspect="1"/>
-          </p:cNvPicPr>
-          <p:nvPr/>
-        </p:nvPicPr>
-        <p:blipFill>
-          <a:blip r:embed="rId4"/>
-          <a:stretch>
-            <a:fillRect/>
-          </a:stretch>
-        </p:blipFill>
-        <p:spPr bwMode="auto">
-          <a:xfrm>
-            <a:off x="513238" y="6992620"/>
-            <a:ext cx="10586403" cy="2388635"/>
-          </a:xfrm>
-          <a:prstGeom prst="rect">
-            <a:avLst/>
-          </a:prstGeom>
-          <a:noFill/>
-        </p:spPr>
-      </p:pic>
       <p:sp>
         <p:nvSpPr>
           <p:cNvPr id="7" name="Прямоугольник: скругленные углы 6">
@@ -23051,66 +19614,6 @@
                 <a:cs typeface="Times New Roman" panose="02020603050405020304" pitchFamily="18" charset="0"/>
               </a:rPr>
               <a:t>Получение ХР / достижения</a:t>
-            </a:r>
-          </a:p>
-        </p:txBody>
-      </p:sp>
-      <p:sp>
-        <p:nvSpPr>
-          <p:cNvPr id="14" name="Прямоугольник: скругленные углы 13">
-            <a:extLst>
-              <a:ext uri="{FF2B5EF4-FFF2-40B4-BE49-F238E27FC236}">
-                <a16:creationId xmlns:a16="http://schemas.microsoft.com/office/drawing/2014/main" id="{39AE1005-1938-469A-1251-480F94930F50}"/>
-              </a:ext>
-            </a:extLst>
-          </p:cNvPr>
-          <p:cNvSpPr/>
-          <p:nvPr/>
-        </p:nvSpPr>
-        <p:spPr>
-          <a:xfrm>
-            <a:off x="9790391" y="7123430"/>
-            <a:ext cx="2880000" cy="900000"/>
-          </a:xfrm>
-          <a:prstGeom prst="roundRect">
-            <a:avLst/>
-          </a:prstGeom>
-          <a:noFill/>
-          <a:ln w="9525" cap="flat" cmpd="sng" algn="ctr">
-            <a:solidFill>
-              <a:schemeClr val="accent1"/>
-            </a:solidFill>
-            <a:prstDash val="solid"/>
-            <a:round/>
-            <a:headEnd type="none" w="med" len="med"/>
-            <a:tailEnd type="none" w="med" len="med"/>
-          </a:ln>
-        </p:spPr>
-        <p:style>
-          <a:lnRef idx="0">
-            <a:scrgbClr r="0" g="0" b="0"/>
-          </a:lnRef>
-          <a:fillRef idx="0">
-            <a:scrgbClr r="0" g="0" b="0"/>
-          </a:fillRef>
-          <a:effectRef idx="0">
-            <a:scrgbClr r="0" g="0" b="0"/>
-          </a:effectRef>
-          <a:fontRef idx="minor">
-            <a:schemeClr val="accent1"/>
-          </a:fontRef>
-        </p:style>
-        <p:txBody>
-          <a:bodyPr rtlCol="0" anchor="ctr"/>
-          <a:lstStyle/>
-          <a:p>
-            <a:pPr algn="ctr"/>
-            <a:r>
-              <a:rPr lang="ru-RU" sz="2400" dirty="0">
-                <a:latin typeface="Times New Roman" panose="02020603050405020304" pitchFamily="18" charset="0"/>
-                <a:cs typeface="Times New Roman" panose="02020603050405020304" pitchFamily="18" charset="0"/>
-              </a:rPr>
-              <a:t>Эмоциональное удовлетворение</a:t>
             </a:r>
           </a:p>
         </p:txBody>
@@ -23595,49 +20098,6 @@
       </p:cxnSp>
       <p:cxnSp>
         <p:nvCxnSpPr>
-          <p:cNvPr id="102" name="Соединитель: изогнутый 101">
-            <a:extLst>
-              <a:ext uri="{FF2B5EF4-FFF2-40B4-BE49-F238E27FC236}">
-                <a16:creationId xmlns:a16="http://schemas.microsoft.com/office/drawing/2014/main" id="{15FA21F9-10A0-26A8-913A-33EC599DA3CF}"/>
-              </a:ext>
-            </a:extLst>
-          </p:cNvPr>
-          <p:cNvCxnSpPr>
-            <a:stCxn id="18" idx="3"/>
-            <a:endCxn id="13" idx="1"/>
-          </p:cNvCxnSpPr>
-          <p:nvPr/>
-        </p:nvCxnSpPr>
-        <p:spPr>
-          <a:xfrm>
-            <a:off x="8010023" y="2977321"/>
-            <a:ext cx="509180" cy="1416"/>
-          </a:xfrm>
-          <a:prstGeom prst="curvedConnector3">
-            <a:avLst/>
-          </a:prstGeom>
-          <a:ln>
-            <a:headEnd type="triangle"/>
-            <a:tailEnd type="triangle"/>
-          </a:ln>
-        </p:spPr>
-        <p:style>
-          <a:lnRef idx="1">
-            <a:schemeClr val="accent1"/>
-          </a:lnRef>
-          <a:fillRef idx="0">
-            <a:schemeClr val="accent1"/>
-          </a:fillRef>
-          <a:effectRef idx="0">
-            <a:schemeClr val="accent1"/>
-          </a:effectRef>
-          <a:fontRef idx="minor">
-            <a:schemeClr val="tx1"/>
-          </a:fontRef>
-        </p:style>
-      </p:cxnSp>
-      <p:cxnSp>
-        <p:nvCxnSpPr>
           <p:cNvPr id="108" name="Соединитель: изогнутый 107">
             <a:extLst>
               <a:ext uri="{FF2B5EF4-FFF2-40B4-BE49-F238E27FC236}">
@@ -23842,6 +20302,48 @@
           </a:p>
         </p:txBody>
       </p:sp>
+      <p:cxnSp>
+        <p:nvCxnSpPr>
+          <p:cNvPr id="5" name="Прямая со стрелкой 4">
+            <a:extLst>
+              <a:ext uri="{FF2B5EF4-FFF2-40B4-BE49-F238E27FC236}">
+                <a16:creationId xmlns:a16="http://schemas.microsoft.com/office/drawing/2014/main" id="{DACFB206-2129-1E31-916B-B498707E676B}"/>
+              </a:ext>
+            </a:extLst>
+          </p:cNvPr>
+          <p:cNvCxnSpPr>
+            <a:stCxn id="13" idx="1"/>
+            <a:endCxn id="18" idx="3"/>
+          </p:cNvCxnSpPr>
+          <p:nvPr/>
+        </p:nvCxnSpPr>
+        <p:spPr>
+          <a:xfrm flipH="1" flipV="1">
+            <a:off x="8010023" y="2977321"/>
+            <a:ext cx="509180" cy="1416"/>
+          </a:xfrm>
+          <a:prstGeom prst="straightConnector1">
+            <a:avLst/>
+          </a:prstGeom>
+          <a:ln>
+            <a:tailEnd type="triangle"/>
+          </a:ln>
+        </p:spPr>
+        <p:style>
+          <a:lnRef idx="1">
+            <a:schemeClr val="accent1"/>
+          </a:lnRef>
+          <a:fillRef idx="0">
+            <a:schemeClr val="accent1"/>
+          </a:fillRef>
+          <a:effectRef idx="0">
+            <a:schemeClr val="accent1"/>
+          </a:effectRef>
+          <a:fontRef idx="minor">
+            <a:schemeClr val="tx1"/>
+          </a:fontRef>
+        </p:style>
+      </p:cxnSp>
     </p:spTree>
     <p:extLst>
       <p:ext uri="{BB962C8B-B14F-4D97-AF65-F5344CB8AC3E}">
